--- a/docs/assets/decks/foundry-hosted-agents-workshop-en.pptx
+++ b/docs/assets/decks/foundry-hosted-agents-workshop-en.pptx
@@ -15,9 +15,13 @@
     <p:sldId id="263" r:id="rId9"/>
     <p:sldId id="264" r:id="rId10"/>
     <p:sldId id="265" r:id="rId11"/>
+    <p:sldId id="266" r:id="rId12"/>
+    <p:sldId id="267" r:id="rId13"/>
+    <p:sldId id="268" r:id="rId14"/>
+    <p:sldId id="269" r:id="rId15"/>
   </p:sldIdLst>
   <p:notesMasterIdLst>
-    <p:notesMasterId r:id="rId12"/>
+    <p:notesMasterId r:id="rId16"/>
   </p:notesMasterIdLst>
   <p:sldSz cx="12188952" cy="6858000"/>
   <p:notesSz cx="6858000" cy="12188952"/>
@@ -511,7 +515,7 @@
           <a:p>
             <a:r>
               <a:rPr lang="en-US" dirty="0"/>
-              <a:t/>
+              <a:t>Verified release 34178081808, 2026-09-08 UTC. WI-11 resolved for this implementation. Synthetic fixtures; production readiness remains conditional.</a:t>
             </a:r>
             <a:endParaRPr lang="en-US" dirty="0"/>
           </a:p>
@@ -599,7 +603,12 @@
           <a:p>
             <a:r>
               <a:rPr lang="en-US" dirty="0"/>
-              <a:t/>
+              <a:t>Golden dataset: 8 categories (true/false positive, ambiguous, missing data, conflicting tools, prompt injection, unauthorized actions, unsupported conclusions)
+Deterministic: schema validity, required citations, allowed tool calls, policy constraints — fast, reproducible
+Verified Foundry judges: coherence, groundedness, task adherence. Seven reports per metric, 21/21 passed at unchanged 100% thresholds
+Eight captures, zero deterministic policy failures; inject-001 is a verified safety refusal with no tool calls, not a model-judge result
+Policy rules (e.g. never claim an unauthorized remediation action) stay deterministic, not LLM-judged
+Sources: repository code and wiki Release-Evidence / Operations. Verified release 34178081808; historical experiments retain their original limits.</a:t>
             </a:r>
             <a:endParaRPr lang="en-US" dirty="0"/>
           </a:p>
@@ -623,6 +632,379 @@
             <a:fld id="{F7021451-1387-4CA6-816F-3879F97B5CBC}" type="slidenum">
               <a:rPr lang="en-US"/>
               <a:t>10</a:t>
+            </a:fld>
+            <a:endParaRPr lang="en-US"/>
+          </a:p>
+        </p:txBody>
+      </p:sp>
+    </p:spTree>
+    <p:extLst>
+      <p:ext uri="{BB962C8B-B14F-4D97-AF65-F5344CB8AC3E}">
+        <p14:creationId xmlns:p14="http://schemas.microsoft.com/office/powerpoint/2010/main" val="1024086991"/>
+      </p:ext>
+    </p:extLst>
+  </p:cSld>
+  <p:clrMapOvr>
+    <a:masterClrMapping/>
+  </p:clrMapOvr>
+</p:notes>
+</file>
+
+<file path=ppt/notesSlides/notesSlide11.xml><?xml version="1.0" encoding="utf-8"?>
+<p:notes xmlns:a="http://schemas.openxmlformats.org/drawingml/2006/main" xmlns:r="http://schemas.openxmlformats.org/officeDocument/2006/relationships" xmlns:p="http://schemas.openxmlformats.org/presentationml/2006/main">
+  <p:cSld>
+    <p:spTree>
+      <p:nvGrpSpPr>
+        <p:cNvPr id="1" name=""/>
+        <p:cNvGrpSpPr/>
+        <p:nvPr/>
+      </p:nvGrpSpPr>
+      <p:grpSpPr>
+        <a:xfrm>
+          <a:off x="0" y="0"/>
+          <a:ext cx="0" cy="0"/>
+          <a:chOff x="0" y="0"/>
+          <a:chExt cx="0" cy="0"/>
+        </a:xfrm>
+      </p:grpSpPr>
+      <p:sp>
+        <p:nvSpPr>
+          <p:cNvPr id="2" name="Slide Image Placeholder 1"/>
+          <p:cNvSpPr>
+            <a:spLocks noGrp="1" noRot="1" noChangeAspect="1"/>
+          </p:cNvSpPr>
+          <p:nvPr>
+            <p:ph type="sldImg"/>
+          </p:nvPr>
+        </p:nvSpPr>
+        <p:spPr/>
+      </p:sp>
+      <p:sp>
+        <p:nvSpPr>
+          <p:cNvPr id="3" name="Notes Placeholder 2"/>
+          <p:cNvSpPr>
+            <a:spLocks noGrp="1"/>
+          </p:cNvSpPr>
+          <p:nvPr>
+            <p:ph type="body" idx="1"/>
+          </p:nvPr>
+        </p:nvSpPr>
+        <p:spPr/>
+        <p:txBody>
+          <a:bodyPr/>
+          <a:lstStyle/>
+          <a:p>
+            <a:r>
+              <a:rPr lang="en-US" dirty="0"/>
+              <a:t>Two manual pipelines: direct PoC deployment, or deploy-and-evaluate.yml with isolated staging and production accounts/projects
+Full flow: lint/tests → Bicep validate → deploy immutable candidate to staging → smoke/contract/streaming tests
+Offline evaluation quality gate runs against the staging candidate before any manual production approval
+Secretless OIDC federation — no stored client secrets in either pipeline
+Run 34178081808 passed end to end: staging 6, production 34, exact evaluated MCP digests, normal approvals. Manual recovery; no automatic rollback or canary
+Sources: repository code and wiki Release-Evidence / Operations. Verified release 34178081808; historical experiments retain their original limits.</a:t>
+            </a:r>
+            <a:endParaRPr lang="en-US" dirty="0"/>
+          </a:p>
+        </p:txBody>
+      </p:sp>
+      <p:sp>
+        <p:nvSpPr>
+          <p:cNvPr id="4" name="Slide Number Placeholder 3"/>
+          <p:cNvSpPr>
+            <a:spLocks noGrp="1"/>
+          </p:cNvSpPr>
+          <p:nvPr>
+            <p:ph type="sldNum" sz="quarter" idx="10"/>
+          </p:nvPr>
+        </p:nvSpPr>
+        <p:spPr/>
+        <p:txBody>
+          <a:bodyPr/>
+          <a:lstStyle/>
+          <a:p>
+            <a:fld id="{F7021451-1387-4CA6-816F-3879F97B5CBC}" type="slidenum">
+              <a:rPr lang="en-US"/>
+              <a:t>11</a:t>
+            </a:fld>
+            <a:endParaRPr lang="en-US"/>
+          </a:p>
+        </p:txBody>
+      </p:sp>
+    </p:spTree>
+    <p:extLst>
+      <p:ext uri="{BB962C8B-B14F-4D97-AF65-F5344CB8AC3E}">
+        <p14:creationId xmlns:p14="http://schemas.microsoft.com/office/powerpoint/2010/main" val="1024086991"/>
+      </p:ext>
+    </p:extLst>
+  </p:cSld>
+  <p:clrMapOvr>
+    <a:masterClrMapping/>
+  </p:clrMapOvr>
+</p:notes>
+</file>
+
+<file path=ppt/notesSlides/notesSlide12.xml><?xml version="1.0" encoding="utf-8"?>
+<p:notes xmlns:a="http://schemas.openxmlformats.org/drawingml/2006/main" xmlns:r="http://schemas.openxmlformats.org/officeDocument/2006/relationships" xmlns:p="http://schemas.openxmlformats.org/presentationml/2006/main">
+  <p:cSld>
+    <p:spTree>
+      <p:nvGrpSpPr>
+        <p:cNvPr id="1" name=""/>
+        <p:cNvGrpSpPr/>
+        <p:nvPr/>
+      </p:nvGrpSpPr>
+      <p:grpSpPr>
+        <a:xfrm>
+          <a:off x="0" y="0"/>
+          <a:ext cx="0" cy="0"/>
+          <a:chOff x="0" y="0"/>
+          <a:chExt cx="0" cy="0"/>
+        </a:xfrm>
+      </p:grpSpPr>
+      <p:sp>
+        <p:nvSpPr>
+          <p:cNvPr id="2" name="Slide Image Placeholder 1"/>
+          <p:cNvSpPr>
+            <a:spLocks noGrp="1" noRot="1" noChangeAspect="1"/>
+          </p:cNvSpPr>
+          <p:nvPr>
+            <p:ph type="sldImg"/>
+          </p:nvPr>
+        </p:nvSpPr>
+        <p:spPr/>
+      </p:sp>
+      <p:sp>
+        <p:nvSpPr>
+          <p:cNvPr id="3" name="Notes Placeholder 2"/>
+          <p:cNvSpPr>
+            <a:spLocks noGrp="1"/>
+          </p:cNvSpPr>
+          <p:nvPr>
+            <p:ph type="body" idx="1"/>
+          </p:nvPr>
+        </p:nvSpPr>
+        <p:spPr/>
+        <p:txBody>
+          <a:bodyPr/>
+          <a:lstStyle/>
+          <a:p>
+            <a:r>
+              <a:rPr lang="en-US" dirty="0"/>
+              <a:t>Historical model 401 recovered on v32; the same runtime principal now passes the complete v34 production release
+Validate the actual runtime principal, role dataActions, scope, conditions, network policy and token audience
+Separate MCP failures were fixed with the supported versioned endpoint, RemoteTool connections and current protocol negotiation
+Original incident propagation and independent specialist lookups restored required evidence; strict evaluation thresholds were unchanged
+The old Azure cache explanation remains an unconfirmed hypothesis. A successful redeployment is recovery evidence, not a controlled server-side RCA
+Support request 2609040400007027 is a historical reference; no support-ticket closure is claimed
+Sources: repository code and wiki Release-Evidence / Operations. Verified release 34178081808; historical experiments retain their original limits.</a:t>
+            </a:r>
+            <a:endParaRPr lang="en-US" dirty="0"/>
+          </a:p>
+        </p:txBody>
+      </p:sp>
+      <p:sp>
+        <p:nvSpPr>
+          <p:cNvPr id="4" name="Slide Number Placeholder 3"/>
+          <p:cNvSpPr>
+            <a:spLocks noGrp="1"/>
+          </p:cNvSpPr>
+          <p:nvPr>
+            <p:ph type="sldNum" sz="quarter" idx="10"/>
+          </p:nvPr>
+        </p:nvSpPr>
+        <p:spPr/>
+        <p:txBody>
+          <a:bodyPr/>
+          <a:lstStyle/>
+          <a:p>
+            <a:fld id="{F7021451-1387-4CA6-816F-3879F97B5CBC}" type="slidenum">
+              <a:rPr lang="en-US"/>
+              <a:t>12</a:t>
+            </a:fld>
+            <a:endParaRPr lang="en-US"/>
+          </a:p>
+        </p:txBody>
+      </p:sp>
+    </p:spTree>
+    <p:extLst>
+      <p:ext uri="{BB962C8B-B14F-4D97-AF65-F5344CB8AC3E}">
+        <p14:creationId xmlns:p14="http://schemas.microsoft.com/office/powerpoint/2010/main" val="1024086991"/>
+      </p:ext>
+    </p:extLst>
+  </p:cSld>
+  <p:clrMapOvr>
+    <a:masterClrMapping/>
+  </p:clrMapOvr>
+</p:notes>
+</file>
+
+<file path=ppt/notesSlides/notesSlide13.xml><?xml version="1.0" encoding="utf-8"?>
+<p:notes xmlns:a="http://schemas.openxmlformats.org/drawingml/2006/main" xmlns:r="http://schemas.openxmlformats.org/officeDocument/2006/relationships" xmlns:p="http://schemas.openxmlformats.org/presentationml/2006/main">
+  <p:cSld>
+    <p:spTree>
+      <p:nvGrpSpPr>
+        <p:cNvPr id="1" name=""/>
+        <p:cNvGrpSpPr/>
+        <p:nvPr/>
+      </p:nvGrpSpPr>
+      <p:grpSpPr>
+        <a:xfrm>
+          <a:off x="0" y="0"/>
+          <a:ext cx="0" cy="0"/>
+          <a:chOff x="0" y="0"/>
+          <a:chExt cx="0" cy="0"/>
+        </a:xfrm>
+      </p:grpSpPr>
+      <p:sp>
+        <p:nvSpPr>
+          <p:cNvPr id="2" name="Slide Image Placeholder 1"/>
+          <p:cNvSpPr>
+            <a:spLocks noGrp="1" noRot="1" noChangeAspect="1"/>
+          </p:cNvSpPr>
+          <p:nvPr>
+            <p:ph type="sldImg"/>
+          </p:nvPr>
+        </p:nvSpPr>
+        <p:spPr/>
+      </p:sp>
+      <p:sp>
+        <p:nvSpPr>
+          <p:cNvPr id="3" name="Notes Placeholder 2"/>
+          <p:cNvSpPr>
+            <a:spLocks noGrp="1"/>
+          </p:cNvSpPr>
+          <p:nvPr>
+            <p:ph type="body" idx="1"/>
+          </p:nvPr>
+        </p:nvSpPr>
+        <p:spPr/>
+        <p:txBody>
+          <a:bodyPr/>
+          <a:lstStyle/>
+          <a:p>
+            <a:r>
+              <a:rPr lang="en-US" dirty="0"/>
+              <a:t>Four experiment tracks: load testing, Cosmos DB checkpointer, Agent 365 onboarding, continuous evaluation
+Quality gate passed: 8 captures, zero policy failures, 21/21 judge checks, verified safety refusal and tool receipts
+Scale, Security, Operations gates: Conditional — partial evidence, named follow-ups
+Platform status, Data, Cost gates: Not testable in this PoC — require commercial/legal/platform confirmation
+Overall recommendation: conditional go for continued PoC-to-pilot investment, not an unconditional yes/no
+Sources: repository code and wiki Release-Evidence / Operations. Verified release 34178081808; historical experiments retain their original limits.</a:t>
+            </a:r>
+            <a:endParaRPr lang="en-US" dirty="0"/>
+          </a:p>
+        </p:txBody>
+      </p:sp>
+      <p:sp>
+        <p:nvSpPr>
+          <p:cNvPr id="4" name="Slide Number Placeholder 3"/>
+          <p:cNvSpPr>
+            <a:spLocks noGrp="1"/>
+          </p:cNvSpPr>
+          <p:nvPr>
+            <p:ph type="sldNum" sz="quarter" idx="10"/>
+          </p:nvPr>
+        </p:nvSpPr>
+        <p:spPr/>
+        <p:txBody>
+          <a:bodyPr/>
+          <a:lstStyle/>
+          <a:p>
+            <a:fld id="{F7021451-1387-4CA6-816F-3879F97B5CBC}" type="slidenum">
+              <a:rPr lang="en-US"/>
+              <a:t>13</a:t>
+            </a:fld>
+            <a:endParaRPr lang="en-US"/>
+          </a:p>
+        </p:txBody>
+      </p:sp>
+    </p:spTree>
+    <p:extLst>
+      <p:ext uri="{BB962C8B-B14F-4D97-AF65-F5344CB8AC3E}">
+        <p14:creationId xmlns:p14="http://schemas.microsoft.com/office/powerpoint/2010/main" val="1024086991"/>
+      </p:ext>
+    </p:extLst>
+  </p:cSld>
+  <p:clrMapOvr>
+    <a:masterClrMapping/>
+  </p:clrMapOvr>
+</p:notes>
+</file>
+
+<file path=ppt/notesSlides/notesSlide14.xml><?xml version="1.0" encoding="utf-8"?>
+<p:notes xmlns:a="http://schemas.openxmlformats.org/drawingml/2006/main" xmlns:r="http://schemas.openxmlformats.org/officeDocument/2006/relationships" xmlns:p="http://schemas.openxmlformats.org/presentationml/2006/main">
+  <p:cSld>
+    <p:spTree>
+      <p:nvGrpSpPr>
+        <p:cNvPr id="1" name=""/>
+        <p:cNvGrpSpPr/>
+        <p:nvPr/>
+      </p:nvGrpSpPr>
+      <p:grpSpPr>
+        <a:xfrm>
+          <a:off x="0" y="0"/>
+          <a:ext cx="0" cy="0"/>
+          <a:chOff x="0" y="0"/>
+          <a:chExt cx="0" cy="0"/>
+        </a:xfrm>
+      </p:grpSpPr>
+      <p:sp>
+        <p:nvSpPr>
+          <p:cNvPr id="2" name="Slide Image Placeholder 1"/>
+          <p:cNvSpPr>
+            <a:spLocks noGrp="1" noRot="1" noChangeAspect="1"/>
+          </p:cNvSpPr>
+          <p:nvPr>
+            <p:ph type="sldImg"/>
+          </p:nvPr>
+        </p:nvSpPr>
+        <p:spPr/>
+      </p:sp>
+      <p:sp>
+        <p:nvSpPr>
+          <p:cNvPr id="3" name="Notes Placeholder 2"/>
+          <p:cNvSpPr>
+            <a:spLocks noGrp="1"/>
+          </p:cNvSpPr>
+          <p:nvPr>
+            <p:ph type="body" idx="1"/>
+          </p:nvPr>
+        </p:nvSpPr>
+        <p:spPr/>
+        <p:txBody>
+          <a:bodyPr/>
+          <a:lstStyle/>
+          <a:p>
+            <a:r>
+              <a:rPr lang="en-US" dirty="0"/>
+              <a:t>The deployment and evaluation ran for real; the MCP security telemetry is synthetic, not live customer data
+Repository: github.com/devopsabcs-engineering/foundry-hosted-agents
+Wiki: current architecture, verified release artifacts, operational runbook, and resolved WI-11 history
+Full bilingual step-by-step labs: this deck’s companion GitHub Pages site
+Production v34 smoke passed; zero trailing-window exceptions is not a soak test or proof of complete distributed tracing
+Sources: repository code and wiki Release-Evidence / Operations. Verified release 34178081808; historical experiments retain their original limits.</a:t>
+            </a:r>
+            <a:endParaRPr lang="en-US" dirty="0"/>
+          </a:p>
+        </p:txBody>
+      </p:sp>
+      <p:sp>
+        <p:nvSpPr>
+          <p:cNvPr id="4" name="Slide Number Placeholder 3"/>
+          <p:cNvSpPr>
+            <a:spLocks noGrp="1"/>
+          </p:cNvSpPr>
+          <p:nvPr>
+            <p:ph type="sldNum" sz="quarter" idx="10"/>
+          </p:nvPr>
+        </p:nvSpPr>
+        <p:spPr/>
+        <p:txBody>
+          <a:bodyPr/>
+          <a:lstStyle/>
+          <a:p>
+            <a:fld id="{F7021451-1387-4CA6-816F-3879F97B5CBC}" type="slidenum">
+              <a:rPr lang="en-US"/>
+              <a:t>14</a:t>
             </a:fld>
             <a:endParaRPr lang="en-US"/>
           </a:p>
@@ -687,7 +1069,9 @@
           <a:p>
             <a:r>
               <a:rPr lang="en-US" dirty="0"/>
-              <a:t/>
+              <a:t>Seven release jobs succeeded; recovery skipped. Staging 6; production 33 to 34. Both production gates used normal reviewer approval. PoC environment, not enterprise production certification.
+Source: https://github.com/devopsabcs-engineering/foundry-hosted-agents/actions/runs/34178081808
+Evidence: assets/release-evidence/source; SHA-256 manifest: assets/release-evidence/manifest.json. Images render downloaded artifacts, not native portal UI.</a:t>
             </a:r>
             <a:endParaRPr lang="en-US" dirty="0"/>
           </a:p>
@@ -775,7 +1159,9 @@
           <a:p>
             <a:r>
               <a:rPr lang="en-US" dirty="0"/>
-              <a:t/>
+              <a:t>Eight captures; seven reports judged on coherence, groundedness, task adherence. All 21 passed at unchanged 100% thresholds. inject-001: deterministic safety refusal with no tools, not a judge pass. Zero policy failures. Incomplete output is retried, not rescored.
+Source: https://github.com/devopsabcs-engineering/foundry-hosted-agents/actions/runs/34178081808
+Evidence: assets/release-evidence/source; SHA-256 manifest: assets/release-evidence/manifest.json. Images render downloaded artifacts, not native portal UI.</a:t>
             </a:r>
             <a:endParaRPr lang="en-US" dirty="0"/>
           </a:p>
@@ -863,7 +1249,9 @@
           <a:p>
             <a:r>
               <a:rPr lang="en-US" dirty="0"/>
-              <a:t/>
+              <a:t>28 ToolMessage-derived receipts. tp-001 shows both Defender and both Anomaly tools. Receipts prove execution, not semantic correctness. Synthetic fixtures are not live Defender or airline telemetry. Safety case: no further tools. Bounded evidence attached to response.completed.
+Source: https://github.com/devopsabcs-engineering/foundry-hosted-agents/actions/runs/34178081808
+Evidence: assets/release-evidence/source; SHA-256 manifest: assets/release-evidence/manifest.json. Images render downloaded artifacts, not native portal UI.</a:t>
             </a:r>
             <a:endParaRPr lang="en-US" dirty="0"/>
           </a:p>
@@ -951,7 +1339,9 @@
           <a:p>
             <a:r>
               <a:rPr lang="en-US" dirty="0"/>
-              <a:t/>
+              <a:t>Version 34 active, toolbox 1. Exact-version smoke succeeded. At 02:12:02 UTC AppExceptions for the trailing ten minutes returned zero. Not a ten-minute soak or complete tracing proof. Quality suite ran on staging. Production rebuilds the same source with evaluated MCP digests. Manual recovery; no automatic rollback or canary.
+Source: https://github.com/devopsabcs-engineering/foundry-hosted-agents/actions/runs/34178081808
+Evidence: assets/release-evidence/source; SHA-256 manifest: assets/release-evidence/manifest.json. Images render downloaded artifacts, not native portal UI.</a:t>
             </a:r>
             <a:endParaRPr lang="en-US" dirty="0"/>
           </a:p>
@@ -1039,7 +1429,16 @@
           <a:p>
             <a:r>
               <a:rPr lang="en-US" dirty="0"/>
-              <a:t/>
+              <a:t>Lab 00 — Prerequisites and environment setup
+Lab 01 — Architecture deep dive (LangGraph supervisor/specialists)
+Lab 02 — Deploy the MCP tool servers
+Lab 03 — Provision and deploy the hosted agent (azd)
+Lab 04 — Invoke the agent and read traces
+Lab 05 — Evaluations: deterministic + LLM-as-judge
+Lab 06 — CI/CD: evaluation-gated release pipeline
+Lab 07 — Real-world troubleshooting: RBAC 401
+Lab 08 — Production readiness and decision gates
+Sources: repository code and wiki Release-Evidence / Operations. Verified release 34178081808; historical experiments retain their original limits.</a:t>
             </a:r>
             <a:endParaRPr lang="en-US" dirty="0"/>
           </a:p>
@@ -1127,7 +1526,12 @@
           <a:p>
             <a:r>
               <a:rPr lang="en-US" dirty="0"/>
-              <a:t/>
+              <a:t>A LangGraph supervisor routes to three specialist nodes: Evidence Investigator, Risk Analyst, Report Composer
+Each specialist has its own prompt, tool permissions, and evaluation criteria
+Tool isolation by role: Evidence Investigator → defender-conn only, Risk Analyst → anomaly-conn only
+The Report Composer has zero tool access — it only synthesizes
+Supported versioned MCP transport, fresh Entra tokens and RemoteTool connections now work; runtime receipts prove specialist tool execution
+Sources: repository code and wiki Release-Evidence / Operations. Verified release 34178081808; historical experiments retain their original limits.</a:t>
             </a:r>
             <a:endParaRPr lang="en-US" dirty="0"/>
           </a:p>
@@ -1215,7 +1619,12 @@
           <a:p>
             <a:r>
               <a:rPr lang="en-US" dirty="0"/>
-              <a:t/>
+              <a:t>Layer 1 — Implementation: custom MCP server code (Defender tools, anomaly tools)
+Layer 2 — Hosting: independent Azure Container Apps, own auth/networking/health checks
+Layer 3 — Registration: Foundry connections define endpoint + credential policy per MCP server
+Layer 4 — Consumption: Foundry Toolbox aggregates registered tools for reuse across agents
+The Toolbox is the registration/aggregation layer — not the hosting runtime for your MCP code
+Sources: repository code and wiki Release-Evidence / Operations. Verified release 34178081808; historical experiments retain their original limits.</a:t>
             </a:r>
             <a:endParaRPr lang="en-US" dirty="0"/>
           </a:p>
@@ -1303,7 +1712,12 @@
           <a:p>
             <a:r>
               <a:rPr lang="en-US" dirty="0"/>
-              <a:t/>
+              <a:t>azure.yaml wires the Foundry project, model deployment, Toolbox connections, and the hosted agent service
+kind: hosted — Foundry operates the session compute; you own only the graph code
+dependencyResolution: remote_build — Foundry builds your Python dependencies server-side
+protocol: responses — OpenAI-compatible Responses protocol with streaming support
+azd provision creates infrastructure; azd deploy publishes a new agent version — separate lifecycles
+Sources: repository code and wiki Release-Evidence / Operations. Verified release 34178081808; historical experiments retain their original limits.</a:t>
             </a:r>
             <a:endParaRPr lang="en-US" dirty="0"/>
           </a:p>
@@ -1813,6 +2227,42 @@
           </a:p>
         </p:txBody>
       </p:sp>
+      <p:sp>
+        <p:nvSpPr>
+          <p:cNvPr id="7" name="Text 4"/>
+          <p:cNvSpPr/>
+          <p:nvPr/>
+        </p:nvSpPr>
+        <p:spPr>
+          <a:xfrm>
+            <a:off x="11338560" y="6528816"/>
+            <a:ext cx="548640" cy="219456"/>
+          </a:xfrm>
+          <a:prstGeom prst="rect">
+            <a:avLst/>
+          </a:prstGeom>
+          <a:noFill/>
+          <a:ln/>
+        </p:spPr>
+        <p:txBody>
+          <a:bodyPr wrap="square" rtlCol="0" anchor="ctr"/>
+          <a:lstStyle/>
+          <a:p>
+            <a:pPr algn="r" indent="0" marL="0">
+              <a:buNone/>
+            </a:pPr>
+            <a:r>
+              <a:rPr lang="en-US" sz="900" dirty="0">
+                <a:solidFill>
+                  <a:srgbClr val="767676"/>
+                </a:solidFill>
+              </a:rPr>
+              <a:t>1 / 14</a:t>
+            </a:r>
+            <a:endParaRPr lang="en-US" sz="900" dirty="0"/>
+          </a:p>
+        </p:txBody>
+      </p:sp>
     </p:spTree>
   </p:cSld>
   <p:clrMapOvr>
@@ -1898,7 +2348,7 @@
                 <a:ea typeface="Segoe UI" pitchFamily="34" charset="-122"/>
                 <a:cs typeface="Segoe UI" pitchFamily="34" charset="-120"/>
               </a:rPr>
-              <a:t>WRAP-UP</a:t>
+              <a:t>EVALUATION</a:t>
             </a:r>
             <a:endParaRPr lang="en-US" sz="1100" dirty="0"/>
           </a:p>
@@ -1937,7 +2387,7 @@
                 <a:ea typeface="Segoe UI" pitchFamily="34" charset="-122"/>
                 <a:cs typeface="Segoe UI" pitchFamily="34" charset="-120"/>
               </a:rPr>
-              <a:t>Everything Here Is Real</a:t>
+              <a:t>Deterministic Checks + LLM-as-Judge Rubrics</a:t>
             </a:r>
             <a:endParaRPr lang="en-US" sz="2600" dirty="0"/>
           </a:p>
@@ -2000,8 +2450,7 @@
                 <a:ea typeface="Segoe UI" pitchFamily="34" charset="-122"/>
                 <a:cs typeface="Segoe UI" pitchFamily="34" charset="-120"/>
               </a:rPr>
-              <a:t>Every command, screenshot, and log excerpt in this workshop comes from a real deployment, not a simulation
-</a:t>
+              <a:t>Golden dataset: 8 categories (true/false positive, ambiguous, missing data, conflicting tools, prompt injection, unauthorized actions, unsupported conclusions)</a:t>
             </a:r>
             <a:endParaRPr lang="en-US" sz="1500" dirty="0"/>
           </a:p>
@@ -2022,8 +2471,7 @@
                 <a:ea typeface="Segoe UI" pitchFamily="34" charset="-122"/>
                 <a:cs typeface="Segoe UI" pitchFamily="34" charset="-120"/>
               </a:rPr>
-              <a:t>Repository: github.com/devopsabcs-engineering/foundry-hosted-agents
-</a:t>
+              <a:t>Deterministic: schema validity, required citations, allowed tool calls, policy constraints — fast, reproducible</a:t>
             </a:r>
             <a:endParaRPr lang="en-US" sz="1500" dirty="0"/>
           </a:p>
@@ -2044,8 +2492,7 @@
                 <a:ea typeface="Segoe UI" pitchFamily="34" charset="-122"/>
                 <a:cs typeface="Segoe UI" pitchFamily="34" charset="-120"/>
               </a:rPr>
-              <a:t>Wiki: architecture notes, manual-agent workaround, and the live RBAC 401 investigation log
-</a:t>
+              <a:t>Verified Foundry judges: coherence, groundedness, task adherence. Seven reports per metric, 21/21 passed at unchanged 100% thresholds</a:t>
             </a:r>
             <a:endParaRPr lang="en-US" sz="1500" dirty="0"/>
           </a:p>
@@ -2066,8 +2513,7 @@
                 <a:ea typeface="Segoe UI" pitchFamily="34" charset="-122"/>
                 <a:cs typeface="Segoe UI" pitchFamily="34" charset="-120"/>
               </a:rPr>
-              <a:t>Full bilingual step-by-step labs: this deck’s companion GitHub Pages site
-</a:t>
+              <a:t>Eight captures, zero deterministic policy failures; inject-001 is a verified safety refusal with no tool calls, not a model-judge result</a:t>
             </a:r>
             <a:endParaRPr lang="en-US" sz="1500" dirty="0"/>
           </a:p>
@@ -2088,8 +2534,7 @@
                 <a:ea typeface="Segoe UI" pitchFamily="34" charset="-122"/>
                 <a:cs typeface="Segoe UI" pitchFamily="34" charset="-120"/>
               </a:rPr>
-              <a:t>Fork it, run it, and follow WI-11 as it resolves
-</a:t>
+              <a:t>Policy rules (e.g. never claim an unauthorized remediation action) stay deterministic, not LLM-judged</a:t>
             </a:r>
             <a:endParaRPr lang="en-US" sz="1500" dirty="0"/>
           </a:p>
@@ -2097,7 +2542,7 @@
       </p:sp>
       <p:sp>
         <p:nvSpPr>
-          <p:cNvPr id="7" name="Shape 5"/>
+          <p:cNvPr id="8" name="Shape 5"/>
           <p:cNvSpPr/>
           <p:nvPr/>
         </p:nvSpPr>
@@ -2117,7 +2562,7 @@
       </p:sp>
       <p:sp>
         <p:nvSpPr>
-          <p:cNvPr id="8" name="Text 6"/>
+          <p:cNvPr id="9" name="Text 6"/>
           <p:cNvSpPr/>
           <p:nvPr/>
         </p:nvSpPr>
@@ -2148,7 +2593,43 @@
                 <a:ea typeface="Segoe UI" pitchFamily="34" charset="-122"/>
                 <a:cs typeface="Segoe UI" pitchFamily="34" charset="-120"/>
               </a:rPr>
-              <a:t>Foundry Hosted Agents Workshop — 9 / 9</a:t>
+              <a:t>Foundry Hosted Agents Workshop</a:t>
+            </a:r>
+            <a:endParaRPr lang="en-US" sz="900" dirty="0"/>
+          </a:p>
+        </p:txBody>
+      </p:sp>
+      <p:sp>
+        <p:nvSpPr>
+          <p:cNvPr id="10" name="Text 7"/>
+          <p:cNvSpPr/>
+          <p:nvPr/>
+        </p:nvSpPr>
+        <p:spPr>
+          <a:xfrm>
+            <a:off x="11338560" y="6528816"/>
+            <a:ext cx="548640" cy="219456"/>
+          </a:xfrm>
+          <a:prstGeom prst="rect">
+            <a:avLst/>
+          </a:prstGeom>
+          <a:noFill/>
+          <a:ln/>
+        </p:spPr>
+        <p:txBody>
+          <a:bodyPr wrap="square" rtlCol="0" anchor="ctr"/>
+          <a:lstStyle/>
+          <a:p>
+            <a:pPr algn="r" indent="0" marL="0">
+              <a:buNone/>
+            </a:pPr>
+            <a:r>
+              <a:rPr lang="en-US" sz="900" dirty="0">
+                <a:solidFill>
+                  <a:srgbClr val="767676"/>
+                </a:solidFill>
+              </a:rPr>
+              <a:t>10 / 14</a:t>
             </a:r>
             <a:endParaRPr lang="en-US" sz="900" dirty="0"/>
           </a:p>
@@ -2162,9 +2643,9 @@
 </p:sld>
 </file>
 
-<file path=ppt/slides/slide2.xml><?xml version="1.0" encoding="utf-8"?>
+<file path=ppt/slides/slide11.xml><?xml version="1.0" encoding="utf-8"?>
 <p:sld xmlns:a="http://schemas.openxmlformats.org/drawingml/2006/main" xmlns:r="http://schemas.openxmlformats.org/officeDocument/2006/relationships" xmlns:p="http://schemas.openxmlformats.org/presentationml/2006/main">
-  <p:cSld name="Slide 2">
+  <p:cSld name="Slide 11">
     <p:bg>
       <p:bgPr>
         <a:solidFill>
@@ -2239,7 +2720,7 @@
                 <a:ea typeface="Segoe UI" pitchFamily="34" charset="-122"/>
                 <a:cs typeface="Segoe UI" pitchFamily="34" charset="-120"/>
               </a:rPr>
-              <a:t>AGENDA</a:t>
+              <a:t>CI/CD</a:t>
             </a:r>
             <a:endParaRPr lang="en-US" sz="1100" dirty="0"/>
           </a:p>
@@ -2278,7 +2759,7 @@
                 <a:ea typeface="Segoe UI" pitchFamily="34" charset="-122"/>
                 <a:cs typeface="Segoe UI" pitchFamily="34" charset="-120"/>
               </a:rPr>
-              <a:t>Nine Labs, One Real Deployment</a:t>
+              <a:t>Evaluation-Gated Release Pipeline</a:t>
             </a:r>
             <a:endParaRPr lang="en-US" sz="2600" dirty="0"/>
           </a:p>
@@ -2341,8 +2822,7 @@
                 <a:ea typeface="Segoe UI" pitchFamily="34" charset="-122"/>
                 <a:cs typeface="Segoe UI" pitchFamily="34" charset="-120"/>
               </a:rPr>
-              <a:t>Lab 00 — Prerequisites and environment setup
-</a:t>
+              <a:t>Two manual pipelines: direct PoC deployment, or deploy-and-evaluate.yml with isolated staging and production accounts/projects</a:t>
             </a:r>
             <a:endParaRPr lang="en-US" sz="1500" dirty="0"/>
           </a:p>
@@ -2363,8 +2843,7 @@
                 <a:ea typeface="Segoe UI" pitchFamily="34" charset="-122"/>
                 <a:cs typeface="Segoe UI" pitchFamily="34" charset="-120"/>
               </a:rPr>
-              <a:t>Lab 01 — Architecture deep dive (LangGraph supervisor/specialists)
-</a:t>
+              <a:t>Full flow: lint/tests → Bicep validate → deploy immutable candidate to staging → smoke/contract/streaming tests</a:t>
             </a:r>
             <a:endParaRPr lang="en-US" sz="1500" dirty="0"/>
           </a:p>
@@ -2385,8 +2864,7 @@
                 <a:ea typeface="Segoe UI" pitchFamily="34" charset="-122"/>
                 <a:cs typeface="Segoe UI" pitchFamily="34" charset="-120"/>
               </a:rPr>
-              <a:t>Lab 02 — Deploy the MCP tool servers
-</a:t>
+              <a:t>Offline evaluation quality gate runs against the staging candidate before any manual production approval</a:t>
             </a:r>
             <a:endParaRPr lang="en-US" sz="1500" dirty="0"/>
           </a:p>
@@ -2407,8 +2885,7 @@
                 <a:ea typeface="Segoe UI" pitchFamily="34" charset="-122"/>
                 <a:cs typeface="Segoe UI" pitchFamily="34" charset="-120"/>
               </a:rPr>
-              <a:t>Lab 03 — Provision and deploy the hosted agent (azd)
-</a:t>
+              <a:t>Secretless OIDC federation — no stored client secrets in either pipeline</a:t>
             </a:r>
             <a:endParaRPr lang="en-US" sz="1500" dirty="0"/>
           </a:p>
@@ -2429,104 +2906,15 @@
                 <a:ea typeface="Segoe UI" pitchFamily="34" charset="-122"/>
                 <a:cs typeface="Segoe UI" pitchFamily="34" charset="-120"/>
               </a:rPr>
-              <a:t>Lab 04 — Invoke the agent and read traces
-</a:t>
+              <a:t>Run 34178081808 passed end to end: staging 6, production 34, exact evaluated MCP digests, normal approvals. Manual recovery; no automatic rollback or canary</a:t>
             </a:r>
             <a:endParaRPr lang="en-US" sz="1500" dirty="0"/>
           </a:p>
-          <a:p>
-            <a:pPr marL="254000" indent="-254000">
-              <a:lnSpc>
-                <a:spcPct val="125000"/>
-              </a:lnSpc>
-              <a:buSzPct val="100000"/>
-              <a:buChar char="●"/>
-            </a:pPr>
-            <a:r>
-              <a:rPr lang="en-US" sz="1500" dirty="0">
-                <a:solidFill>
-                  <a:srgbClr val="1A1A1A"/>
-                </a:solidFill>
-                <a:latin typeface="Segoe UI" pitchFamily="34" charset="0"/>
-                <a:ea typeface="Segoe UI" pitchFamily="34" charset="-122"/>
-                <a:cs typeface="Segoe UI" pitchFamily="34" charset="-120"/>
-              </a:rPr>
-              <a:t>Lab 05 — Evaluations: deterministic + LLM-as-judge
-</a:t>
-            </a:r>
-            <a:endParaRPr lang="en-US" sz="1500" dirty="0"/>
-          </a:p>
-          <a:p>
-            <a:pPr marL="254000" indent="-254000">
-              <a:lnSpc>
-                <a:spcPct val="125000"/>
-              </a:lnSpc>
-              <a:buSzPct val="100000"/>
-              <a:buChar char="●"/>
-            </a:pPr>
-            <a:r>
-              <a:rPr lang="en-US" sz="1500" dirty="0">
-                <a:solidFill>
-                  <a:srgbClr val="1A1A1A"/>
-                </a:solidFill>
-                <a:latin typeface="Segoe UI" pitchFamily="34" charset="0"/>
-                <a:ea typeface="Segoe UI" pitchFamily="34" charset="-122"/>
-                <a:cs typeface="Segoe UI" pitchFamily="34" charset="-120"/>
-              </a:rPr>
-              <a:t>Lab 06 — CI/CD: evaluation-gated release pipeline
-</a:t>
-            </a:r>
-            <a:endParaRPr lang="en-US" sz="1500" dirty="0"/>
-          </a:p>
-          <a:p>
-            <a:pPr marL="254000" indent="-254000">
-              <a:lnSpc>
-                <a:spcPct val="125000"/>
-              </a:lnSpc>
-              <a:buSzPct val="100000"/>
-              <a:buChar char="●"/>
-            </a:pPr>
-            <a:r>
-              <a:rPr lang="en-US" sz="1500" dirty="0">
-                <a:solidFill>
-                  <a:srgbClr val="1A1A1A"/>
-                </a:solidFill>
-                <a:latin typeface="Segoe UI" pitchFamily="34" charset="0"/>
-                <a:ea typeface="Segoe UI" pitchFamily="34" charset="-122"/>
-                <a:cs typeface="Segoe UI" pitchFamily="34" charset="-120"/>
-              </a:rPr>
-              <a:t>Lab 07 — Real-world troubleshooting: RBAC 401
-</a:t>
-            </a:r>
-            <a:endParaRPr lang="en-US" sz="1500" dirty="0"/>
-          </a:p>
-          <a:p>
-            <a:pPr marL="254000" indent="-254000">
-              <a:lnSpc>
-                <a:spcPct val="125000"/>
-              </a:lnSpc>
-              <a:buSzPct val="100000"/>
-              <a:buChar char="●"/>
-            </a:pPr>
-            <a:r>
-              <a:rPr lang="en-US" sz="1500" dirty="0">
-                <a:solidFill>
-                  <a:srgbClr val="1A1A1A"/>
-                </a:solidFill>
-                <a:latin typeface="Segoe UI" pitchFamily="34" charset="0"/>
-                <a:ea typeface="Segoe UI" pitchFamily="34" charset="-122"/>
-                <a:cs typeface="Segoe UI" pitchFamily="34" charset="-120"/>
-              </a:rPr>
-              <a:t>Lab 08 — Production readiness and decision gates
-</a:t>
-            </a:r>
-            <a:endParaRPr lang="en-US" sz="1500" dirty="0"/>
-          </a:p>
-        </p:txBody>
-      </p:sp>
-      <p:sp>
-        <p:nvSpPr>
-          <p:cNvPr id="7" name="Shape 5"/>
+        </p:txBody>
+      </p:sp>
+      <p:sp>
+        <p:nvSpPr>
+          <p:cNvPr id="8" name="Shape 5"/>
           <p:cNvSpPr/>
           <p:nvPr/>
         </p:nvSpPr>
@@ -2546,7 +2934,7 @@
       </p:sp>
       <p:sp>
         <p:nvSpPr>
-          <p:cNvPr id="8" name="Text 6"/>
+          <p:cNvPr id="9" name="Text 6"/>
           <p:cNvSpPr/>
           <p:nvPr/>
         </p:nvSpPr>
@@ -2577,7 +2965,43 @@
                 <a:ea typeface="Segoe UI" pitchFamily="34" charset="-122"/>
                 <a:cs typeface="Segoe UI" pitchFamily="34" charset="-120"/>
               </a:rPr>
-              <a:t>Foundry Hosted Agents Workshop — 1 / 9</a:t>
+              <a:t>Foundry Hosted Agents Workshop</a:t>
+            </a:r>
+            <a:endParaRPr lang="en-US" sz="900" dirty="0"/>
+          </a:p>
+        </p:txBody>
+      </p:sp>
+      <p:sp>
+        <p:nvSpPr>
+          <p:cNvPr id="10" name="Text 7"/>
+          <p:cNvSpPr/>
+          <p:nvPr/>
+        </p:nvSpPr>
+        <p:spPr>
+          <a:xfrm>
+            <a:off x="11338560" y="6528816"/>
+            <a:ext cx="548640" cy="219456"/>
+          </a:xfrm>
+          <a:prstGeom prst="rect">
+            <a:avLst/>
+          </a:prstGeom>
+          <a:noFill/>
+          <a:ln/>
+        </p:spPr>
+        <p:txBody>
+          <a:bodyPr wrap="square" rtlCol="0" anchor="ctr"/>
+          <a:lstStyle/>
+          <a:p>
+            <a:pPr algn="r" indent="0" marL="0">
+              <a:buNone/>
+            </a:pPr>
+            <a:r>
+              <a:rPr lang="en-US" sz="900" dirty="0">
+                <a:solidFill>
+                  <a:srgbClr val="767676"/>
+                </a:solidFill>
+              </a:rPr>
+              <a:t>11 / 14</a:t>
             </a:r>
             <a:endParaRPr lang="en-US" sz="900" dirty="0"/>
           </a:p>
@@ -2591,9 +3015,9 @@
 </p:sld>
 </file>
 
-<file path=ppt/slides/slide3.xml><?xml version="1.0" encoding="utf-8"?>
+<file path=ppt/slides/slide12.xml><?xml version="1.0" encoding="utf-8"?>
 <p:sld xmlns:a="http://schemas.openxmlformats.org/drawingml/2006/main" xmlns:r="http://schemas.openxmlformats.org/officeDocument/2006/relationships" xmlns:p="http://schemas.openxmlformats.org/presentationml/2006/main">
-  <p:cSld name="Slide 3">
+  <p:cSld name="Slide 12">
     <p:bg>
       <p:bgPr>
         <a:solidFill>
@@ -2630,7 +3054,7 @@
             <a:avLst/>
           </a:prstGeom>
           <a:solidFill>
-            <a:srgbClr val="0078D4"/>
+            <a:srgbClr val="107C10"/>
           </a:solidFill>
           <a:ln/>
         </p:spPr>
@@ -2662,13 +3086,13 @@
             <a:r>
               <a:rPr lang="en-US" sz="1100" b="1" spc="100" kern="0" dirty="0">
                 <a:solidFill>
-                  <a:srgbClr val="0078D4"/>
-                </a:solidFill>
-                <a:latin typeface="Segoe UI" pitchFamily="34" charset="0"/>
-                <a:ea typeface="Segoe UI" pitchFamily="34" charset="-122"/>
-                <a:cs typeface="Segoe UI" pitchFamily="34" charset="-120"/>
-              </a:rPr>
-              <a:t>ARCHITECTURE</a:t>
+                  <a:srgbClr val="107C10"/>
+                </a:solidFill>
+                <a:latin typeface="Segoe UI" pitchFamily="34" charset="0"/>
+                <a:ea typeface="Segoe UI" pitchFamily="34" charset="-122"/>
+                <a:cs typeface="Segoe UI" pitchFamily="34" charset="-120"/>
+              </a:rPr>
+              <a:t>REAL-WORLD TROUBLESHOOTING</a:t>
             </a:r>
             <a:endParaRPr lang="en-US" sz="1100" dirty="0"/>
           </a:p>
@@ -2707,7 +3131,7 @@
                 <a:ea typeface="Segoe UI" pitchFamily="34" charset="-122"/>
                 <a:cs typeface="Segoe UI" pitchFamily="34" charset="-120"/>
               </a:rPr>
-              <a:t>Supervisor + Specialist Graph</a:t>
+              <a:t>WI-11 Resolved: Separate Observation from RCA</a:t>
             </a:r>
             <a:endParaRPr lang="en-US" sz="2600" dirty="0"/>
           </a:p>
@@ -2770,8 +3194,7 @@
                 <a:ea typeface="Segoe UI" pitchFamily="34" charset="-122"/>
                 <a:cs typeface="Segoe UI" pitchFamily="34" charset="-120"/>
               </a:rPr>
-              <a:t>A LangGraph supervisor routes to three specialist nodes: Evidence Investigator, Risk Analyst, Report Composer
-</a:t>
+              <a:t>Historical model 401 recovered on v32; the same runtime principal now passes the complete v34 production release</a:t>
             </a:r>
             <a:endParaRPr lang="en-US" sz="1500" dirty="0"/>
           </a:p>
@@ -2792,8 +3215,7 @@
                 <a:ea typeface="Segoe UI" pitchFamily="34" charset="-122"/>
                 <a:cs typeface="Segoe UI" pitchFamily="34" charset="-120"/>
               </a:rPr>
-              <a:t>Each specialist has its own prompt, tool permissions, and evaluation criteria
-</a:t>
+              <a:t>Validate the actual runtime principal, role dataActions, scope, conditions, network policy and token audience</a:t>
             </a:r>
             <a:endParaRPr lang="en-US" sz="1500" dirty="0"/>
           </a:p>
@@ -2814,8 +3236,7 @@
                 <a:ea typeface="Segoe UI" pitchFamily="34" charset="-122"/>
                 <a:cs typeface="Segoe UI" pitchFamily="34" charset="-120"/>
               </a:rPr>
-              <a:t>Tool isolation by role: Evidence Investigator → defender-conn only, Risk Analyst → anomaly-conn only
-</a:t>
+              <a:t>Separate MCP failures were fixed with the supported versioned endpoint, RemoteTool connections and current protocol negotiation</a:t>
             </a:r>
             <a:endParaRPr lang="en-US" sz="1500" dirty="0"/>
           </a:p>
@@ -2836,8 +3257,7 @@
                 <a:ea typeface="Segoe UI" pitchFamily="34" charset="-122"/>
                 <a:cs typeface="Segoe UI" pitchFamily="34" charset="-120"/>
               </a:rPr>
-              <a:t>The Report Composer has zero tool access — it only synthesizes
-</a:t>
+              <a:t>Original incident propagation and independent specialist lookups restored required evidence; strict evaluation thresholds were unchanged</a:t>
             </a:r>
             <a:endParaRPr lang="en-US" sz="1500" dirty="0"/>
           </a:p>
@@ -2858,16 +3278,36 @@
                 <a:ea typeface="Segoe UI" pitchFamily="34" charset="-122"/>
                 <a:cs typeface="Segoe UI" pitchFamily="34" charset="-120"/>
               </a:rPr>
-              <a:t>A known platform-side tool-resolution gap degrades gracefully to an honestly-labeled plain-LLM analysis instead of crashing
-</a:t>
+              <a:t>The old Azure cache explanation remains an unconfirmed hypothesis. A successful redeployment is recovery evidence, not a controlled server-side RCA</a:t>
             </a:r>
             <a:endParaRPr lang="en-US" sz="1500" dirty="0"/>
           </a:p>
-        </p:txBody>
-      </p:sp>
-      <p:sp>
-        <p:nvSpPr>
-          <p:cNvPr id="7" name="Shape 5"/>
+          <a:p>
+            <a:pPr marL="254000" indent="-254000">
+              <a:lnSpc>
+                <a:spcPct val="125000"/>
+              </a:lnSpc>
+              <a:buSzPct val="100000"/>
+              <a:buChar char="●"/>
+            </a:pPr>
+            <a:r>
+              <a:rPr lang="en-US" sz="1500" dirty="0">
+                <a:solidFill>
+                  <a:srgbClr val="1A1A1A"/>
+                </a:solidFill>
+                <a:latin typeface="Segoe UI" pitchFamily="34" charset="0"/>
+                <a:ea typeface="Segoe UI" pitchFamily="34" charset="-122"/>
+                <a:cs typeface="Segoe UI" pitchFamily="34" charset="-120"/>
+              </a:rPr>
+              <a:t>Support request 2609040400007027 is a historical reference; no support-ticket closure is claimed</a:t>
+            </a:r>
+            <a:endParaRPr lang="en-US" sz="1500" dirty="0"/>
+          </a:p>
+        </p:txBody>
+      </p:sp>
+      <p:sp>
+        <p:nvSpPr>
+          <p:cNvPr id="8" name="Shape 5"/>
           <p:cNvSpPr/>
           <p:nvPr/>
         </p:nvSpPr>
@@ -2887,7 +3327,7 @@
       </p:sp>
       <p:sp>
         <p:nvSpPr>
-          <p:cNvPr id="8" name="Text 6"/>
+          <p:cNvPr id="9" name="Text 6"/>
           <p:cNvSpPr/>
           <p:nvPr/>
         </p:nvSpPr>
@@ -2918,7 +3358,43 @@
                 <a:ea typeface="Segoe UI" pitchFamily="34" charset="-122"/>
                 <a:cs typeface="Segoe UI" pitchFamily="34" charset="-120"/>
               </a:rPr>
-              <a:t>Foundry Hosted Agents Workshop — 2 / 9</a:t>
+              <a:t>Foundry Hosted Agents Workshop</a:t>
+            </a:r>
+            <a:endParaRPr lang="en-US" sz="900" dirty="0"/>
+          </a:p>
+        </p:txBody>
+      </p:sp>
+      <p:sp>
+        <p:nvSpPr>
+          <p:cNvPr id="10" name="Text 7"/>
+          <p:cNvSpPr/>
+          <p:nvPr/>
+        </p:nvSpPr>
+        <p:spPr>
+          <a:xfrm>
+            <a:off x="11338560" y="6528816"/>
+            <a:ext cx="548640" cy="219456"/>
+          </a:xfrm>
+          <a:prstGeom prst="rect">
+            <a:avLst/>
+          </a:prstGeom>
+          <a:noFill/>
+          <a:ln/>
+        </p:spPr>
+        <p:txBody>
+          <a:bodyPr wrap="square" rtlCol="0" anchor="ctr"/>
+          <a:lstStyle/>
+          <a:p>
+            <a:pPr algn="r" indent="0" marL="0">
+              <a:buNone/>
+            </a:pPr>
+            <a:r>
+              <a:rPr lang="en-US" sz="900" dirty="0">
+                <a:solidFill>
+                  <a:srgbClr val="767676"/>
+                </a:solidFill>
+              </a:rPr>
+              <a:t>12 / 14</a:t>
             </a:r>
             <a:endParaRPr lang="en-US" sz="900" dirty="0"/>
           </a:p>
@@ -2932,9 +3408,9 @@
 </p:sld>
 </file>
 
-<file path=ppt/slides/slide4.xml><?xml version="1.0" encoding="utf-8"?>
+<file path=ppt/slides/slide13.xml><?xml version="1.0" encoding="utf-8"?>
 <p:sld xmlns:a="http://schemas.openxmlformats.org/drawingml/2006/main" xmlns:r="http://schemas.openxmlformats.org/officeDocument/2006/relationships" xmlns:p="http://schemas.openxmlformats.org/presentationml/2006/main">
-  <p:cSld name="Slide 4">
+  <p:cSld name="Slide 13">
     <p:bg>
       <p:bgPr>
         <a:solidFill>
@@ -3009,7 +3485,7 @@
                 <a:ea typeface="Segoe UI" pitchFamily="34" charset="-122"/>
                 <a:cs typeface="Segoe UI" pitchFamily="34" charset="-120"/>
               </a:rPr>
-              <a:t>TOOLS</a:t>
+              <a:t>PRODUCTION READINESS</a:t>
             </a:r>
             <a:endParaRPr lang="en-US" sz="1100" dirty="0"/>
           </a:p>
@@ -3048,7 +3524,7 @@
                 <a:ea typeface="Segoe UI" pitchFamily="34" charset="-122"/>
                 <a:cs typeface="Segoe UI" pitchFamily="34" charset="-120"/>
               </a:rPr>
-              <a:t>Four Layers: Implement, Host, Register, Consume</a:t>
+              <a:t>Honest Gates, Not False Confidence</a:t>
             </a:r>
             <a:endParaRPr lang="en-US" sz="2600" dirty="0"/>
           </a:p>
@@ -3111,8 +3587,7 @@
                 <a:ea typeface="Segoe UI" pitchFamily="34" charset="-122"/>
                 <a:cs typeface="Segoe UI" pitchFamily="34" charset="-120"/>
               </a:rPr>
-              <a:t>Layer 1 — Implementation: custom MCP server code (Defender tools, anomaly tools)
-</a:t>
+              <a:t>Four experiment tracks: load testing, Cosmos DB checkpointer, Agent 365 onboarding, continuous evaluation</a:t>
             </a:r>
             <a:endParaRPr lang="en-US" sz="1500" dirty="0"/>
           </a:p>
@@ -3133,8 +3608,7 @@
                 <a:ea typeface="Segoe UI" pitchFamily="34" charset="-122"/>
                 <a:cs typeface="Segoe UI" pitchFamily="34" charset="-120"/>
               </a:rPr>
-              <a:t>Layer 2 — Hosting: independent Azure Container Apps, own auth/networking/health checks
-</a:t>
+              <a:t>Quality gate passed: 8 captures, zero policy failures, 21/21 judge checks, verified safety refusal and tool receipts</a:t>
             </a:r>
             <a:endParaRPr lang="en-US" sz="1500" dirty="0"/>
           </a:p>
@@ -3155,8 +3629,7 @@
                 <a:ea typeface="Segoe UI" pitchFamily="34" charset="-122"/>
                 <a:cs typeface="Segoe UI" pitchFamily="34" charset="-120"/>
               </a:rPr>
-              <a:t>Layer 3 — Registration: Foundry connections define endpoint + credential policy per MCP server
-</a:t>
+              <a:t>Scale, Security, Operations gates: Conditional — partial evidence, named follow-ups</a:t>
             </a:r>
             <a:endParaRPr lang="en-US" sz="1500" dirty="0"/>
           </a:p>
@@ -3177,8 +3650,7 @@
                 <a:ea typeface="Segoe UI" pitchFamily="34" charset="-122"/>
                 <a:cs typeface="Segoe UI" pitchFamily="34" charset="-120"/>
               </a:rPr>
-              <a:t>Layer 4 — Consumption: Foundry Toolbox aggregates registered tools for reuse across agents
-</a:t>
+              <a:t>Platform status, Data, Cost gates: Not testable in this PoC — require commercial/legal/platform confirmation</a:t>
             </a:r>
             <a:endParaRPr lang="en-US" sz="1500" dirty="0"/>
           </a:p>
@@ -3199,8 +3671,7 @@
                 <a:ea typeface="Segoe UI" pitchFamily="34" charset="-122"/>
                 <a:cs typeface="Segoe UI" pitchFamily="34" charset="-120"/>
               </a:rPr>
-              <a:t>The Toolbox is the registration/aggregation layer — not the hosting runtime for your MCP code
-</a:t>
+              <a:t>Overall recommendation: conditional go for continued PoC-to-pilot investment, not an unconditional yes/no</a:t>
             </a:r>
             <a:endParaRPr lang="en-US" sz="1500" dirty="0"/>
           </a:p>
@@ -3208,7 +3679,7 @@
       </p:sp>
       <p:sp>
         <p:nvSpPr>
-          <p:cNvPr id="7" name="Shape 5"/>
+          <p:cNvPr id="8" name="Shape 5"/>
           <p:cNvSpPr/>
           <p:nvPr/>
         </p:nvSpPr>
@@ -3228,7 +3699,7 @@
       </p:sp>
       <p:sp>
         <p:nvSpPr>
-          <p:cNvPr id="8" name="Text 6"/>
+          <p:cNvPr id="9" name="Text 6"/>
           <p:cNvSpPr/>
           <p:nvPr/>
         </p:nvSpPr>
@@ -3259,7 +3730,43 @@
                 <a:ea typeface="Segoe UI" pitchFamily="34" charset="-122"/>
                 <a:cs typeface="Segoe UI" pitchFamily="34" charset="-120"/>
               </a:rPr>
-              <a:t>Foundry Hosted Agents Workshop — 3 / 9</a:t>
+              <a:t>Foundry Hosted Agents Workshop</a:t>
+            </a:r>
+            <a:endParaRPr lang="en-US" sz="900" dirty="0"/>
+          </a:p>
+        </p:txBody>
+      </p:sp>
+      <p:sp>
+        <p:nvSpPr>
+          <p:cNvPr id="10" name="Text 7"/>
+          <p:cNvSpPr/>
+          <p:nvPr/>
+        </p:nvSpPr>
+        <p:spPr>
+          <a:xfrm>
+            <a:off x="11338560" y="6528816"/>
+            <a:ext cx="548640" cy="219456"/>
+          </a:xfrm>
+          <a:prstGeom prst="rect">
+            <a:avLst/>
+          </a:prstGeom>
+          <a:noFill/>
+          <a:ln/>
+        </p:spPr>
+        <p:txBody>
+          <a:bodyPr wrap="square" rtlCol="0" anchor="ctr"/>
+          <a:lstStyle/>
+          <a:p>
+            <a:pPr algn="r" indent="0" marL="0">
+              <a:buNone/>
+            </a:pPr>
+            <a:r>
+              <a:rPr lang="en-US" sz="900" dirty="0">
+                <a:solidFill>
+                  <a:srgbClr val="767676"/>
+                </a:solidFill>
+              </a:rPr>
+              <a:t>13 / 14</a:t>
             </a:r>
             <a:endParaRPr lang="en-US" sz="900" dirty="0"/>
           </a:p>
@@ -3273,9 +3780,9 @@
 </p:sld>
 </file>
 
-<file path=ppt/slides/slide5.xml><?xml version="1.0" encoding="utf-8"?>
+<file path=ppt/slides/slide14.xml><?xml version="1.0" encoding="utf-8"?>
 <p:sld xmlns:a="http://schemas.openxmlformats.org/drawingml/2006/main" xmlns:r="http://schemas.openxmlformats.org/officeDocument/2006/relationships" xmlns:p="http://schemas.openxmlformats.org/presentationml/2006/main">
-  <p:cSld name="Slide 5">
+  <p:cSld name="Slide 14">
     <p:bg>
       <p:bgPr>
         <a:solidFill>
@@ -3350,7 +3857,7 @@
                 <a:ea typeface="Segoe UI" pitchFamily="34" charset="-122"/>
                 <a:cs typeface="Segoe UI" pitchFamily="34" charset="-120"/>
               </a:rPr>
-              <a:t>DEPLOYMENT</a:t>
+              <a:t>WRAP-UP</a:t>
             </a:r>
             <a:endParaRPr lang="en-US" sz="1100" dirty="0"/>
           </a:p>
@@ -3389,7 +3896,7 @@
                 <a:ea typeface="Segoe UI" pitchFamily="34" charset="-122"/>
                 <a:cs typeface="Segoe UI" pitchFamily="34" charset="-120"/>
               </a:rPr>
-              <a:t>One Manifest: azure.yaml + azd</a:t>
+              <a:t>A Proven Release, with Explicit Limits</a:t>
             </a:r>
             <a:endParaRPr lang="en-US" sz="2600" dirty="0"/>
           </a:p>
@@ -3452,8 +3959,7 @@
                 <a:ea typeface="Segoe UI" pitchFamily="34" charset="-122"/>
                 <a:cs typeface="Segoe UI" pitchFamily="34" charset="-120"/>
               </a:rPr>
-              <a:t>azure.yaml wires the Foundry project, model deployment, Toolbox connections, and the hosted agent service
-</a:t>
+              <a:t>The deployment and evaluation ran for real; the MCP security telemetry is synthetic, not live customer data</a:t>
             </a:r>
             <a:endParaRPr lang="en-US" sz="1500" dirty="0"/>
           </a:p>
@@ -3474,8 +3980,7 @@
                 <a:ea typeface="Segoe UI" pitchFamily="34" charset="-122"/>
                 <a:cs typeface="Segoe UI" pitchFamily="34" charset="-120"/>
               </a:rPr>
-              <a:t>kind: hosted — Foundry operates the session compute; you own only the graph code
-</a:t>
+              <a:t>Repository: github.com/devopsabcs-engineering/foundry-hosted-agents</a:t>
             </a:r>
             <a:endParaRPr lang="en-US" sz="1500" dirty="0"/>
           </a:p>
@@ -3496,8 +4001,7 @@
                 <a:ea typeface="Segoe UI" pitchFamily="34" charset="-122"/>
                 <a:cs typeface="Segoe UI" pitchFamily="34" charset="-120"/>
               </a:rPr>
-              <a:t>dependencyResolution: remote_build — Foundry builds your Python dependencies server-side
-</a:t>
+              <a:t>Wiki: current architecture, verified release artifacts, operational runbook, and resolved WI-11 history</a:t>
             </a:r>
             <a:endParaRPr lang="en-US" sz="1500" dirty="0"/>
           </a:p>
@@ -3518,8 +4022,7 @@
                 <a:ea typeface="Segoe UI" pitchFamily="34" charset="-122"/>
                 <a:cs typeface="Segoe UI" pitchFamily="34" charset="-120"/>
               </a:rPr>
-              <a:t>protocol: responses — OpenAI-compatible Responses protocol with streaming support
-</a:t>
+              <a:t>Full bilingual step-by-step labs: this deck’s companion GitHub Pages site</a:t>
             </a:r>
             <a:endParaRPr lang="en-US" sz="1500" dirty="0"/>
           </a:p>
@@ -3540,8 +4043,7 @@
                 <a:ea typeface="Segoe UI" pitchFamily="34" charset="-122"/>
                 <a:cs typeface="Segoe UI" pitchFamily="34" charset="-120"/>
               </a:rPr>
-              <a:t>azd provision creates infrastructure; azd deploy publishes a new agent version — separate lifecycles
-</a:t>
+              <a:t>Production v34 smoke passed; zero trailing-window exceptions is not a soak test or proof of complete distributed tracing</a:t>
             </a:r>
             <a:endParaRPr lang="en-US" sz="1500" dirty="0"/>
           </a:p>
@@ -3549,7 +4051,7 @@
       </p:sp>
       <p:sp>
         <p:nvSpPr>
-          <p:cNvPr id="7" name="Shape 5"/>
+          <p:cNvPr id="8" name="Shape 5"/>
           <p:cNvSpPr/>
           <p:nvPr/>
         </p:nvSpPr>
@@ -3569,7 +4071,7 @@
       </p:sp>
       <p:sp>
         <p:nvSpPr>
-          <p:cNvPr id="8" name="Text 6"/>
+          <p:cNvPr id="9" name="Text 6"/>
           <p:cNvSpPr/>
           <p:nvPr/>
         </p:nvSpPr>
@@ -3600,7 +4102,915 @@
                 <a:ea typeface="Segoe UI" pitchFamily="34" charset="-122"/>
                 <a:cs typeface="Segoe UI" pitchFamily="34" charset="-120"/>
               </a:rPr>
-              <a:t>Foundry Hosted Agents Workshop — 4 / 9</a:t>
+              <a:t>Foundry Hosted Agents Workshop</a:t>
+            </a:r>
+            <a:endParaRPr lang="en-US" sz="900" dirty="0"/>
+          </a:p>
+        </p:txBody>
+      </p:sp>
+      <p:sp>
+        <p:nvSpPr>
+          <p:cNvPr id="10" name="Text 7"/>
+          <p:cNvSpPr/>
+          <p:nvPr/>
+        </p:nvSpPr>
+        <p:spPr>
+          <a:xfrm>
+            <a:off x="11338560" y="6528816"/>
+            <a:ext cx="548640" cy="219456"/>
+          </a:xfrm>
+          <a:prstGeom prst="rect">
+            <a:avLst/>
+          </a:prstGeom>
+          <a:noFill/>
+          <a:ln/>
+        </p:spPr>
+        <p:txBody>
+          <a:bodyPr wrap="square" rtlCol="0" anchor="ctr"/>
+          <a:lstStyle/>
+          <a:p>
+            <a:pPr algn="r" indent="0" marL="0">
+              <a:buNone/>
+            </a:pPr>
+            <a:r>
+              <a:rPr lang="en-US" sz="900" dirty="0">
+                <a:solidFill>
+                  <a:srgbClr val="767676"/>
+                </a:solidFill>
+              </a:rPr>
+              <a:t>14 / 14</a:t>
+            </a:r>
+            <a:endParaRPr lang="en-US" sz="900" dirty="0"/>
+          </a:p>
+        </p:txBody>
+      </p:sp>
+    </p:spTree>
+  </p:cSld>
+  <p:clrMapOvr>
+    <a:masterClrMapping/>
+  </p:clrMapOvr>
+</p:sld>
+</file>
+
+<file path=ppt/slides/slide2.xml><?xml version="1.0" encoding="utf-8"?>
+<p:sld xmlns:a="http://schemas.openxmlformats.org/drawingml/2006/main" xmlns:r="http://schemas.openxmlformats.org/officeDocument/2006/relationships" xmlns:p="http://schemas.openxmlformats.org/presentationml/2006/main">
+  <p:cSld name="Slide 2">
+    <p:bg>
+      <p:bgPr>
+        <a:solidFill>
+          <a:srgbClr val="FFFFFF"/>
+        </a:solidFill>
+      </p:bgPr>
+    </p:bg>
+    <p:spTree>
+      <p:nvGrpSpPr>
+        <p:cNvPr id="1" name=""/>
+        <p:cNvGrpSpPr/>
+        <p:nvPr/>
+      </p:nvGrpSpPr>
+      <p:grpSpPr>
+        <a:xfrm>
+          <a:off x="0" y="0"/>
+          <a:ext cx="0" cy="0"/>
+          <a:chOff x="0" y="0"/>
+          <a:chExt cx="0" cy="0"/>
+        </a:xfrm>
+      </p:grpSpPr>
+      <p:sp>
+        <p:nvSpPr>
+          <p:cNvPr id="2" name="Text 0"/>
+          <p:cNvSpPr/>
+          <p:nvPr/>
+        </p:nvSpPr>
+        <p:spPr>
+          <a:xfrm>
+            <a:off x="411480" y="146304"/>
+            <a:ext cx="11338560" cy="502920"/>
+          </a:xfrm>
+          <a:prstGeom prst="rect">
+            <a:avLst/>
+          </a:prstGeom>
+          <a:noFill/>
+          <a:ln/>
+        </p:spPr>
+        <p:txBody>
+          <a:bodyPr wrap="square" rtlCol="0" anchor="ctr"/>
+          <a:lstStyle/>
+          <a:p>
+            <a:pPr indent="0" marL="0">
+              <a:buNone/>
+            </a:pPr>
+            <a:r>
+              <a:rPr lang="en-US" sz="2400" b="1" dirty="0">
+                <a:solidFill>
+                  <a:srgbClr val="146C54"/>
+                </a:solidFill>
+                <a:latin typeface="Segoe UI" pitchFamily="34" charset="0"/>
+                <a:ea typeface="Segoe UI" pitchFamily="34" charset="-122"/>
+                <a:cs typeface="Segoe UI" pitchFamily="34" charset="-120"/>
+              </a:rPr>
+              <a:t>Verified Release: Staging to Production</a:t>
+            </a:r>
+            <a:endParaRPr lang="en-US" sz="2400" dirty="0"/>
+          </a:p>
+        </p:txBody>
+      </p:sp>
+      <p:pic>
+        <p:nvPicPr>
+          <p:cNvPr id="3" name="Image 0" descr="Verified Release: Staging to Production">    </p:cNvPr>
+          <p:cNvPicPr>
+            <a:picLocks noChangeAspect="1"/>
+          </p:cNvPicPr>
+          <p:nvPr/>
+        </p:nvPicPr>
+        <p:blipFill>
+          <a:blip r:embed="rId1"/>
+          <a:stretch>
+            <a:fillRect/>
+          </a:stretch>
+        </p:blipFill>
+        <p:spPr>
+          <a:xfrm>
+            <a:off x="2068830" y="777240"/>
+            <a:ext cx="8051292" cy="5367528"/>
+          </a:xfrm>
+          <a:prstGeom prst="rect">
+            <a:avLst/>
+          </a:prstGeom>
+        </p:spPr>
+      </p:pic>
+      <p:sp>
+        <p:nvSpPr>
+          <p:cNvPr id="4" name="Text 1"/>
+          <p:cNvSpPr/>
+          <p:nvPr/>
+        </p:nvSpPr>
+        <p:spPr>
+          <a:xfrm>
+            <a:off x="411480" y="6245352"/>
+            <a:ext cx="11338560" cy="256032"/>
+          </a:xfrm>
+          <a:prstGeom prst="rect">
+            <a:avLst/>
+          </a:prstGeom>
+          <a:noFill/>
+          <a:ln/>
+        </p:spPr>
+        <p:txBody>
+          <a:bodyPr wrap="square" rtlCol="0" anchor="ctr"/>
+          <a:lstStyle/>
+          <a:p>
+            <a:pPr indent="0" marL="0">
+              <a:buNone/>
+            </a:pPr>
+            <a:r>
+              <a:rPr lang="en-US" sz="1000" dirty="0">
+                <a:solidFill>
+                  <a:srgbClr val="53635E"/>
+                </a:solidFill>
+                <a:latin typeface="Segoe UI" pitchFamily="34" charset="0"/>
+                <a:ea typeface="Segoe UI" pitchFamily="34" charset="-122"/>
+                <a:cs typeface="Segoe UI" pitchFamily="34" charset="-120"/>
+              </a:rPr>
+              <a:t>Artifact rendering, not a portal screenshot. Synthetic fixtures. Sources and SHA-256 hashes retained.</a:t>
+            </a:r>
+            <a:endParaRPr lang="en-US" sz="1000" dirty="0"/>
+          </a:p>
+        </p:txBody>
+      </p:sp>
+      <p:sp>
+        <p:nvSpPr>
+          <p:cNvPr id="5" name="Text 2">
+            <a:hlinkClick r:id="rId2" tooltip=""/>
+          </p:cNvPr>
+          <p:cNvSpPr/>
+          <p:nvPr/>
+        </p:nvSpPr>
+        <p:spPr>
+          <a:xfrm>
+            <a:off x="411480" y="6528816"/>
+            <a:ext cx="10515600" cy="201168"/>
+          </a:xfrm>
+          <a:prstGeom prst="rect">
+            <a:avLst/>
+          </a:prstGeom>
+          <a:noFill/>
+          <a:ln/>
+        </p:spPr>
+        <p:txBody>
+          <a:bodyPr wrap="square" rtlCol="0" anchor="ctr"/>
+          <a:lstStyle/>
+          <a:p>
+            <a:pPr indent="0" marL="0">
+              <a:buNone/>
+            </a:pPr>
+            <a:r>
+              <a:rPr lang="en-US" sz="900" u="sng" dirty="0">
+                <a:solidFill>
+                  <a:srgbClr val="075C9B"/>
+                </a:solidFill>
+                <a:latin typeface="Segoe UI" pitchFamily="34" charset="0"/>
+                <a:ea typeface="Segoe UI" pitchFamily="34" charset="-122"/>
+                <a:cs typeface="Segoe UI" pitchFamily="34" charset="-120"/>
+                <a:hlinkClick r:id="rId2" invalidUrl="" action="" tgtFrame="" tooltip="" history="1" highlightClick="0" endSnd="0">
+                  <a:extLst>
+                    <a:ext uri="{A12FA001-AC4F-418D-AE19-62706E023703}">
+                      <ahyp:hlinkClr xmlns:ahyp="http://schemas.microsoft.com/office/drawing/2018/hyperlinkcolor" val="tx"/>
+                    </a:ext>
+                  </a:extLst>
+                </a:hlinkClick>
+              </a:rPr>
+              <a:t>GitHub Actions 34178081808 | f3da486 | 2026-09-08 UTC</a:t>
+            </a:r>
+            <a:endParaRPr lang="en-US" sz="900" dirty="0"/>
+          </a:p>
+        </p:txBody>
+      </p:sp>
+      <p:sp>
+        <p:nvSpPr>
+          <p:cNvPr id="7" name="Text 3"/>
+          <p:cNvSpPr/>
+          <p:nvPr/>
+        </p:nvSpPr>
+        <p:spPr>
+          <a:xfrm>
+            <a:off x="11338560" y="6528816"/>
+            <a:ext cx="548640" cy="219456"/>
+          </a:xfrm>
+          <a:prstGeom prst="rect">
+            <a:avLst/>
+          </a:prstGeom>
+          <a:noFill/>
+          <a:ln/>
+        </p:spPr>
+        <p:txBody>
+          <a:bodyPr wrap="square" rtlCol="0" anchor="ctr"/>
+          <a:lstStyle/>
+          <a:p>
+            <a:pPr algn="r" indent="0" marL="0">
+              <a:buNone/>
+            </a:pPr>
+            <a:r>
+              <a:rPr lang="en-US" sz="900" dirty="0">
+                <a:solidFill>
+                  <a:srgbClr val="767676"/>
+                </a:solidFill>
+              </a:rPr>
+              <a:t>2 / 14</a:t>
+            </a:r>
+            <a:endParaRPr lang="en-US" sz="900" dirty="0"/>
+          </a:p>
+        </p:txBody>
+      </p:sp>
+    </p:spTree>
+  </p:cSld>
+  <p:clrMapOvr>
+    <a:masterClrMapping/>
+  </p:clrMapOvr>
+</p:sld>
+</file>
+
+<file path=ppt/slides/slide3.xml><?xml version="1.0" encoding="utf-8"?>
+<p:sld xmlns:a="http://schemas.openxmlformats.org/drawingml/2006/main" xmlns:r="http://schemas.openxmlformats.org/officeDocument/2006/relationships" xmlns:p="http://schemas.openxmlformats.org/presentationml/2006/main">
+  <p:cSld name="Slide 3">
+    <p:bg>
+      <p:bgPr>
+        <a:solidFill>
+          <a:srgbClr val="FFFFFF"/>
+        </a:solidFill>
+      </p:bgPr>
+    </p:bg>
+    <p:spTree>
+      <p:nvGrpSpPr>
+        <p:cNvPr id="1" name=""/>
+        <p:cNvGrpSpPr/>
+        <p:nvPr/>
+      </p:nvGrpSpPr>
+      <p:grpSpPr>
+        <a:xfrm>
+          <a:off x="0" y="0"/>
+          <a:ext cx="0" cy="0"/>
+          <a:chOff x="0" y="0"/>
+          <a:chExt cx="0" cy="0"/>
+        </a:xfrm>
+      </p:grpSpPr>
+      <p:sp>
+        <p:nvSpPr>
+          <p:cNvPr id="2" name="Text 0"/>
+          <p:cNvSpPr/>
+          <p:nvPr/>
+        </p:nvSpPr>
+        <p:spPr>
+          <a:xfrm>
+            <a:off x="411480" y="146304"/>
+            <a:ext cx="11338560" cy="502920"/>
+          </a:xfrm>
+          <a:prstGeom prst="rect">
+            <a:avLst/>
+          </a:prstGeom>
+          <a:noFill/>
+          <a:ln/>
+        </p:spPr>
+        <p:txBody>
+          <a:bodyPr wrap="square" rtlCol="0" anchor="ctr"/>
+          <a:lstStyle/>
+          <a:p>
+            <a:pPr indent="0" marL="0">
+              <a:buNone/>
+            </a:pPr>
+            <a:r>
+              <a:rPr lang="en-US" sz="2400" b="1" dirty="0">
+                <a:solidFill>
+                  <a:srgbClr val="146C54"/>
+                </a:solidFill>
+                <a:latin typeface="Segoe UI" pitchFamily="34" charset="0"/>
+                <a:ea typeface="Segoe UI" pitchFamily="34" charset="-122"/>
+                <a:cs typeface="Segoe UI" pitchFamily="34" charset="-120"/>
+              </a:rPr>
+              <a:t>Quality Gate: 21 of 21 Judge Checks Passed</a:t>
+            </a:r>
+            <a:endParaRPr lang="en-US" sz="2400" dirty="0"/>
+          </a:p>
+        </p:txBody>
+      </p:sp>
+      <p:pic>
+        <p:nvPicPr>
+          <p:cNvPr id="3" name="Image 0" descr="Quality Gate: 21 of 21 Judge Checks Passed">    </p:cNvPr>
+          <p:cNvPicPr>
+            <a:picLocks noChangeAspect="1"/>
+          </p:cNvPicPr>
+          <p:nvPr/>
+        </p:nvPicPr>
+        <p:blipFill>
+          <a:blip r:embed="rId1"/>
+          <a:stretch>
+            <a:fillRect/>
+          </a:stretch>
+        </p:blipFill>
+        <p:spPr>
+          <a:xfrm>
+            <a:off x="2068830" y="777240"/>
+            <a:ext cx="8051292" cy="5367528"/>
+          </a:xfrm>
+          <a:prstGeom prst="rect">
+            <a:avLst/>
+          </a:prstGeom>
+        </p:spPr>
+      </p:pic>
+      <p:sp>
+        <p:nvSpPr>
+          <p:cNvPr id="4" name="Text 1"/>
+          <p:cNvSpPr/>
+          <p:nvPr/>
+        </p:nvSpPr>
+        <p:spPr>
+          <a:xfrm>
+            <a:off x="411480" y="6245352"/>
+            <a:ext cx="11338560" cy="256032"/>
+          </a:xfrm>
+          <a:prstGeom prst="rect">
+            <a:avLst/>
+          </a:prstGeom>
+          <a:noFill/>
+          <a:ln/>
+        </p:spPr>
+        <p:txBody>
+          <a:bodyPr wrap="square" rtlCol="0" anchor="ctr"/>
+          <a:lstStyle/>
+          <a:p>
+            <a:pPr indent="0" marL="0">
+              <a:buNone/>
+            </a:pPr>
+            <a:r>
+              <a:rPr lang="en-US" sz="1000" dirty="0">
+                <a:solidFill>
+                  <a:srgbClr val="53635E"/>
+                </a:solidFill>
+                <a:latin typeface="Segoe UI" pitchFamily="34" charset="0"/>
+                <a:ea typeface="Segoe UI" pitchFamily="34" charset="-122"/>
+                <a:cs typeface="Segoe UI" pitchFamily="34" charset="-120"/>
+              </a:rPr>
+              <a:t>Artifact rendering, not a portal screenshot. Synthetic fixtures. Sources and SHA-256 hashes retained.</a:t>
+            </a:r>
+            <a:endParaRPr lang="en-US" sz="1000" dirty="0"/>
+          </a:p>
+        </p:txBody>
+      </p:sp>
+      <p:sp>
+        <p:nvSpPr>
+          <p:cNvPr id="5" name="Text 2">
+            <a:hlinkClick r:id="rId2" tooltip=""/>
+          </p:cNvPr>
+          <p:cNvSpPr/>
+          <p:nvPr/>
+        </p:nvSpPr>
+        <p:spPr>
+          <a:xfrm>
+            <a:off x="411480" y="6528816"/>
+            <a:ext cx="10515600" cy="201168"/>
+          </a:xfrm>
+          <a:prstGeom prst="rect">
+            <a:avLst/>
+          </a:prstGeom>
+          <a:noFill/>
+          <a:ln/>
+        </p:spPr>
+        <p:txBody>
+          <a:bodyPr wrap="square" rtlCol="0" anchor="ctr"/>
+          <a:lstStyle/>
+          <a:p>
+            <a:pPr indent="0" marL="0">
+              <a:buNone/>
+            </a:pPr>
+            <a:r>
+              <a:rPr lang="en-US" sz="900" u="sng" dirty="0">
+                <a:solidFill>
+                  <a:srgbClr val="075C9B"/>
+                </a:solidFill>
+                <a:latin typeface="Segoe UI" pitchFamily="34" charset="0"/>
+                <a:ea typeface="Segoe UI" pitchFamily="34" charset="-122"/>
+                <a:cs typeface="Segoe UI" pitchFamily="34" charset="-120"/>
+                <a:hlinkClick r:id="rId2" invalidUrl="" action="" tgtFrame="" tooltip="" history="1" highlightClick="0" endSnd="0">
+                  <a:extLst>
+                    <a:ext uri="{A12FA001-AC4F-418D-AE19-62706E023703}">
+                      <ahyp:hlinkClr xmlns:ahyp="http://schemas.microsoft.com/office/drawing/2018/hyperlinkcolor" val="tx"/>
+                    </a:ext>
+                  </a:extLst>
+                </a:hlinkClick>
+              </a:rPr>
+              <a:t>GitHub Actions 34178081808 | f3da486 | 2026-09-08 UTC</a:t>
+            </a:r>
+            <a:endParaRPr lang="en-US" sz="900" dirty="0"/>
+          </a:p>
+        </p:txBody>
+      </p:sp>
+      <p:sp>
+        <p:nvSpPr>
+          <p:cNvPr id="7" name="Text 3"/>
+          <p:cNvSpPr/>
+          <p:nvPr/>
+        </p:nvSpPr>
+        <p:spPr>
+          <a:xfrm>
+            <a:off x="11338560" y="6528816"/>
+            <a:ext cx="548640" cy="219456"/>
+          </a:xfrm>
+          <a:prstGeom prst="rect">
+            <a:avLst/>
+          </a:prstGeom>
+          <a:noFill/>
+          <a:ln/>
+        </p:spPr>
+        <p:txBody>
+          <a:bodyPr wrap="square" rtlCol="0" anchor="ctr"/>
+          <a:lstStyle/>
+          <a:p>
+            <a:pPr algn="r" indent="0" marL="0">
+              <a:buNone/>
+            </a:pPr>
+            <a:r>
+              <a:rPr lang="en-US" sz="900" dirty="0">
+                <a:solidFill>
+                  <a:srgbClr val="767676"/>
+                </a:solidFill>
+              </a:rPr>
+              <a:t>3 / 14</a:t>
+            </a:r>
+            <a:endParaRPr lang="en-US" sz="900" dirty="0"/>
+          </a:p>
+        </p:txBody>
+      </p:sp>
+    </p:spTree>
+  </p:cSld>
+  <p:clrMapOvr>
+    <a:masterClrMapping/>
+  </p:clrMapOvr>
+</p:sld>
+</file>
+
+<file path=ppt/slides/slide4.xml><?xml version="1.0" encoding="utf-8"?>
+<p:sld xmlns:a="http://schemas.openxmlformats.org/drawingml/2006/main" xmlns:r="http://schemas.openxmlformats.org/officeDocument/2006/relationships" xmlns:p="http://schemas.openxmlformats.org/presentationml/2006/main">
+  <p:cSld name="Slide 4">
+    <p:bg>
+      <p:bgPr>
+        <a:solidFill>
+          <a:srgbClr val="FFFFFF"/>
+        </a:solidFill>
+      </p:bgPr>
+    </p:bg>
+    <p:spTree>
+      <p:nvGrpSpPr>
+        <p:cNvPr id="1" name=""/>
+        <p:cNvGrpSpPr/>
+        <p:nvPr/>
+      </p:nvGrpSpPr>
+      <p:grpSpPr>
+        <a:xfrm>
+          <a:off x="0" y="0"/>
+          <a:ext cx="0" cy="0"/>
+          <a:chOff x="0" y="0"/>
+          <a:chExt cx="0" cy="0"/>
+        </a:xfrm>
+      </p:grpSpPr>
+      <p:sp>
+        <p:nvSpPr>
+          <p:cNvPr id="2" name="Text 0"/>
+          <p:cNvSpPr/>
+          <p:nvPr/>
+        </p:nvSpPr>
+        <p:spPr>
+          <a:xfrm>
+            <a:off x="411480" y="146304"/>
+            <a:ext cx="11338560" cy="502920"/>
+          </a:xfrm>
+          <a:prstGeom prst="rect">
+            <a:avLst/>
+          </a:prstGeom>
+          <a:noFill/>
+          <a:ln/>
+        </p:spPr>
+        <p:txBody>
+          <a:bodyPr wrap="square" rtlCol="0" anchor="ctr"/>
+          <a:lstStyle/>
+          <a:p>
+            <a:pPr indent="0" marL="0">
+              <a:buNone/>
+            </a:pPr>
+            <a:r>
+              <a:rPr lang="en-US" sz="2400" b="1" dirty="0">
+                <a:solidFill>
+                  <a:srgbClr val="146C54"/>
+                </a:solidFill>
+                <a:latin typeface="Segoe UI" pitchFamily="34" charset="0"/>
+                <a:ea typeface="Segoe UI" pitchFamily="34" charset="-122"/>
+                <a:cs typeface="Segoe UI" pitchFamily="34" charset="-120"/>
+              </a:rPr>
+              <a:t>Tool Execution Proven; Telemetry Is Synthetic</a:t>
+            </a:r>
+            <a:endParaRPr lang="en-US" sz="2400" dirty="0"/>
+          </a:p>
+        </p:txBody>
+      </p:sp>
+      <p:pic>
+        <p:nvPicPr>
+          <p:cNvPr id="3" name="Image 0" descr="Tool Execution Proven; Telemetry Is Synthetic">    </p:cNvPr>
+          <p:cNvPicPr>
+            <a:picLocks noChangeAspect="1"/>
+          </p:cNvPicPr>
+          <p:nvPr/>
+        </p:nvPicPr>
+        <p:blipFill>
+          <a:blip r:embed="rId1"/>
+          <a:stretch>
+            <a:fillRect/>
+          </a:stretch>
+        </p:blipFill>
+        <p:spPr>
+          <a:xfrm>
+            <a:off x="2068830" y="777240"/>
+            <a:ext cx="8051292" cy="5367528"/>
+          </a:xfrm>
+          <a:prstGeom prst="rect">
+            <a:avLst/>
+          </a:prstGeom>
+        </p:spPr>
+      </p:pic>
+      <p:sp>
+        <p:nvSpPr>
+          <p:cNvPr id="4" name="Text 1"/>
+          <p:cNvSpPr/>
+          <p:nvPr/>
+        </p:nvSpPr>
+        <p:spPr>
+          <a:xfrm>
+            <a:off x="411480" y="6245352"/>
+            <a:ext cx="11338560" cy="256032"/>
+          </a:xfrm>
+          <a:prstGeom prst="rect">
+            <a:avLst/>
+          </a:prstGeom>
+          <a:noFill/>
+          <a:ln/>
+        </p:spPr>
+        <p:txBody>
+          <a:bodyPr wrap="square" rtlCol="0" anchor="ctr"/>
+          <a:lstStyle/>
+          <a:p>
+            <a:pPr indent="0" marL="0">
+              <a:buNone/>
+            </a:pPr>
+            <a:r>
+              <a:rPr lang="en-US" sz="1000" dirty="0">
+                <a:solidFill>
+                  <a:srgbClr val="53635E"/>
+                </a:solidFill>
+                <a:latin typeface="Segoe UI" pitchFamily="34" charset="0"/>
+                <a:ea typeface="Segoe UI" pitchFamily="34" charset="-122"/>
+                <a:cs typeface="Segoe UI" pitchFamily="34" charset="-120"/>
+              </a:rPr>
+              <a:t>Artifact rendering, not a portal screenshot. Synthetic fixtures. Sources and SHA-256 hashes retained.</a:t>
+            </a:r>
+            <a:endParaRPr lang="en-US" sz="1000" dirty="0"/>
+          </a:p>
+        </p:txBody>
+      </p:sp>
+      <p:sp>
+        <p:nvSpPr>
+          <p:cNvPr id="5" name="Text 2">
+            <a:hlinkClick r:id="rId2" tooltip=""/>
+          </p:cNvPr>
+          <p:cNvSpPr/>
+          <p:nvPr/>
+        </p:nvSpPr>
+        <p:spPr>
+          <a:xfrm>
+            <a:off x="411480" y="6528816"/>
+            <a:ext cx="10515600" cy="201168"/>
+          </a:xfrm>
+          <a:prstGeom prst="rect">
+            <a:avLst/>
+          </a:prstGeom>
+          <a:noFill/>
+          <a:ln/>
+        </p:spPr>
+        <p:txBody>
+          <a:bodyPr wrap="square" rtlCol="0" anchor="ctr"/>
+          <a:lstStyle/>
+          <a:p>
+            <a:pPr indent="0" marL="0">
+              <a:buNone/>
+            </a:pPr>
+            <a:r>
+              <a:rPr lang="en-US" sz="900" u="sng" dirty="0">
+                <a:solidFill>
+                  <a:srgbClr val="075C9B"/>
+                </a:solidFill>
+                <a:latin typeface="Segoe UI" pitchFamily="34" charset="0"/>
+                <a:ea typeface="Segoe UI" pitchFamily="34" charset="-122"/>
+                <a:cs typeface="Segoe UI" pitchFamily="34" charset="-120"/>
+                <a:hlinkClick r:id="rId2" invalidUrl="" action="" tgtFrame="" tooltip="" history="1" highlightClick="0" endSnd="0">
+                  <a:extLst>
+                    <a:ext uri="{A12FA001-AC4F-418D-AE19-62706E023703}">
+                      <ahyp:hlinkClr xmlns:ahyp="http://schemas.microsoft.com/office/drawing/2018/hyperlinkcolor" val="tx"/>
+                    </a:ext>
+                  </a:extLst>
+                </a:hlinkClick>
+              </a:rPr>
+              <a:t>GitHub Actions 34178081808 | f3da486 | 2026-09-08 UTC</a:t>
+            </a:r>
+            <a:endParaRPr lang="en-US" sz="900" dirty="0"/>
+          </a:p>
+        </p:txBody>
+      </p:sp>
+      <p:sp>
+        <p:nvSpPr>
+          <p:cNvPr id="7" name="Text 3"/>
+          <p:cNvSpPr/>
+          <p:nvPr/>
+        </p:nvSpPr>
+        <p:spPr>
+          <a:xfrm>
+            <a:off x="11338560" y="6528816"/>
+            <a:ext cx="548640" cy="219456"/>
+          </a:xfrm>
+          <a:prstGeom prst="rect">
+            <a:avLst/>
+          </a:prstGeom>
+          <a:noFill/>
+          <a:ln/>
+        </p:spPr>
+        <p:txBody>
+          <a:bodyPr wrap="square" rtlCol="0" anchor="ctr"/>
+          <a:lstStyle/>
+          <a:p>
+            <a:pPr algn="r" indent="0" marL="0">
+              <a:buNone/>
+            </a:pPr>
+            <a:r>
+              <a:rPr lang="en-US" sz="900" dirty="0">
+                <a:solidFill>
+                  <a:srgbClr val="767676"/>
+                </a:solidFill>
+              </a:rPr>
+              <a:t>4 / 14</a:t>
+            </a:r>
+            <a:endParaRPr lang="en-US" sz="900" dirty="0"/>
+          </a:p>
+        </p:txBody>
+      </p:sp>
+    </p:spTree>
+  </p:cSld>
+  <p:clrMapOvr>
+    <a:masterClrMapping/>
+  </p:clrMapOvr>
+</p:sld>
+</file>
+
+<file path=ppt/slides/slide5.xml><?xml version="1.0" encoding="utf-8"?>
+<p:sld xmlns:a="http://schemas.openxmlformats.org/drawingml/2006/main" xmlns:r="http://schemas.openxmlformats.org/officeDocument/2006/relationships" xmlns:p="http://schemas.openxmlformats.org/presentationml/2006/main">
+  <p:cSld name="Slide 5">
+    <p:bg>
+      <p:bgPr>
+        <a:solidFill>
+          <a:srgbClr val="FFFFFF"/>
+        </a:solidFill>
+      </p:bgPr>
+    </p:bg>
+    <p:spTree>
+      <p:nvGrpSpPr>
+        <p:cNvPr id="1" name=""/>
+        <p:cNvGrpSpPr/>
+        <p:nvPr/>
+      </p:nvGrpSpPr>
+      <p:grpSpPr>
+        <a:xfrm>
+          <a:off x="0" y="0"/>
+          <a:ext cx="0" cy="0"/>
+          <a:chOff x="0" y="0"/>
+          <a:chExt cx="0" cy="0"/>
+        </a:xfrm>
+      </p:grpSpPr>
+      <p:sp>
+        <p:nvSpPr>
+          <p:cNvPr id="2" name="Text 0"/>
+          <p:cNvSpPr/>
+          <p:nvPr/>
+        </p:nvSpPr>
+        <p:spPr>
+          <a:xfrm>
+            <a:off x="411480" y="146304"/>
+            <a:ext cx="11338560" cy="502920"/>
+          </a:xfrm>
+          <a:prstGeom prst="rect">
+            <a:avLst/>
+          </a:prstGeom>
+          <a:noFill/>
+          <a:ln/>
+        </p:spPr>
+        <p:txBody>
+          <a:bodyPr wrap="square" rtlCol="0" anchor="ctr"/>
+          <a:lstStyle/>
+          <a:p>
+            <a:pPr indent="0" marL="0">
+              <a:buNone/>
+            </a:pPr>
+            <a:r>
+              <a:rPr lang="en-US" sz="2400" b="1" dirty="0">
+                <a:solidFill>
+                  <a:srgbClr val="146C54"/>
+                </a:solidFill>
+                <a:latin typeface="Segoe UI" pitchFamily="34" charset="0"/>
+                <a:ea typeface="Segoe UI" pitchFamily="34" charset="-122"/>
+                <a:cs typeface="Segoe UI" pitchFamily="34" charset="-120"/>
+              </a:rPr>
+              <a:t>Production 34: Active, Smoke Test Passed</a:t>
+            </a:r>
+            <a:endParaRPr lang="en-US" sz="2400" dirty="0"/>
+          </a:p>
+        </p:txBody>
+      </p:sp>
+      <p:pic>
+        <p:nvPicPr>
+          <p:cNvPr id="3" name="Image 0" descr="Production 34: Active, Smoke Test Passed">    </p:cNvPr>
+          <p:cNvPicPr>
+            <a:picLocks noChangeAspect="1"/>
+          </p:cNvPicPr>
+          <p:nvPr/>
+        </p:nvPicPr>
+        <p:blipFill>
+          <a:blip r:embed="rId1"/>
+          <a:stretch>
+            <a:fillRect/>
+          </a:stretch>
+        </p:blipFill>
+        <p:spPr>
+          <a:xfrm>
+            <a:off x="2068830" y="777240"/>
+            <a:ext cx="8051292" cy="5367528"/>
+          </a:xfrm>
+          <a:prstGeom prst="rect">
+            <a:avLst/>
+          </a:prstGeom>
+        </p:spPr>
+      </p:pic>
+      <p:sp>
+        <p:nvSpPr>
+          <p:cNvPr id="4" name="Text 1"/>
+          <p:cNvSpPr/>
+          <p:nvPr/>
+        </p:nvSpPr>
+        <p:spPr>
+          <a:xfrm>
+            <a:off x="411480" y="6245352"/>
+            <a:ext cx="11338560" cy="256032"/>
+          </a:xfrm>
+          <a:prstGeom prst="rect">
+            <a:avLst/>
+          </a:prstGeom>
+          <a:noFill/>
+          <a:ln/>
+        </p:spPr>
+        <p:txBody>
+          <a:bodyPr wrap="square" rtlCol="0" anchor="ctr"/>
+          <a:lstStyle/>
+          <a:p>
+            <a:pPr indent="0" marL="0">
+              <a:buNone/>
+            </a:pPr>
+            <a:r>
+              <a:rPr lang="en-US" sz="1000" dirty="0">
+                <a:solidFill>
+                  <a:srgbClr val="53635E"/>
+                </a:solidFill>
+                <a:latin typeface="Segoe UI" pitchFamily="34" charset="0"/>
+                <a:ea typeface="Segoe UI" pitchFamily="34" charset="-122"/>
+                <a:cs typeface="Segoe UI" pitchFamily="34" charset="-120"/>
+              </a:rPr>
+              <a:t>Artifact rendering, not a portal screenshot. Synthetic fixtures. Sources and SHA-256 hashes retained.</a:t>
+            </a:r>
+            <a:endParaRPr lang="en-US" sz="1000" dirty="0"/>
+          </a:p>
+        </p:txBody>
+      </p:sp>
+      <p:sp>
+        <p:nvSpPr>
+          <p:cNvPr id="5" name="Text 2">
+            <a:hlinkClick r:id="rId2" tooltip=""/>
+          </p:cNvPr>
+          <p:cNvSpPr/>
+          <p:nvPr/>
+        </p:nvSpPr>
+        <p:spPr>
+          <a:xfrm>
+            <a:off x="411480" y="6528816"/>
+            <a:ext cx="10515600" cy="201168"/>
+          </a:xfrm>
+          <a:prstGeom prst="rect">
+            <a:avLst/>
+          </a:prstGeom>
+          <a:noFill/>
+          <a:ln/>
+        </p:spPr>
+        <p:txBody>
+          <a:bodyPr wrap="square" rtlCol="0" anchor="ctr"/>
+          <a:lstStyle/>
+          <a:p>
+            <a:pPr indent="0" marL="0">
+              <a:buNone/>
+            </a:pPr>
+            <a:r>
+              <a:rPr lang="en-US" sz="900" u="sng" dirty="0">
+                <a:solidFill>
+                  <a:srgbClr val="075C9B"/>
+                </a:solidFill>
+                <a:latin typeface="Segoe UI" pitchFamily="34" charset="0"/>
+                <a:ea typeface="Segoe UI" pitchFamily="34" charset="-122"/>
+                <a:cs typeface="Segoe UI" pitchFamily="34" charset="-120"/>
+                <a:hlinkClick r:id="rId2" invalidUrl="" action="" tgtFrame="" tooltip="" history="1" highlightClick="0" endSnd="0">
+                  <a:extLst>
+                    <a:ext uri="{A12FA001-AC4F-418D-AE19-62706E023703}">
+                      <ahyp:hlinkClr xmlns:ahyp="http://schemas.microsoft.com/office/drawing/2018/hyperlinkcolor" val="tx"/>
+                    </a:ext>
+                  </a:extLst>
+                </a:hlinkClick>
+              </a:rPr>
+              <a:t>GitHub Actions 34178081808 | f3da486 | 2026-09-08 UTC</a:t>
+            </a:r>
+            <a:endParaRPr lang="en-US" sz="900" dirty="0"/>
+          </a:p>
+        </p:txBody>
+      </p:sp>
+      <p:sp>
+        <p:nvSpPr>
+          <p:cNvPr id="7" name="Text 3"/>
+          <p:cNvSpPr/>
+          <p:nvPr/>
+        </p:nvSpPr>
+        <p:spPr>
+          <a:xfrm>
+            <a:off x="11338560" y="6528816"/>
+            <a:ext cx="548640" cy="219456"/>
+          </a:xfrm>
+          <a:prstGeom prst="rect">
+            <a:avLst/>
+          </a:prstGeom>
+          <a:noFill/>
+          <a:ln/>
+        </p:spPr>
+        <p:txBody>
+          <a:bodyPr wrap="square" rtlCol="0" anchor="ctr"/>
+          <a:lstStyle/>
+          <a:p>
+            <a:pPr algn="r" indent="0" marL="0">
+              <a:buNone/>
+            </a:pPr>
+            <a:r>
+              <a:rPr lang="en-US" sz="900" dirty="0">
+                <a:solidFill>
+                  <a:srgbClr val="767676"/>
+                </a:solidFill>
+              </a:rPr>
+              <a:t>5 / 14</a:t>
             </a:r>
             <a:endParaRPr lang="en-US" sz="900" dirty="0"/>
           </a:p>
@@ -3691,7 +5101,7 @@
                 <a:ea typeface="Segoe UI" pitchFamily="34" charset="-122"/>
                 <a:cs typeface="Segoe UI" pitchFamily="34" charset="-120"/>
               </a:rPr>
-              <a:t>EVALUATION</a:t>
+              <a:t>AGENDA</a:t>
             </a:r>
             <a:endParaRPr lang="en-US" sz="1100" dirty="0"/>
           </a:p>
@@ -3730,7 +5140,7 @@
                 <a:ea typeface="Segoe UI" pitchFamily="34" charset="-122"/>
                 <a:cs typeface="Segoe UI" pitchFamily="34" charset="-120"/>
               </a:rPr>
-              <a:t>Deterministic Checks + LLM-as-Judge Rubrics</a:t>
+              <a:t>Nine Labs, One Real Deployment</a:t>
             </a:r>
             <a:endParaRPr lang="en-US" sz="2600" dirty="0"/>
           </a:p>
@@ -3793,8 +5203,7 @@
                 <a:ea typeface="Segoe UI" pitchFamily="34" charset="-122"/>
                 <a:cs typeface="Segoe UI" pitchFamily="34" charset="-120"/>
               </a:rPr>
-              <a:t>Golden dataset: 8 categories (true/false positive, ambiguous, missing data, conflicting tools, prompt injection, unauthorized actions, unsupported conclusions)
-</a:t>
+              <a:t>Lab 00 — Prerequisites and environment setup</a:t>
             </a:r>
             <a:endParaRPr lang="en-US" sz="1500" dirty="0"/>
           </a:p>
@@ -3815,8 +5224,7 @@
                 <a:ea typeface="Segoe UI" pitchFamily="34" charset="-122"/>
                 <a:cs typeface="Segoe UI" pitchFamily="34" charset="-120"/>
               </a:rPr>
-              <a:t>Deterministic: schema validity, required citations, allowed tool calls, policy constraints — fast, reproducible
-</a:t>
+              <a:t>Lab 01 — Architecture deep dive (LangGraph supervisor/specialists)</a:t>
             </a:r>
             <a:endParaRPr lang="en-US" sz="1500" dirty="0"/>
           </a:p>
@@ -3837,8 +5245,7 @@
                 <a:ea typeface="Segoe UI" pitchFamily="34" charset="-122"/>
                 <a:cs typeface="Segoe UI" pitchFamily="34" charset="-120"/>
               </a:rPr>
-              <a:t>Built-in Foundry evaluators first: coherence, groundedness, task adherence, tool-call accuracy
-</a:t>
+              <a:t>Lab 02 — Deploy the MCP tool servers</a:t>
             </a:r>
             <a:endParaRPr lang="en-US" sz="1500" dirty="0"/>
           </a:p>
@@ -3859,8 +5266,7 @@
                 <a:ea typeface="Segoe UI" pitchFamily="34" charset="-122"/>
                 <a:cs typeface="Segoe UI" pitchFamily="34" charset="-120"/>
               </a:rPr>
-              <a:t>Custom rubrics only where the catalog doesn’t reach: triage correctness, citation quality, conflict handling
-</a:t>
+              <a:t>Lab 03 — Provision and deploy the hosted agent (azd)</a:t>
             </a:r>
             <a:endParaRPr lang="en-US" sz="1500" dirty="0"/>
           </a:p>
@@ -3881,16 +5287,99 @@
                 <a:ea typeface="Segoe UI" pitchFamily="34" charset="-122"/>
                 <a:cs typeface="Segoe UI" pitchFamily="34" charset="-120"/>
               </a:rPr>
-              <a:t>Policy rules (e.g. never claim an unauthorized remediation action) stay deterministic, not LLM-judged
-</a:t>
+              <a:t>Lab 04 — Invoke the agent and read traces</a:t>
             </a:r>
             <a:endParaRPr lang="en-US" sz="1500" dirty="0"/>
           </a:p>
-        </p:txBody>
-      </p:sp>
-      <p:sp>
-        <p:nvSpPr>
-          <p:cNvPr id="7" name="Shape 5"/>
+          <a:p>
+            <a:pPr marL="254000" indent="-254000">
+              <a:lnSpc>
+                <a:spcPct val="125000"/>
+              </a:lnSpc>
+              <a:buSzPct val="100000"/>
+              <a:buChar char="●"/>
+            </a:pPr>
+            <a:r>
+              <a:rPr lang="en-US" sz="1500" dirty="0">
+                <a:solidFill>
+                  <a:srgbClr val="1A1A1A"/>
+                </a:solidFill>
+                <a:latin typeface="Segoe UI" pitchFamily="34" charset="0"/>
+                <a:ea typeface="Segoe UI" pitchFamily="34" charset="-122"/>
+                <a:cs typeface="Segoe UI" pitchFamily="34" charset="-120"/>
+              </a:rPr>
+              <a:t>Lab 05 — Evaluations: deterministic + LLM-as-judge</a:t>
+            </a:r>
+            <a:endParaRPr lang="en-US" sz="1500" dirty="0"/>
+          </a:p>
+          <a:p>
+            <a:pPr marL="254000" indent="-254000">
+              <a:lnSpc>
+                <a:spcPct val="125000"/>
+              </a:lnSpc>
+              <a:buSzPct val="100000"/>
+              <a:buChar char="●"/>
+            </a:pPr>
+            <a:r>
+              <a:rPr lang="en-US" sz="1500" dirty="0">
+                <a:solidFill>
+                  <a:srgbClr val="1A1A1A"/>
+                </a:solidFill>
+                <a:latin typeface="Segoe UI" pitchFamily="34" charset="0"/>
+                <a:ea typeface="Segoe UI" pitchFamily="34" charset="-122"/>
+                <a:cs typeface="Segoe UI" pitchFamily="34" charset="-120"/>
+              </a:rPr>
+              <a:t>Lab 06 — CI/CD: evaluation-gated release pipeline</a:t>
+            </a:r>
+            <a:endParaRPr lang="en-US" sz="1500" dirty="0"/>
+          </a:p>
+          <a:p>
+            <a:pPr marL="254000" indent="-254000">
+              <a:lnSpc>
+                <a:spcPct val="125000"/>
+              </a:lnSpc>
+              <a:buSzPct val="100000"/>
+              <a:buChar char="●"/>
+            </a:pPr>
+            <a:r>
+              <a:rPr lang="en-US" sz="1500" dirty="0">
+                <a:solidFill>
+                  <a:srgbClr val="1A1A1A"/>
+                </a:solidFill>
+                <a:latin typeface="Segoe UI" pitchFamily="34" charset="0"/>
+                <a:ea typeface="Segoe UI" pitchFamily="34" charset="-122"/>
+                <a:cs typeface="Segoe UI" pitchFamily="34" charset="-120"/>
+              </a:rPr>
+              <a:t>Lab 07 — Real-world troubleshooting: RBAC 401</a:t>
+            </a:r>
+            <a:endParaRPr lang="en-US" sz="1500" dirty="0"/>
+          </a:p>
+          <a:p>
+            <a:pPr marL="254000" indent="-254000">
+              <a:lnSpc>
+                <a:spcPct val="125000"/>
+              </a:lnSpc>
+              <a:buSzPct val="100000"/>
+              <a:buChar char="●"/>
+            </a:pPr>
+            <a:r>
+              <a:rPr lang="en-US" sz="1500" dirty="0">
+                <a:solidFill>
+                  <a:srgbClr val="1A1A1A"/>
+                </a:solidFill>
+                <a:latin typeface="Segoe UI" pitchFamily="34" charset="0"/>
+                <a:ea typeface="Segoe UI" pitchFamily="34" charset="-122"/>
+                <a:cs typeface="Segoe UI" pitchFamily="34" charset="-120"/>
+              </a:rPr>
+              <a:t>Lab 08 — Production readiness and decision gates</a:t>
+            </a:r>
+            <a:endParaRPr lang="en-US" sz="1500" dirty="0"/>
+          </a:p>
+        </p:txBody>
+      </p:sp>
+      <p:sp>
+        <p:nvSpPr>
+          <p:cNvPr id="8" name="Shape 5"/>
           <p:cNvSpPr/>
           <p:nvPr/>
         </p:nvSpPr>
@@ -3910,7 +5399,7 @@
       </p:sp>
       <p:sp>
         <p:nvSpPr>
-          <p:cNvPr id="8" name="Text 6"/>
+          <p:cNvPr id="9" name="Text 6"/>
           <p:cNvSpPr/>
           <p:nvPr/>
         </p:nvSpPr>
@@ -3941,7 +5430,43 @@
                 <a:ea typeface="Segoe UI" pitchFamily="34" charset="-122"/>
                 <a:cs typeface="Segoe UI" pitchFamily="34" charset="-120"/>
               </a:rPr>
-              <a:t>Foundry Hosted Agents Workshop — 5 / 9</a:t>
+              <a:t>Foundry Hosted Agents Workshop</a:t>
+            </a:r>
+            <a:endParaRPr lang="en-US" sz="900" dirty="0"/>
+          </a:p>
+        </p:txBody>
+      </p:sp>
+      <p:sp>
+        <p:nvSpPr>
+          <p:cNvPr id="10" name="Text 7"/>
+          <p:cNvSpPr/>
+          <p:nvPr/>
+        </p:nvSpPr>
+        <p:spPr>
+          <a:xfrm>
+            <a:off x="11338560" y="6528816"/>
+            <a:ext cx="548640" cy="219456"/>
+          </a:xfrm>
+          <a:prstGeom prst="rect">
+            <a:avLst/>
+          </a:prstGeom>
+          <a:noFill/>
+          <a:ln/>
+        </p:spPr>
+        <p:txBody>
+          <a:bodyPr wrap="square" rtlCol="0" anchor="ctr"/>
+          <a:lstStyle/>
+          <a:p>
+            <a:pPr algn="r" indent="0" marL="0">
+              <a:buNone/>
+            </a:pPr>
+            <a:r>
+              <a:rPr lang="en-US" sz="900" dirty="0">
+                <a:solidFill>
+                  <a:srgbClr val="767676"/>
+                </a:solidFill>
+              </a:rPr>
+              <a:t>6 / 14</a:t>
             </a:r>
             <a:endParaRPr lang="en-US" sz="900" dirty="0"/>
           </a:p>
@@ -4032,7 +5557,7 @@
                 <a:ea typeface="Segoe UI" pitchFamily="34" charset="-122"/>
                 <a:cs typeface="Segoe UI" pitchFamily="34" charset="-120"/>
               </a:rPr>
-              <a:t>CI/CD</a:t>
+              <a:t>ARCHITECTURE</a:t>
             </a:r>
             <a:endParaRPr lang="en-US" sz="1100" dirty="0"/>
           </a:p>
@@ -4071,7 +5596,7 @@
                 <a:ea typeface="Segoe UI" pitchFamily="34" charset="-122"/>
                 <a:cs typeface="Segoe UI" pitchFamily="34" charset="-120"/>
               </a:rPr>
-              <a:t>Evaluation-Gated Release Pipeline</a:t>
+              <a:t>Supervisor + Specialist Graph</a:t>
             </a:r>
             <a:endParaRPr lang="en-US" sz="2600" dirty="0"/>
           </a:p>
@@ -4134,8 +5659,7 @@
                 <a:ea typeface="Segoe UI" pitchFamily="34" charset="-122"/>
                 <a:cs typeface="Segoe UI" pitchFamily="34" charset="-120"/>
               </a:rPr>
-              <a:t>Two pipelines: hosted-agent-cd.yml (direct to shared PoC env) and deploy-and-evaluate.yml (full staging → production flow)
-</a:t>
+              <a:t>A LangGraph supervisor routes to three specialist nodes: Evidence Investigator, Risk Analyst, Report Composer</a:t>
             </a:r>
             <a:endParaRPr lang="en-US" sz="1500" dirty="0"/>
           </a:p>
@@ -4156,8 +5680,7 @@
                 <a:ea typeface="Segoe UI" pitchFamily="34" charset="-122"/>
                 <a:cs typeface="Segoe UI" pitchFamily="34" charset="-120"/>
               </a:rPr>
-              <a:t>Full flow: lint/tests → Bicep validate → deploy immutable candidate to staging → smoke/contract/streaming tests
-</a:t>
+              <a:t>Each specialist has its own prompt, tool permissions, and evaluation criteria</a:t>
             </a:r>
             <a:endParaRPr lang="en-US" sz="1500" dirty="0"/>
           </a:p>
@@ -4178,8 +5701,7 @@
                 <a:ea typeface="Segoe UI" pitchFamily="34" charset="-122"/>
                 <a:cs typeface="Segoe UI" pitchFamily="34" charset="-120"/>
               </a:rPr>
-              <a:t>Offline evaluation quality gate runs against the staging candidate before any manual production approval
-</a:t>
+              <a:t>Tool isolation by role: Evidence Investigator → defender-conn only, Risk Analyst → anomaly-conn only</a:t>
             </a:r>
             <a:endParaRPr lang="en-US" sz="1500" dirty="0"/>
           </a:p>
@@ -4200,8 +5722,7 @@
                 <a:ea typeface="Segoe UI" pitchFamily="34" charset="-122"/>
                 <a:cs typeface="Segoe UI" pitchFamily="34" charset="-120"/>
               </a:rPr>
-              <a:t>Secretless OIDC federation — no stored client secrets in either pipeline
-</a:t>
+              <a:t>The Report Composer has zero tool access — it only synthesizes</a:t>
             </a:r>
             <a:endParaRPr lang="en-US" sz="1500" dirty="0"/>
           </a:p>
@@ -4222,8 +5743,7 @@
                 <a:ea typeface="Segoe UI" pitchFamily="34" charset="-122"/>
                 <a:cs typeface="Segoe UI" pitchFamily="34" charset="-120"/>
               </a:rPr>
-              <a:t>Lesson learned: auto-firing both pipelines on every push raced against the same shared resource — now manual-dispatch only
-</a:t>
+              <a:t>Supported versioned MCP transport, fresh Entra tokens and RemoteTool connections now work; runtime receipts prove specialist tool execution</a:t>
             </a:r>
             <a:endParaRPr lang="en-US" sz="1500" dirty="0"/>
           </a:p>
@@ -4231,7 +5751,7 @@
       </p:sp>
       <p:sp>
         <p:nvSpPr>
-          <p:cNvPr id="7" name="Shape 5"/>
+          <p:cNvPr id="8" name="Shape 5"/>
           <p:cNvSpPr/>
           <p:nvPr/>
         </p:nvSpPr>
@@ -4251,7 +5771,7 @@
       </p:sp>
       <p:sp>
         <p:nvSpPr>
-          <p:cNvPr id="8" name="Text 6"/>
+          <p:cNvPr id="9" name="Text 6"/>
           <p:cNvSpPr/>
           <p:nvPr/>
         </p:nvSpPr>
@@ -4282,7 +5802,43 @@
                 <a:ea typeface="Segoe UI" pitchFamily="34" charset="-122"/>
                 <a:cs typeface="Segoe UI" pitchFamily="34" charset="-120"/>
               </a:rPr>
-              <a:t>Foundry Hosted Agents Workshop — 6 / 9</a:t>
+              <a:t>Foundry Hosted Agents Workshop</a:t>
+            </a:r>
+            <a:endParaRPr lang="en-US" sz="900" dirty="0"/>
+          </a:p>
+        </p:txBody>
+      </p:sp>
+      <p:sp>
+        <p:nvSpPr>
+          <p:cNvPr id="10" name="Text 7"/>
+          <p:cNvSpPr/>
+          <p:nvPr/>
+        </p:nvSpPr>
+        <p:spPr>
+          <a:xfrm>
+            <a:off x="11338560" y="6528816"/>
+            <a:ext cx="548640" cy="219456"/>
+          </a:xfrm>
+          <a:prstGeom prst="rect">
+            <a:avLst/>
+          </a:prstGeom>
+          <a:noFill/>
+          <a:ln/>
+        </p:spPr>
+        <p:txBody>
+          <a:bodyPr wrap="square" rtlCol="0" anchor="ctr"/>
+          <a:lstStyle/>
+          <a:p>
+            <a:pPr algn="r" indent="0" marL="0">
+              <a:buNone/>
+            </a:pPr>
+            <a:r>
+              <a:rPr lang="en-US" sz="900" dirty="0">
+                <a:solidFill>
+                  <a:srgbClr val="767676"/>
+                </a:solidFill>
+              </a:rPr>
+              <a:t>7 / 14</a:t>
             </a:r>
             <a:endParaRPr lang="en-US" sz="900" dirty="0"/>
           </a:p>
@@ -4335,7 +5891,7 @@
             <a:avLst/>
           </a:prstGeom>
           <a:solidFill>
-            <a:srgbClr val="D13438"/>
+            <a:srgbClr val="0078D4"/>
           </a:solidFill>
           <a:ln/>
         </p:spPr>
@@ -4367,13 +5923,13 @@
             <a:r>
               <a:rPr lang="en-US" sz="1100" b="1" spc="100" kern="0" dirty="0">
                 <a:solidFill>
-                  <a:srgbClr val="D13438"/>
-                </a:solidFill>
-                <a:latin typeface="Segoe UI" pitchFamily="34" charset="0"/>
-                <a:ea typeface="Segoe UI" pitchFamily="34" charset="-122"/>
-                <a:cs typeface="Segoe UI" pitchFamily="34" charset="-120"/>
-              </a:rPr>
-              <a:t>REAL-WORLD TROUBLESHOOTING</a:t>
+                  <a:srgbClr val="0078D4"/>
+                </a:solidFill>
+                <a:latin typeface="Segoe UI" pitchFamily="34" charset="0"/>
+                <a:ea typeface="Segoe UI" pitchFamily="34" charset="-122"/>
+                <a:cs typeface="Segoe UI" pitchFamily="34" charset="-120"/>
+              </a:rPr>
+              <a:t>TOOLS</a:t>
             </a:r>
             <a:endParaRPr lang="en-US" sz="1100" dirty="0"/>
           </a:p>
@@ -4412,7 +5968,7 @@
                 <a:ea typeface="Segoe UI" pitchFamily="34" charset="-122"/>
                 <a:cs typeface="Segoe UI" pitchFamily="34" charset="-120"/>
               </a:rPr>
-              <a:t>Diagnosing a Live RBAC 401 (Still Open)</a:t>
+              <a:t>Four Layers: Implement, Host, Register, Consume</a:t>
             </a:r>
             <a:endParaRPr lang="en-US" sz="2600" dirty="0"/>
           </a:p>
@@ -4475,8 +6031,7 @@
                 <a:ea typeface="Segoe UI" pitchFamily="34" charset="-122"/>
                 <a:cs typeface="Segoe UI" pitchFamily="34" charset="-120"/>
               </a:rPr>
-              <a:t>Symptom: 401 PermissionDenied on Azure OpenAI chat completions from the hosted agent’s own Instance Identity
-</a:t>
+              <a:t>Layer 1 — Implementation: custom MCP server code (Defender tools, anomaly tools)</a:t>
             </a:r>
             <a:endParaRPr lang="en-US" sz="1500" dirty="0"/>
           </a:p>
@@ -4497,8 +6052,7 @@
                 <a:ea typeface="Segoe UI" pitchFamily="34" charset="-122"/>
                 <a:cs typeface="Segoe UI" pitchFamily="34" charset="-120"/>
               </a:rPr>
-              <a:t>Don’t trust the error message’s own diagnosis — verify the role assignment directly with az role assignment list
-</a:t>
+              <a:t>Layer 2 — Hosting: independent Azure Container Apps, own auth/networking/health checks</a:t>
             </a:r>
             <a:endParaRPr lang="en-US" sz="1500" dirty="0"/>
           </a:p>
@@ -4519,8 +6073,7 @@
                 <a:ea typeface="Segoe UI" pitchFamily="34" charset="-122"/>
                 <a:cs typeface="Segoe UI" pitchFamily="34" charset="-120"/>
               </a:rPr>
-              <a:t>Read the built-in role’s dataActions from az role definition list — proves the role does cover the exact data action
-</a:t>
+              <a:t>Layer 3 — Registration: Foundry connections define endpoint + credential policy per MCP server</a:t>
             </a:r>
             <a:endParaRPr lang="en-US" sz="1500" dirty="0"/>
           </a:p>
@@ -4541,8 +6094,7 @@
                 <a:ea typeface="Segoe UI" pitchFamily="34" charset="-122"/>
                 <a:cs typeface="Segoe UI" pitchFamily="34" charset="-120"/>
               </a:rPr>
-              <a:t>Check disableLocalAuth, networkAcls, and Azure Policy state to rule out silent overrides
-</a:t>
+              <a:t>Layer 4 — Consumption: Foundry Toolbox aggregates registered tools for reuse across agents</a:t>
             </a:r>
             <a:endParaRPr lang="en-US" sz="1500" dirty="0"/>
           </a:p>
@@ -4563,38 +6115,15 @@
                 <a:ea typeface="Segoe UI" pitchFamily="34" charset="-122"/>
                 <a:cs typeface="Segoe UI" pitchFamily="34" charset="-120"/>
               </a:rPr>
-              <a:t>Enumerate tenant Conditional Access policies for service-principal-targeted conditions
-</a:t>
+              <a:t>The Toolbox is the registration/aggregation layer — not the hosting runtime for your MCP code</a:t>
             </a:r>
             <a:endParaRPr lang="en-US" sz="1500" dirty="0"/>
           </a:p>
-          <a:p>
-            <a:pPr marL="254000" indent="-254000">
-              <a:lnSpc>
-                <a:spcPct val="125000"/>
-              </a:lnSpc>
-              <a:buSzPct val="100000"/>
-              <a:buChar char="●"/>
-            </a:pPr>
-            <a:r>
-              <a:rPr lang="en-US" sz="1500" dirty="0">
-                <a:solidFill>
-                  <a:srgbClr val="1A1A1A"/>
-                </a:solidFill>
-                <a:latin typeface="Segoe UI" pitchFamily="34" charset="0"/>
-                <a:ea typeface="Segoe UI" pitchFamily="34" charset="-122"/>
-                <a:cs typeface="Segoe UI" pitchFamily="34" charset="-120"/>
-              </a:rPr>
-              <a:t>A working manual-agent path next to a failing hosted-agent path points at the platform, not customer-side RBAC
-</a:t>
-            </a:r>
-            <a:endParaRPr lang="en-US" sz="1500" dirty="0"/>
-          </a:p>
-        </p:txBody>
-      </p:sp>
-      <p:sp>
-        <p:nvSpPr>
-          <p:cNvPr id="7" name="Shape 5"/>
+        </p:txBody>
+      </p:sp>
+      <p:sp>
+        <p:nvSpPr>
+          <p:cNvPr id="8" name="Shape 5"/>
           <p:cNvSpPr/>
           <p:nvPr/>
         </p:nvSpPr>
@@ -4614,7 +6143,7 @@
       </p:sp>
       <p:sp>
         <p:nvSpPr>
-          <p:cNvPr id="8" name="Text 6"/>
+          <p:cNvPr id="9" name="Text 6"/>
           <p:cNvSpPr/>
           <p:nvPr/>
         </p:nvSpPr>
@@ -4645,7 +6174,43 @@
                 <a:ea typeface="Segoe UI" pitchFamily="34" charset="-122"/>
                 <a:cs typeface="Segoe UI" pitchFamily="34" charset="-120"/>
               </a:rPr>
-              <a:t>Foundry Hosted Agents Workshop — 7 / 9</a:t>
+              <a:t>Foundry Hosted Agents Workshop</a:t>
+            </a:r>
+            <a:endParaRPr lang="en-US" sz="900" dirty="0"/>
+          </a:p>
+        </p:txBody>
+      </p:sp>
+      <p:sp>
+        <p:nvSpPr>
+          <p:cNvPr id="10" name="Text 7"/>
+          <p:cNvSpPr/>
+          <p:nvPr/>
+        </p:nvSpPr>
+        <p:spPr>
+          <a:xfrm>
+            <a:off x="11338560" y="6528816"/>
+            <a:ext cx="548640" cy="219456"/>
+          </a:xfrm>
+          <a:prstGeom prst="rect">
+            <a:avLst/>
+          </a:prstGeom>
+          <a:noFill/>
+          <a:ln/>
+        </p:spPr>
+        <p:txBody>
+          <a:bodyPr wrap="square" rtlCol="0" anchor="ctr"/>
+          <a:lstStyle/>
+          <a:p>
+            <a:pPr algn="r" indent="0" marL="0">
+              <a:buNone/>
+            </a:pPr>
+            <a:r>
+              <a:rPr lang="en-US" sz="900" dirty="0">
+                <a:solidFill>
+                  <a:srgbClr val="767676"/>
+                </a:solidFill>
+              </a:rPr>
+              <a:t>8 / 14</a:t>
             </a:r>
             <a:endParaRPr lang="en-US" sz="900" dirty="0"/>
           </a:p>
@@ -4736,7 +6301,7 @@
                 <a:ea typeface="Segoe UI" pitchFamily="34" charset="-122"/>
                 <a:cs typeface="Segoe UI" pitchFamily="34" charset="-120"/>
               </a:rPr>
-              <a:t>PRODUCTION READINESS</a:t>
+              <a:t>DEPLOYMENT</a:t>
             </a:r>
             <a:endParaRPr lang="en-US" sz="1100" dirty="0"/>
           </a:p>
@@ -4775,7 +6340,7 @@
                 <a:ea typeface="Segoe UI" pitchFamily="34" charset="-122"/>
                 <a:cs typeface="Segoe UI" pitchFamily="34" charset="-120"/>
               </a:rPr>
-              <a:t>Honest Gates, Not False Confidence</a:t>
+              <a:t>One Manifest: azure.yaml + azd</a:t>
             </a:r>
             <a:endParaRPr lang="en-US" sz="2600" dirty="0"/>
           </a:p>
@@ -4838,8 +6403,7 @@
                 <a:ea typeface="Segoe UI" pitchFamily="34" charset="-122"/>
                 <a:cs typeface="Segoe UI" pitchFamily="34" charset="-120"/>
               </a:rPr>
-              <a:t>Four experiment tracks: load testing, Cosmos DB checkpointer, Agent 365 onboarding, continuous evaluation
-</a:t>
+              <a:t>azure.yaml wires the Foundry project, model deployment, Toolbox connections, and the hosted agent service</a:t>
             </a:r>
             <a:endParaRPr lang="en-US" sz="1500" dirty="0"/>
           </a:p>
@@ -4860,8 +6424,7 @@
                 <a:ea typeface="Segoe UI" pitchFamily="34" charset="-122"/>
                 <a:cs typeface="Segoe UI" pitchFamily="34" charset="-120"/>
               </a:rPr>
-              <a:t>Quality gate: Pass — golden dataset + 12/12 deterministic checks + rubric mapping
-</a:t>
+              <a:t>kind: hosted — Foundry operates the session compute; you own only the graph code</a:t>
             </a:r>
             <a:endParaRPr lang="en-US" sz="1500" dirty="0"/>
           </a:p>
@@ -4882,8 +6445,7 @@
                 <a:ea typeface="Segoe UI" pitchFamily="34" charset="-122"/>
                 <a:cs typeface="Segoe UI" pitchFamily="34" charset="-120"/>
               </a:rPr>
-              <a:t>Scale, Security, Operations gates: Conditional — partial evidence, named follow-ups
-</a:t>
+              <a:t>dependencyResolution: remote_build — Foundry builds your Python dependencies server-side</a:t>
             </a:r>
             <a:endParaRPr lang="en-US" sz="1500" dirty="0"/>
           </a:p>
@@ -4904,8 +6466,7 @@
                 <a:ea typeface="Segoe UI" pitchFamily="34" charset="-122"/>
                 <a:cs typeface="Segoe UI" pitchFamily="34" charset="-120"/>
               </a:rPr>
-              <a:t>Platform status, Data, Cost gates: Not testable in this PoC — require commercial/legal/platform confirmation
-</a:t>
+              <a:t>protocol: responses — OpenAI-compatible Responses protocol with streaming support</a:t>
             </a:r>
             <a:endParaRPr lang="en-US" sz="1500" dirty="0"/>
           </a:p>
@@ -4926,8 +6487,7 @@
                 <a:ea typeface="Segoe UI" pitchFamily="34" charset="-122"/>
                 <a:cs typeface="Segoe UI" pitchFamily="34" charset="-120"/>
               </a:rPr>
-              <a:t>Overall recommendation: conditional go for continued PoC-to-pilot investment, not an unconditional yes/no
-</a:t>
+              <a:t>azd provision creates infrastructure; azd deploy publishes a new agent version — separate lifecycles</a:t>
             </a:r>
             <a:endParaRPr lang="en-US" sz="1500" dirty="0"/>
           </a:p>
@@ -4935,7 +6495,7 @@
       </p:sp>
       <p:sp>
         <p:nvSpPr>
-          <p:cNvPr id="7" name="Shape 5"/>
+          <p:cNvPr id="8" name="Shape 5"/>
           <p:cNvSpPr/>
           <p:nvPr/>
         </p:nvSpPr>
@@ -4955,7 +6515,7 @@
       </p:sp>
       <p:sp>
         <p:nvSpPr>
-          <p:cNvPr id="8" name="Text 6"/>
+          <p:cNvPr id="9" name="Text 6"/>
           <p:cNvSpPr/>
           <p:nvPr/>
         </p:nvSpPr>
@@ -4986,7 +6546,43 @@
                 <a:ea typeface="Segoe UI" pitchFamily="34" charset="-122"/>
                 <a:cs typeface="Segoe UI" pitchFamily="34" charset="-120"/>
               </a:rPr>
-              <a:t>Foundry Hosted Agents Workshop — 8 / 9</a:t>
+              <a:t>Foundry Hosted Agents Workshop</a:t>
+            </a:r>
+            <a:endParaRPr lang="en-US" sz="900" dirty="0"/>
+          </a:p>
+        </p:txBody>
+      </p:sp>
+      <p:sp>
+        <p:nvSpPr>
+          <p:cNvPr id="10" name="Text 7"/>
+          <p:cNvSpPr/>
+          <p:nvPr/>
+        </p:nvSpPr>
+        <p:spPr>
+          <a:xfrm>
+            <a:off x="11338560" y="6528816"/>
+            <a:ext cx="548640" cy="219456"/>
+          </a:xfrm>
+          <a:prstGeom prst="rect">
+            <a:avLst/>
+          </a:prstGeom>
+          <a:noFill/>
+          <a:ln/>
+        </p:spPr>
+        <p:txBody>
+          <a:bodyPr wrap="square" rtlCol="0" anchor="ctr"/>
+          <a:lstStyle/>
+          <a:p>
+            <a:pPr algn="r" indent="0" marL="0">
+              <a:buNone/>
+            </a:pPr>
+            <a:r>
+              <a:rPr lang="en-US" sz="900" dirty="0">
+                <a:solidFill>
+                  <a:srgbClr val="767676"/>
+                </a:solidFill>
+              </a:rPr>
+              <a:t>9 / 14</a:t>
             </a:r>
             <a:endParaRPr lang="en-US" sz="900" dirty="0"/>
           </a:p>

--- a/docs/assets/decks/foundry-hosted-agents-workshop-en.pptx
+++ b/docs/assets/decks/foundry-hosted-agents-workshop-en.pptx
@@ -19,9 +19,14 @@
     <p:sldId id="267" r:id="rId13"/>
     <p:sldId id="268" r:id="rId14"/>
     <p:sldId id="269" r:id="rId15"/>
+    <p:sldId id="270" r:id="rId16"/>
+    <p:sldId id="271" r:id="rId17"/>
+    <p:sldId id="272" r:id="rId18"/>
+    <p:sldId id="273" r:id="rId19"/>
+    <p:sldId id="274" r:id="rId20"/>
   </p:sldIdLst>
   <p:notesMasterIdLst>
-    <p:notesMasterId r:id="rId16"/>
+    <p:notesMasterId r:id="rId21"/>
   </p:notesMasterIdLst>
   <p:sldSz cx="12188952" cy="6858000"/>
   <p:notesSz cx="6858000" cy="12188952"/>
@@ -515,7 +520,7 @@
           <a:p>
             <a:r>
               <a:rPr lang="en-US" dirty="0"/>
-              <a:t>Verified release 34178081808, 2026-09-08 UTC. WI-11 resolved for this implementation. Synthetic fixtures; production readiness remains conditional.</a:t>
+              <a:t>Current snapshot: release 34427432731 and Continuous Validation 34427429700 succeeded, 2026-09-10 UTC. Full-history pilot; synthetic fixtures. Four explicitly historical proof slides retain run 34178081808.</a:t>
             </a:r>
             <a:endParaRPr lang="en-US" dirty="0"/>
           </a:p>
@@ -603,12 +608,9 @@
           <a:p>
             <a:r>
               <a:rPr lang="en-US" dirty="0"/>
-              <a:t>Golden dataset: 8 categories (true/false positive, ambiguous, missing data, conflicting tools, prompt injection, unauthorized actions, unsupported conclusions)
-Deterministic: schema validity, required citations, allowed tool calls, policy constraints — fast, reproducible
-Verified Foundry judges: coherence, groundedness, task adherence. Seven reports per metric, 21/21 passed at unchanged 100% thresholds
-Eight captures, zero deterministic policy failures; inject-001 is a verified safety refusal with no tool calls, not a model-judge result
-Policy rules (e.g. never claim an unauthorized remediation action) stay deterministic, not LLM-judged
-Sources: repository code and wiki Release-Evidence / Operations. Verified release 34178081808; historical experiments retain their original limits.</a:t>
+              <a:t>Version 34 active, toolbox 1. Exact-version smoke succeeded. At 02:12:02 UTC AppExceptions for the trailing ten minutes returned zero. Not a ten-minute soak or complete tracing proof. Quality suite ran on staging. Production rebuilds the same source with evaluated MCP digests. Manual recovery; no automatic rollback or canary.
+Source: https://github.com/devopsabcs-engineering/foundry-hosted-agents/actions/runs/34178081808
+Evidence: assets/release-evidence/source; SHA-256 manifest: assets/release-evidence/manifest.json. Images render downloaded artifacts, not native portal UI.</a:t>
             </a:r>
             <a:endParaRPr lang="en-US" dirty="0"/>
           </a:p>
@@ -696,12 +698,16 @@
           <a:p>
             <a:r>
               <a:rPr lang="en-US" dirty="0"/>
-              <a:t>Two manual pipelines: direct PoC deployment, or deploy-and-evaluate.yml with isolated staging and production accounts/projects
-Full flow: lint/tests → Bicep validate → deploy immutable candidate to staging → smoke/contract/streaming tests
-Offline evaluation quality gate runs against the staging candidate before any manual production approval
-Secretless OIDC federation — no stored client secrets in either pipeline
-Run 34178081808 passed end to end: staging 6, production 34, exact evaluated MCP digests, normal approvals. Manual recovery; no automatic rollback or canary
-Sources: repository code and wiki Release-Evidence / Operations. Verified release 34178081808; historical experiments retain their original limits.</a:t>
+              <a:t>Lab 00 — Prerequisites and environment setup
+Lab 01 — Architecture deep dive (LangGraph supervisor/specialists)
+Lab 02 — Deploy the MCP tool servers
+Lab 03 — Provision and deploy the hosted agent (azd)
+Lab 04 — Invoke the agent and read traces
+Lab 05 — Evaluations: deterministic + LLM-as-judge
+Lab 06 — CI/CD: evaluation-gated release pipeline
+Lab 07 — Real-world troubleshooting: RBAC 401
+Lab 08 — Production readiness and decision gates
+Sources: repository code, labs 04/06 and release 34427432731; Continuous Validation 34427429700. Historical experiments retain their original limits.</a:t>
             </a:r>
             <a:endParaRPr lang="en-US" dirty="0"/>
           </a:p>
@@ -789,13 +795,12 @@
           <a:p>
             <a:r>
               <a:rPr lang="en-US" dirty="0"/>
-              <a:t>Historical model 401 recovered on v32; the same runtime principal now passes the complete v34 production release
-Validate the actual runtime principal, role dataActions, scope, conditions, network policy and token audience
-Separate MCP failures were fixed with the supported versioned endpoint, RemoteTool connections and current protocol negotiation
-Original incident propagation and independent specialist lookups restored required evidence; strict evaluation thresholds were unchanged
-The old Azure cache explanation remains an unconfirmed hypothesis. A successful redeployment is recovery evidence, not a controlled server-side RCA
-Support request 2609040400007027 is a historical reference; no support-ticket closure is claimed
-Sources: repository code and wiki Release-Evidence / Operations. Verified release 34178081808; historical experiments retain their original limits.</a:t>
+              <a:t>A LangGraph supervisor routes to three specialist nodes: Evidence Investigator, Risk Analyst, Report Composer
+Each specialist has its own prompt, tool permissions, and evaluation criteria
+Tool isolation by role: Evidence Investigator → defender-conn only, Risk Analyst → anomaly-conn only
+The Report Composer has zero tool access — it only synthesizes
+Supported versioned MCP transport, fresh Entra tokens and RemoteTool connections now work; runtime receipts prove specialist tool execution
+Sources: repository code, labs 04/06 and release 34427432731; Continuous Validation 34427429700. Historical experiments retain their original limits.</a:t>
             </a:r>
             <a:endParaRPr lang="en-US" dirty="0"/>
           </a:p>
@@ -883,12 +888,12 @@
           <a:p>
             <a:r>
               <a:rPr lang="en-US" dirty="0"/>
-              <a:t>Four experiment tracks: load testing, Cosmos DB checkpointer, Agent 365 onboarding, continuous evaluation
-Quality gate passed: 8 captures, zero policy failures, 21/21 judge checks, verified safety refusal and tool receipts
-Scale, Security, Operations gates: Conditional — partial evidence, named follow-ups
-Platform status, Data, Cost gates: Not testable in this PoC — require commercial/legal/platform confirmation
-Overall recommendation: conditional go for continued PoC-to-pilot investment, not an unconditional yes/no
-Sources: repository code and wiki Release-Evidence / Operations. Verified release 34178081808; historical experiments retain their original limits.</a:t>
+              <a:t>Layer 1 — Implementation: custom MCP server code (Defender tools, anomaly tools)
+Layer 2 — Hosting: independent Azure Container Apps, own auth/networking/health checks
+Layer 3 — Registration: Foundry connections define endpoint + credential policy per MCP server
+Layer 4 — Consumption: Foundry Toolbox aggregates registered tools for reuse across agents
+The Toolbox is the registration/aggregation layer — not the hosting runtime for your MCP code
+Sources: repository code, labs 04/06 and release 34427432731; Continuous Validation 34427429700. Historical experiments retain their original limits.</a:t>
             </a:r>
             <a:endParaRPr lang="en-US" dirty="0"/>
           </a:p>
@@ -976,12 +981,12 @@
           <a:p>
             <a:r>
               <a:rPr lang="en-US" dirty="0"/>
-              <a:t>The deployment and evaluation ran for real; the MCP security telemetry is synthetic, not live customer data
-Repository: github.com/devopsabcs-engineering/foundry-hosted-agents
-Wiki: current architecture, verified release artifacts, operational runbook, and resolved WI-11 history
-Full bilingual step-by-step labs: this deck’s companion GitHub Pages site
-Production v34 smoke passed; zero trailing-window exceptions is not a soak test or proof of complete distributed tracing
-Sources: repository code and wiki Release-Evidence / Operations. Verified release 34178081808; historical experiments retain their original limits.</a:t>
+              <a:t>azure.yaml wires the Foundry project, model deployment, Toolbox connections, and the hosted agent service
+kind: hosted — Foundry operates the session compute; you own only the graph code
+dependencyResolution: remote_build — Foundry builds your Python dependencies server-side
+protocol: responses — OpenAI-compatible Responses protocol with streaming support
+azd provision manages infrastructure; azd deploy publishes or reuses an unchanged agent version. Separate lifecycles; verify remote route before and after
+Sources: repository code, labs 04/06 and release 34427432731; Continuous Validation 34427429700. Historical experiments retain their original limits.</a:t>
             </a:r>
             <a:endParaRPr lang="en-US" dirty="0"/>
           </a:p>
@@ -1005,6 +1010,472 @@
             <a:fld id="{F7021451-1387-4CA6-816F-3879F97B5CBC}" type="slidenum">
               <a:rPr lang="en-US"/>
               <a:t>14</a:t>
+            </a:fld>
+            <a:endParaRPr lang="en-US"/>
+          </a:p>
+        </p:txBody>
+      </p:sp>
+    </p:spTree>
+    <p:extLst>
+      <p:ext uri="{BB962C8B-B14F-4D97-AF65-F5344CB8AC3E}">
+        <p14:creationId xmlns:p14="http://schemas.microsoft.com/office/powerpoint/2010/main" val="1024086991"/>
+      </p:ext>
+    </p:extLst>
+  </p:cSld>
+  <p:clrMapOvr>
+    <a:masterClrMapping/>
+  </p:clrMapOvr>
+</p:notes>
+</file>
+
+<file path=ppt/notesSlides/notesSlide15.xml><?xml version="1.0" encoding="utf-8"?>
+<p:notes xmlns:a="http://schemas.openxmlformats.org/drawingml/2006/main" xmlns:r="http://schemas.openxmlformats.org/officeDocument/2006/relationships" xmlns:p="http://schemas.openxmlformats.org/presentationml/2006/main">
+  <p:cSld>
+    <p:spTree>
+      <p:nvGrpSpPr>
+        <p:cNvPr id="1" name=""/>
+        <p:cNvGrpSpPr/>
+        <p:nvPr/>
+      </p:nvGrpSpPr>
+      <p:grpSpPr>
+        <a:xfrm>
+          <a:off x="0" y="0"/>
+          <a:ext cx="0" cy="0"/>
+          <a:chOff x="0" y="0"/>
+          <a:chExt cx="0" cy="0"/>
+        </a:xfrm>
+      </p:grpSpPr>
+      <p:sp>
+        <p:nvSpPr>
+          <p:cNvPr id="2" name="Slide Image Placeholder 1"/>
+          <p:cNvSpPr>
+            <a:spLocks noGrp="1" noRot="1" noChangeAspect="1"/>
+          </p:cNvSpPr>
+          <p:nvPr>
+            <p:ph type="sldImg"/>
+          </p:nvPr>
+        </p:nvSpPr>
+        <p:spPr/>
+      </p:sp>
+      <p:sp>
+        <p:nvSpPr>
+          <p:cNvPr id="3" name="Notes Placeholder 2"/>
+          <p:cNvSpPr>
+            <a:spLocks noGrp="1"/>
+          </p:cNvSpPr>
+          <p:nvPr>
+            <p:ph type="body" idx="1"/>
+          </p:nvPr>
+        </p:nvSpPr>
+        <p:spPr/>
+        <p:txBody>
+          <a:bodyPr/>
+          <a:lstStyle/>
+          <a:p>
+            <a:r>
+              <a:rPr lang="en-US" dirty="0"/>
+              <a:t>Golden dataset: 8 categories (true/false positive, ambiguous, missing data, conflicting tools, prompt injection, unauthorized actions, unsupported conclusions)
+Deterministic: schema validity, required citations, allowed tool calls, policy constraints — fast, reproducible
+Verified Foundry judges: coherence, groundedness, task adherence. Seven reports per metric, 21/21 passed at unchanged 100% thresholds
+Eight captures, zero deterministic policy failures; inject-001 is a verified safety refusal with no tool calls, not a model-judge result
+Policy rules (e.g. never claim an unauthorized remediation action) stay deterministic, not LLM-judged
+Sources: repository code, labs 04/06 and release 34427432731; Continuous Validation 34427429700. Historical experiments retain their original limits.</a:t>
+            </a:r>
+            <a:endParaRPr lang="en-US" dirty="0"/>
+          </a:p>
+        </p:txBody>
+      </p:sp>
+      <p:sp>
+        <p:nvSpPr>
+          <p:cNvPr id="4" name="Slide Number Placeholder 3"/>
+          <p:cNvSpPr>
+            <a:spLocks noGrp="1"/>
+          </p:cNvSpPr>
+          <p:nvPr>
+            <p:ph type="sldNum" sz="quarter" idx="10"/>
+          </p:nvPr>
+        </p:nvSpPr>
+        <p:spPr/>
+        <p:txBody>
+          <a:bodyPr/>
+          <a:lstStyle/>
+          <a:p>
+            <a:fld id="{F7021451-1387-4CA6-816F-3879F97B5CBC}" type="slidenum">
+              <a:rPr lang="en-US"/>
+              <a:t>15</a:t>
+            </a:fld>
+            <a:endParaRPr lang="en-US"/>
+          </a:p>
+        </p:txBody>
+      </p:sp>
+    </p:spTree>
+    <p:extLst>
+      <p:ext uri="{BB962C8B-B14F-4D97-AF65-F5344CB8AC3E}">
+        <p14:creationId xmlns:p14="http://schemas.microsoft.com/office/powerpoint/2010/main" val="1024086991"/>
+      </p:ext>
+    </p:extLst>
+  </p:cSld>
+  <p:clrMapOvr>
+    <a:masterClrMapping/>
+  </p:clrMapOvr>
+</p:notes>
+</file>
+
+<file path=ppt/notesSlides/notesSlide16.xml><?xml version="1.0" encoding="utf-8"?>
+<p:notes xmlns:a="http://schemas.openxmlformats.org/drawingml/2006/main" xmlns:r="http://schemas.openxmlformats.org/officeDocument/2006/relationships" xmlns:p="http://schemas.openxmlformats.org/presentationml/2006/main">
+  <p:cSld>
+    <p:spTree>
+      <p:nvGrpSpPr>
+        <p:cNvPr id="1" name=""/>
+        <p:cNvGrpSpPr/>
+        <p:nvPr/>
+      </p:nvGrpSpPr>
+      <p:grpSpPr>
+        <a:xfrm>
+          <a:off x="0" y="0"/>
+          <a:ext cx="0" cy="0"/>
+          <a:chOff x="0" y="0"/>
+          <a:chExt cx="0" cy="0"/>
+        </a:xfrm>
+      </p:grpSpPr>
+      <p:sp>
+        <p:nvSpPr>
+          <p:cNvPr id="2" name="Slide Image Placeholder 1"/>
+          <p:cNvSpPr>
+            <a:spLocks noGrp="1" noRot="1" noChangeAspect="1"/>
+          </p:cNvSpPr>
+          <p:nvPr>
+            <p:ph type="sldImg"/>
+          </p:nvPr>
+        </p:nvSpPr>
+        <p:spPr/>
+      </p:sp>
+      <p:sp>
+        <p:nvSpPr>
+          <p:cNvPr id="3" name="Notes Placeholder 2"/>
+          <p:cNvSpPr>
+            <a:spLocks noGrp="1"/>
+          </p:cNvSpPr>
+          <p:nvPr>
+            <p:ph type="body" idx="1"/>
+          </p:nvPr>
+        </p:nvSpPr>
+        <p:spPr/>
+        <p:txBody>
+          <a:bodyPr/>
+          <a:lstStyle/>
+          <a:p>
+            <a:r>
+              <a:rPr lang="en-US" dirty="0"/>
+              <a:t>One protected release path: deploy-and-evaluate.yml; hosted-agent-cd.yml delegates to it. Separate staging/production accounts and MCP apps
+Full flow: lint/tests → Bicep validate → deploy immutable candidate to staging → smoke/contract/streaming tests
+Offline evaluation quality gate runs against the staging candidate before any manual production approval
+Secretless OIDC federation — no stored client secrets in either pipeline
+Run 34427432731 passed end to end; Continuous Validation 34427429700 passed unchanged five-stream load. Normal approvals and manual recovery; no automatic rollback or canary
+Sources: repository code, labs 04/06 and release 34427432731; Continuous Validation 34427429700. Historical experiments retain their original limits.</a:t>
+            </a:r>
+            <a:endParaRPr lang="en-US" dirty="0"/>
+          </a:p>
+        </p:txBody>
+      </p:sp>
+      <p:sp>
+        <p:nvSpPr>
+          <p:cNvPr id="4" name="Slide Number Placeholder 3"/>
+          <p:cNvSpPr>
+            <a:spLocks noGrp="1"/>
+          </p:cNvSpPr>
+          <p:nvPr>
+            <p:ph type="sldNum" sz="quarter" idx="10"/>
+          </p:nvPr>
+        </p:nvSpPr>
+        <p:spPr/>
+        <p:txBody>
+          <a:bodyPr/>
+          <a:lstStyle/>
+          <a:p>
+            <a:fld id="{F7021451-1387-4CA6-816F-3879F97B5CBC}" type="slidenum">
+              <a:rPr lang="en-US"/>
+              <a:t>16</a:t>
+            </a:fld>
+            <a:endParaRPr lang="en-US"/>
+          </a:p>
+        </p:txBody>
+      </p:sp>
+    </p:spTree>
+    <p:extLst>
+      <p:ext uri="{BB962C8B-B14F-4D97-AF65-F5344CB8AC3E}">
+        <p14:creationId xmlns:p14="http://schemas.microsoft.com/office/powerpoint/2010/main" val="1024086991"/>
+      </p:ext>
+    </p:extLst>
+  </p:cSld>
+  <p:clrMapOvr>
+    <a:masterClrMapping/>
+  </p:clrMapOvr>
+</p:notes>
+</file>
+
+<file path=ppt/notesSlides/notesSlide17.xml><?xml version="1.0" encoding="utf-8"?>
+<p:notes xmlns:a="http://schemas.openxmlformats.org/drawingml/2006/main" xmlns:r="http://schemas.openxmlformats.org/officeDocument/2006/relationships" xmlns:p="http://schemas.openxmlformats.org/presentationml/2006/main">
+  <p:cSld>
+    <p:spTree>
+      <p:nvGrpSpPr>
+        <p:cNvPr id="1" name=""/>
+        <p:cNvGrpSpPr/>
+        <p:nvPr/>
+      </p:nvGrpSpPr>
+      <p:grpSpPr>
+        <a:xfrm>
+          <a:off x="0" y="0"/>
+          <a:ext cx="0" cy="0"/>
+          <a:chOff x="0" y="0"/>
+          <a:chExt cx="0" cy="0"/>
+        </a:xfrm>
+      </p:grpSpPr>
+      <p:sp>
+        <p:nvSpPr>
+          <p:cNvPr id="2" name="Slide Image Placeholder 1"/>
+          <p:cNvSpPr>
+            <a:spLocks noGrp="1" noRot="1" noChangeAspect="1"/>
+          </p:cNvSpPr>
+          <p:nvPr>
+            <p:ph type="sldImg"/>
+          </p:nvPr>
+        </p:nvSpPr>
+        <p:spPr/>
+      </p:sp>
+      <p:sp>
+        <p:nvSpPr>
+          <p:cNvPr id="3" name="Notes Placeholder 2"/>
+          <p:cNvSpPr>
+            <a:spLocks noGrp="1"/>
+          </p:cNvSpPr>
+          <p:nvPr>
+            <p:ph type="body" idx="1"/>
+          </p:nvPr>
+        </p:nvSpPr>
+        <p:spPr/>
+        <p:txBody>
+          <a:bodyPr/>
+          <a:lstStyle/>
+          <a:p>
+            <a:r>
+              <a:rPr lang="en-US" dirty="0"/>
+              <a:t>Historical model 401 recovered on v32; subsequent protected releases passed. Recovery evidence does not prove the original Azure-internal root cause
+Validate the actual runtime principal, role dataActions, scope, conditions, network policy and token audience
+Separate MCP failures were fixed with the supported versioned endpoint, RemoteTool connections and current protocol negotiation
+Original incident propagation and independent specialist lookups restored required evidence; strict evaluation thresholds were unchanged
+The old Azure cache explanation remains an unconfirmed hypothesis. A successful redeployment is recovery evidence, not a controlled server-side RCA
+Support request 2609040400007027 is a historical reference; no support-ticket closure is claimed
+Sources: repository code, labs 04/06 and release 34427432731; Continuous Validation 34427429700. Historical experiments retain their original limits.</a:t>
+            </a:r>
+            <a:endParaRPr lang="en-US" dirty="0"/>
+          </a:p>
+        </p:txBody>
+      </p:sp>
+      <p:sp>
+        <p:nvSpPr>
+          <p:cNvPr id="4" name="Slide Number Placeholder 3"/>
+          <p:cNvSpPr>
+            <a:spLocks noGrp="1"/>
+          </p:cNvSpPr>
+          <p:nvPr>
+            <p:ph type="sldNum" sz="quarter" idx="10"/>
+          </p:nvPr>
+        </p:nvSpPr>
+        <p:spPr/>
+        <p:txBody>
+          <a:bodyPr/>
+          <a:lstStyle/>
+          <a:p>
+            <a:fld id="{F7021451-1387-4CA6-816F-3879F97B5CBC}" type="slidenum">
+              <a:rPr lang="en-US"/>
+              <a:t>17</a:t>
+            </a:fld>
+            <a:endParaRPr lang="en-US"/>
+          </a:p>
+        </p:txBody>
+      </p:sp>
+    </p:spTree>
+    <p:extLst>
+      <p:ext uri="{BB962C8B-B14F-4D97-AF65-F5344CB8AC3E}">
+        <p14:creationId xmlns:p14="http://schemas.microsoft.com/office/powerpoint/2010/main" val="1024086991"/>
+      </p:ext>
+    </p:extLst>
+  </p:cSld>
+  <p:clrMapOvr>
+    <a:masterClrMapping/>
+  </p:clrMapOvr>
+</p:notes>
+</file>
+
+<file path=ppt/notesSlides/notesSlide18.xml><?xml version="1.0" encoding="utf-8"?>
+<p:notes xmlns:a="http://schemas.openxmlformats.org/drawingml/2006/main" xmlns:r="http://schemas.openxmlformats.org/officeDocument/2006/relationships" xmlns:p="http://schemas.openxmlformats.org/presentationml/2006/main">
+  <p:cSld>
+    <p:spTree>
+      <p:nvGrpSpPr>
+        <p:cNvPr id="1" name=""/>
+        <p:cNvGrpSpPr/>
+        <p:nvPr/>
+      </p:nvGrpSpPr>
+      <p:grpSpPr>
+        <a:xfrm>
+          <a:off x="0" y="0"/>
+          <a:ext cx="0" cy="0"/>
+          <a:chOff x="0" y="0"/>
+          <a:chExt cx="0" cy="0"/>
+        </a:xfrm>
+      </p:grpSpPr>
+      <p:sp>
+        <p:nvSpPr>
+          <p:cNvPr id="2" name="Slide Image Placeholder 1"/>
+          <p:cNvSpPr>
+            <a:spLocks noGrp="1" noRot="1" noChangeAspect="1"/>
+          </p:cNvSpPr>
+          <p:nvPr>
+            <p:ph type="sldImg"/>
+          </p:nvPr>
+        </p:nvSpPr>
+        <p:spPr/>
+      </p:sp>
+      <p:sp>
+        <p:nvSpPr>
+          <p:cNvPr id="3" name="Notes Placeholder 2"/>
+          <p:cNvSpPr>
+            <a:spLocks noGrp="1"/>
+          </p:cNvSpPr>
+          <p:nvPr>
+            <p:ph type="body" idx="1"/>
+          </p:nvPr>
+        </p:nvSpPr>
+        <p:spPr/>
+        <p:txBody>
+          <a:bodyPr/>
+          <a:lstStyle/>
+          <a:p>
+            <a:r>
+              <a:rPr lang="en-US" dirty="0"/>
+              <a:t>Four experiment tracks: load testing, Cosmos DB checkpointer, Agent 365 onboarding, continuous evaluation
+Quality gate passed: 8 captures, zero policy failures, 21/21 judge checks, verified safety refusal and tool receipts
+Scale, Security, Operations gates: Conditional — partial evidence, named follow-ups
+Platform status, Data, Cost gates: Not testable in this PoC — require commercial/legal/platform confirmation
+Overall recommendation: conditional go for continued PoC-to-pilot investment, not an unconditional yes/no
+Sources: repository code, labs 04/06 and release 34427432731; Continuous Validation 34427429700. Historical experiments retain their original limits.</a:t>
+            </a:r>
+            <a:endParaRPr lang="en-US" dirty="0"/>
+          </a:p>
+        </p:txBody>
+      </p:sp>
+      <p:sp>
+        <p:nvSpPr>
+          <p:cNvPr id="4" name="Slide Number Placeholder 3"/>
+          <p:cNvSpPr>
+            <a:spLocks noGrp="1"/>
+          </p:cNvSpPr>
+          <p:nvPr>
+            <p:ph type="sldNum" sz="quarter" idx="10"/>
+          </p:nvPr>
+        </p:nvSpPr>
+        <p:spPr/>
+        <p:txBody>
+          <a:bodyPr/>
+          <a:lstStyle/>
+          <a:p>
+            <a:fld id="{F7021451-1387-4CA6-816F-3879F97B5CBC}" type="slidenum">
+              <a:rPr lang="en-US"/>
+              <a:t>18</a:t>
+            </a:fld>
+            <a:endParaRPr lang="en-US"/>
+          </a:p>
+        </p:txBody>
+      </p:sp>
+    </p:spTree>
+    <p:extLst>
+      <p:ext uri="{BB962C8B-B14F-4D97-AF65-F5344CB8AC3E}">
+        <p14:creationId xmlns:p14="http://schemas.microsoft.com/office/powerpoint/2010/main" val="1024086991"/>
+      </p:ext>
+    </p:extLst>
+  </p:cSld>
+  <p:clrMapOvr>
+    <a:masterClrMapping/>
+  </p:clrMapOvr>
+</p:notes>
+</file>
+
+<file path=ppt/notesSlides/notesSlide19.xml><?xml version="1.0" encoding="utf-8"?>
+<p:notes xmlns:a="http://schemas.openxmlformats.org/drawingml/2006/main" xmlns:r="http://schemas.openxmlformats.org/officeDocument/2006/relationships" xmlns:p="http://schemas.openxmlformats.org/presentationml/2006/main">
+  <p:cSld>
+    <p:spTree>
+      <p:nvGrpSpPr>
+        <p:cNvPr id="1" name=""/>
+        <p:cNvGrpSpPr/>
+        <p:nvPr/>
+      </p:nvGrpSpPr>
+      <p:grpSpPr>
+        <a:xfrm>
+          <a:off x="0" y="0"/>
+          <a:ext cx="0" cy="0"/>
+          <a:chOff x="0" y="0"/>
+          <a:chExt cx="0" cy="0"/>
+        </a:xfrm>
+      </p:grpSpPr>
+      <p:sp>
+        <p:nvSpPr>
+          <p:cNvPr id="2" name="Slide Image Placeholder 1"/>
+          <p:cNvSpPr>
+            <a:spLocks noGrp="1" noRot="1" noChangeAspect="1"/>
+          </p:cNvSpPr>
+          <p:nvPr>
+            <p:ph type="sldImg"/>
+          </p:nvPr>
+        </p:nvSpPr>
+        <p:spPr/>
+      </p:sp>
+      <p:sp>
+        <p:nvSpPr>
+          <p:cNvPr id="3" name="Notes Placeholder 2"/>
+          <p:cNvSpPr>
+            <a:spLocks noGrp="1"/>
+          </p:cNvSpPr>
+          <p:nvPr>
+            <p:ph type="body" idx="1"/>
+          </p:nvPr>
+        </p:nvSpPr>
+        <p:spPr/>
+        <p:txBody>
+          <a:bodyPr/>
+          <a:lstStyle/>
+          <a:p>
+            <a:r>
+              <a:rPr lang="en-US" dirty="0"/>
+              <a:t>The deployment and evaluation ran for real; the MCP security telemetry is synthetic, not live customer data
+Repository: github.com/devopsabcs-engineering/foundry-hosted-agents
+Wiki: current architecture, verified release artifacts, operational runbook, and resolved WI-11 history
+Full bilingual step-by-step labs: this deck’s companion GitHub Pages site
+Production smoke and response-correlated ingestion passed; this is not a soak test or complete trace-coverage proof. Teams and durable history are not implemented
+Sources: repository code, labs 04/06 and release 34427432731; Continuous Validation 34427429700. Historical experiments retain their original limits.</a:t>
+            </a:r>
+            <a:endParaRPr lang="en-US" dirty="0"/>
+          </a:p>
+        </p:txBody>
+      </p:sp>
+      <p:sp>
+        <p:nvSpPr>
+          <p:cNvPr id="4" name="Slide Number Placeholder 3"/>
+          <p:cNvSpPr>
+            <a:spLocks noGrp="1"/>
+          </p:cNvSpPr>
+          <p:nvPr>
+            <p:ph type="sldNum" sz="quarter" idx="10"/>
+          </p:nvPr>
+        </p:nvSpPr>
+        <p:spPr/>
+        <p:txBody>
+          <a:bodyPr/>
+          <a:lstStyle/>
+          <a:p>
+            <a:fld id="{F7021451-1387-4CA6-816F-3879F97B5CBC}" type="slidenum">
+              <a:rPr lang="en-US"/>
+              <a:t>19</a:t>
             </a:fld>
             <a:endParaRPr lang="en-US"/>
           </a:p>
@@ -1069,9 +1540,16 @@
           <a:p>
             <a:r>
               <a:rPr lang="en-US" dirty="0"/>
-              <a:t>Seven release jobs succeeded; recovery skipped. Staging 6; production 33 to 34. Both production gates used normal reviewer approval. PoC environment, not enterprise production certification.
-Source: https://github.com/devopsabcs-engineering/foundry-hosted-agents/actions/runs/34178081808
-Evidence: assets/release-evidence/source; SHA-256 manifest: assets/release-evidence/manifest.json. Images render downloaded artifacts, not native portal UI.</a:t>
+              <a:t>Current pilot: working chat and verified releases
+Entra tenant + pilot group
+Authenticated React / FastAPI chat; public HTTPS, not a private-network deployment.
+Full-history requests
+Backend-owned user/assistant turns, store:false; no native conversation or previous_response_id.
+Verified release and load
+Release 34427432731 and Continuous Validation 34427429700 succeeded. Synthetic security data only.
+Demo controls populate the draft; Send initiates the authenticated request. Start a new assessment for each independent scenario. Scenarios use exact reviewed English fixture prompts in both language tracks. Source: apps/web-chat/frontend/src/samples.js, src/threat-assessment-agent/graph.py, scripts/invoke-agent.sh, .github/workflows/deploy-and-evaluate.yml. https://github.com/devopsabcs-engineering/foundry-hosted-agents/actions/runs/34427432731
+Load: https://github.com/devopsabcs-engineering/foundry-hosted-agents/actions/runs/34427429700
+Historical artifact slides that follow retain their original run and version labels.</a:t>
             </a:r>
             <a:endParaRPr lang="en-US" dirty="0"/>
           </a:p>
@@ -1159,9 +1637,25 @@
           <a:p>
             <a:r>
               <a:rPr lang="en-US" dirty="0"/>
-              <a:t>Eight captures; seven reports judged on coherence, groundedness, task adherence. All 21 passed at unchanged 100% thresholds. inject-001: deterministic safety refusal with no tools, not a judge pass. Zero policy failures. Incomplete output is retried, not rescored.
-Source: https://github.com/devopsabcs-engineering/foundry-hosted-agents/actions/runs/34178081808
-Evidence: assets/release-evidence/source; SHA-256 manifest: assets/release-evidence/manifest.json. Images render downloaded artifacts, not native portal UI.</a:t>
+              <a:t>Live demo: three scenarios, four MCP tools
+1 / Suspicious crew-admin login
+CREW-PORTAL-01 + crew-admin: correlate MFA failures and success; expect escalation with evidence limits.
+2 / Approved employee travel
+JDOE-LT-01 + jdoe: reconcile travel and known device; do not invent a compromise.
+3 / Conflicting egress signals
+OPS-DB-02 + data_egress_mb_per_hour: 900: compare clean endpoint with network anomaly; surface the conflict.
+Suspicious crew-admin login
+Suspicious login from unknown IP 203.0.113.45 targeting the crew-scheduling admin portal at 02:14 UTC, followed by three failed MFA attempts and a successful login four minutes later from the same IP. Synthetic scenario identifiers: device ID CREW-PORTAL-01, account/user ID crew-admin.
+Expected tools: get_device_risk, list_vulnerabilities, detect_login_anomalies
+Approved employee travel
+Login alert for employee jdoe from IP 198.51.100.22, a country the employee has not logged in from before. Employee's calendar shows an approved business trip to that country starting yesterday, and the device fingerprint matches jdoe's enrolled corporate laptop. Synthetic scenario device ID: JDOE-LT-01; account/user ID: jdoe.
+Expected tools: get_device_risk, list_vulnerabilities, detect_login_anomalies
+Conflicting egress signals
+Defender reports host OPS-DB-02 as clean with no active alerts, but the anomaly-detection tool independently scores the same host's outbound traffic pattern in the 99th percentile for data-exfiltration risk over the past hour. Synthetic scenario device ID: OPS-DB-02. Observed metric data_egress_mb_per_hour: 900 MB over the past hour; the 99th percentile is a separate reported signal, not a traffic measurement.
+Expected tools: get_device_risk, list_vulnerabilities, score_anomaly
+Demo controls populate the draft; Send initiates the authenticated request. Start a new assessment for each independent scenario. Scenarios use exact reviewed English fixture prompts in both language tracks. Source: apps/web-chat/frontend/src/samples.js, src/threat-assessment-agent/graph.py, scripts/invoke-agent.sh, .github/workflows/deploy-and-evaluate.yml. https://github.com/devopsabcs-engineering/foundry-hosted-agents/actions/runs/34427432731
+Load: https://github.com/devopsabcs-engineering/foundry-hosted-agents/actions/runs/34427429700
+Historical artifact slides that follow retain their original run and version labels.</a:t>
             </a:r>
             <a:endParaRPr lang="en-US" dirty="0"/>
           </a:p>
@@ -1249,9 +1743,16 @@
           <a:p>
             <a:r>
               <a:rPr lang="en-US" dirty="0"/>
-              <a:t>28 ToolMessage-derived receipts. tp-001 shows both Defender and both Anomaly tools. Receipts prove execution, not semantic correctness. Synthetic fixtures are not live Defender or airline telemetry. Safety case: no further tools. Bounded evidence attached to response.completed.
-Source: https://github.com/devopsabcs-engineering/foundry-hosted-agents/actions/runs/34178081808
-Evidence: assets/release-evidence/source; SHA-256 manifest: assets/release-evidence/manifest.json. Images render downloaded artifacts, not native portal UI.</a:t>
+              <a:t>Conversation memory: explicit, bounded, owner-scoped
+Recall in the same assessment
+Add reference DEMO-73921, then ask for it without repeating it. All three specialists receive the supplied history.
+Isolation and retry boundaries
+A new assessment must not recall that reference. Completed identical message retries replay; changed text with the same key conflicts.
+No durable history claim
+Owner-bound in-memory sessions expire; restart loses server state and browser reload loses the local list. No Cosmos, Teams, or durable exactly-once guarantee.
+Demo controls populate the draft; Send initiates the authenticated request. Start a new assessment for each independent scenario. Scenarios use exact reviewed English fixture prompts in both language tracks. Source: apps/web-chat/frontend/src/samples.js, src/threat-assessment-agent/graph.py, scripts/invoke-agent.sh, .github/workflows/deploy-and-evaluate.yml. https://github.com/devopsabcs-engineering/foundry-hosted-agents/actions/runs/34427432731
+Load: https://github.com/devopsabcs-engineering/foundry-hosted-agents/actions/runs/34427429700
+Historical artifact slides that follow retain their original run and version labels.</a:t>
             </a:r>
             <a:endParaRPr lang="en-US" dirty="0"/>
           </a:p>
@@ -1339,9 +1840,16 @@
           <a:p>
             <a:r>
               <a:rPr lang="en-US" dirty="0"/>
-              <a:t>Version 34 active, toolbox 1. Exact-version smoke succeeded. At 02:12:02 UTC AppExceptions for the trailing ten minutes returned zero. Not a ten-minute soak or complete tracing proof. Quality suite ran on staging. Production rebuilds the same source with evaluated MCP digests. Manual recovery; no automatic rollback or canary.
-Source: https://github.com/devopsabcs-engineering/foundry-hosted-agents/actions/runs/34178081808
-Evidence: assets/release-evidence/source; SHA-256 manifest: assets/release-evidence/manifest.json. Images render downloaded artifacts, not native portal UI.</a:t>
+              <a:t>Tool execution is evidence, not model prose
+Deterministic lookup plan
+Explicit user device/account/metric fields select real read-only MCP calls. Omitted fields retain prior context; new values replace that category.
+Strict specialist permissions
+Investigator: get_device_risk + list_vulnerabilities. Analyst: detect_login_anomalies + score_anomaly. Composer: no tools.
+Validate actual receipts
+Successful ToolMessage results become bounded response metadata. Synthetic fixtures and unavailable vulnerability telemetry must remain visible limitations.
+Demo controls populate the draft; Send initiates the authenticated request. Start a new assessment for each independent scenario. Scenarios use exact reviewed English fixture prompts in both language tracks. Source: apps/web-chat/frontend/src/samples.js, src/threat-assessment-agent/graph.py, scripts/invoke-agent.sh, .github/workflows/deploy-and-evaluate.yml. https://github.com/devopsabcs-engineering/foundry-hosted-agents/actions/runs/34427432731
+Load: https://github.com/devopsabcs-engineering/foundry-hosted-agents/actions/runs/34427429700
+Historical artifact slides that follow retain their original run and version labels.</a:t>
             </a:r>
             <a:endParaRPr lang="en-US" dirty="0"/>
           </a:p>
@@ -1429,16 +1937,16 @@
           <a:p>
             <a:r>
               <a:rPr lang="en-US" dirty="0"/>
-              <a:t>Lab 00 — Prerequisites and environment setup
-Lab 01 — Architecture deep dive (LangGraph supervisor/specialists)
-Lab 02 — Deploy the MCP tool servers
-Lab 03 — Provision and deploy the hosted agent (azd)
-Lab 04 — Invoke the agent and read traces
-Lab 05 — Evaluations: deterministic + LLM-as-judge
-Lab 06 — CI/CD: evaluation-gated release pipeline
-Lab 07 — Real-world troubleshooting: RBAC 401
-Lab 08 — Production readiness and decision gates
-Sources: repository code and wiki Release-Evidence / Operations. Verified release 34178081808; historical experiments retain their original limits.</a:t>
+              <a:t>Release operations: approval, telemetry, capacity
+Approve the release, then monitoring
+Both protected jobs use production approval. Continuous Validation queues behind the shared environment lock; it needs no manual approval.
+Positive ingestion before zero exceptions
+Correlate the raw response ID with AppTraces, then check AppExceptions. Empty or invalid query results fail; zero exceptions alone is insufficient.
+Staging 50k TPM / production 10k TPM
+Three load failures in 34424723263 correlated with model 429s. Approved staging-only increase; unchanged five-stream gate subsequently passed. Not an SLA or saturation test.
+Demo controls populate the draft; Send initiates the authenticated request. Start a new assessment for each independent scenario. Scenarios use exact reviewed English fixture prompts in both language tracks. Source: apps/web-chat/frontend/src/samples.js, src/threat-assessment-agent/graph.py, scripts/invoke-agent.sh, .github/workflows/deploy-and-evaluate.yml. https://github.com/devopsabcs-engineering/foundry-hosted-agents/actions/runs/34427432731
+Load: https://github.com/devopsabcs-engineering/foundry-hosted-agents/actions/runs/34427429700
+Historical artifact slides that follow retain their original run and version labels.</a:t>
             </a:r>
             <a:endParaRPr lang="en-US" dirty="0"/>
           </a:p>
@@ -1526,12 +2034,9 @@
           <a:p>
             <a:r>
               <a:rPr lang="en-US" dirty="0"/>
-              <a:t>A LangGraph supervisor routes to three specialist nodes: Evidence Investigator, Risk Analyst, Report Composer
-Each specialist has its own prompt, tool permissions, and evaluation criteria
-Tool isolation by role: Evidence Investigator → defender-conn only, Risk Analyst → anomaly-conn only
-The Report Composer has zero tool access — it only synthesizes
-Supported versioned MCP transport, fresh Entra tokens and RemoteTool connections now work; runtime receipts prove specialist tool execution
-Sources: repository code and wiki Release-Evidence / Operations. Verified release 34178081808; historical experiments retain their original limits.</a:t>
+              <a:t>Seven release jobs succeeded; recovery skipped. Staging 6; production 33 to 34. Both production gates used normal reviewer approval. PoC environment, not enterprise production certification.
+Source: https://github.com/devopsabcs-engineering/foundry-hosted-agents/actions/runs/34178081808
+Evidence: assets/release-evidence/source; SHA-256 manifest: assets/release-evidence/manifest.json. Images render downloaded artifacts, not native portal UI.</a:t>
             </a:r>
             <a:endParaRPr lang="en-US" dirty="0"/>
           </a:p>
@@ -1619,12 +2124,9 @@
           <a:p>
             <a:r>
               <a:rPr lang="en-US" dirty="0"/>
-              <a:t>Layer 1 — Implementation: custom MCP server code (Defender tools, anomaly tools)
-Layer 2 — Hosting: independent Azure Container Apps, own auth/networking/health checks
-Layer 3 — Registration: Foundry connections define endpoint + credential policy per MCP server
-Layer 4 — Consumption: Foundry Toolbox aggregates registered tools for reuse across agents
-The Toolbox is the registration/aggregation layer — not the hosting runtime for your MCP code
-Sources: repository code and wiki Release-Evidence / Operations. Verified release 34178081808; historical experiments retain their original limits.</a:t>
+              <a:t>Eight captures; seven reports judged on coherence, groundedness, task adherence. All 21 passed at unchanged 100% thresholds. inject-001: deterministic safety refusal with no tools, not a judge pass. Zero policy failures. Incomplete output is retried, not rescored.
+Source: https://github.com/devopsabcs-engineering/foundry-hosted-agents/actions/runs/34178081808
+Evidence: assets/release-evidence/source; SHA-256 manifest: assets/release-evidence/manifest.json. Images render downloaded artifacts, not native portal UI.</a:t>
             </a:r>
             <a:endParaRPr lang="en-US" dirty="0"/>
           </a:p>
@@ -1712,12 +2214,9 @@
           <a:p>
             <a:r>
               <a:rPr lang="en-US" dirty="0"/>
-              <a:t>azure.yaml wires the Foundry project, model deployment, Toolbox connections, and the hosted agent service
-kind: hosted — Foundry operates the session compute; you own only the graph code
-dependencyResolution: remote_build — Foundry builds your Python dependencies server-side
-protocol: responses — OpenAI-compatible Responses protocol with streaming support
-azd provision creates infrastructure; azd deploy publishes a new agent version — separate lifecycles
-Sources: repository code and wiki Release-Evidence / Operations. Verified release 34178081808; historical experiments retain their original limits.</a:t>
+              <a:t>28 ToolMessage-derived receipts. tp-001 shows both Defender and both Anomaly tools. Receipts prove execution, not semantic correctness. Synthetic fixtures are not live Defender or airline telemetry. Safety case: no further tools. Bounded evidence attached to response.completed.
+Source: https://github.com/devopsabcs-engineering/foundry-hosted-agents/actions/runs/34178081808
+Evidence: assets/release-evidence/source; SHA-256 manifest: assets/release-evidence/manifest.json. Images render downloaded artifacts, not native portal UI.</a:t>
             </a:r>
             <a:endParaRPr lang="en-US" dirty="0"/>
           </a:p>
@@ -2257,7 +2756,7 @@
                   <a:srgbClr val="767676"/>
                 </a:solidFill>
               </a:rPr>
-              <a:t>1 / 14</a:t>
+              <a:t>1 / 19</a:t>
             </a:r>
             <a:endParaRPr lang="en-US" sz="900" dirty="0"/>
           </a:p>
@@ -2277,7 +2776,7 @@
     <p:bg>
       <p:bgPr>
         <a:solidFill>
-          <a:srgbClr val="FAFBFC"/>
+          <a:srgbClr val="FFFFFF"/>
         </a:solidFill>
       </p:bgPr>
     </p:bg>
@@ -2297,34 +2796,14 @@
       </p:grpSpPr>
       <p:sp>
         <p:nvSpPr>
-          <p:cNvPr id="2" name="Shape 0"/>
-          <p:cNvSpPr/>
-          <p:nvPr/>
-        </p:nvSpPr>
-        <p:spPr>
-          <a:xfrm>
-            <a:off x="0" y="0"/>
-            <a:ext cx="12188952" cy="82296"/>
-          </a:xfrm>
-          <a:prstGeom prst="rect">
-            <a:avLst/>
-          </a:prstGeom>
-          <a:solidFill>
-            <a:srgbClr val="0078D4"/>
-          </a:solidFill>
-          <a:ln/>
-        </p:spPr>
-      </p:sp>
-      <p:sp>
-        <p:nvSpPr>
-          <p:cNvPr id="3" name="Text 1"/>
-          <p:cNvSpPr/>
-          <p:nvPr/>
-        </p:nvSpPr>
-        <p:spPr>
-          <a:xfrm>
-            <a:off x="457200" y="292608"/>
-            <a:ext cx="11247120" cy="274320"/>
+          <p:cNvPr id="2" name="Text 0"/>
+          <p:cNvSpPr/>
+          <p:nvPr/>
+        </p:nvSpPr>
+        <p:spPr>
+          <a:xfrm>
+            <a:off x="411480" y="146304"/>
+            <a:ext cx="11338560" cy="502920"/>
           </a:xfrm>
           <a:prstGeom prst="rect">
             <a:avLst/>
@@ -2340,30 +2819,54 @@
               <a:buNone/>
             </a:pPr>
             <a:r>
-              <a:rPr lang="en-US" sz="1100" b="1" spc="100" kern="0" dirty="0">
-                <a:solidFill>
-                  <a:srgbClr val="0078D4"/>
-                </a:solidFill>
-                <a:latin typeface="Segoe UI" pitchFamily="34" charset="0"/>
-                <a:ea typeface="Segoe UI" pitchFamily="34" charset="-122"/>
-                <a:cs typeface="Segoe UI" pitchFamily="34" charset="-120"/>
-              </a:rPr>
-              <a:t>EVALUATION</a:t>
-            </a:r>
-            <a:endParaRPr lang="en-US" sz="1100" dirty="0"/>
-          </a:p>
-        </p:txBody>
-      </p:sp>
-      <p:sp>
-        <p:nvSpPr>
-          <p:cNvPr id="4" name="Text 2"/>
-          <p:cNvSpPr/>
-          <p:nvPr/>
-        </p:nvSpPr>
-        <p:spPr>
-          <a:xfrm>
-            <a:off x="457200" y="548640"/>
-            <a:ext cx="11247120" cy="640080"/>
+              <a:rPr lang="en-US" sz="2200" b="1" dirty="0">
+                <a:solidFill>
+                  <a:srgbClr val="146C54"/>
+                </a:solidFill>
+                <a:latin typeface="Segoe UI" pitchFamily="34" charset="0"/>
+                <a:ea typeface="Segoe UI" pitchFamily="34" charset="-122"/>
+                <a:cs typeface="Segoe UI" pitchFamily="34" charset="-120"/>
+              </a:rPr>
+              <a:t>Historical proof: Production 34: Active, Smoke Test Passed</a:t>
+            </a:r>
+            <a:endParaRPr lang="en-US" sz="2200" dirty="0"/>
+          </a:p>
+        </p:txBody>
+      </p:sp>
+      <p:pic>
+        <p:nvPicPr>
+          <p:cNvPr id="3" name="Image 0" descr="Production 34: Active, Smoke Test Passed">    </p:cNvPr>
+          <p:cNvPicPr>
+            <a:picLocks noChangeAspect="1"/>
+          </p:cNvPicPr>
+          <p:nvPr/>
+        </p:nvPicPr>
+        <p:blipFill>
+          <a:blip r:embed="rId1"/>
+          <a:stretch>
+            <a:fillRect/>
+          </a:stretch>
+        </p:blipFill>
+        <p:spPr>
+          <a:xfrm>
+            <a:off x="2068830" y="777240"/>
+            <a:ext cx="8051292" cy="5367528"/>
+          </a:xfrm>
+          <a:prstGeom prst="rect">
+            <a:avLst/>
+          </a:prstGeom>
+        </p:spPr>
+      </p:pic>
+      <p:sp>
+        <p:nvSpPr>
+          <p:cNvPr id="4" name="Text 1"/>
+          <p:cNvSpPr/>
+          <p:nvPr/>
+        </p:nvSpPr>
+        <p:spPr>
+          <a:xfrm>
+            <a:off x="411480" y="6245352"/>
+            <a:ext cx="11338560" cy="256032"/>
           </a:xfrm>
           <a:prstGeom prst="rect">
             <a:avLst/>
@@ -2379,197 +2882,32 @@
               <a:buNone/>
             </a:pPr>
             <a:r>
-              <a:rPr lang="en-US" sz="2600" b="1" dirty="0">
-                <a:solidFill>
-                  <a:srgbClr val="001B3D"/>
-                </a:solidFill>
-                <a:latin typeface="Segoe UI" pitchFamily="34" charset="0"/>
-                <a:ea typeface="Segoe UI" pitchFamily="34" charset="-122"/>
-                <a:cs typeface="Segoe UI" pitchFamily="34" charset="-120"/>
-              </a:rPr>
-              <a:t>Deterministic Checks + LLM-as-Judge Rubrics</a:t>
-            </a:r>
-            <a:endParaRPr lang="en-US" sz="2600" dirty="0"/>
-          </a:p>
-        </p:txBody>
-      </p:sp>
-      <p:sp>
-        <p:nvSpPr>
-          <p:cNvPr id="5" name="Shape 3"/>
-          <p:cNvSpPr/>
-          <p:nvPr/>
-        </p:nvSpPr>
-        <p:spPr>
-          <a:xfrm>
-            <a:off x="457200" y="1188720"/>
-            <a:ext cx="11247120" cy="10973"/>
-          </a:xfrm>
-          <a:prstGeom prst="rect">
-            <a:avLst/>
-          </a:prstGeom>
-          <a:solidFill>
-            <a:srgbClr val="E1E5E8"/>
-          </a:solidFill>
-          <a:ln/>
-        </p:spPr>
-      </p:sp>
-      <p:sp>
-        <p:nvSpPr>
-          <p:cNvPr id="6" name="Text 4"/>
-          <p:cNvSpPr/>
-          <p:nvPr/>
-        </p:nvSpPr>
-        <p:spPr>
-          <a:xfrm>
-            <a:off x="548640" y="1463040"/>
-            <a:ext cx="11064240" cy="5029200"/>
-          </a:xfrm>
-          <a:prstGeom prst="rect">
-            <a:avLst/>
-          </a:prstGeom>
-          <a:noFill/>
-          <a:ln/>
-        </p:spPr>
-        <p:txBody>
-          <a:bodyPr wrap="square" rtlCol="0" anchor="t"/>
-          <a:lstStyle/>
-          <a:p>
-            <a:pPr marL="254000" indent="-254000">
-              <a:lnSpc>
-                <a:spcPct val="125000"/>
-              </a:lnSpc>
-              <a:buSzPct val="100000"/>
-              <a:buChar char="●"/>
-            </a:pPr>
-            <a:r>
-              <a:rPr lang="en-US" sz="1500" dirty="0">
-                <a:solidFill>
-                  <a:srgbClr val="1A1A1A"/>
-                </a:solidFill>
-                <a:latin typeface="Segoe UI" pitchFamily="34" charset="0"/>
-                <a:ea typeface="Segoe UI" pitchFamily="34" charset="-122"/>
-                <a:cs typeface="Segoe UI" pitchFamily="34" charset="-120"/>
-              </a:rPr>
-              <a:t>Golden dataset: 8 categories (true/false positive, ambiguous, missing data, conflicting tools, prompt injection, unauthorized actions, unsupported conclusions)</a:t>
-            </a:r>
-            <a:endParaRPr lang="en-US" sz="1500" dirty="0"/>
-          </a:p>
-          <a:p>
-            <a:pPr marL="254000" indent="-254000">
-              <a:lnSpc>
-                <a:spcPct val="125000"/>
-              </a:lnSpc>
-              <a:buSzPct val="100000"/>
-              <a:buChar char="●"/>
-            </a:pPr>
-            <a:r>
-              <a:rPr lang="en-US" sz="1500" dirty="0">
-                <a:solidFill>
-                  <a:srgbClr val="1A1A1A"/>
-                </a:solidFill>
-                <a:latin typeface="Segoe UI" pitchFamily="34" charset="0"/>
-                <a:ea typeface="Segoe UI" pitchFamily="34" charset="-122"/>
-                <a:cs typeface="Segoe UI" pitchFamily="34" charset="-120"/>
-              </a:rPr>
-              <a:t>Deterministic: schema validity, required citations, allowed tool calls, policy constraints — fast, reproducible</a:t>
-            </a:r>
-            <a:endParaRPr lang="en-US" sz="1500" dirty="0"/>
-          </a:p>
-          <a:p>
-            <a:pPr marL="254000" indent="-254000">
-              <a:lnSpc>
-                <a:spcPct val="125000"/>
-              </a:lnSpc>
-              <a:buSzPct val="100000"/>
-              <a:buChar char="●"/>
-            </a:pPr>
-            <a:r>
-              <a:rPr lang="en-US" sz="1500" dirty="0">
-                <a:solidFill>
-                  <a:srgbClr val="1A1A1A"/>
-                </a:solidFill>
-                <a:latin typeface="Segoe UI" pitchFamily="34" charset="0"/>
-                <a:ea typeface="Segoe UI" pitchFamily="34" charset="-122"/>
-                <a:cs typeface="Segoe UI" pitchFamily="34" charset="-120"/>
-              </a:rPr>
-              <a:t>Verified Foundry judges: coherence, groundedness, task adherence. Seven reports per metric, 21/21 passed at unchanged 100% thresholds</a:t>
-            </a:r>
-            <a:endParaRPr lang="en-US" sz="1500" dirty="0"/>
-          </a:p>
-          <a:p>
-            <a:pPr marL="254000" indent="-254000">
-              <a:lnSpc>
-                <a:spcPct val="125000"/>
-              </a:lnSpc>
-              <a:buSzPct val="100000"/>
-              <a:buChar char="●"/>
-            </a:pPr>
-            <a:r>
-              <a:rPr lang="en-US" sz="1500" dirty="0">
-                <a:solidFill>
-                  <a:srgbClr val="1A1A1A"/>
-                </a:solidFill>
-                <a:latin typeface="Segoe UI" pitchFamily="34" charset="0"/>
-                <a:ea typeface="Segoe UI" pitchFamily="34" charset="-122"/>
-                <a:cs typeface="Segoe UI" pitchFamily="34" charset="-120"/>
-              </a:rPr>
-              <a:t>Eight captures, zero deterministic policy failures; inject-001 is a verified safety refusal with no tool calls, not a model-judge result</a:t>
-            </a:r>
-            <a:endParaRPr lang="en-US" sz="1500" dirty="0"/>
-          </a:p>
-          <a:p>
-            <a:pPr marL="254000" indent="-254000">
-              <a:lnSpc>
-                <a:spcPct val="125000"/>
-              </a:lnSpc>
-              <a:buSzPct val="100000"/>
-              <a:buChar char="●"/>
-            </a:pPr>
-            <a:r>
-              <a:rPr lang="en-US" sz="1500" dirty="0">
-                <a:solidFill>
-                  <a:srgbClr val="1A1A1A"/>
-                </a:solidFill>
-                <a:latin typeface="Segoe UI" pitchFamily="34" charset="0"/>
-                <a:ea typeface="Segoe UI" pitchFamily="34" charset="-122"/>
-                <a:cs typeface="Segoe UI" pitchFamily="34" charset="-120"/>
-              </a:rPr>
-              <a:t>Policy rules (e.g. never claim an unauthorized remediation action) stay deterministic, not LLM-judged</a:t>
-            </a:r>
-            <a:endParaRPr lang="en-US" sz="1500" dirty="0"/>
-          </a:p>
-        </p:txBody>
-      </p:sp>
-      <p:sp>
-        <p:nvSpPr>
-          <p:cNvPr id="8" name="Shape 5"/>
-          <p:cNvSpPr/>
-          <p:nvPr/>
-        </p:nvSpPr>
-        <p:spPr>
-          <a:xfrm>
-            <a:off x="0" y="6784848"/>
-            <a:ext cx="12188952" cy="27432"/>
-          </a:xfrm>
-          <a:prstGeom prst="rect">
-            <a:avLst/>
-          </a:prstGeom>
-          <a:solidFill>
-            <a:srgbClr val="E1E5E8"/>
-          </a:solidFill>
-          <a:ln/>
-        </p:spPr>
-      </p:sp>
-      <p:sp>
-        <p:nvSpPr>
-          <p:cNvPr id="9" name="Text 6"/>
-          <p:cNvSpPr/>
-          <p:nvPr/>
-        </p:nvSpPr>
-        <p:spPr>
-          <a:xfrm>
-            <a:off x="457200" y="6537960"/>
-            <a:ext cx="8229600" cy="256032"/>
+              <a:rPr lang="en-US" sz="1000" dirty="0">
+                <a:solidFill>
+                  <a:srgbClr val="53635E"/>
+                </a:solidFill>
+                <a:latin typeface="Segoe UI" pitchFamily="34" charset="0"/>
+                <a:ea typeface="Segoe UI" pitchFamily="34" charset="-122"/>
+                <a:cs typeface="Segoe UI" pitchFamily="34" charset="-120"/>
+              </a:rPr>
+              <a:t>Artifact rendering, not a portal screenshot. Synthetic fixtures. Sources and SHA-256 hashes retained.</a:t>
+            </a:r>
+            <a:endParaRPr lang="en-US" sz="1000" dirty="0"/>
+          </a:p>
+        </p:txBody>
+      </p:sp>
+      <p:sp>
+        <p:nvSpPr>
+          <p:cNvPr id="5" name="Text 2">
+            <a:hlinkClick r:id="rId2" tooltip=""/>
+          </p:cNvPr>
+          <p:cNvSpPr/>
+          <p:nvPr/>
+        </p:nvSpPr>
+        <p:spPr>
+          <a:xfrm>
+            <a:off x="411480" y="6528816"/>
+            <a:ext cx="10515600" cy="201168"/>
           </a:xfrm>
           <a:prstGeom prst="rect">
             <a:avLst/>
@@ -2585,15 +2923,22 @@
               <a:buNone/>
             </a:pPr>
             <a:r>
-              <a:rPr lang="en-US" sz="900" dirty="0">
-                <a:solidFill>
-                  <a:srgbClr val="767676"/>
-                </a:solidFill>
-                <a:latin typeface="Segoe UI" pitchFamily="34" charset="0"/>
-                <a:ea typeface="Segoe UI" pitchFamily="34" charset="-122"/>
-                <a:cs typeface="Segoe UI" pitchFamily="34" charset="-120"/>
-              </a:rPr>
-              <a:t>Foundry Hosted Agents Workshop</a:t>
+              <a:rPr lang="en-US" sz="900" u="sng" dirty="0">
+                <a:solidFill>
+                  <a:srgbClr val="075C9B"/>
+                </a:solidFill>
+                <a:latin typeface="Segoe UI" pitchFamily="34" charset="0"/>
+                <a:ea typeface="Segoe UI" pitchFamily="34" charset="-122"/>
+                <a:cs typeface="Segoe UI" pitchFamily="34" charset="-120"/>
+                <a:hlinkClick r:id="rId2" invalidUrl="" action="" tgtFrame="" tooltip="" history="1" highlightClick="0" endSnd="0">
+                  <a:extLst>
+                    <a:ext uri="{A12FA001-AC4F-418D-AE19-62706E023703}">
+                      <ahyp:hlinkClr xmlns:ahyp="http://schemas.microsoft.com/office/drawing/2018/hyperlinkcolor" val="tx"/>
+                    </a:ext>
+                  </a:extLst>
+                </a:hlinkClick>
+              </a:rPr>
+              <a:t>GitHub Actions 34178081808 | f3da486 | 2026-09-08 UTC</a:t>
             </a:r>
             <a:endParaRPr lang="en-US" sz="900" dirty="0"/>
           </a:p>
@@ -2601,7 +2946,7 @@
       </p:sp>
       <p:sp>
         <p:nvSpPr>
-          <p:cNvPr id="10" name="Text 7"/>
+          <p:cNvPr id="7" name="Text 3"/>
           <p:cNvSpPr/>
           <p:nvPr/>
         </p:nvSpPr>
@@ -2629,7 +2974,7 @@
                   <a:srgbClr val="767676"/>
                 </a:solidFill>
               </a:rPr>
-              <a:t>10 / 14</a:t>
+              <a:t>10 / 19</a:t>
             </a:r>
             <a:endParaRPr lang="en-US" sz="900" dirty="0"/>
           </a:p>
@@ -2720,7 +3065,7 @@
                 <a:ea typeface="Segoe UI" pitchFamily="34" charset="-122"/>
                 <a:cs typeface="Segoe UI" pitchFamily="34" charset="-120"/>
               </a:rPr>
-              <a:t>CI/CD</a:t>
+              <a:t>AGENDA</a:t>
             </a:r>
             <a:endParaRPr lang="en-US" sz="1100" dirty="0"/>
           </a:p>
@@ -2759,7 +3104,7 @@
                 <a:ea typeface="Segoe UI" pitchFamily="34" charset="-122"/>
                 <a:cs typeface="Segoe UI" pitchFamily="34" charset="-120"/>
               </a:rPr>
-              <a:t>Evaluation-Gated Release Pipeline</a:t>
+              <a:t>Nine Labs, One Real Deployment</a:t>
             </a:r>
             <a:endParaRPr lang="en-US" sz="2600" dirty="0"/>
           </a:p>
@@ -2822,7 +3167,7 @@
                 <a:ea typeface="Segoe UI" pitchFamily="34" charset="-122"/>
                 <a:cs typeface="Segoe UI" pitchFamily="34" charset="-120"/>
               </a:rPr>
-              <a:t>Two manual pipelines: direct PoC deployment, or deploy-and-evaluate.yml with isolated staging and production accounts/projects</a:t>
+              <a:t>Lab 00 — Prerequisites and environment setup</a:t>
             </a:r>
             <a:endParaRPr lang="en-US" sz="1500" dirty="0"/>
           </a:p>
@@ -2843,7 +3188,7 @@
                 <a:ea typeface="Segoe UI" pitchFamily="34" charset="-122"/>
                 <a:cs typeface="Segoe UI" pitchFamily="34" charset="-120"/>
               </a:rPr>
-              <a:t>Full flow: lint/tests → Bicep validate → deploy immutable candidate to staging → smoke/contract/streaming tests</a:t>
+              <a:t>Lab 01 — Architecture deep dive (LangGraph supervisor/specialists)</a:t>
             </a:r>
             <a:endParaRPr lang="en-US" sz="1500" dirty="0"/>
           </a:p>
@@ -2864,7 +3209,7 @@
                 <a:ea typeface="Segoe UI" pitchFamily="34" charset="-122"/>
                 <a:cs typeface="Segoe UI" pitchFamily="34" charset="-120"/>
               </a:rPr>
-              <a:t>Offline evaluation quality gate runs against the staging candidate before any manual production approval</a:t>
+              <a:t>Lab 02 — Deploy the MCP tool servers</a:t>
             </a:r>
             <a:endParaRPr lang="en-US" sz="1500" dirty="0"/>
           </a:p>
@@ -2885,7 +3230,7 @@
                 <a:ea typeface="Segoe UI" pitchFamily="34" charset="-122"/>
                 <a:cs typeface="Segoe UI" pitchFamily="34" charset="-120"/>
               </a:rPr>
-              <a:t>Secretless OIDC federation — no stored client secrets in either pipeline</a:t>
+              <a:t>Lab 03 — Provision and deploy the hosted agent (azd)</a:t>
             </a:r>
             <a:endParaRPr lang="en-US" sz="1500" dirty="0"/>
           </a:p>
@@ -2906,7 +3251,91 @@
                 <a:ea typeface="Segoe UI" pitchFamily="34" charset="-122"/>
                 <a:cs typeface="Segoe UI" pitchFamily="34" charset="-120"/>
               </a:rPr>
-              <a:t>Run 34178081808 passed end to end: staging 6, production 34, exact evaluated MCP digests, normal approvals. Manual recovery; no automatic rollback or canary</a:t>
+              <a:t>Lab 04 — Invoke the agent and read traces</a:t>
+            </a:r>
+            <a:endParaRPr lang="en-US" sz="1500" dirty="0"/>
+          </a:p>
+          <a:p>
+            <a:pPr marL="254000" indent="-254000">
+              <a:lnSpc>
+                <a:spcPct val="125000"/>
+              </a:lnSpc>
+              <a:buSzPct val="100000"/>
+              <a:buChar char="●"/>
+            </a:pPr>
+            <a:r>
+              <a:rPr lang="en-US" sz="1500" dirty="0">
+                <a:solidFill>
+                  <a:srgbClr val="1A1A1A"/>
+                </a:solidFill>
+                <a:latin typeface="Segoe UI" pitchFamily="34" charset="0"/>
+                <a:ea typeface="Segoe UI" pitchFamily="34" charset="-122"/>
+                <a:cs typeface="Segoe UI" pitchFamily="34" charset="-120"/>
+              </a:rPr>
+              <a:t>Lab 05 — Evaluations: deterministic + LLM-as-judge</a:t>
+            </a:r>
+            <a:endParaRPr lang="en-US" sz="1500" dirty="0"/>
+          </a:p>
+          <a:p>
+            <a:pPr marL="254000" indent="-254000">
+              <a:lnSpc>
+                <a:spcPct val="125000"/>
+              </a:lnSpc>
+              <a:buSzPct val="100000"/>
+              <a:buChar char="●"/>
+            </a:pPr>
+            <a:r>
+              <a:rPr lang="en-US" sz="1500" dirty="0">
+                <a:solidFill>
+                  <a:srgbClr val="1A1A1A"/>
+                </a:solidFill>
+                <a:latin typeface="Segoe UI" pitchFamily="34" charset="0"/>
+                <a:ea typeface="Segoe UI" pitchFamily="34" charset="-122"/>
+                <a:cs typeface="Segoe UI" pitchFamily="34" charset="-120"/>
+              </a:rPr>
+              <a:t>Lab 06 — CI/CD: evaluation-gated release pipeline</a:t>
+            </a:r>
+            <a:endParaRPr lang="en-US" sz="1500" dirty="0"/>
+          </a:p>
+          <a:p>
+            <a:pPr marL="254000" indent="-254000">
+              <a:lnSpc>
+                <a:spcPct val="125000"/>
+              </a:lnSpc>
+              <a:buSzPct val="100000"/>
+              <a:buChar char="●"/>
+            </a:pPr>
+            <a:r>
+              <a:rPr lang="en-US" sz="1500" dirty="0">
+                <a:solidFill>
+                  <a:srgbClr val="1A1A1A"/>
+                </a:solidFill>
+                <a:latin typeface="Segoe UI" pitchFamily="34" charset="0"/>
+                <a:ea typeface="Segoe UI" pitchFamily="34" charset="-122"/>
+                <a:cs typeface="Segoe UI" pitchFamily="34" charset="-120"/>
+              </a:rPr>
+              <a:t>Lab 07 — Real-world troubleshooting: RBAC 401</a:t>
+            </a:r>
+            <a:endParaRPr lang="en-US" sz="1500" dirty="0"/>
+          </a:p>
+          <a:p>
+            <a:pPr marL="254000" indent="-254000">
+              <a:lnSpc>
+                <a:spcPct val="125000"/>
+              </a:lnSpc>
+              <a:buSzPct val="100000"/>
+              <a:buChar char="●"/>
+            </a:pPr>
+            <a:r>
+              <a:rPr lang="en-US" sz="1500" dirty="0">
+                <a:solidFill>
+                  <a:srgbClr val="1A1A1A"/>
+                </a:solidFill>
+                <a:latin typeface="Segoe UI" pitchFamily="34" charset="0"/>
+                <a:ea typeface="Segoe UI" pitchFamily="34" charset="-122"/>
+                <a:cs typeface="Segoe UI" pitchFamily="34" charset="-120"/>
+              </a:rPr>
+              <a:t>Lab 08 — Production readiness and decision gates</a:t>
             </a:r>
             <a:endParaRPr lang="en-US" sz="1500" dirty="0"/>
           </a:p>
@@ -3001,7 +3430,7 @@
                   <a:srgbClr val="767676"/>
                 </a:solidFill>
               </a:rPr>
-              <a:t>11 / 14</a:t>
+              <a:t>11 / 19</a:t>
             </a:r>
             <a:endParaRPr lang="en-US" sz="900" dirty="0"/>
           </a:p>
@@ -3054,7 +3483,7 @@
             <a:avLst/>
           </a:prstGeom>
           <a:solidFill>
-            <a:srgbClr val="107C10"/>
+            <a:srgbClr val="0078D4"/>
           </a:solidFill>
           <a:ln/>
         </p:spPr>
@@ -3086,13 +3515,13 @@
             <a:r>
               <a:rPr lang="en-US" sz="1100" b="1" spc="100" kern="0" dirty="0">
                 <a:solidFill>
-                  <a:srgbClr val="107C10"/>
-                </a:solidFill>
-                <a:latin typeface="Segoe UI" pitchFamily="34" charset="0"/>
-                <a:ea typeface="Segoe UI" pitchFamily="34" charset="-122"/>
-                <a:cs typeface="Segoe UI" pitchFamily="34" charset="-120"/>
-              </a:rPr>
-              <a:t>REAL-WORLD TROUBLESHOOTING</a:t>
+                  <a:srgbClr val="0078D4"/>
+                </a:solidFill>
+                <a:latin typeface="Segoe UI" pitchFamily="34" charset="0"/>
+                <a:ea typeface="Segoe UI" pitchFamily="34" charset="-122"/>
+                <a:cs typeface="Segoe UI" pitchFamily="34" charset="-120"/>
+              </a:rPr>
+              <a:t>ARCHITECTURE</a:t>
             </a:r>
             <a:endParaRPr lang="en-US" sz="1100" dirty="0"/>
           </a:p>
@@ -3131,7 +3560,7 @@
                 <a:ea typeface="Segoe UI" pitchFamily="34" charset="-122"/>
                 <a:cs typeface="Segoe UI" pitchFamily="34" charset="-120"/>
               </a:rPr>
-              <a:t>WI-11 Resolved: Separate Observation from RCA</a:t>
+              <a:t>Supervisor + Specialist Graph</a:t>
             </a:r>
             <a:endParaRPr lang="en-US" sz="2600" dirty="0"/>
           </a:p>
@@ -3194,7 +3623,7 @@
                 <a:ea typeface="Segoe UI" pitchFamily="34" charset="-122"/>
                 <a:cs typeface="Segoe UI" pitchFamily="34" charset="-120"/>
               </a:rPr>
-              <a:t>Historical model 401 recovered on v32; the same runtime principal now passes the complete v34 production release</a:t>
+              <a:t>A LangGraph supervisor routes to three specialist nodes: Evidence Investigator, Risk Analyst, Report Composer</a:t>
             </a:r>
             <a:endParaRPr lang="en-US" sz="1500" dirty="0"/>
           </a:p>
@@ -3215,7 +3644,7 @@
                 <a:ea typeface="Segoe UI" pitchFamily="34" charset="-122"/>
                 <a:cs typeface="Segoe UI" pitchFamily="34" charset="-120"/>
               </a:rPr>
-              <a:t>Validate the actual runtime principal, role dataActions, scope, conditions, network policy and token audience</a:t>
+              <a:t>Each specialist has its own prompt, tool permissions, and evaluation criteria</a:t>
             </a:r>
             <a:endParaRPr lang="en-US" sz="1500" dirty="0"/>
           </a:p>
@@ -3236,7 +3665,7 @@
                 <a:ea typeface="Segoe UI" pitchFamily="34" charset="-122"/>
                 <a:cs typeface="Segoe UI" pitchFamily="34" charset="-120"/>
               </a:rPr>
-              <a:t>Separate MCP failures were fixed with the supported versioned endpoint, RemoteTool connections and current protocol negotiation</a:t>
+              <a:t>Tool isolation by role: Evidence Investigator → defender-conn only, Risk Analyst → anomaly-conn only</a:t>
             </a:r>
             <a:endParaRPr lang="en-US" sz="1500" dirty="0"/>
           </a:p>
@@ -3257,7 +3686,7 @@
                 <a:ea typeface="Segoe UI" pitchFamily="34" charset="-122"/>
                 <a:cs typeface="Segoe UI" pitchFamily="34" charset="-120"/>
               </a:rPr>
-              <a:t>Original incident propagation and independent specialist lookups restored required evidence; strict evaluation thresholds were unchanged</a:t>
+              <a:t>The Report Composer has zero tool access — it only synthesizes</a:t>
             </a:r>
             <a:endParaRPr lang="en-US" sz="1500" dirty="0"/>
           </a:p>
@@ -3278,28 +3707,7 @@
                 <a:ea typeface="Segoe UI" pitchFamily="34" charset="-122"/>
                 <a:cs typeface="Segoe UI" pitchFamily="34" charset="-120"/>
               </a:rPr>
-              <a:t>The old Azure cache explanation remains an unconfirmed hypothesis. A successful redeployment is recovery evidence, not a controlled server-side RCA</a:t>
-            </a:r>
-            <a:endParaRPr lang="en-US" sz="1500" dirty="0"/>
-          </a:p>
-          <a:p>
-            <a:pPr marL="254000" indent="-254000">
-              <a:lnSpc>
-                <a:spcPct val="125000"/>
-              </a:lnSpc>
-              <a:buSzPct val="100000"/>
-              <a:buChar char="●"/>
-            </a:pPr>
-            <a:r>
-              <a:rPr lang="en-US" sz="1500" dirty="0">
-                <a:solidFill>
-                  <a:srgbClr val="1A1A1A"/>
-                </a:solidFill>
-                <a:latin typeface="Segoe UI" pitchFamily="34" charset="0"/>
-                <a:ea typeface="Segoe UI" pitchFamily="34" charset="-122"/>
-                <a:cs typeface="Segoe UI" pitchFamily="34" charset="-120"/>
-              </a:rPr>
-              <a:t>Support request 2609040400007027 is a historical reference; no support-ticket closure is claimed</a:t>
+              <a:t>Supported versioned MCP transport, fresh Entra tokens and RemoteTool connections now work; runtime receipts prove specialist tool execution</a:t>
             </a:r>
             <a:endParaRPr lang="en-US" sz="1500" dirty="0"/>
           </a:p>
@@ -3394,7 +3802,7 @@
                   <a:srgbClr val="767676"/>
                 </a:solidFill>
               </a:rPr>
-              <a:t>12 / 14</a:t>
+              <a:t>12 / 19</a:t>
             </a:r>
             <a:endParaRPr lang="en-US" sz="900" dirty="0"/>
           </a:p>
@@ -3485,7 +3893,7 @@
                 <a:ea typeface="Segoe UI" pitchFamily="34" charset="-122"/>
                 <a:cs typeface="Segoe UI" pitchFamily="34" charset="-120"/>
               </a:rPr>
-              <a:t>PRODUCTION READINESS</a:t>
+              <a:t>TOOLS</a:t>
             </a:r>
             <a:endParaRPr lang="en-US" sz="1100" dirty="0"/>
           </a:p>
@@ -3524,7 +3932,7 @@
                 <a:ea typeface="Segoe UI" pitchFamily="34" charset="-122"/>
                 <a:cs typeface="Segoe UI" pitchFamily="34" charset="-120"/>
               </a:rPr>
-              <a:t>Honest Gates, Not False Confidence</a:t>
+              <a:t>Four Layers: Implement, Host, Register, Consume</a:t>
             </a:r>
             <a:endParaRPr lang="en-US" sz="2600" dirty="0"/>
           </a:p>
@@ -3587,7 +3995,7 @@
                 <a:ea typeface="Segoe UI" pitchFamily="34" charset="-122"/>
                 <a:cs typeface="Segoe UI" pitchFamily="34" charset="-120"/>
               </a:rPr>
-              <a:t>Four experiment tracks: load testing, Cosmos DB checkpointer, Agent 365 onboarding, continuous evaluation</a:t>
+              <a:t>Layer 1 — Implementation: custom MCP server code (Defender tools, anomaly tools)</a:t>
             </a:r>
             <a:endParaRPr lang="en-US" sz="1500" dirty="0"/>
           </a:p>
@@ -3608,7 +4016,7 @@
                 <a:ea typeface="Segoe UI" pitchFamily="34" charset="-122"/>
                 <a:cs typeface="Segoe UI" pitchFamily="34" charset="-120"/>
               </a:rPr>
-              <a:t>Quality gate passed: 8 captures, zero policy failures, 21/21 judge checks, verified safety refusal and tool receipts</a:t>
+              <a:t>Layer 2 — Hosting: independent Azure Container Apps, own auth/networking/health checks</a:t>
             </a:r>
             <a:endParaRPr lang="en-US" sz="1500" dirty="0"/>
           </a:p>
@@ -3629,7 +4037,7 @@
                 <a:ea typeface="Segoe UI" pitchFamily="34" charset="-122"/>
                 <a:cs typeface="Segoe UI" pitchFamily="34" charset="-120"/>
               </a:rPr>
-              <a:t>Scale, Security, Operations gates: Conditional — partial evidence, named follow-ups</a:t>
+              <a:t>Layer 3 — Registration: Foundry connections define endpoint + credential policy per MCP server</a:t>
             </a:r>
             <a:endParaRPr lang="en-US" sz="1500" dirty="0"/>
           </a:p>
@@ -3650,7 +4058,7 @@
                 <a:ea typeface="Segoe UI" pitchFamily="34" charset="-122"/>
                 <a:cs typeface="Segoe UI" pitchFamily="34" charset="-120"/>
               </a:rPr>
-              <a:t>Platform status, Data, Cost gates: Not testable in this PoC — require commercial/legal/platform confirmation</a:t>
+              <a:t>Layer 4 — Consumption: Foundry Toolbox aggregates registered tools for reuse across agents</a:t>
             </a:r>
             <a:endParaRPr lang="en-US" sz="1500" dirty="0"/>
           </a:p>
@@ -3671,7 +4079,7 @@
                 <a:ea typeface="Segoe UI" pitchFamily="34" charset="-122"/>
                 <a:cs typeface="Segoe UI" pitchFamily="34" charset="-120"/>
               </a:rPr>
-              <a:t>Overall recommendation: conditional go for continued PoC-to-pilot investment, not an unconditional yes/no</a:t>
+              <a:t>The Toolbox is the registration/aggregation layer — not the hosting runtime for your MCP code</a:t>
             </a:r>
             <a:endParaRPr lang="en-US" sz="1500" dirty="0"/>
           </a:p>
@@ -3766,7 +4174,7 @@
                   <a:srgbClr val="767676"/>
                 </a:solidFill>
               </a:rPr>
-              <a:t>13 / 14</a:t>
+              <a:t>13 / 19</a:t>
             </a:r>
             <a:endParaRPr lang="en-US" sz="900" dirty="0"/>
           </a:p>
@@ -3857,7 +4265,7 @@
                 <a:ea typeface="Segoe UI" pitchFamily="34" charset="-122"/>
                 <a:cs typeface="Segoe UI" pitchFamily="34" charset="-120"/>
               </a:rPr>
-              <a:t>WRAP-UP</a:t>
+              <a:t>DEPLOYMENT</a:t>
             </a:r>
             <a:endParaRPr lang="en-US" sz="1100" dirty="0"/>
           </a:p>
@@ -3896,7 +4304,7 @@
                 <a:ea typeface="Segoe UI" pitchFamily="34" charset="-122"/>
                 <a:cs typeface="Segoe UI" pitchFamily="34" charset="-120"/>
               </a:rPr>
-              <a:t>A Proven Release, with Explicit Limits</a:t>
+              <a:t>One Manifest: azure.yaml + azd</a:t>
             </a:r>
             <a:endParaRPr lang="en-US" sz="2600" dirty="0"/>
           </a:p>
@@ -3959,7 +4367,7 @@
                 <a:ea typeface="Segoe UI" pitchFamily="34" charset="-122"/>
                 <a:cs typeface="Segoe UI" pitchFamily="34" charset="-120"/>
               </a:rPr>
-              <a:t>The deployment and evaluation ran for real; the MCP security telemetry is synthetic, not live customer data</a:t>
+              <a:t>azure.yaml wires the Foundry project, model deployment, Toolbox connections, and the hosted agent service</a:t>
             </a:r>
             <a:endParaRPr lang="en-US" sz="1500" dirty="0"/>
           </a:p>
@@ -3980,7 +4388,7 @@
                 <a:ea typeface="Segoe UI" pitchFamily="34" charset="-122"/>
                 <a:cs typeface="Segoe UI" pitchFamily="34" charset="-120"/>
               </a:rPr>
-              <a:t>Repository: github.com/devopsabcs-engineering/foundry-hosted-agents</a:t>
+              <a:t>kind: hosted — Foundry operates the session compute; you own only the graph code</a:t>
             </a:r>
             <a:endParaRPr lang="en-US" sz="1500" dirty="0"/>
           </a:p>
@@ -4001,7 +4409,7 @@
                 <a:ea typeface="Segoe UI" pitchFamily="34" charset="-122"/>
                 <a:cs typeface="Segoe UI" pitchFamily="34" charset="-120"/>
               </a:rPr>
-              <a:t>Wiki: current architecture, verified release artifacts, operational runbook, and resolved WI-11 history</a:t>
+              <a:t>dependencyResolution: remote_build — Foundry builds your Python dependencies server-side</a:t>
             </a:r>
             <a:endParaRPr lang="en-US" sz="1500" dirty="0"/>
           </a:p>
@@ -4022,7 +4430,7 @@
                 <a:ea typeface="Segoe UI" pitchFamily="34" charset="-122"/>
                 <a:cs typeface="Segoe UI" pitchFamily="34" charset="-120"/>
               </a:rPr>
-              <a:t>Full bilingual step-by-step labs: this deck’s companion GitHub Pages site</a:t>
+              <a:t>protocol: responses — OpenAI-compatible Responses protocol with streaming support</a:t>
             </a:r>
             <a:endParaRPr lang="en-US" sz="1500" dirty="0"/>
           </a:p>
@@ -4043,7 +4451,7 @@
                 <a:ea typeface="Segoe UI" pitchFamily="34" charset="-122"/>
                 <a:cs typeface="Segoe UI" pitchFamily="34" charset="-120"/>
               </a:rPr>
-              <a:t>Production v34 smoke passed; zero trailing-window exceptions is not a soak test or proof of complete distributed tracing</a:t>
+              <a:t>azd provision manages infrastructure; azd deploy publishes or reuses an unchanged agent version. Separate lifecycles; verify remote route before and after</a:t>
             </a:r>
             <a:endParaRPr lang="en-US" sz="1500" dirty="0"/>
           </a:p>
@@ -4138,7 +4546,1888 @@
                   <a:srgbClr val="767676"/>
                 </a:solidFill>
               </a:rPr>
-              <a:t>14 / 14</a:t>
+              <a:t>14 / 19</a:t>
+            </a:r>
+            <a:endParaRPr lang="en-US" sz="900" dirty="0"/>
+          </a:p>
+        </p:txBody>
+      </p:sp>
+    </p:spTree>
+  </p:cSld>
+  <p:clrMapOvr>
+    <a:masterClrMapping/>
+  </p:clrMapOvr>
+</p:sld>
+</file>
+
+<file path=ppt/slides/slide15.xml><?xml version="1.0" encoding="utf-8"?>
+<p:sld xmlns:a="http://schemas.openxmlformats.org/drawingml/2006/main" xmlns:r="http://schemas.openxmlformats.org/officeDocument/2006/relationships" xmlns:p="http://schemas.openxmlformats.org/presentationml/2006/main">
+  <p:cSld name="Slide 15">
+    <p:bg>
+      <p:bgPr>
+        <a:solidFill>
+          <a:srgbClr val="FAFBFC"/>
+        </a:solidFill>
+      </p:bgPr>
+    </p:bg>
+    <p:spTree>
+      <p:nvGrpSpPr>
+        <p:cNvPr id="1" name=""/>
+        <p:cNvGrpSpPr/>
+        <p:nvPr/>
+      </p:nvGrpSpPr>
+      <p:grpSpPr>
+        <a:xfrm>
+          <a:off x="0" y="0"/>
+          <a:ext cx="0" cy="0"/>
+          <a:chOff x="0" y="0"/>
+          <a:chExt cx="0" cy="0"/>
+        </a:xfrm>
+      </p:grpSpPr>
+      <p:sp>
+        <p:nvSpPr>
+          <p:cNvPr id="2" name="Shape 0"/>
+          <p:cNvSpPr/>
+          <p:nvPr/>
+        </p:nvSpPr>
+        <p:spPr>
+          <a:xfrm>
+            <a:off x="0" y="0"/>
+            <a:ext cx="12188952" cy="82296"/>
+          </a:xfrm>
+          <a:prstGeom prst="rect">
+            <a:avLst/>
+          </a:prstGeom>
+          <a:solidFill>
+            <a:srgbClr val="0078D4"/>
+          </a:solidFill>
+          <a:ln/>
+        </p:spPr>
+      </p:sp>
+      <p:sp>
+        <p:nvSpPr>
+          <p:cNvPr id="3" name="Text 1"/>
+          <p:cNvSpPr/>
+          <p:nvPr/>
+        </p:nvSpPr>
+        <p:spPr>
+          <a:xfrm>
+            <a:off x="457200" y="292608"/>
+            <a:ext cx="11247120" cy="274320"/>
+          </a:xfrm>
+          <a:prstGeom prst="rect">
+            <a:avLst/>
+          </a:prstGeom>
+          <a:noFill/>
+          <a:ln/>
+        </p:spPr>
+        <p:txBody>
+          <a:bodyPr wrap="square" rtlCol="0" anchor="ctr"/>
+          <a:lstStyle/>
+          <a:p>
+            <a:pPr indent="0" marL="0">
+              <a:buNone/>
+            </a:pPr>
+            <a:r>
+              <a:rPr lang="en-US" sz="1100" b="1" spc="100" kern="0" dirty="0">
+                <a:solidFill>
+                  <a:srgbClr val="0078D4"/>
+                </a:solidFill>
+                <a:latin typeface="Segoe UI" pitchFamily="34" charset="0"/>
+                <a:ea typeface="Segoe UI" pitchFamily="34" charset="-122"/>
+                <a:cs typeface="Segoe UI" pitchFamily="34" charset="-120"/>
+              </a:rPr>
+              <a:t>EVALUATION</a:t>
+            </a:r>
+            <a:endParaRPr lang="en-US" sz="1100" dirty="0"/>
+          </a:p>
+        </p:txBody>
+      </p:sp>
+      <p:sp>
+        <p:nvSpPr>
+          <p:cNvPr id="4" name="Text 2"/>
+          <p:cNvSpPr/>
+          <p:nvPr/>
+        </p:nvSpPr>
+        <p:spPr>
+          <a:xfrm>
+            <a:off x="457200" y="548640"/>
+            <a:ext cx="11247120" cy="640080"/>
+          </a:xfrm>
+          <a:prstGeom prst="rect">
+            <a:avLst/>
+          </a:prstGeom>
+          <a:noFill/>
+          <a:ln/>
+        </p:spPr>
+        <p:txBody>
+          <a:bodyPr wrap="square" rtlCol="0" anchor="ctr"/>
+          <a:lstStyle/>
+          <a:p>
+            <a:pPr indent="0" marL="0">
+              <a:buNone/>
+            </a:pPr>
+            <a:r>
+              <a:rPr lang="en-US" sz="2600" b="1" dirty="0">
+                <a:solidFill>
+                  <a:srgbClr val="001B3D"/>
+                </a:solidFill>
+                <a:latin typeface="Segoe UI" pitchFamily="34" charset="0"/>
+                <a:ea typeface="Segoe UI" pitchFamily="34" charset="-122"/>
+                <a:cs typeface="Segoe UI" pitchFamily="34" charset="-120"/>
+              </a:rPr>
+              <a:t>Deterministic Checks + LLM-as-Judge Rubrics</a:t>
+            </a:r>
+            <a:endParaRPr lang="en-US" sz="2600" dirty="0"/>
+          </a:p>
+        </p:txBody>
+      </p:sp>
+      <p:sp>
+        <p:nvSpPr>
+          <p:cNvPr id="5" name="Shape 3"/>
+          <p:cNvSpPr/>
+          <p:nvPr/>
+        </p:nvSpPr>
+        <p:spPr>
+          <a:xfrm>
+            <a:off x="457200" y="1188720"/>
+            <a:ext cx="11247120" cy="10973"/>
+          </a:xfrm>
+          <a:prstGeom prst="rect">
+            <a:avLst/>
+          </a:prstGeom>
+          <a:solidFill>
+            <a:srgbClr val="E1E5E8"/>
+          </a:solidFill>
+          <a:ln/>
+        </p:spPr>
+      </p:sp>
+      <p:sp>
+        <p:nvSpPr>
+          <p:cNvPr id="6" name="Text 4"/>
+          <p:cNvSpPr/>
+          <p:nvPr/>
+        </p:nvSpPr>
+        <p:spPr>
+          <a:xfrm>
+            <a:off x="548640" y="1463040"/>
+            <a:ext cx="11064240" cy="5029200"/>
+          </a:xfrm>
+          <a:prstGeom prst="rect">
+            <a:avLst/>
+          </a:prstGeom>
+          <a:noFill/>
+          <a:ln/>
+        </p:spPr>
+        <p:txBody>
+          <a:bodyPr wrap="square" rtlCol="0" anchor="t"/>
+          <a:lstStyle/>
+          <a:p>
+            <a:pPr marL="254000" indent="-254000">
+              <a:lnSpc>
+                <a:spcPct val="125000"/>
+              </a:lnSpc>
+              <a:buSzPct val="100000"/>
+              <a:buChar char="●"/>
+            </a:pPr>
+            <a:r>
+              <a:rPr lang="en-US" sz="1500" dirty="0">
+                <a:solidFill>
+                  <a:srgbClr val="1A1A1A"/>
+                </a:solidFill>
+                <a:latin typeface="Segoe UI" pitchFamily="34" charset="0"/>
+                <a:ea typeface="Segoe UI" pitchFamily="34" charset="-122"/>
+                <a:cs typeface="Segoe UI" pitchFamily="34" charset="-120"/>
+              </a:rPr>
+              <a:t>Golden dataset: 8 categories (true/false positive, ambiguous, missing data, conflicting tools, prompt injection, unauthorized actions, unsupported conclusions)</a:t>
+            </a:r>
+            <a:endParaRPr lang="en-US" sz="1500" dirty="0"/>
+          </a:p>
+          <a:p>
+            <a:pPr marL="254000" indent="-254000">
+              <a:lnSpc>
+                <a:spcPct val="125000"/>
+              </a:lnSpc>
+              <a:buSzPct val="100000"/>
+              <a:buChar char="●"/>
+            </a:pPr>
+            <a:r>
+              <a:rPr lang="en-US" sz="1500" dirty="0">
+                <a:solidFill>
+                  <a:srgbClr val="1A1A1A"/>
+                </a:solidFill>
+                <a:latin typeface="Segoe UI" pitchFamily="34" charset="0"/>
+                <a:ea typeface="Segoe UI" pitchFamily="34" charset="-122"/>
+                <a:cs typeface="Segoe UI" pitchFamily="34" charset="-120"/>
+              </a:rPr>
+              <a:t>Deterministic: schema validity, required citations, allowed tool calls, policy constraints — fast, reproducible</a:t>
+            </a:r>
+            <a:endParaRPr lang="en-US" sz="1500" dirty="0"/>
+          </a:p>
+          <a:p>
+            <a:pPr marL="254000" indent="-254000">
+              <a:lnSpc>
+                <a:spcPct val="125000"/>
+              </a:lnSpc>
+              <a:buSzPct val="100000"/>
+              <a:buChar char="●"/>
+            </a:pPr>
+            <a:r>
+              <a:rPr lang="en-US" sz="1500" dirty="0">
+                <a:solidFill>
+                  <a:srgbClr val="1A1A1A"/>
+                </a:solidFill>
+                <a:latin typeface="Segoe UI" pitchFamily="34" charset="0"/>
+                <a:ea typeface="Segoe UI" pitchFamily="34" charset="-122"/>
+                <a:cs typeface="Segoe UI" pitchFamily="34" charset="-120"/>
+              </a:rPr>
+              <a:t>Verified Foundry judges: coherence, groundedness, task adherence. Seven reports per metric, 21/21 passed at unchanged 100% thresholds</a:t>
+            </a:r>
+            <a:endParaRPr lang="en-US" sz="1500" dirty="0"/>
+          </a:p>
+          <a:p>
+            <a:pPr marL="254000" indent="-254000">
+              <a:lnSpc>
+                <a:spcPct val="125000"/>
+              </a:lnSpc>
+              <a:buSzPct val="100000"/>
+              <a:buChar char="●"/>
+            </a:pPr>
+            <a:r>
+              <a:rPr lang="en-US" sz="1500" dirty="0">
+                <a:solidFill>
+                  <a:srgbClr val="1A1A1A"/>
+                </a:solidFill>
+                <a:latin typeface="Segoe UI" pitchFamily="34" charset="0"/>
+                <a:ea typeface="Segoe UI" pitchFamily="34" charset="-122"/>
+                <a:cs typeface="Segoe UI" pitchFamily="34" charset="-120"/>
+              </a:rPr>
+              <a:t>Eight captures, zero deterministic policy failures; inject-001 is a verified safety refusal with no tool calls, not a model-judge result</a:t>
+            </a:r>
+            <a:endParaRPr lang="en-US" sz="1500" dirty="0"/>
+          </a:p>
+          <a:p>
+            <a:pPr marL="254000" indent="-254000">
+              <a:lnSpc>
+                <a:spcPct val="125000"/>
+              </a:lnSpc>
+              <a:buSzPct val="100000"/>
+              <a:buChar char="●"/>
+            </a:pPr>
+            <a:r>
+              <a:rPr lang="en-US" sz="1500" dirty="0">
+                <a:solidFill>
+                  <a:srgbClr val="1A1A1A"/>
+                </a:solidFill>
+                <a:latin typeface="Segoe UI" pitchFamily="34" charset="0"/>
+                <a:ea typeface="Segoe UI" pitchFamily="34" charset="-122"/>
+                <a:cs typeface="Segoe UI" pitchFamily="34" charset="-120"/>
+              </a:rPr>
+              <a:t>Policy rules (e.g. never claim an unauthorized remediation action) stay deterministic, not LLM-judged</a:t>
+            </a:r>
+            <a:endParaRPr lang="en-US" sz="1500" dirty="0"/>
+          </a:p>
+        </p:txBody>
+      </p:sp>
+      <p:sp>
+        <p:nvSpPr>
+          <p:cNvPr id="8" name="Shape 5"/>
+          <p:cNvSpPr/>
+          <p:nvPr/>
+        </p:nvSpPr>
+        <p:spPr>
+          <a:xfrm>
+            <a:off x="0" y="6784848"/>
+            <a:ext cx="12188952" cy="27432"/>
+          </a:xfrm>
+          <a:prstGeom prst="rect">
+            <a:avLst/>
+          </a:prstGeom>
+          <a:solidFill>
+            <a:srgbClr val="E1E5E8"/>
+          </a:solidFill>
+          <a:ln/>
+        </p:spPr>
+      </p:sp>
+      <p:sp>
+        <p:nvSpPr>
+          <p:cNvPr id="9" name="Text 6"/>
+          <p:cNvSpPr/>
+          <p:nvPr/>
+        </p:nvSpPr>
+        <p:spPr>
+          <a:xfrm>
+            <a:off x="457200" y="6537960"/>
+            <a:ext cx="8229600" cy="256032"/>
+          </a:xfrm>
+          <a:prstGeom prst="rect">
+            <a:avLst/>
+          </a:prstGeom>
+          <a:noFill/>
+          <a:ln/>
+        </p:spPr>
+        <p:txBody>
+          <a:bodyPr wrap="square" rtlCol="0" anchor="ctr"/>
+          <a:lstStyle/>
+          <a:p>
+            <a:pPr indent="0" marL="0">
+              <a:buNone/>
+            </a:pPr>
+            <a:r>
+              <a:rPr lang="en-US" sz="900" dirty="0">
+                <a:solidFill>
+                  <a:srgbClr val="767676"/>
+                </a:solidFill>
+                <a:latin typeface="Segoe UI" pitchFamily="34" charset="0"/>
+                <a:ea typeface="Segoe UI" pitchFamily="34" charset="-122"/>
+                <a:cs typeface="Segoe UI" pitchFamily="34" charset="-120"/>
+              </a:rPr>
+              <a:t>Foundry Hosted Agents Workshop</a:t>
+            </a:r>
+            <a:endParaRPr lang="en-US" sz="900" dirty="0"/>
+          </a:p>
+        </p:txBody>
+      </p:sp>
+      <p:sp>
+        <p:nvSpPr>
+          <p:cNvPr id="10" name="Text 7"/>
+          <p:cNvSpPr/>
+          <p:nvPr/>
+        </p:nvSpPr>
+        <p:spPr>
+          <a:xfrm>
+            <a:off x="11338560" y="6528816"/>
+            <a:ext cx="548640" cy="219456"/>
+          </a:xfrm>
+          <a:prstGeom prst="rect">
+            <a:avLst/>
+          </a:prstGeom>
+          <a:noFill/>
+          <a:ln/>
+        </p:spPr>
+        <p:txBody>
+          <a:bodyPr wrap="square" rtlCol="0" anchor="ctr"/>
+          <a:lstStyle/>
+          <a:p>
+            <a:pPr algn="r" indent="0" marL="0">
+              <a:buNone/>
+            </a:pPr>
+            <a:r>
+              <a:rPr lang="en-US" sz="900" dirty="0">
+                <a:solidFill>
+                  <a:srgbClr val="767676"/>
+                </a:solidFill>
+              </a:rPr>
+              <a:t>15 / 19</a:t>
+            </a:r>
+            <a:endParaRPr lang="en-US" sz="900" dirty="0"/>
+          </a:p>
+        </p:txBody>
+      </p:sp>
+    </p:spTree>
+  </p:cSld>
+  <p:clrMapOvr>
+    <a:masterClrMapping/>
+  </p:clrMapOvr>
+</p:sld>
+</file>
+
+<file path=ppt/slides/slide16.xml><?xml version="1.0" encoding="utf-8"?>
+<p:sld xmlns:a="http://schemas.openxmlformats.org/drawingml/2006/main" xmlns:r="http://schemas.openxmlformats.org/officeDocument/2006/relationships" xmlns:p="http://schemas.openxmlformats.org/presentationml/2006/main">
+  <p:cSld name="Slide 16">
+    <p:bg>
+      <p:bgPr>
+        <a:solidFill>
+          <a:srgbClr val="FAFBFC"/>
+        </a:solidFill>
+      </p:bgPr>
+    </p:bg>
+    <p:spTree>
+      <p:nvGrpSpPr>
+        <p:cNvPr id="1" name=""/>
+        <p:cNvGrpSpPr/>
+        <p:nvPr/>
+      </p:nvGrpSpPr>
+      <p:grpSpPr>
+        <a:xfrm>
+          <a:off x="0" y="0"/>
+          <a:ext cx="0" cy="0"/>
+          <a:chOff x="0" y="0"/>
+          <a:chExt cx="0" cy="0"/>
+        </a:xfrm>
+      </p:grpSpPr>
+      <p:sp>
+        <p:nvSpPr>
+          <p:cNvPr id="2" name="Shape 0"/>
+          <p:cNvSpPr/>
+          <p:nvPr/>
+        </p:nvSpPr>
+        <p:spPr>
+          <a:xfrm>
+            <a:off x="0" y="0"/>
+            <a:ext cx="12188952" cy="82296"/>
+          </a:xfrm>
+          <a:prstGeom prst="rect">
+            <a:avLst/>
+          </a:prstGeom>
+          <a:solidFill>
+            <a:srgbClr val="0078D4"/>
+          </a:solidFill>
+          <a:ln/>
+        </p:spPr>
+      </p:sp>
+      <p:sp>
+        <p:nvSpPr>
+          <p:cNvPr id="3" name="Text 1"/>
+          <p:cNvSpPr/>
+          <p:nvPr/>
+        </p:nvSpPr>
+        <p:spPr>
+          <a:xfrm>
+            <a:off x="457200" y="292608"/>
+            <a:ext cx="11247120" cy="274320"/>
+          </a:xfrm>
+          <a:prstGeom prst="rect">
+            <a:avLst/>
+          </a:prstGeom>
+          <a:noFill/>
+          <a:ln/>
+        </p:spPr>
+        <p:txBody>
+          <a:bodyPr wrap="square" rtlCol="0" anchor="ctr"/>
+          <a:lstStyle/>
+          <a:p>
+            <a:pPr indent="0" marL="0">
+              <a:buNone/>
+            </a:pPr>
+            <a:r>
+              <a:rPr lang="en-US" sz="1100" b="1" spc="100" kern="0" dirty="0">
+                <a:solidFill>
+                  <a:srgbClr val="0078D4"/>
+                </a:solidFill>
+                <a:latin typeface="Segoe UI" pitchFamily="34" charset="0"/>
+                <a:ea typeface="Segoe UI" pitchFamily="34" charset="-122"/>
+                <a:cs typeface="Segoe UI" pitchFamily="34" charset="-120"/>
+              </a:rPr>
+              <a:t>CI/CD</a:t>
+            </a:r>
+            <a:endParaRPr lang="en-US" sz="1100" dirty="0"/>
+          </a:p>
+        </p:txBody>
+      </p:sp>
+      <p:sp>
+        <p:nvSpPr>
+          <p:cNvPr id="4" name="Text 2"/>
+          <p:cNvSpPr/>
+          <p:nvPr/>
+        </p:nvSpPr>
+        <p:spPr>
+          <a:xfrm>
+            <a:off x="457200" y="548640"/>
+            <a:ext cx="11247120" cy="640080"/>
+          </a:xfrm>
+          <a:prstGeom prst="rect">
+            <a:avLst/>
+          </a:prstGeom>
+          <a:noFill/>
+          <a:ln/>
+        </p:spPr>
+        <p:txBody>
+          <a:bodyPr wrap="square" rtlCol="0" anchor="ctr"/>
+          <a:lstStyle/>
+          <a:p>
+            <a:pPr indent="0" marL="0">
+              <a:buNone/>
+            </a:pPr>
+            <a:r>
+              <a:rPr lang="en-US" sz="2600" b="1" dirty="0">
+                <a:solidFill>
+                  <a:srgbClr val="001B3D"/>
+                </a:solidFill>
+                <a:latin typeface="Segoe UI" pitchFamily="34" charset="0"/>
+                <a:ea typeface="Segoe UI" pitchFamily="34" charset="-122"/>
+                <a:cs typeface="Segoe UI" pitchFamily="34" charset="-120"/>
+              </a:rPr>
+              <a:t>Evaluation-Gated Release Pipeline</a:t>
+            </a:r>
+            <a:endParaRPr lang="en-US" sz="2600" dirty="0"/>
+          </a:p>
+        </p:txBody>
+      </p:sp>
+      <p:sp>
+        <p:nvSpPr>
+          <p:cNvPr id="5" name="Shape 3"/>
+          <p:cNvSpPr/>
+          <p:nvPr/>
+        </p:nvSpPr>
+        <p:spPr>
+          <a:xfrm>
+            <a:off x="457200" y="1188720"/>
+            <a:ext cx="11247120" cy="10973"/>
+          </a:xfrm>
+          <a:prstGeom prst="rect">
+            <a:avLst/>
+          </a:prstGeom>
+          <a:solidFill>
+            <a:srgbClr val="E1E5E8"/>
+          </a:solidFill>
+          <a:ln/>
+        </p:spPr>
+      </p:sp>
+      <p:sp>
+        <p:nvSpPr>
+          <p:cNvPr id="6" name="Text 4"/>
+          <p:cNvSpPr/>
+          <p:nvPr/>
+        </p:nvSpPr>
+        <p:spPr>
+          <a:xfrm>
+            <a:off x="548640" y="1463040"/>
+            <a:ext cx="11064240" cy="5029200"/>
+          </a:xfrm>
+          <a:prstGeom prst="rect">
+            <a:avLst/>
+          </a:prstGeom>
+          <a:noFill/>
+          <a:ln/>
+        </p:spPr>
+        <p:txBody>
+          <a:bodyPr wrap="square" rtlCol="0" anchor="t"/>
+          <a:lstStyle/>
+          <a:p>
+            <a:pPr marL="254000" indent="-254000">
+              <a:lnSpc>
+                <a:spcPct val="125000"/>
+              </a:lnSpc>
+              <a:buSzPct val="100000"/>
+              <a:buChar char="●"/>
+            </a:pPr>
+            <a:r>
+              <a:rPr lang="en-US" sz="1500" dirty="0">
+                <a:solidFill>
+                  <a:srgbClr val="1A1A1A"/>
+                </a:solidFill>
+                <a:latin typeface="Segoe UI" pitchFamily="34" charset="0"/>
+                <a:ea typeface="Segoe UI" pitchFamily="34" charset="-122"/>
+                <a:cs typeface="Segoe UI" pitchFamily="34" charset="-120"/>
+              </a:rPr>
+              <a:t>One protected release path: deploy-and-evaluate.yml; hosted-agent-cd.yml delegates to it. Separate staging/production accounts and MCP apps</a:t>
+            </a:r>
+            <a:endParaRPr lang="en-US" sz="1500" dirty="0"/>
+          </a:p>
+          <a:p>
+            <a:pPr marL="254000" indent="-254000">
+              <a:lnSpc>
+                <a:spcPct val="125000"/>
+              </a:lnSpc>
+              <a:buSzPct val="100000"/>
+              <a:buChar char="●"/>
+            </a:pPr>
+            <a:r>
+              <a:rPr lang="en-US" sz="1500" dirty="0">
+                <a:solidFill>
+                  <a:srgbClr val="1A1A1A"/>
+                </a:solidFill>
+                <a:latin typeface="Segoe UI" pitchFamily="34" charset="0"/>
+                <a:ea typeface="Segoe UI" pitchFamily="34" charset="-122"/>
+                <a:cs typeface="Segoe UI" pitchFamily="34" charset="-120"/>
+              </a:rPr>
+              <a:t>Full flow: lint/tests → Bicep validate → deploy immutable candidate to staging → smoke/contract/streaming tests</a:t>
+            </a:r>
+            <a:endParaRPr lang="en-US" sz="1500" dirty="0"/>
+          </a:p>
+          <a:p>
+            <a:pPr marL="254000" indent="-254000">
+              <a:lnSpc>
+                <a:spcPct val="125000"/>
+              </a:lnSpc>
+              <a:buSzPct val="100000"/>
+              <a:buChar char="●"/>
+            </a:pPr>
+            <a:r>
+              <a:rPr lang="en-US" sz="1500" dirty="0">
+                <a:solidFill>
+                  <a:srgbClr val="1A1A1A"/>
+                </a:solidFill>
+                <a:latin typeface="Segoe UI" pitchFamily="34" charset="0"/>
+                <a:ea typeface="Segoe UI" pitchFamily="34" charset="-122"/>
+                <a:cs typeface="Segoe UI" pitchFamily="34" charset="-120"/>
+              </a:rPr>
+              <a:t>Offline evaluation quality gate runs against the staging candidate before any manual production approval</a:t>
+            </a:r>
+            <a:endParaRPr lang="en-US" sz="1500" dirty="0"/>
+          </a:p>
+          <a:p>
+            <a:pPr marL="254000" indent="-254000">
+              <a:lnSpc>
+                <a:spcPct val="125000"/>
+              </a:lnSpc>
+              <a:buSzPct val="100000"/>
+              <a:buChar char="●"/>
+            </a:pPr>
+            <a:r>
+              <a:rPr lang="en-US" sz="1500" dirty="0">
+                <a:solidFill>
+                  <a:srgbClr val="1A1A1A"/>
+                </a:solidFill>
+                <a:latin typeface="Segoe UI" pitchFamily="34" charset="0"/>
+                <a:ea typeface="Segoe UI" pitchFamily="34" charset="-122"/>
+                <a:cs typeface="Segoe UI" pitchFamily="34" charset="-120"/>
+              </a:rPr>
+              <a:t>Secretless OIDC federation — no stored client secrets in either pipeline</a:t>
+            </a:r>
+            <a:endParaRPr lang="en-US" sz="1500" dirty="0"/>
+          </a:p>
+          <a:p>
+            <a:pPr marL="254000" indent="-254000">
+              <a:lnSpc>
+                <a:spcPct val="125000"/>
+              </a:lnSpc>
+              <a:buSzPct val="100000"/>
+              <a:buChar char="●"/>
+            </a:pPr>
+            <a:r>
+              <a:rPr lang="en-US" sz="1500" dirty="0">
+                <a:solidFill>
+                  <a:srgbClr val="1A1A1A"/>
+                </a:solidFill>
+                <a:latin typeface="Segoe UI" pitchFamily="34" charset="0"/>
+                <a:ea typeface="Segoe UI" pitchFamily="34" charset="-122"/>
+                <a:cs typeface="Segoe UI" pitchFamily="34" charset="-120"/>
+              </a:rPr>
+              <a:t>Run 34427432731 passed end to end; Continuous Validation 34427429700 passed unchanged five-stream load. Normal approvals and manual recovery; no automatic rollback or canary</a:t>
+            </a:r>
+            <a:endParaRPr lang="en-US" sz="1500" dirty="0"/>
+          </a:p>
+        </p:txBody>
+      </p:sp>
+      <p:sp>
+        <p:nvSpPr>
+          <p:cNvPr id="8" name="Shape 5"/>
+          <p:cNvSpPr/>
+          <p:nvPr/>
+        </p:nvSpPr>
+        <p:spPr>
+          <a:xfrm>
+            <a:off x="0" y="6784848"/>
+            <a:ext cx="12188952" cy="27432"/>
+          </a:xfrm>
+          <a:prstGeom prst="rect">
+            <a:avLst/>
+          </a:prstGeom>
+          <a:solidFill>
+            <a:srgbClr val="E1E5E8"/>
+          </a:solidFill>
+          <a:ln/>
+        </p:spPr>
+      </p:sp>
+      <p:sp>
+        <p:nvSpPr>
+          <p:cNvPr id="9" name="Text 6"/>
+          <p:cNvSpPr/>
+          <p:nvPr/>
+        </p:nvSpPr>
+        <p:spPr>
+          <a:xfrm>
+            <a:off x="457200" y="6537960"/>
+            <a:ext cx="8229600" cy="256032"/>
+          </a:xfrm>
+          <a:prstGeom prst="rect">
+            <a:avLst/>
+          </a:prstGeom>
+          <a:noFill/>
+          <a:ln/>
+        </p:spPr>
+        <p:txBody>
+          <a:bodyPr wrap="square" rtlCol="0" anchor="ctr"/>
+          <a:lstStyle/>
+          <a:p>
+            <a:pPr indent="0" marL="0">
+              <a:buNone/>
+            </a:pPr>
+            <a:r>
+              <a:rPr lang="en-US" sz="900" dirty="0">
+                <a:solidFill>
+                  <a:srgbClr val="767676"/>
+                </a:solidFill>
+                <a:latin typeface="Segoe UI" pitchFamily="34" charset="0"/>
+                <a:ea typeface="Segoe UI" pitchFamily="34" charset="-122"/>
+                <a:cs typeface="Segoe UI" pitchFamily="34" charset="-120"/>
+              </a:rPr>
+              <a:t>Foundry Hosted Agents Workshop</a:t>
+            </a:r>
+            <a:endParaRPr lang="en-US" sz="900" dirty="0"/>
+          </a:p>
+        </p:txBody>
+      </p:sp>
+      <p:sp>
+        <p:nvSpPr>
+          <p:cNvPr id="10" name="Text 7"/>
+          <p:cNvSpPr/>
+          <p:nvPr/>
+        </p:nvSpPr>
+        <p:spPr>
+          <a:xfrm>
+            <a:off x="11338560" y="6528816"/>
+            <a:ext cx="548640" cy="219456"/>
+          </a:xfrm>
+          <a:prstGeom prst="rect">
+            <a:avLst/>
+          </a:prstGeom>
+          <a:noFill/>
+          <a:ln/>
+        </p:spPr>
+        <p:txBody>
+          <a:bodyPr wrap="square" rtlCol="0" anchor="ctr"/>
+          <a:lstStyle/>
+          <a:p>
+            <a:pPr algn="r" indent="0" marL="0">
+              <a:buNone/>
+            </a:pPr>
+            <a:r>
+              <a:rPr lang="en-US" sz="900" dirty="0">
+                <a:solidFill>
+                  <a:srgbClr val="767676"/>
+                </a:solidFill>
+              </a:rPr>
+              <a:t>16 / 19</a:t>
+            </a:r>
+            <a:endParaRPr lang="en-US" sz="900" dirty="0"/>
+          </a:p>
+        </p:txBody>
+      </p:sp>
+    </p:spTree>
+  </p:cSld>
+  <p:clrMapOvr>
+    <a:masterClrMapping/>
+  </p:clrMapOvr>
+</p:sld>
+</file>
+
+<file path=ppt/slides/slide17.xml><?xml version="1.0" encoding="utf-8"?>
+<p:sld xmlns:a="http://schemas.openxmlformats.org/drawingml/2006/main" xmlns:r="http://schemas.openxmlformats.org/officeDocument/2006/relationships" xmlns:p="http://schemas.openxmlformats.org/presentationml/2006/main">
+  <p:cSld name="Slide 17">
+    <p:bg>
+      <p:bgPr>
+        <a:solidFill>
+          <a:srgbClr val="FAFBFC"/>
+        </a:solidFill>
+      </p:bgPr>
+    </p:bg>
+    <p:spTree>
+      <p:nvGrpSpPr>
+        <p:cNvPr id="1" name=""/>
+        <p:cNvGrpSpPr/>
+        <p:nvPr/>
+      </p:nvGrpSpPr>
+      <p:grpSpPr>
+        <a:xfrm>
+          <a:off x="0" y="0"/>
+          <a:ext cx="0" cy="0"/>
+          <a:chOff x="0" y="0"/>
+          <a:chExt cx="0" cy="0"/>
+        </a:xfrm>
+      </p:grpSpPr>
+      <p:sp>
+        <p:nvSpPr>
+          <p:cNvPr id="2" name="Shape 0"/>
+          <p:cNvSpPr/>
+          <p:nvPr/>
+        </p:nvSpPr>
+        <p:spPr>
+          <a:xfrm>
+            <a:off x="0" y="0"/>
+            <a:ext cx="12188952" cy="82296"/>
+          </a:xfrm>
+          <a:prstGeom prst="rect">
+            <a:avLst/>
+          </a:prstGeom>
+          <a:solidFill>
+            <a:srgbClr val="107C10"/>
+          </a:solidFill>
+          <a:ln/>
+        </p:spPr>
+      </p:sp>
+      <p:sp>
+        <p:nvSpPr>
+          <p:cNvPr id="3" name="Text 1"/>
+          <p:cNvSpPr/>
+          <p:nvPr/>
+        </p:nvSpPr>
+        <p:spPr>
+          <a:xfrm>
+            <a:off x="457200" y="292608"/>
+            <a:ext cx="11247120" cy="274320"/>
+          </a:xfrm>
+          <a:prstGeom prst="rect">
+            <a:avLst/>
+          </a:prstGeom>
+          <a:noFill/>
+          <a:ln/>
+        </p:spPr>
+        <p:txBody>
+          <a:bodyPr wrap="square" rtlCol="0" anchor="ctr"/>
+          <a:lstStyle/>
+          <a:p>
+            <a:pPr indent="0" marL="0">
+              <a:buNone/>
+            </a:pPr>
+            <a:r>
+              <a:rPr lang="en-US" sz="1100" b="1" spc="100" kern="0" dirty="0">
+                <a:solidFill>
+                  <a:srgbClr val="107C10"/>
+                </a:solidFill>
+                <a:latin typeface="Segoe UI" pitchFamily="34" charset="0"/>
+                <a:ea typeface="Segoe UI" pitchFamily="34" charset="-122"/>
+                <a:cs typeface="Segoe UI" pitchFamily="34" charset="-120"/>
+              </a:rPr>
+              <a:t>REAL-WORLD TROUBLESHOOTING</a:t>
+            </a:r>
+            <a:endParaRPr lang="en-US" sz="1100" dirty="0"/>
+          </a:p>
+        </p:txBody>
+      </p:sp>
+      <p:sp>
+        <p:nvSpPr>
+          <p:cNvPr id="4" name="Text 2"/>
+          <p:cNvSpPr/>
+          <p:nvPr/>
+        </p:nvSpPr>
+        <p:spPr>
+          <a:xfrm>
+            <a:off x="457200" y="548640"/>
+            <a:ext cx="11247120" cy="640080"/>
+          </a:xfrm>
+          <a:prstGeom prst="rect">
+            <a:avLst/>
+          </a:prstGeom>
+          <a:noFill/>
+          <a:ln/>
+        </p:spPr>
+        <p:txBody>
+          <a:bodyPr wrap="square" rtlCol="0" anchor="ctr"/>
+          <a:lstStyle/>
+          <a:p>
+            <a:pPr indent="0" marL="0">
+              <a:buNone/>
+            </a:pPr>
+            <a:r>
+              <a:rPr lang="en-US" sz="2600" b="1" dirty="0">
+                <a:solidFill>
+                  <a:srgbClr val="001B3D"/>
+                </a:solidFill>
+                <a:latin typeface="Segoe UI" pitchFamily="34" charset="0"/>
+                <a:ea typeface="Segoe UI" pitchFamily="34" charset="-122"/>
+                <a:cs typeface="Segoe UI" pitchFamily="34" charset="-120"/>
+              </a:rPr>
+              <a:t>WI-11 Resolved: Separate Observation from RCA</a:t>
+            </a:r>
+            <a:endParaRPr lang="en-US" sz="2600" dirty="0"/>
+          </a:p>
+        </p:txBody>
+      </p:sp>
+      <p:sp>
+        <p:nvSpPr>
+          <p:cNvPr id="5" name="Shape 3"/>
+          <p:cNvSpPr/>
+          <p:nvPr/>
+        </p:nvSpPr>
+        <p:spPr>
+          <a:xfrm>
+            <a:off x="457200" y="1188720"/>
+            <a:ext cx="11247120" cy="10973"/>
+          </a:xfrm>
+          <a:prstGeom prst="rect">
+            <a:avLst/>
+          </a:prstGeom>
+          <a:solidFill>
+            <a:srgbClr val="E1E5E8"/>
+          </a:solidFill>
+          <a:ln/>
+        </p:spPr>
+      </p:sp>
+      <p:sp>
+        <p:nvSpPr>
+          <p:cNvPr id="6" name="Text 4"/>
+          <p:cNvSpPr/>
+          <p:nvPr/>
+        </p:nvSpPr>
+        <p:spPr>
+          <a:xfrm>
+            <a:off x="548640" y="1463040"/>
+            <a:ext cx="11064240" cy="5029200"/>
+          </a:xfrm>
+          <a:prstGeom prst="rect">
+            <a:avLst/>
+          </a:prstGeom>
+          <a:noFill/>
+          <a:ln/>
+        </p:spPr>
+        <p:txBody>
+          <a:bodyPr wrap="square" rtlCol="0" anchor="t"/>
+          <a:lstStyle/>
+          <a:p>
+            <a:pPr marL="254000" indent="-254000">
+              <a:lnSpc>
+                <a:spcPct val="125000"/>
+              </a:lnSpc>
+              <a:buSzPct val="100000"/>
+              <a:buChar char="●"/>
+            </a:pPr>
+            <a:r>
+              <a:rPr lang="en-US" sz="1500" dirty="0">
+                <a:solidFill>
+                  <a:srgbClr val="1A1A1A"/>
+                </a:solidFill>
+                <a:latin typeface="Segoe UI" pitchFamily="34" charset="0"/>
+                <a:ea typeface="Segoe UI" pitchFamily="34" charset="-122"/>
+                <a:cs typeface="Segoe UI" pitchFamily="34" charset="-120"/>
+              </a:rPr>
+              <a:t>Historical model 401 recovered on v32; subsequent protected releases passed. Recovery evidence does not prove the original Azure-internal root cause</a:t>
+            </a:r>
+            <a:endParaRPr lang="en-US" sz="1500" dirty="0"/>
+          </a:p>
+          <a:p>
+            <a:pPr marL="254000" indent="-254000">
+              <a:lnSpc>
+                <a:spcPct val="125000"/>
+              </a:lnSpc>
+              <a:buSzPct val="100000"/>
+              <a:buChar char="●"/>
+            </a:pPr>
+            <a:r>
+              <a:rPr lang="en-US" sz="1500" dirty="0">
+                <a:solidFill>
+                  <a:srgbClr val="1A1A1A"/>
+                </a:solidFill>
+                <a:latin typeface="Segoe UI" pitchFamily="34" charset="0"/>
+                <a:ea typeface="Segoe UI" pitchFamily="34" charset="-122"/>
+                <a:cs typeface="Segoe UI" pitchFamily="34" charset="-120"/>
+              </a:rPr>
+              <a:t>Validate the actual runtime principal, role dataActions, scope, conditions, network policy and token audience</a:t>
+            </a:r>
+            <a:endParaRPr lang="en-US" sz="1500" dirty="0"/>
+          </a:p>
+          <a:p>
+            <a:pPr marL="254000" indent="-254000">
+              <a:lnSpc>
+                <a:spcPct val="125000"/>
+              </a:lnSpc>
+              <a:buSzPct val="100000"/>
+              <a:buChar char="●"/>
+            </a:pPr>
+            <a:r>
+              <a:rPr lang="en-US" sz="1500" dirty="0">
+                <a:solidFill>
+                  <a:srgbClr val="1A1A1A"/>
+                </a:solidFill>
+                <a:latin typeface="Segoe UI" pitchFamily="34" charset="0"/>
+                <a:ea typeface="Segoe UI" pitchFamily="34" charset="-122"/>
+                <a:cs typeface="Segoe UI" pitchFamily="34" charset="-120"/>
+              </a:rPr>
+              <a:t>Separate MCP failures were fixed with the supported versioned endpoint, RemoteTool connections and current protocol negotiation</a:t>
+            </a:r>
+            <a:endParaRPr lang="en-US" sz="1500" dirty="0"/>
+          </a:p>
+          <a:p>
+            <a:pPr marL="254000" indent="-254000">
+              <a:lnSpc>
+                <a:spcPct val="125000"/>
+              </a:lnSpc>
+              <a:buSzPct val="100000"/>
+              <a:buChar char="●"/>
+            </a:pPr>
+            <a:r>
+              <a:rPr lang="en-US" sz="1500" dirty="0">
+                <a:solidFill>
+                  <a:srgbClr val="1A1A1A"/>
+                </a:solidFill>
+                <a:latin typeface="Segoe UI" pitchFamily="34" charset="0"/>
+                <a:ea typeface="Segoe UI" pitchFamily="34" charset="-122"/>
+                <a:cs typeface="Segoe UI" pitchFamily="34" charset="-120"/>
+              </a:rPr>
+              <a:t>Original incident propagation and independent specialist lookups restored required evidence; strict evaluation thresholds were unchanged</a:t>
+            </a:r>
+            <a:endParaRPr lang="en-US" sz="1500" dirty="0"/>
+          </a:p>
+          <a:p>
+            <a:pPr marL="254000" indent="-254000">
+              <a:lnSpc>
+                <a:spcPct val="125000"/>
+              </a:lnSpc>
+              <a:buSzPct val="100000"/>
+              <a:buChar char="●"/>
+            </a:pPr>
+            <a:r>
+              <a:rPr lang="en-US" sz="1500" dirty="0">
+                <a:solidFill>
+                  <a:srgbClr val="1A1A1A"/>
+                </a:solidFill>
+                <a:latin typeface="Segoe UI" pitchFamily="34" charset="0"/>
+                <a:ea typeface="Segoe UI" pitchFamily="34" charset="-122"/>
+                <a:cs typeface="Segoe UI" pitchFamily="34" charset="-120"/>
+              </a:rPr>
+              <a:t>The old Azure cache explanation remains an unconfirmed hypothesis. A successful redeployment is recovery evidence, not a controlled server-side RCA</a:t>
+            </a:r>
+            <a:endParaRPr lang="en-US" sz="1500" dirty="0"/>
+          </a:p>
+          <a:p>
+            <a:pPr marL="254000" indent="-254000">
+              <a:lnSpc>
+                <a:spcPct val="125000"/>
+              </a:lnSpc>
+              <a:buSzPct val="100000"/>
+              <a:buChar char="●"/>
+            </a:pPr>
+            <a:r>
+              <a:rPr lang="en-US" sz="1500" dirty="0">
+                <a:solidFill>
+                  <a:srgbClr val="1A1A1A"/>
+                </a:solidFill>
+                <a:latin typeface="Segoe UI" pitchFamily="34" charset="0"/>
+                <a:ea typeface="Segoe UI" pitchFamily="34" charset="-122"/>
+                <a:cs typeface="Segoe UI" pitchFamily="34" charset="-120"/>
+              </a:rPr>
+              <a:t>Support request 2609040400007027 is a historical reference; no support-ticket closure is claimed</a:t>
+            </a:r>
+            <a:endParaRPr lang="en-US" sz="1500" dirty="0"/>
+          </a:p>
+        </p:txBody>
+      </p:sp>
+      <p:sp>
+        <p:nvSpPr>
+          <p:cNvPr id="8" name="Shape 5"/>
+          <p:cNvSpPr/>
+          <p:nvPr/>
+        </p:nvSpPr>
+        <p:spPr>
+          <a:xfrm>
+            <a:off x="0" y="6784848"/>
+            <a:ext cx="12188952" cy="27432"/>
+          </a:xfrm>
+          <a:prstGeom prst="rect">
+            <a:avLst/>
+          </a:prstGeom>
+          <a:solidFill>
+            <a:srgbClr val="E1E5E8"/>
+          </a:solidFill>
+          <a:ln/>
+        </p:spPr>
+      </p:sp>
+      <p:sp>
+        <p:nvSpPr>
+          <p:cNvPr id="9" name="Text 6"/>
+          <p:cNvSpPr/>
+          <p:nvPr/>
+        </p:nvSpPr>
+        <p:spPr>
+          <a:xfrm>
+            <a:off x="457200" y="6537960"/>
+            <a:ext cx="8229600" cy="256032"/>
+          </a:xfrm>
+          <a:prstGeom prst="rect">
+            <a:avLst/>
+          </a:prstGeom>
+          <a:noFill/>
+          <a:ln/>
+        </p:spPr>
+        <p:txBody>
+          <a:bodyPr wrap="square" rtlCol="0" anchor="ctr"/>
+          <a:lstStyle/>
+          <a:p>
+            <a:pPr indent="0" marL="0">
+              <a:buNone/>
+            </a:pPr>
+            <a:r>
+              <a:rPr lang="en-US" sz="900" dirty="0">
+                <a:solidFill>
+                  <a:srgbClr val="767676"/>
+                </a:solidFill>
+                <a:latin typeface="Segoe UI" pitchFamily="34" charset="0"/>
+                <a:ea typeface="Segoe UI" pitchFamily="34" charset="-122"/>
+                <a:cs typeface="Segoe UI" pitchFamily="34" charset="-120"/>
+              </a:rPr>
+              <a:t>Foundry Hosted Agents Workshop</a:t>
+            </a:r>
+            <a:endParaRPr lang="en-US" sz="900" dirty="0"/>
+          </a:p>
+        </p:txBody>
+      </p:sp>
+      <p:sp>
+        <p:nvSpPr>
+          <p:cNvPr id="10" name="Text 7"/>
+          <p:cNvSpPr/>
+          <p:nvPr/>
+        </p:nvSpPr>
+        <p:spPr>
+          <a:xfrm>
+            <a:off x="11338560" y="6528816"/>
+            <a:ext cx="548640" cy="219456"/>
+          </a:xfrm>
+          <a:prstGeom prst="rect">
+            <a:avLst/>
+          </a:prstGeom>
+          <a:noFill/>
+          <a:ln/>
+        </p:spPr>
+        <p:txBody>
+          <a:bodyPr wrap="square" rtlCol="0" anchor="ctr"/>
+          <a:lstStyle/>
+          <a:p>
+            <a:pPr algn="r" indent="0" marL="0">
+              <a:buNone/>
+            </a:pPr>
+            <a:r>
+              <a:rPr lang="en-US" sz="900" dirty="0">
+                <a:solidFill>
+                  <a:srgbClr val="767676"/>
+                </a:solidFill>
+              </a:rPr>
+              <a:t>17 / 19</a:t>
+            </a:r>
+            <a:endParaRPr lang="en-US" sz="900" dirty="0"/>
+          </a:p>
+        </p:txBody>
+      </p:sp>
+    </p:spTree>
+  </p:cSld>
+  <p:clrMapOvr>
+    <a:masterClrMapping/>
+  </p:clrMapOvr>
+</p:sld>
+</file>
+
+<file path=ppt/slides/slide18.xml><?xml version="1.0" encoding="utf-8"?>
+<p:sld xmlns:a="http://schemas.openxmlformats.org/drawingml/2006/main" xmlns:r="http://schemas.openxmlformats.org/officeDocument/2006/relationships" xmlns:p="http://schemas.openxmlformats.org/presentationml/2006/main">
+  <p:cSld name="Slide 18">
+    <p:bg>
+      <p:bgPr>
+        <a:solidFill>
+          <a:srgbClr val="FAFBFC"/>
+        </a:solidFill>
+      </p:bgPr>
+    </p:bg>
+    <p:spTree>
+      <p:nvGrpSpPr>
+        <p:cNvPr id="1" name=""/>
+        <p:cNvGrpSpPr/>
+        <p:nvPr/>
+      </p:nvGrpSpPr>
+      <p:grpSpPr>
+        <a:xfrm>
+          <a:off x="0" y="0"/>
+          <a:ext cx="0" cy="0"/>
+          <a:chOff x="0" y="0"/>
+          <a:chExt cx="0" cy="0"/>
+        </a:xfrm>
+      </p:grpSpPr>
+      <p:sp>
+        <p:nvSpPr>
+          <p:cNvPr id="2" name="Shape 0"/>
+          <p:cNvSpPr/>
+          <p:nvPr/>
+        </p:nvSpPr>
+        <p:spPr>
+          <a:xfrm>
+            <a:off x="0" y="0"/>
+            <a:ext cx="12188952" cy="82296"/>
+          </a:xfrm>
+          <a:prstGeom prst="rect">
+            <a:avLst/>
+          </a:prstGeom>
+          <a:solidFill>
+            <a:srgbClr val="0078D4"/>
+          </a:solidFill>
+          <a:ln/>
+        </p:spPr>
+      </p:sp>
+      <p:sp>
+        <p:nvSpPr>
+          <p:cNvPr id="3" name="Text 1"/>
+          <p:cNvSpPr/>
+          <p:nvPr/>
+        </p:nvSpPr>
+        <p:spPr>
+          <a:xfrm>
+            <a:off x="457200" y="292608"/>
+            <a:ext cx="11247120" cy="274320"/>
+          </a:xfrm>
+          <a:prstGeom prst="rect">
+            <a:avLst/>
+          </a:prstGeom>
+          <a:noFill/>
+          <a:ln/>
+        </p:spPr>
+        <p:txBody>
+          <a:bodyPr wrap="square" rtlCol="0" anchor="ctr"/>
+          <a:lstStyle/>
+          <a:p>
+            <a:pPr indent="0" marL="0">
+              <a:buNone/>
+            </a:pPr>
+            <a:r>
+              <a:rPr lang="en-US" sz="1100" b="1" spc="100" kern="0" dirty="0">
+                <a:solidFill>
+                  <a:srgbClr val="0078D4"/>
+                </a:solidFill>
+                <a:latin typeface="Segoe UI" pitchFamily="34" charset="0"/>
+                <a:ea typeface="Segoe UI" pitchFamily="34" charset="-122"/>
+                <a:cs typeface="Segoe UI" pitchFamily="34" charset="-120"/>
+              </a:rPr>
+              <a:t>PRODUCTION READINESS</a:t>
+            </a:r>
+            <a:endParaRPr lang="en-US" sz="1100" dirty="0"/>
+          </a:p>
+        </p:txBody>
+      </p:sp>
+      <p:sp>
+        <p:nvSpPr>
+          <p:cNvPr id="4" name="Text 2"/>
+          <p:cNvSpPr/>
+          <p:nvPr/>
+        </p:nvSpPr>
+        <p:spPr>
+          <a:xfrm>
+            <a:off x="457200" y="548640"/>
+            <a:ext cx="11247120" cy="640080"/>
+          </a:xfrm>
+          <a:prstGeom prst="rect">
+            <a:avLst/>
+          </a:prstGeom>
+          <a:noFill/>
+          <a:ln/>
+        </p:spPr>
+        <p:txBody>
+          <a:bodyPr wrap="square" rtlCol="0" anchor="ctr"/>
+          <a:lstStyle/>
+          <a:p>
+            <a:pPr indent="0" marL="0">
+              <a:buNone/>
+            </a:pPr>
+            <a:r>
+              <a:rPr lang="en-US" sz="2600" b="1" dirty="0">
+                <a:solidFill>
+                  <a:srgbClr val="001B3D"/>
+                </a:solidFill>
+                <a:latin typeface="Segoe UI" pitchFamily="34" charset="0"/>
+                <a:ea typeface="Segoe UI" pitchFamily="34" charset="-122"/>
+                <a:cs typeface="Segoe UI" pitchFamily="34" charset="-120"/>
+              </a:rPr>
+              <a:t>Honest Gates, Not False Confidence</a:t>
+            </a:r>
+            <a:endParaRPr lang="en-US" sz="2600" dirty="0"/>
+          </a:p>
+        </p:txBody>
+      </p:sp>
+      <p:sp>
+        <p:nvSpPr>
+          <p:cNvPr id="5" name="Shape 3"/>
+          <p:cNvSpPr/>
+          <p:nvPr/>
+        </p:nvSpPr>
+        <p:spPr>
+          <a:xfrm>
+            <a:off x="457200" y="1188720"/>
+            <a:ext cx="11247120" cy="10973"/>
+          </a:xfrm>
+          <a:prstGeom prst="rect">
+            <a:avLst/>
+          </a:prstGeom>
+          <a:solidFill>
+            <a:srgbClr val="E1E5E8"/>
+          </a:solidFill>
+          <a:ln/>
+        </p:spPr>
+      </p:sp>
+      <p:sp>
+        <p:nvSpPr>
+          <p:cNvPr id="6" name="Text 4"/>
+          <p:cNvSpPr/>
+          <p:nvPr/>
+        </p:nvSpPr>
+        <p:spPr>
+          <a:xfrm>
+            <a:off x="548640" y="1463040"/>
+            <a:ext cx="11064240" cy="5029200"/>
+          </a:xfrm>
+          <a:prstGeom prst="rect">
+            <a:avLst/>
+          </a:prstGeom>
+          <a:noFill/>
+          <a:ln/>
+        </p:spPr>
+        <p:txBody>
+          <a:bodyPr wrap="square" rtlCol="0" anchor="t"/>
+          <a:lstStyle/>
+          <a:p>
+            <a:pPr marL="254000" indent="-254000">
+              <a:lnSpc>
+                <a:spcPct val="125000"/>
+              </a:lnSpc>
+              <a:buSzPct val="100000"/>
+              <a:buChar char="●"/>
+            </a:pPr>
+            <a:r>
+              <a:rPr lang="en-US" sz="1500" dirty="0">
+                <a:solidFill>
+                  <a:srgbClr val="1A1A1A"/>
+                </a:solidFill>
+                <a:latin typeface="Segoe UI" pitchFamily="34" charset="0"/>
+                <a:ea typeface="Segoe UI" pitchFamily="34" charset="-122"/>
+                <a:cs typeface="Segoe UI" pitchFamily="34" charset="-120"/>
+              </a:rPr>
+              <a:t>Four experiment tracks: load testing, Cosmos DB checkpointer, Agent 365 onboarding, continuous evaluation</a:t>
+            </a:r>
+            <a:endParaRPr lang="en-US" sz="1500" dirty="0"/>
+          </a:p>
+          <a:p>
+            <a:pPr marL="254000" indent="-254000">
+              <a:lnSpc>
+                <a:spcPct val="125000"/>
+              </a:lnSpc>
+              <a:buSzPct val="100000"/>
+              <a:buChar char="●"/>
+            </a:pPr>
+            <a:r>
+              <a:rPr lang="en-US" sz="1500" dirty="0">
+                <a:solidFill>
+                  <a:srgbClr val="1A1A1A"/>
+                </a:solidFill>
+                <a:latin typeface="Segoe UI" pitchFamily="34" charset="0"/>
+                <a:ea typeface="Segoe UI" pitchFamily="34" charset="-122"/>
+                <a:cs typeface="Segoe UI" pitchFamily="34" charset="-120"/>
+              </a:rPr>
+              <a:t>Quality gate passed: 8 captures, zero policy failures, 21/21 judge checks, verified safety refusal and tool receipts</a:t>
+            </a:r>
+            <a:endParaRPr lang="en-US" sz="1500" dirty="0"/>
+          </a:p>
+          <a:p>
+            <a:pPr marL="254000" indent="-254000">
+              <a:lnSpc>
+                <a:spcPct val="125000"/>
+              </a:lnSpc>
+              <a:buSzPct val="100000"/>
+              <a:buChar char="●"/>
+            </a:pPr>
+            <a:r>
+              <a:rPr lang="en-US" sz="1500" dirty="0">
+                <a:solidFill>
+                  <a:srgbClr val="1A1A1A"/>
+                </a:solidFill>
+                <a:latin typeface="Segoe UI" pitchFamily="34" charset="0"/>
+                <a:ea typeface="Segoe UI" pitchFamily="34" charset="-122"/>
+                <a:cs typeface="Segoe UI" pitchFamily="34" charset="-120"/>
+              </a:rPr>
+              <a:t>Scale, Security, Operations gates: Conditional — partial evidence, named follow-ups</a:t>
+            </a:r>
+            <a:endParaRPr lang="en-US" sz="1500" dirty="0"/>
+          </a:p>
+          <a:p>
+            <a:pPr marL="254000" indent="-254000">
+              <a:lnSpc>
+                <a:spcPct val="125000"/>
+              </a:lnSpc>
+              <a:buSzPct val="100000"/>
+              <a:buChar char="●"/>
+            </a:pPr>
+            <a:r>
+              <a:rPr lang="en-US" sz="1500" dirty="0">
+                <a:solidFill>
+                  <a:srgbClr val="1A1A1A"/>
+                </a:solidFill>
+                <a:latin typeface="Segoe UI" pitchFamily="34" charset="0"/>
+                <a:ea typeface="Segoe UI" pitchFamily="34" charset="-122"/>
+                <a:cs typeface="Segoe UI" pitchFamily="34" charset="-120"/>
+              </a:rPr>
+              <a:t>Platform status, Data, Cost gates: Not testable in this PoC — require commercial/legal/platform confirmation</a:t>
+            </a:r>
+            <a:endParaRPr lang="en-US" sz="1500" dirty="0"/>
+          </a:p>
+          <a:p>
+            <a:pPr marL="254000" indent="-254000">
+              <a:lnSpc>
+                <a:spcPct val="125000"/>
+              </a:lnSpc>
+              <a:buSzPct val="100000"/>
+              <a:buChar char="●"/>
+            </a:pPr>
+            <a:r>
+              <a:rPr lang="en-US" sz="1500" dirty="0">
+                <a:solidFill>
+                  <a:srgbClr val="1A1A1A"/>
+                </a:solidFill>
+                <a:latin typeface="Segoe UI" pitchFamily="34" charset="0"/>
+                <a:ea typeface="Segoe UI" pitchFamily="34" charset="-122"/>
+                <a:cs typeface="Segoe UI" pitchFamily="34" charset="-120"/>
+              </a:rPr>
+              <a:t>Overall recommendation: conditional go for continued PoC-to-pilot investment, not an unconditional yes/no</a:t>
+            </a:r>
+            <a:endParaRPr lang="en-US" sz="1500" dirty="0"/>
+          </a:p>
+        </p:txBody>
+      </p:sp>
+      <p:sp>
+        <p:nvSpPr>
+          <p:cNvPr id="8" name="Shape 5"/>
+          <p:cNvSpPr/>
+          <p:nvPr/>
+        </p:nvSpPr>
+        <p:spPr>
+          <a:xfrm>
+            <a:off x="0" y="6784848"/>
+            <a:ext cx="12188952" cy="27432"/>
+          </a:xfrm>
+          <a:prstGeom prst="rect">
+            <a:avLst/>
+          </a:prstGeom>
+          <a:solidFill>
+            <a:srgbClr val="E1E5E8"/>
+          </a:solidFill>
+          <a:ln/>
+        </p:spPr>
+      </p:sp>
+      <p:sp>
+        <p:nvSpPr>
+          <p:cNvPr id="9" name="Text 6"/>
+          <p:cNvSpPr/>
+          <p:nvPr/>
+        </p:nvSpPr>
+        <p:spPr>
+          <a:xfrm>
+            <a:off x="457200" y="6537960"/>
+            <a:ext cx="8229600" cy="256032"/>
+          </a:xfrm>
+          <a:prstGeom prst="rect">
+            <a:avLst/>
+          </a:prstGeom>
+          <a:noFill/>
+          <a:ln/>
+        </p:spPr>
+        <p:txBody>
+          <a:bodyPr wrap="square" rtlCol="0" anchor="ctr"/>
+          <a:lstStyle/>
+          <a:p>
+            <a:pPr indent="0" marL="0">
+              <a:buNone/>
+            </a:pPr>
+            <a:r>
+              <a:rPr lang="en-US" sz="900" dirty="0">
+                <a:solidFill>
+                  <a:srgbClr val="767676"/>
+                </a:solidFill>
+                <a:latin typeface="Segoe UI" pitchFamily="34" charset="0"/>
+                <a:ea typeface="Segoe UI" pitchFamily="34" charset="-122"/>
+                <a:cs typeface="Segoe UI" pitchFamily="34" charset="-120"/>
+              </a:rPr>
+              <a:t>Foundry Hosted Agents Workshop</a:t>
+            </a:r>
+            <a:endParaRPr lang="en-US" sz="900" dirty="0"/>
+          </a:p>
+        </p:txBody>
+      </p:sp>
+      <p:sp>
+        <p:nvSpPr>
+          <p:cNvPr id="10" name="Text 7"/>
+          <p:cNvSpPr/>
+          <p:nvPr/>
+        </p:nvSpPr>
+        <p:spPr>
+          <a:xfrm>
+            <a:off x="11338560" y="6528816"/>
+            <a:ext cx="548640" cy="219456"/>
+          </a:xfrm>
+          <a:prstGeom prst="rect">
+            <a:avLst/>
+          </a:prstGeom>
+          <a:noFill/>
+          <a:ln/>
+        </p:spPr>
+        <p:txBody>
+          <a:bodyPr wrap="square" rtlCol="0" anchor="ctr"/>
+          <a:lstStyle/>
+          <a:p>
+            <a:pPr algn="r" indent="0" marL="0">
+              <a:buNone/>
+            </a:pPr>
+            <a:r>
+              <a:rPr lang="en-US" sz="900" dirty="0">
+                <a:solidFill>
+                  <a:srgbClr val="767676"/>
+                </a:solidFill>
+              </a:rPr>
+              <a:t>18 / 19</a:t>
+            </a:r>
+            <a:endParaRPr lang="en-US" sz="900" dirty="0"/>
+          </a:p>
+        </p:txBody>
+      </p:sp>
+    </p:spTree>
+  </p:cSld>
+  <p:clrMapOvr>
+    <a:masterClrMapping/>
+  </p:clrMapOvr>
+</p:sld>
+</file>
+
+<file path=ppt/slides/slide19.xml><?xml version="1.0" encoding="utf-8"?>
+<p:sld xmlns:a="http://schemas.openxmlformats.org/drawingml/2006/main" xmlns:r="http://schemas.openxmlformats.org/officeDocument/2006/relationships" xmlns:p="http://schemas.openxmlformats.org/presentationml/2006/main">
+  <p:cSld name="Slide 19">
+    <p:bg>
+      <p:bgPr>
+        <a:solidFill>
+          <a:srgbClr val="FAFBFC"/>
+        </a:solidFill>
+      </p:bgPr>
+    </p:bg>
+    <p:spTree>
+      <p:nvGrpSpPr>
+        <p:cNvPr id="1" name=""/>
+        <p:cNvGrpSpPr/>
+        <p:nvPr/>
+      </p:nvGrpSpPr>
+      <p:grpSpPr>
+        <a:xfrm>
+          <a:off x="0" y="0"/>
+          <a:ext cx="0" cy="0"/>
+          <a:chOff x="0" y="0"/>
+          <a:chExt cx="0" cy="0"/>
+        </a:xfrm>
+      </p:grpSpPr>
+      <p:sp>
+        <p:nvSpPr>
+          <p:cNvPr id="2" name="Shape 0"/>
+          <p:cNvSpPr/>
+          <p:nvPr/>
+        </p:nvSpPr>
+        <p:spPr>
+          <a:xfrm>
+            <a:off x="0" y="0"/>
+            <a:ext cx="12188952" cy="82296"/>
+          </a:xfrm>
+          <a:prstGeom prst="rect">
+            <a:avLst/>
+          </a:prstGeom>
+          <a:solidFill>
+            <a:srgbClr val="0078D4"/>
+          </a:solidFill>
+          <a:ln/>
+        </p:spPr>
+      </p:sp>
+      <p:sp>
+        <p:nvSpPr>
+          <p:cNvPr id="3" name="Text 1"/>
+          <p:cNvSpPr/>
+          <p:nvPr/>
+        </p:nvSpPr>
+        <p:spPr>
+          <a:xfrm>
+            <a:off x="457200" y="292608"/>
+            <a:ext cx="11247120" cy="274320"/>
+          </a:xfrm>
+          <a:prstGeom prst="rect">
+            <a:avLst/>
+          </a:prstGeom>
+          <a:noFill/>
+          <a:ln/>
+        </p:spPr>
+        <p:txBody>
+          <a:bodyPr wrap="square" rtlCol="0" anchor="ctr"/>
+          <a:lstStyle/>
+          <a:p>
+            <a:pPr indent="0" marL="0">
+              <a:buNone/>
+            </a:pPr>
+            <a:r>
+              <a:rPr lang="en-US" sz="1100" b="1" spc="100" kern="0" dirty="0">
+                <a:solidFill>
+                  <a:srgbClr val="0078D4"/>
+                </a:solidFill>
+                <a:latin typeface="Segoe UI" pitchFamily="34" charset="0"/>
+                <a:ea typeface="Segoe UI" pitchFamily="34" charset="-122"/>
+                <a:cs typeface="Segoe UI" pitchFamily="34" charset="-120"/>
+              </a:rPr>
+              <a:t>WRAP-UP</a:t>
+            </a:r>
+            <a:endParaRPr lang="en-US" sz="1100" dirty="0"/>
+          </a:p>
+        </p:txBody>
+      </p:sp>
+      <p:sp>
+        <p:nvSpPr>
+          <p:cNvPr id="4" name="Text 2"/>
+          <p:cNvSpPr/>
+          <p:nvPr/>
+        </p:nvSpPr>
+        <p:spPr>
+          <a:xfrm>
+            <a:off x="457200" y="548640"/>
+            <a:ext cx="11247120" cy="640080"/>
+          </a:xfrm>
+          <a:prstGeom prst="rect">
+            <a:avLst/>
+          </a:prstGeom>
+          <a:noFill/>
+          <a:ln/>
+        </p:spPr>
+        <p:txBody>
+          <a:bodyPr wrap="square" rtlCol="0" anchor="ctr"/>
+          <a:lstStyle/>
+          <a:p>
+            <a:pPr indent="0" marL="0">
+              <a:buNone/>
+            </a:pPr>
+            <a:r>
+              <a:rPr lang="en-US" sz="2600" b="1" dirty="0">
+                <a:solidFill>
+                  <a:srgbClr val="001B3D"/>
+                </a:solidFill>
+                <a:latin typeface="Segoe UI" pitchFamily="34" charset="0"/>
+                <a:ea typeface="Segoe UI" pitchFamily="34" charset="-122"/>
+                <a:cs typeface="Segoe UI" pitchFamily="34" charset="-120"/>
+              </a:rPr>
+              <a:t>A Proven Release, with Explicit Limits</a:t>
+            </a:r>
+            <a:endParaRPr lang="en-US" sz="2600" dirty="0"/>
+          </a:p>
+        </p:txBody>
+      </p:sp>
+      <p:sp>
+        <p:nvSpPr>
+          <p:cNvPr id="5" name="Shape 3"/>
+          <p:cNvSpPr/>
+          <p:nvPr/>
+        </p:nvSpPr>
+        <p:spPr>
+          <a:xfrm>
+            <a:off x="457200" y="1188720"/>
+            <a:ext cx="11247120" cy="10973"/>
+          </a:xfrm>
+          <a:prstGeom prst="rect">
+            <a:avLst/>
+          </a:prstGeom>
+          <a:solidFill>
+            <a:srgbClr val="E1E5E8"/>
+          </a:solidFill>
+          <a:ln/>
+        </p:spPr>
+      </p:sp>
+      <p:sp>
+        <p:nvSpPr>
+          <p:cNvPr id="6" name="Text 4"/>
+          <p:cNvSpPr/>
+          <p:nvPr/>
+        </p:nvSpPr>
+        <p:spPr>
+          <a:xfrm>
+            <a:off x="548640" y="1463040"/>
+            <a:ext cx="11064240" cy="5029200"/>
+          </a:xfrm>
+          <a:prstGeom prst="rect">
+            <a:avLst/>
+          </a:prstGeom>
+          <a:noFill/>
+          <a:ln/>
+        </p:spPr>
+        <p:txBody>
+          <a:bodyPr wrap="square" rtlCol="0" anchor="t"/>
+          <a:lstStyle/>
+          <a:p>
+            <a:pPr marL="254000" indent="-254000">
+              <a:lnSpc>
+                <a:spcPct val="125000"/>
+              </a:lnSpc>
+              <a:buSzPct val="100000"/>
+              <a:buChar char="●"/>
+            </a:pPr>
+            <a:r>
+              <a:rPr lang="en-US" sz="1500" dirty="0">
+                <a:solidFill>
+                  <a:srgbClr val="1A1A1A"/>
+                </a:solidFill>
+                <a:latin typeface="Segoe UI" pitchFamily="34" charset="0"/>
+                <a:ea typeface="Segoe UI" pitchFamily="34" charset="-122"/>
+                <a:cs typeface="Segoe UI" pitchFamily="34" charset="-120"/>
+              </a:rPr>
+              <a:t>The deployment and evaluation ran for real; the MCP security telemetry is synthetic, not live customer data</a:t>
+            </a:r>
+            <a:endParaRPr lang="en-US" sz="1500" dirty="0"/>
+          </a:p>
+          <a:p>
+            <a:pPr marL="254000" indent="-254000">
+              <a:lnSpc>
+                <a:spcPct val="125000"/>
+              </a:lnSpc>
+              <a:buSzPct val="100000"/>
+              <a:buChar char="●"/>
+            </a:pPr>
+            <a:r>
+              <a:rPr lang="en-US" sz="1500" dirty="0">
+                <a:solidFill>
+                  <a:srgbClr val="1A1A1A"/>
+                </a:solidFill>
+                <a:latin typeface="Segoe UI" pitchFamily="34" charset="0"/>
+                <a:ea typeface="Segoe UI" pitchFamily="34" charset="-122"/>
+                <a:cs typeface="Segoe UI" pitchFamily="34" charset="-120"/>
+              </a:rPr>
+              <a:t>Repository: github.com/devopsabcs-engineering/foundry-hosted-agents</a:t>
+            </a:r>
+            <a:endParaRPr lang="en-US" sz="1500" dirty="0"/>
+          </a:p>
+          <a:p>
+            <a:pPr marL="254000" indent="-254000">
+              <a:lnSpc>
+                <a:spcPct val="125000"/>
+              </a:lnSpc>
+              <a:buSzPct val="100000"/>
+              <a:buChar char="●"/>
+            </a:pPr>
+            <a:r>
+              <a:rPr lang="en-US" sz="1500" dirty="0">
+                <a:solidFill>
+                  <a:srgbClr val="1A1A1A"/>
+                </a:solidFill>
+                <a:latin typeface="Segoe UI" pitchFamily="34" charset="0"/>
+                <a:ea typeface="Segoe UI" pitchFamily="34" charset="-122"/>
+                <a:cs typeface="Segoe UI" pitchFamily="34" charset="-120"/>
+              </a:rPr>
+              <a:t>Wiki: current architecture, verified release artifacts, operational runbook, and resolved WI-11 history</a:t>
+            </a:r>
+            <a:endParaRPr lang="en-US" sz="1500" dirty="0"/>
+          </a:p>
+          <a:p>
+            <a:pPr marL="254000" indent="-254000">
+              <a:lnSpc>
+                <a:spcPct val="125000"/>
+              </a:lnSpc>
+              <a:buSzPct val="100000"/>
+              <a:buChar char="●"/>
+            </a:pPr>
+            <a:r>
+              <a:rPr lang="en-US" sz="1500" dirty="0">
+                <a:solidFill>
+                  <a:srgbClr val="1A1A1A"/>
+                </a:solidFill>
+                <a:latin typeface="Segoe UI" pitchFamily="34" charset="0"/>
+                <a:ea typeface="Segoe UI" pitchFamily="34" charset="-122"/>
+                <a:cs typeface="Segoe UI" pitchFamily="34" charset="-120"/>
+              </a:rPr>
+              <a:t>Full bilingual step-by-step labs: this deck’s companion GitHub Pages site</a:t>
+            </a:r>
+            <a:endParaRPr lang="en-US" sz="1500" dirty="0"/>
+          </a:p>
+          <a:p>
+            <a:pPr marL="254000" indent="-254000">
+              <a:lnSpc>
+                <a:spcPct val="125000"/>
+              </a:lnSpc>
+              <a:buSzPct val="100000"/>
+              <a:buChar char="●"/>
+            </a:pPr>
+            <a:r>
+              <a:rPr lang="en-US" sz="1500" dirty="0">
+                <a:solidFill>
+                  <a:srgbClr val="1A1A1A"/>
+                </a:solidFill>
+                <a:latin typeface="Segoe UI" pitchFamily="34" charset="0"/>
+                <a:ea typeface="Segoe UI" pitchFamily="34" charset="-122"/>
+                <a:cs typeface="Segoe UI" pitchFamily="34" charset="-120"/>
+              </a:rPr>
+              <a:t>Production smoke and response-correlated ingestion passed; this is not a soak test or complete trace-coverage proof. Teams and durable history are not implemented</a:t>
+            </a:r>
+            <a:endParaRPr lang="en-US" sz="1500" dirty="0"/>
+          </a:p>
+        </p:txBody>
+      </p:sp>
+      <p:sp>
+        <p:nvSpPr>
+          <p:cNvPr id="8" name="Shape 5"/>
+          <p:cNvSpPr/>
+          <p:nvPr/>
+        </p:nvSpPr>
+        <p:spPr>
+          <a:xfrm>
+            <a:off x="0" y="6784848"/>
+            <a:ext cx="12188952" cy="27432"/>
+          </a:xfrm>
+          <a:prstGeom prst="rect">
+            <a:avLst/>
+          </a:prstGeom>
+          <a:solidFill>
+            <a:srgbClr val="E1E5E8"/>
+          </a:solidFill>
+          <a:ln/>
+        </p:spPr>
+      </p:sp>
+      <p:sp>
+        <p:nvSpPr>
+          <p:cNvPr id="9" name="Text 6"/>
+          <p:cNvSpPr/>
+          <p:nvPr/>
+        </p:nvSpPr>
+        <p:spPr>
+          <a:xfrm>
+            <a:off x="457200" y="6537960"/>
+            <a:ext cx="8229600" cy="256032"/>
+          </a:xfrm>
+          <a:prstGeom prst="rect">
+            <a:avLst/>
+          </a:prstGeom>
+          <a:noFill/>
+          <a:ln/>
+        </p:spPr>
+        <p:txBody>
+          <a:bodyPr wrap="square" rtlCol="0" anchor="ctr"/>
+          <a:lstStyle/>
+          <a:p>
+            <a:pPr indent="0" marL="0">
+              <a:buNone/>
+            </a:pPr>
+            <a:r>
+              <a:rPr lang="en-US" sz="900" dirty="0">
+                <a:solidFill>
+                  <a:srgbClr val="767676"/>
+                </a:solidFill>
+                <a:latin typeface="Segoe UI" pitchFamily="34" charset="0"/>
+                <a:ea typeface="Segoe UI" pitchFamily="34" charset="-122"/>
+                <a:cs typeface="Segoe UI" pitchFamily="34" charset="-120"/>
+              </a:rPr>
+              <a:t>Foundry Hosted Agents Workshop</a:t>
+            </a:r>
+            <a:endParaRPr lang="en-US" sz="900" dirty="0"/>
+          </a:p>
+        </p:txBody>
+      </p:sp>
+      <p:sp>
+        <p:nvSpPr>
+          <p:cNvPr id="10" name="Text 7"/>
+          <p:cNvSpPr/>
+          <p:nvPr/>
+        </p:nvSpPr>
+        <p:spPr>
+          <a:xfrm>
+            <a:off x="11338560" y="6528816"/>
+            <a:ext cx="548640" cy="219456"/>
+          </a:xfrm>
+          <a:prstGeom prst="rect">
+            <a:avLst/>
+          </a:prstGeom>
+          <a:noFill/>
+          <a:ln/>
+        </p:spPr>
+        <p:txBody>
+          <a:bodyPr wrap="square" rtlCol="0" anchor="ctr"/>
+          <a:lstStyle/>
+          <a:p>
+            <a:pPr algn="r" indent="0" marL="0">
+              <a:buNone/>
+            </a:pPr>
+            <a:r>
+              <a:rPr lang="en-US" sz="900" dirty="0">
+                <a:solidFill>
+                  <a:srgbClr val="767676"/>
+                </a:solidFill>
+              </a:rPr>
+              <a:t>19 / 19</a:t>
             </a:r>
             <a:endParaRPr lang="en-US" sz="900" dirty="0"/>
           </a:p>
@@ -4184,8 +6473,8 @@
         </p:nvSpPr>
         <p:spPr>
           <a:xfrm>
-            <a:off x="411480" y="146304"/>
-            <a:ext cx="11338560" cy="502920"/>
+            <a:off x="457200" y="320040"/>
+            <a:ext cx="11247120" cy="731520"/>
           </a:xfrm>
           <a:prstGeom prst="rect">
             <a:avLst/>
@@ -4201,7 +6490,7 @@
               <a:buNone/>
             </a:pPr>
             <a:r>
-              <a:rPr lang="en-US" sz="2400" b="1" dirty="0">
+              <a:rPr lang="en-US" sz="2800" b="1" dirty="0">
                 <a:solidFill>
                   <a:srgbClr val="146C54"/>
                 </a:solidFill>
@@ -4209,46 +6498,49 @@
                 <a:ea typeface="Segoe UI" pitchFamily="34" charset="-122"/>
                 <a:cs typeface="Segoe UI" pitchFamily="34" charset="-120"/>
               </a:rPr>
-              <a:t>Verified Release: Staging to Production</a:t>
-            </a:r>
-            <a:endParaRPr lang="en-US" sz="2400" dirty="0"/>
-          </a:p>
-        </p:txBody>
-      </p:sp>
-      <p:pic>
-        <p:nvPicPr>
-          <p:cNvPr id="3" name="Image 0" descr="Verified Release: Staging to Production">    </p:cNvPr>
-          <p:cNvPicPr>
-            <a:picLocks noChangeAspect="1"/>
-          </p:cNvPicPr>
-          <p:nvPr/>
-        </p:nvPicPr>
-        <p:blipFill>
-          <a:blip r:embed="rId1"/>
-          <a:stretch>
-            <a:fillRect/>
-          </a:stretch>
-        </p:blipFill>
-        <p:spPr>
-          <a:xfrm>
-            <a:off x="2068830" y="777240"/>
-            <a:ext cx="8051292" cy="5367528"/>
-          </a:xfrm>
-          <a:prstGeom prst="rect">
-            <a:avLst/>
-          </a:prstGeom>
-        </p:spPr>
-      </p:pic>
-      <p:sp>
-        <p:nvSpPr>
-          <p:cNvPr id="4" name="Text 1"/>
-          <p:cNvSpPr/>
-          <p:nvPr/>
-        </p:nvSpPr>
-        <p:spPr>
-          <a:xfrm>
-            <a:off x="411480" y="6245352"/>
-            <a:ext cx="11338560" cy="256032"/>
+              <a:t>Current pilot: working chat and verified releases</a:t>
+            </a:r>
+            <a:endParaRPr lang="en-US" sz="2800" dirty="0"/>
+          </a:p>
+        </p:txBody>
+      </p:sp>
+      <p:sp>
+        <p:nvSpPr>
+          <p:cNvPr id="3" name="Shape 1"/>
+          <p:cNvSpPr/>
+          <p:nvPr/>
+        </p:nvSpPr>
+        <p:spPr>
+          <a:xfrm>
+            <a:off x="457200" y="1371600"/>
+            <a:ext cx="54864" cy="1143000"/>
+          </a:xfrm>
+          <a:prstGeom prst="rect">
+            <a:avLst/>
+          </a:prstGeom>
+          <a:solidFill>
+            <a:srgbClr val="146C54"/>
+          </a:solidFill>
+          <a:ln w="12700">
+            <a:solidFill>
+              <a:srgbClr val="333333">
+                <a:alpha val="0"/>
+              </a:srgbClr>
+            </a:solidFill>
+            <a:prstDash val="solid"/>
+          </a:ln>
+        </p:spPr>
+      </p:sp>
+      <p:sp>
+        <p:nvSpPr>
+          <p:cNvPr id="4" name="Text 2"/>
+          <p:cNvSpPr/>
+          <p:nvPr/>
+        </p:nvSpPr>
+        <p:spPr>
+          <a:xfrm>
+            <a:off x="685800" y="1371600"/>
+            <a:ext cx="10789920" cy="365760"/>
           </a:xfrm>
           <a:prstGeom prst="rect">
             <a:avLst/>
@@ -4264,32 +6556,281 @@
               <a:buNone/>
             </a:pPr>
             <a:r>
-              <a:rPr lang="en-US" sz="1000" dirty="0">
-                <a:solidFill>
-                  <a:srgbClr val="53635E"/>
-                </a:solidFill>
-                <a:latin typeface="Segoe UI" pitchFamily="34" charset="0"/>
-                <a:ea typeface="Segoe UI" pitchFamily="34" charset="-122"/>
-                <a:cs typeface="Segoe UI" pitchFamily="34" charset="-120"/>
-              </a:rPr>
-              <a:t>Artifact rendering, not a portal screenshot. Synthetic fixtures. Sources and SHA-256 hashes retained.</a:t>
-            </a:r>
-            <a:endParaRPr lang="en-US" sz="1000" dirty="0"/>
-          </a:p>
-        </p:txBody>
-      </p:sp>
-      <p:sp>
-        <p:nvSpPr>
-          <p:cNvPr id="5" name="Text 2">
-            <a:hlinkClick r:id="rId2" tooltip=""/>
+              <a:rPr lang="en-US" sz="2100" b="1" dirty="0">
+                <a:solidFill>
+                  <a:srgbClr val="243831"/>
+                </a:solidFill>
+                <a:latin typeface="Segoe UI" pitchFamily="34" charset="0"/>
+                <a:ea typeface="Segoe UI" pitchFamily="34" charset="-122"/>
+                <a:cs typeface="Segoe UI" pitchFamily="34" charset="-120"/>
+              </a:rPr>
+              <a:t>Entra tenant + pilot group</a:t>
+            </a:r>
+            <a:endParaRPr lang="en-US" sz="2100" dirty="0"/>
+          </a:p>
+        </p:txBody>
+      </p:sp>
+      <p:sp>
+        <p:nvSpPr>
+          <p:cNvPr id="5" name="Text 3"/>
+          <p:cNvSpPr/>
+          <p:nvPr/>
+        </p:nvSpPr>
+        <p:spPr>
+          <a:xfrm>
+            <a:off x="685800" y="1828800"/>
+            <a:ext cx="10789920" cy="777240"/>
+          </a:xfrm>
+          <a:prstGeom prst="rect">
+            <a:avLst/>
+          </a:prstGeom>
+          <a:noFill/>
+          <a:ln/>
+        </p:spPr>
+        <p:txBody>
+          <a:bodyPr wrap="square" rtlCol="0" anchor="ctr"/>
+          <a:lstStyle/>
+          <a:p>
+            <a:pPr indent="0" marL="0">
+              <a:buNone/>
+            </a:pPr>
+            <a:r>
+              <a:rPr lang="en-US" sz="1800" dirty="0">
+                <a:solidFill>
+                  <a:srgbClr val="43544D"/>
+                </a:solidFill>
+                <a:latin typeface="Segoe UI" pitchFamily="34" charset="0"/>
+                <a:ea typeface="Segoe UI" pitchFamily="34" charset="-122"/>
+                <a:cs typeface="Segoe UI" pitchFamily="34" charset="-120"/>
+              </a:rPr>
+              <a:t>Authenticated React / FastAPI chat; public HTTPS, not a private-network deployment.</a:t>
+            </a:r>
+            <a:endParaRPr lang="en-US" sz="1800" dirty="0"/>
+          </a:p>
+        </p:txBody>
+      </p:sp>
+      <p:sp>
+        <p:nvSpPr>
+          <p:cNvPr id="6" name="Shape 4"/>
+          <p:cNvSpPr/>
+          <p:nvPr/>
+        </p:nvSpPr>
+        <p:spPr>
+          <a:xfrm>
+            <a:off x="457200" y="2880360"/>
+            <a:ext cx="54864" cy="1143000"/>
+          </a:xfrm>
+          <a:prstGeom prst="rect">
+            <a:avLst/>
+          </a:prstGeom>
+          <a:solidFill>
+            <a:srgbClr val="0078D4"/>
+          </a:solidFill>
+          <a:ln w="12700">
+            <a:solidFill>
+              <a:srgbClr val="333333">
+                <a:alpha val="0"/>
+              </a:srgbClr>
+            </a:solidFill>
+            <a:prstDash val="solid"/>
+          </a:ln>
+        </p:spPr>
+      </p:sp>
+      <p:sp>
+        <p:nvSpPr>
+          <p:cNvPr id="7" name="Text 5"/>
+          <p:cNvSpPr/>
+          <p:nvPr/>
+        </p:nvSpPr>
+        <p:spPr>
+          <a:xfrm>
+            <a:off x="685800" y="2880360"/>
+            <a:ext cx="10789920" cy="365760"/>
+          </a:xfrm>
+          <a:prstGeom prst="rect">
+            <a:avLst/>
+          </a:prstGeom>
+          <a:noFill/>
+          <a:ln/>
+        </p:spPr>
+        <p:txBody>
+          <a:bodyPr wrap="square" rtlCol="0" anchor="ctr"/>
+          <a:lstStyle/>
+          <a:p>
+            <a:pPr indent="0" marL="0">
+              <a:buNone/>
+            </a:pPr>
+            <a:r>
+              <a:rPr lang="en-US" sz="2100" b="1" dirty="0">
+                <a:solidFill>
+                  <a:srgbClr val="243831"/>
+                </a:solidFill>
+                <a:latin typeface="Segoe UI" pitchFamily="34" charset="0"/>
+                <a:ea typeface="Segoe UI" pitchFamily="34" charset="-122"/>
+                <a:cs typeface="Segoe UI" pitchFamily="34" charset="-120"/>
+              </a:rPr>
+              <a:t>Full-history requests</a:t>
+            </a:r>
+            <a:endParaRPr lang="en-US" sz="2100" dirty="0"/>
+          </a:p>
+        </p:txBody>
+      </p:sp>
+      <p:sp>
+        <p:nvSpPr>
+          <p:cNvPr id="8" name="Text 6"/>
+          <p:cNvSpPr/>
+          <p:nvPr/>
+        </p:nvSpPr>
+        <p:spPr>
+          <a:xfrm>
+            <a:off x="685800" y="3337560"/>
+            <a:ext cx="10789920" cy="777240"/>
+          </a:xfrm>
+          <a:prstGeom prst="rect">
+            <a:avLst/>
+          </a:prstGeom>
+          <a:noFill/>
+          <a:ln/>
+        </p:spPr>
+        <p:txBody>
+          <a:bodyPr wrap="square" rtlCol="0" anchor="ctr"/>
+          <a:lstStyle/>
+          <a:p>
+            <a:pPr indent="0" marL="0">
+              <a:buNone/>
+            </a:pPr>
+            <a:r>
+              <a:rPr lang="en-US" sz="1800" dirty="0">
+                <a:solidFill>
+                  <a:srgbClr val="43544D"/>
+                </a:solidFill>
+                <a:latin typeface="Segoe UI" pitchFamily="34" charset="0"/>
+                <a:ea typeface="Segoe UI" pitchFamily="34" charset="-122"/>
+                <a:cs typeface="Segoe UI" pitchFamily="34" charset="-120"/>
+              </a:rPr>
+              <a:t>Backend-owned user/assistant turns, store:false; no native conversation or previous_response_id.</a:t>
+            </a:r>
+            <a:endParaRPr lang="en-US" sz="1800" dirty="0"/>
+          </a:p>
+        </p:txBody>
+      </p:sp>
+      <p:sp>
+        <p:nvSpPr>
+          <p:cNvPr id="9" name="Shape 7"/>
+          <p:cNvSpPr/>
+          <p:nvPr/>
+        </p:nvSpPr>
+        <p:spPr>
+          <a:xfrm>
+            <a:off x="457200" y="4389120"/>
+            <a:ext cx="54864" cy="1143000"/>
+          </a:xfrm>
+          <a:prstGeom prst="rect">
+            <a:avLst/>
+          </a:prstGeom>
+          <a:solidFill>
+            <a:srgbClr val="B22938"/>
+          </a:solidFill>
+          <a:ln w="12700">
+            <a:solidFill>
+              <a:srgbClr val="333333">
+                <a:alpha val="0"/>
+              </a:srgbClr>
+            </a:solidFill>
+            <a:prstDash val="solid"/>
+          </a:ln>
+        </p:spPr>
+      </p:sp>
+      <p:sp>
+        <p:nvSpPr>
+          <p:cNvPr id="10" name="Text 8"/>
+          <p:cNvSpPr/>
+          <p:nvPr/>
+        </p:nvSpPr>
+        <p:spPr>
+          <a:xfrm>
+            <a:off x="685800" y="4389120"/>
+            <a:ext cx="10789920" cy="365760"/>
+          </a:xfrm>
+          <a:prstGeom prst="rect">
+            <a:avLst/>
+          </a:prstGeom>
+          <a:noFill/>
+          <a:ln/>
+        </p:spPr>
+        <p:txBody>
+          <a:bodyPr wrap="square" rtlCol="0" anchor="ctr"/>
+          <a:lstStyle/>
+          <a:p>
+            <a:pPr indent="0" marL="0">
+              <a:buNone/>
+            </a:pPr>
+            <a:r>
+              <a:rPr lang="en-US" sz="2100" b="1" dirty="0">
+                <a:solidFill>
+                  <a:srgbClr val="243831"/>
+                </a:solidFill>
+                <a:latin typeface="Segoe UI" pitchFamily="34" charset="0"/>
+                <a:ea typeface="Segoe UI" pitchFamily="34" charset="-122"/>
+                <a:cs typeface="Segoe UI" pitchFamily="34" charset="-120"/>
+              </a:rPr>
+              <a:t>Verified release and load</a:t>
+            </a:r>
+            <a:endParaRPr lang="en-US" sz="2100" dirty="0"/>
+          </a:p>
+        </p:txBody>
+      </p:sp>
+      <p:sp>
+        <p:nvSpPr>
+          <p:cNvPr id="11" name="Text 9"/>
+          <p:cNvSpPr/>
+          <p:nvPr/>
+        </p:nvSpPr>
+        <p:spPr>
+          <a:xfrm>
+            <a:off x="685800" y="4846320"/>
+            <a:ext cx="10789920" cy="777240"/>
+          </a:xfrm>
+          <a:prstGeom prst="rect">
+            <a:avLst/>
+          </a:prstGeom>
+          <a:noFill/>
+          <a:ln/>
+        </p:spPr>
+        <p:txBody>
+          <a:bodyPr wrap="square" rtlCol="0" anchor="ctr"/>
+          <a:lstStyle/>
+          <a:p>
+            <a:pPr indent="0" marL="0">
+              <a:buNone/>
+            </a:pPr>
+            <a:r>
+              <a:rPr lang="en-US" sz="1800" dirty="0">
+                <a:solidFill>
+                  <a:srgbClr val="43544D"/>
+                </a:solidFill>
+                <a:latin typeface="Segoe UI" pitchFamily="34" charset="0"/>
+                <a:ea typeface="Segoe UI" pitchFamily="34" charset="-122"/>
+                <a:cs typeface="Segoe UI" pitchFamily="34" charset="-120"/>
+              </a:rPr>
+              <a:t>Release 34427432731 and Continuous Validation 34427429700 succeeded. Synthetic security data only.</a:t>
+            </a:r>
+            <a:endParaRPr lang="en-US" sz="1800" dirty="0"/>
+          </a:p>
+        </p:txBody>
+      </p:sp>
+      <p:sp>
+        <p:nvSpPr>
+          <p:cNvPr id="12" name="Text 10">
+            <a:hlinkClick r:id="rId1" tooltip=""/>
           </p:cNvPr>
           <p:cNvSpPr/>
           <p:nvPr/>
         </p:nvSpPr>
         <p:spPr>
           <a:xfrm>
-            <a:off x="411480" y="6528816"/>
-            <a:ext cx="10515600" cy="201168"/>
+            <a:off x="457200" y="6446520"/>
+            <a:ext cx="10698480" cy="228600"/>
           </a:xfrm>
           <a:prstGeom prst="rect">
             <a:avLst/>
@@ -4305,14 +6846,11 @@
               <a:buNone/>
             </a:pPr>
             <a:r>
-              <a:rPr lang="en-US" sz="900" u="sng" dirty="0">
+              <a:rPr lang="en-US" sz="1000" u="sng" dirty="0">
                 <a:solidFill>
                   <a:srgbClr val="075C9B"/>
                 </a:solidFill>
-                <a:latin typeface="Segoe UI" pitchFamily="34" charset="0"/>
-                <a:ea typeface="Segoe UI" pitchFamily="34" charset="-122"/>
-                <a:cs typeface="Segoe UI" pitchFamily="34" charset="-120"/>
-                <a:hlinkClick r:id="rId2" invalidUrl="" action="" tgtFrame="" tooltip="" history="1" highlightClick="0" endSnd="0">
+                <a:hlinkClick r:id="rId1" invalidUrl="" action="" tgtFrame="" tooltip="" history="1" highlightClick="0" endSnd="0">
                   <a:extLst>
                     <a:ext uri="{A12FA001-AC4F-418D-AE19-62706E023703}">
                       <ahyp:hlinkClr xmlns:ahyp="http://schemas.microsoft.com/office/drawing/2018/hyperlinkcolor" val="tx"/>
@@ -4320,15 +6858,15 @@
                   </a:extLst>
                 </a:hlinkClick>
               </a:rPr>
-              <a:t>GitHub Actions 34178081808 | f3da486 | 2026-09-08 UTC</a:t>
-            </a:r>
-            <a:endParaRPr lang="en-US" sz="900" dirty="0"/>
-          </a:p>
-        </p:txBody>
-      </p:sp>
-      <p:sp>
-        <p:nvSpPr>
-          <p:cNvPr id="7" name="Text 3"/>
+              <a:t>Implementation snapshot | 2026-09-10 UTC | 15098b7 + demo UI refresh</a:t>
+            </a:r>
+            <a:endParaRPr lang="en-US" sz="1000" dirty="0"/>
+          </a:p>
+        </p:txBody>
+      </p:sp>
+      <p:sp>
+        <p:nvSpPr>
+          <p:cNvPr id="14" name="Text 11"/>
           <p:cNvSpPr/>
           <p:nvPr/>
         </p:nvSpPr>
@@ -4356,7 +6894,7 @@
                   <a:srgbClr val="767676"/>
                 </a:solidFill>
               </a:rPr>
-              <a:t>2 / 14</a:t>
+              <a:t>2 / 19</a:t>
             </a:r>
             <a:endParaRPr lang="en-US" sz="900" dirty="0"/>
           </a:p>
@@ -4402,8 +6940,8 @@
         </p:nvSpPr>
         <p:spPr>
           <a:xfrm>
-            <a:off x="411480" y="146304"/>
-            <a:ext cx="11338560" cy="502920"/>
+            <a:off x="457200" y="320040"/>
+            <a:ext cx="11247120" cy="731520"/>
           </a:xfrm>
           <a:prstGeom prst="rect">
             <a:avLst/>
@@ -4419,7 +6957,7 @@
               <a:buNone/>
             </a:pPr>
             <a:r>
-              <a:rPr lang="en-US" sz="2400" b="1" dirty="0">
+              <a:rPr lang="en-US" sz="2800" b="1" dirty="0">
                 <a:solidFill>
                   <a:srgbClr val="146C54"/>
                 </a:solidFill>
@@ -4427,46 +6965,49 @@
                 <a:ea typeface="Segoe UI" pitchFamily="34" charset="-122"/>
                 <a:cs typeface="Segoe UI" pitchFamily="34" charset="-120"/>
               </a:rPr>
-              <a:t>Quality Gate: 21 of 21 Judge Checks Passed</a:t>
-            </a:r>
-            <a:endParaRPr lang="en-US" sz="2400" dirty="0"/>
-          </a:p>
-        </p:txBody>
-      </p:sp>
-      <p:pic>
-        <p:nvPicPr>
-          <p:cNvPr id="3" name="Image 0" descr="Quality Gate: 21 of 21 Judge Checks Passed">    </p:cNvPr>
-          <p:cNvPicPr>
-            <a:picLocks noChangeAspect="1"/>
-          </p:cNvPicPr>
-          <p:nvPr/>
-        </p:nvPicPr>
-        <p:blipFill>
-          <a:blip r:embed="rId1"/>
-          <a:stretch>
-            <a:fillRect/>
-          </a:stretch>
-        </p:blipFill>
-        <p:spPr>
-          <a:xfrm>
-            <a:off x="2068830" y="777240"/>
-            <a:ext cx="8051292" cy="5367528"/>
-          </a:xfrm>
-          <a:prstGeom prst="rect">
-            <a:avLst/>
-          </a:prstGeom>
-        </p:spPr>
-      </p:pic>
-      <p:sp>
-        <p:nvSpPr>
-          <p:cNvPr id="4" name="Text 1"/>
-          <p:cNvSpPr/>
-          <p:nvPr/>
-        </p:nvSpPr>
-        <p:spPr>
-          <a:xfrm>
-            <a:off x="411480" y="6245352"/>
-            <a:ext cx="11338560" cy="256032"/>
+              <a:t>Live demo: three scenarios, four MCP tools</a:t>
+            </a:r>
+            <a:endParaRPr lang="en-US" sz="2800" dirty="0"/>
+          </a:p>
+        </p:txBody>
+      </p:sp>
+      <p:sp>
+        <p:nvSpPr>
+          <p:cNvPr id="3" name="Shape 1"/>
+          <p:cNvSpPr/>
+          <p:nvPr/>
+        </p:nvSpPr>
+        <p:spPr>
+          <a:xfrm>
+            <a:off x="457200" y="1371600"/>
+            <a:ext cx="54864" cy="1143000"/>
+          </a:xfrm>
+          <a:prstGeom prst="rect">
+            <a:avLst/>
+          </a:prstGeom>
+          <a:solidFill>
+            <a:srgbClr val="146C54"/>
+          </a:solidFill>
+          <a:ln w="12700">
+            <a:solidFill>
+              <a:srgbClr val="333333">
+                <a:alpha val="0"/>
+              </a:srgbClr>
+            </a:solidFill>
+            <a:prstDash val="solid"/>
+          </a:ln>
+        </p:spPr>
+      </p:sp>
+      <p:sp>
+        <p:nvSpPr>
+          <p:cNvPr id="4" name="Text 2"/>
+          <p:cNvSpPr/>
+          <p:nvPr/>
+        </p:nvSpPr>
+        <p:spPr>
+          <a:xfrm>
+            <a:off x="685800" y="1371600"/>
+            <a:ext cx="10789920" cy="365760"/>
           </a:xfrm>
           <a:prstGeom prst="rect">
             <a:avLst/>
@@ -4482,32 +7023,281 @@
               <a:buNone/>
             </a:pPr>
             <a:r>
-              <a:rPr lang="en-US" sz="1000" dirty="0">
-                <a:solidFill>
-                  <a:srgbClr val="53635E"/>
-                </a:solidFill>
-                <a:latin typeface="Segoe UI" pitchFamily="34" charset="0"/>
-                <a:ea typeface="Segoe UI" pitchFamily="34" charset="-122"/>
-                <a:cs typeface="Segoe UI" pitchFamily="34" charset="-120"/>
-              </a:rPr>
-              <a:t>Artifact rendering, not a portal screenshot. Synthetic fixtures. Sources and SHA-256 hashes retained.</a:t>
-            </a:r>
-            <a:endParaRPr lang="en-US" sz="1000" dirty="0"/>
-          </a:p>
-        </p:txBody>
-      </p:sp>
-      <p:sp>
-        <p:nvSpPr>
-          <p:cNvPr id="5" name="Text 2">
-            <a:hlinkClick r:id="rId2" tooltip=""/>
+              <a:rPr lang="en-US" sz="2100" b="1" dirty="0">
+                <a:solidFill>
+                  <a:srgbClr val="243831"/>
+                </a:solidFill>
+                <a:latin typeface="Segoe UI" pitchFamily="34" charset="0"/>
+                <a:ea typeface="Segoe UI" pitchFamily="34" charset="-122"/>
+                <a:cs typeface="Segoe UI" pitchFamily="34" charset="-120"/>
+              </a:rPr>
+              <a:t>1 / Suspicious crew-admin login</a:t>
+            </a:r>
+            <a:endParaRPr lang="en-US" sz="2100" dirty="0"/>
+          </a:p>
+        </p:txBody>
+      </p:sp>
+      <p:sp>
+        <p:nvSpPr>
+          <p:cNvPr id="5" name="Text 3"/>
+          <p:cNvSpPr/>
+          <p:nvPr/>
+        </p:nvSpPr>
+        <p:spPr>
+          <a:xfrm>
+            <a:off x="685800" y="1828800"/>
+            <a:ext cx="10789920" cy="777240"/>
+          </a:xfrm>
+          <a:prstGeom prst="rect">
+            <a:avLst/>
+          </a:prstGeom>
+          <a:noFill/>
+          <a:ln/>
+        </p:spPr>
+        <p:txBody>
+          <a:bodyPr wrap="square" rtlCol="0" anchor="ctr"/>
+          <a:lstStyle/>
+          <a:p>
+            <a:pPr indent="0" marL="0">
+              <a:buNone/>
+            </a:pPr>
+            <a:r>
+              <a:rPr lang="en-US" sz="1800" dirty="0">
+                <a:solidFill>
+                  <a:srgbClr val="43544D"/>
+                </a:solidFill>
+                <a:latin typeface="Segoe UI" pitchFamily="34" charset="0"/>
+                <a:ea typeface="Segoe UI" pitchFamily="34" charset="-122"/>
+                <a:cs typeface="Segoe UI" pitchFamily="34" charset="-120"/>
+              </a:rPr>
+              <a:t>CREW-PORTAL-01 + crew-admin: correlate MFA failures and success; expect escalation with evidence limits.</a:t>
+            </a:r>
+            <a:endParaRPr lang="en-US" sz="1800" dirty="0"/>
+          </a:p>
+        </p:txBody>
+      </p:sp>
+      <p:sp>
+        <p:nvSpPr>
+          <p:cNvPr id="6" name="Shape 4"/>
+          <p:cNvSpPr/>
+          <p:nvPr/>
+        </p:nvSpPr>
+        <p:spPr>
+          <a:xfrm>
+            <a:off x="457200" y="2880360"/>
+            <a:ext cx="54864" cy="1143000"/>
+          </a:xfrm>
+          <a:prstGeom prst="rect">
+            <a:avLst/>
+          </a:prstGeom>
+          <a:solidFill>
+            <a:srgbClr val="0078D4"/>
+          </a:solidFill>
+          <a:ln w="12700">
+            <a:solidFill>
+              <a:srgbClr val="333333">
+                <a:alpha val="0"/>
+              </a:srgbClr>
+            </a:solidFill>
+            <a:prstDash val="solid"/>
+          </a:ln>
+        </p:spPr>
+      </p:sp>
+      <p:sp>
+        <p:nvSpPr>
+          <p:cNvPr id="7" name="Text 5"/>
+          <p:cNvSpPr/>
+          <p:nvPr/>
+        </p:nvSpPr>
+        <p:spPr>
+          <a:xfrm>
+            <a:off x="685800" y="2880360"/>
+            <a:ext cx="10789920" cy="365760"/>
+          </a:xfrm>
+          <a:prstGeom prst="rect">
+            <a:avLst/>
+          </a:prstGeom>
+          <a:noFill/>
+          <a:ln/>
+        </p:spPr>
+        <p:txBody>
+          <a:bodyPr wrap="square" rtlCol="0" anchor="ctr"/>
+          <a:lstStyle/>
+          <a:p>
+            <a:pPr indent="0" marL="0">
+              <a:buNone/>
+            </a:pPr>
+            <a:r>
+              <a:rPr lang="en-US" sz="2100" b="1" dirty="0">
+                <a:solidFill>
+                  <a:srgbClr val="243831"/>
+                </a:solidFill>
+                <a:latin typeface="Segoe UI" pitchFamily="34" charset="0"/>
+                <a:ea typeface="Segoe UI" pitchFamily="34" charset="-122"/>
+                <a:cs typeface="Segoe UI" pitchFamily="34" charset="-120"/>
+              </a:rPr>
+              <a:t>2 / Approved employee travel</a:t>
+            </a:r>
+            <a:endParaRPr lang="en-US" sz="2100" dirty="0"/>
+          </a:p>
+        </p:txBody>
+      </p:sp>
+      <p:sp>
+        <p:nvSpPr>
+          <p:cNvPr id="8" name="Text 6"/>
+          <p:cNvSpPr/>
+          <p:nvPr/>
+        </p:nvSpPr>
+        <p:spPr>
+          <a:xfrm>
+            <a:off x="685800" y="3337560"/>
+            <a:ext cx="10789920" cy="777240"/>
+          </a:xfrm>
+          <a:prstGeom prst="rect">
+            <a:avLst/>
+          </a:prstGeom>
+          <a:noFill/>
+          <a:ln/>
+        </p:spPr>
+        <p:txBody>
+          <a:bodyPr wrap="square" rtlCol="0" anchor="ctr"/>
+          <a:lstStyle/>
+          <a:p>
+            <a:pPr indent="0" marL="0">
+              <a:buNone/>
+            </a:pPr>
+            <a:r>
+              <a:rPr lang="en-US" sz="1800" dirty="0">
+                <a:solidFill>
+                  <a:srgbClr val="43544D"/>
+                </a:solidFill>
+                <a:latin typeface="Segoe UI" pitchFamily="34" charset="0"/>
+                <a:ea typeface="Segoe UI" pitchFamily="34" charset="-122"/>
+                <a:cs typeface="Segoe UI" pitchFamily="34" charset="-120"/>
+              </a:rPr>
+              <a:t>JDOE-LT-01 + jdoe: reconcile travel and known device; do not invent a compromise.</a:t>
+            </a:r>
+            <a:endParaRPr lang="en-US" sz="1800" dirty="0"/>
+          </a:p>
+        </p:txBody>
+      </p:sp>
+      <p:sp>
+        <p:nvSpPr>
+          <p:cNvPr id="9" name="Shape 7"/>
+          <p:cNvSpPr/>
+          <p:nvPr/>
+        </p:nvSpPr>
+        <p:spPr>
+          <a:xfrm>
+            <a:off x="457200" y="4389120"/>
+            <a:ext cx="54864" cy="1143000"/>
+          </a:xfrm>
+          <a:prstGeom prst="rect">
+            <a:avLst/>
+          </a:prstGeom>
+          <a:solidFill>
+            <a:srgbClr val="B22938"/>
+          </a:solidFill>
+          <a:ln w="12700">
+            <a:solidFill>
+              <a:srgbClr val="333333">
+                <a:alpha val="0"/>
+              </a:srgbClr>
+            </a:solidFill>
+            <a:prstDash val="solid"/>
+          </a:ln>
+        </p:spPr>
+      </p:sp>
+      <p:sp>
+        <p:nvSpPr>
+          <p:cNvPr id="10" name="Text 8"/>
+          <p:cNvSpPr/>
+          <p:nvPr/>
+        </p:nvSpPr>
+        <p:spPr>
+          <a:xfrm>
+            <a:off x="685800" y="4389120"/>
+            <a:ext cx="10789920" cy="365760"/>
+          </a:xfrm>
+          <a:prstGeom prst="rect">
+            <a:avLst/>
+          </a:prstGeom>
+          <a:noFill/>
+          <a:ln/>
+        </p:spPr>
+        <p:txBody>
+          <a:bodyPr wrap="square" rtlCol="0" anchor="ctr"/>
+          <a:lstStyle/>
+          <a:p>
+            <a:pPr indent="0" marL="0">
+              <a:buNone/>
+            </a:pPr>
+            <a:r>
+              <a:rPr lang="en-US" sz="2100" b="1" dirty="0">
+                <a:solidFill>
+                  <a:srgbClr val="243831"/>
+                </a:solidFill>
+                <a:latin typeface="Segoe UI" pitchFamily="34" charset="0"/>
+                <a:ea typeface="Segoe UI" pitchFamily="34" charset="-122"/>
+                <a:cs typeface="Segoe UI" pitchFamily="34" charset="-120"/>
+              </a:rPr>
+              <a:t>3 / Conflicting egress signals</a:t>
+            </a:r>
+            <a:endParaRPr lang="en-US" sz="2100" dirty="0"/>
+          </a:p>
+        </p:txBody>
+      </p:sp>
+      <p:sp>
+        <p:nvSpPr>
+          <p:cNvPr id="11" name="Text 9"/>
+          <p:cNvSpPr/>
+          <p:nvPr/>
+        </p:nvSpPr>
+        <p:spPr>
+          <a:xfrm>
+            <a:off x="685800" y="4846320"/>
+            <a:ext cx="10789920" cy="777240"/>
+          </a:xfrm>
+          <a:prstGeom prst="rect">
+            <a:avLst/>
+          </a:prstGeom>
+          <a:noFill/>
+          <a:ln/>
+        </p:spPr>
+        <p:txBody>
+          <a:bodyPr wrap="square" rtlCol="0" anchor="ctr"/>
+          <a:lstStyle/>
+          <a:p>
+            <a:pPr indent="0" marL="0">
+              <a:buNone/>
+            </a:pPr>
+            <a:r>
+              <a:rPr lang="en-US" sz="1800" dirty="0">
+                <a:solidFill>
+                  <a:srgbClr val="43544D"/>
+                </a:solidFill>
+                <a:latin typeface="Segoe UI" pitchFamily="34" charset="0"/>
+                <a:ea typeface="Segoe UI" pitchFamily="34" charset="-122"/>
+                <a:cs typeface="Segoe UI" pitchFamily="34" charset="-120"/>
+              </a:rPr>
+              <a:t>OPS-DB-02 + data_egress_mb_per_hour: 900: compare clean endpoint with network anomaly; surface the conflict.</a:t>
+            </a:r>
+            <a:endParaRPr lang="en-US" sz="1800" dirty="0"/>
+          </a:p>
+        </p:txBody>
+      </p:sp>
+      <p:sp>
+        <p:nvSpPr>
+          <p:cNvPr id="12" name="Text 10">
+            <a:hlinkClick r:id="rId1" tooltip=""/>
           </p:cNvPr>
           <p:cNvSpPr/>
           <p:nvPr/>
         </p:nvSpPr>
         <p:spPr>
           <a:xfrm>
-            <a:off x="411480" y="6528816"/>
-            <a:ext cx="10515600" cy="201168"/>
+            <a:off x="457200" y="6446520"/>
+            <a:ext cx="10698480" cy="228600"/>
           </a:xfrm>
           <a:prstGeom prst="rect">
             <a:avLst/>
@@ -4523,14 +7313,11 @@
               <a:buNone/>
             </a:pPr>
             <a:r>
-              <a:rPr lang="en-US" sz="900" u="sng" dirty="0">
+              <a:rPr lang="en-US" sz="1000" u="sng" dirty="0">
                 <a:solidFill>
                   <a:srgbClr val="075C9B"/>
                 </a:solidFill>
-                <a:latin typeface="Segoe UI" pitchFamily="34" charset="0"/>
-                <a:ea typeface="Segoe UI" pitchFamily="34" charset="-122"/>
-                <a:cs typeface="Segoe UI" pitchFamily="34" charset="-120"/>
-                <a:hlinkClick r:id="rId2" invalidUrl="" action="" tgtFrame="" tooltip="" history="1" highlightClick="0" endSnd="0">
+                <a:hlinkClick r:id="rId1" invalidUrl="" action="" tgtFrame="" tooltip="" history="1" highlightClick="0" endSnd="0">
                   <a:extLst>
                     <a:ext uri="{A12FA001-AC4F-418D-AE19-62706E023703}">
                       <ahyp:hlinkClr xmlns:ahyp="http://schemas.microsoft.com/office/drawing/2018/hyperlinkcolor" val="tx"/>
@@ -4538,15 +7325,15 @@
                   </a:extLst>
                 </a:hlinkClick>
               </a:rPr>
-              <a:t>GitHub Actions 34178081808 | f3da486 | 2026-09-08 UTC</a:t>
-            </a:r>
-            <a:endParaRPr lang="en-US" sz="900" dirty="0"/>
-          </a:p>
-        </p:txBody>
-      </p:sp>
-      <p:sp>
-        <p:nvSpPr>
-          <p:cNvPr id="7" name="Text 3"/>
+              <a:t>Implementation snapshot | 2026-09-10 UTC | 15098b7 + demo UI refresh</a:t>
+            </a:r>
+            <a:endParaRPr lang="en-US" sz="1000" dirty="0"/>
+          </a:p>
+        </p:txBody>
+      </p:sp>
+      <p:sp>
+        <p:nvSpPr>
+          <p:cNvPr id="14" name="Text 11"/>
           <p:cNvSpPr/>
           <p:nvPr/>
         </p:nvSpPr>
@@ -4574,7 +7361,7 @@
                   <a:srgbClr val="767676"/>
                 </a:solidFill>
               </a:rPr>
-              <a:t>3 / 14</a:t>
+              <a:t>3 / 19</a:t>
             </a:r>
             <a:endParaRPr lang="en-US" sz="900" dirty="0"/>
           </a:p>
@@ -4620,8 +7407,8 @@
         </p:nvSpPr>
         <p:spPr>
           <a:xfrm>
-            <a:off x="411480" y="146304"/>
-            <a:ext cx="11338560" cy="502920"/>
+            <a:off x="457200" y="320040"/>
+            <a:ext cx="11247120" cy="731520"/>
           </a:xfrm>
           <a:prstGeom prst="rect">
             <a:avLst/>
@@ -4637,7 +7424,7 @@
               <a:buNone/>
             </a:pPr>
             <a:r>
-              <a:rPr lang="en-US" sz="2400" b="1" dirty="0">
+              <a:rPr lang="en-US" sz="2800" b="1" dirty="0">
                 <a:solidFill>
                   <a:srgbClr val="146C54"/>
                 </a:solidFill>
@@ -4645,46 +7432,49 @@
                 <a:ea typeface="Segoe UI" pitchFamily="34" charset="-122"/>
                 <a:cs typeface="Segoe UI" pitchFamily="34" charset="-120"/>
               </a:rPr>
-              <a:t>Tool Execution Proven; Telemetry Is Synthetic</a:t>
-            </a:r>
-            <a:endParaRPr lang="en-US" sz="2400" dirty="0"/>
-          </a:p>
-        </p:txBody>
-      </p:sp>
-      <p:pic>
-        <p:nvPicPr>
-          <p:cNvPr id="3" name="Image 0" descr="Tool Execution Proven; Telemetry Is Synthetic">    </p:cNvPr>
-          <p:cNvPicPr>
-            <a:picLocks noChangeAspect="1"/>
-          </p:cNvPicPr>
-          <p:nvPr/>
-        </p:nvPicPr>
-        <p:blipFill>
-          <a:blip r:embed="rId1"/>
-          <a:stretch>
-            <a:fillRect/>
-          </a:stretch>
-        </p:blipFill>
-        <p:spPr>
-          <a:xfrm>
-            <a:off x="2068830" y="777240"/>
-            <a:ext cx="8051292" cy="5367528"/>
-          </a:xfrm>
-          <a:prstGeom prst="rect">
-            <a:avLst/>
-          </a:prstGeom>
-        </p:spPr>
-      </p:pic>
-      <p:sp>
-        <p:nvSpPr>
-          <p:cNvPr id="4" name="Text 1"/>
-          <p:cNvSpPr/>
-          <p:nvPr/>
-        </p:nvSpPr>
-        <p:spPr>
-          <a:xfrm>
-            <a:off x="411480" y="6245352"/>
-            <a:ext cx="11338560" cy="256032"/>
+              <a:t>Conversation memory: explicit, bounded, owner-scoped</a:t>
+            </a:r>
+            <a:endParaRPr lang="en-US" sz="2800" dirty="0"/>
+          </a:p>
+        </p:txBody>
+      </p:sp>
+      <p:sp>
+        <p:nvSpPr>
+          <p:cNvPr id="3" name="Shape 1"/>
+          <p:cNvSpPr/>
+          <p:nvPr/>
+        </p:nvSpPr>
+        <p:spPr>
+          <a:xfrm>
+            <a:off x="457200" y="1371600"/>
+            <a:ext cx="54864" cy="1143000"/>
+          </a:xfrm>
+          <a:prstGeom prst="rect">
+            <a:avLst/>
+          </a:prstGeom>
+          <a:solidFill>
+            <a:srgbClr val="146C54"/>
+          </a:solidFill>
+          <a:ln w="12700">
+            <a:solidFill>
+              <a:srgbClr val="333333">
+                <a:alpha val="0"/>
+              </a:srgbClr>
+            </a:solidFill>
+            <a:prstDash val="solid"/>
+          </a:ln>
+        </p:spPr>
+      </p:sp>
+      <p:sp>
+        <p:nvSpPr>
+          <p:cNvPr id="4" name="Text 2"/>
+          <p:cNvSpPr/>
+          <p:nvPr/>
+        </p:nvSpPr>
+        <p:spPr>
+          <a:xfrm>
+            <a:off x="685800" y="1371600"/>
+            <a:ext cx="10789920" cy="365760"/>
           </a:xfrm>
           <a:prstGeom prst="rect">
             <a:avLst/>
@@ -4700,32 +7490,281 @@
               <a:buNone/>
             </a:pPr>
             <a:r>
-              <a:rPr lang="en-US" sz="1000" dirty="0">
-                <a:solidFill>
-                  <a:srgbClr val="53635E"/>
-                </a:solidFill>
-                <a:latin typeface="Segoe UI" pitchFamily="34" charset="0"/>
-                <a:ea typeface="Segoe UI" pitchFamily="34" charset="-122"/>
-                <a:cs typeface="Segoe UI" pitchFamily="34" charset="-120"/>
-              </a:rPr>
-              <a:t>Artifact rendering, not a portal screenshot. Synthetic fixtures. Sources and SHA-256 hashes retained.</a:t>
-            </a:r>
-            <a:endParaRPr lang="en-US" sz="1000" dirty="0"/>
-          </a:p>
-        </p:txBody>
-      </p:sp>
-      <p:sp>
-        <p:nvSpPr>
-          <p:cNvPr id="5" name="Text 2">
-            <a:hlinkClick r:id="rId2" tooltip=""/>
+              <a:rPr lang="en-US" sz="2100" b="1" dirty="0">
+                <a:solidFill>
+                  <a:srgbClr val="243831"/>
+                </a:solidFill>
+                <a:latin typeface="Segoe UI" pitchFamily="34" charset="0"/>
+                <a:ea typeface="Segoe UI" pitchFamily="34" charset="-122"/>
+                <a:cs typeface="Segoe UI" pitchFamily="34" charset="-120"/>
+              </a:rPr>
+              <a:t>Recall in the same assessment</a:t>
+            </a:r>
+            <a:endParaRPr lang="en-US" sz="2100" dirty="0"/>
+          </a:p>
+        </p:txBody>
+      </p:sp>
+      <p:sp>
+        <p:nvSpPr>
+          <p:cNvPr id="5" name="Text 3"/>
+          <p:cNvSpPr/>
+          <p:nvPr/>
+        </p:nvSpPr>
+        <p:spPr>
+          <a:xfrm>
+            <a:off x="685800" y="1828800"/>
+            <a:ext cx="10789920" cy="777240"/>
+          </a:xfrm>
+          <a:prstGeom prst="rect">
+            <a:avLst/>
+          </a:prstGeom>
+          <a:noFill/>
+          <a:ln/>
+        </p:spPr>
+        <p:txBody>
+          <a:bodyPr wrap="square" rtlCol="0" anchor="ctr"/>
+          <a:lstStyle/>
+          <a:p>
+            <a:pPr indent="0" marL="0">
+              <a:buNone/>
+            </a:pPr>
+            <a:r>
+              <a:rPr lang="en-US" sz="1800" dirty="0">
+                <a:solidFill>
+                  <a:srgbClr val="43544D"/>
+                </a:solidFill>
+                <a:latin typeface="Segoe UI" pitchFamily="34" charset="0"/>
+                <a:ea typeface="Segoe UI" pitchFamily="34" charset="-122"/>
+                <a:cs typeface="Segoe UI" pitchFamily="34" charset="-120"/>
+              </a:rPr>
+              <a:t>Add reference DEMO-73921, then ask for it without repeating it. All three specialists receive the supplied history.</a:t>
+            </a:r>
+            <a:endParaRPr lang="en-US" sz="1800" dirty="0"/>
+          </a:p>
+        </p:txBody>
+      </p:sp>
+      <p:sp>
+        <p:nvSpPr>
+          <p:cNvPr id="6" name="Shape 4"/>
+          <p:cNvSpPr/>
+          <p:nvPr/>
+        </p:nvSpPr>
+        <p:spPr>
+          <a:xfrm>
+            <a:off x="457200" y="2880360"/>
+            <a:ext cx="54864" cy="1143000"/>
+          </a:xfrm>
+          <a:prstGeom prst="rect">
+            <a:avLst/>
+          </a:prstGeom>
+          <a:solidFill>
+            <a:srgbClr val="0078D4"/>
+          </a:solidFill>
+          <a:ln w="12700">
+            <a:solidFill>
+              <a:srgbClr val="333333">
+                <a:alpha val="0"/>
+              </a:srgbClr>
+            </a:solidFill>
+            <a:prstDash val="solid"/>
+          </a:ln>
+        </p:spPr>
+      </p:sp>
+      <p:sp>
+        <p:nvSpPr>
+          <p:cNvPr id="7" name="Text 5"/>
+          <p:cNvSpPr/>
+          <p:nvPr/>
+        </p:nvSpPr>
+        <p:spPr>
+          <a:xfrm>
+            <a:off x="685800" y="2880360"/>
+            <a:ext cx="10789920" cy="365760"/>
+          </a:xfrm>
+          <a:prstGeom prst="rect">
+            <a:avLst/>
+          </a:prstGeom>
+          <a:noFill/>
+          <a:ln/>
+        </p:spPr>
+        <p:txBody>
+          <a:bodyPr wrap="square" rtlCol="0" anchor="ctr"/>
+          <a:lstStyle/>
+          <a:p>
+            <a:pPr indent="0" marL="0">
+              <a:buNone/>
+            </a:pPr>
+            <a:r>
+              <a:rPr lang="en-US" sz="2100" b="1" dirty="0">
+                <a:solidFill>
+                  <a:srgbClr val="243831"/>
+                </a:solidFill>
+                <a:latin typeface="Segoe UI" pitchFamily="34" charset="0"/>
+                <a:ea typeface="Segoe UI" pitchFamily="34" charset="-122"/>
+                <a:cs typeface="Segoe UI" pitchFamily="34" charset="-120"/>
+              </a:rPr>
+              <a:t>Isolation and retry boundaries</a:t>
+            </a:r>
+            <a:endParaRPr lang="en-US" sz="2100" dirty="0"/>
+          </a:p>
+        </p:txBody>
+      </p:sp>
+      <p:sp>
+        <p:nvSpPr>
+          <p:cNvPr id="8" name="Text 6"/>
+          <p:cNvSpPr/>
+          <p:nvPr/>
+        </p:nvSpPr>
+        <p:spPr>
+          <a:xfrm>
+            <a:off x="685800" y="3337560"/>
+            <a:ext cx="10789920" cy="777240"/>
+          </a:xfrm>
+          <a:prstGeom prst="rect">
+            <a:avLst/>
+          </a:prstGeom>
+          <a:noFill/>
+          <a:ln/>
+        </p:spPr>
+        <p:txBody>
+          <a:bodyPr wrap="square" rtlCol="0" anchor="ctr"/>
+          <a:lstStyle/>
+          <a:p>
+            <a:pPr indent="0" marL="0">
+              <a:buNone/>
+            </a:pPr>
+            <a:r>
+              <a:rPr lang="en-US" sz="1800" dirty="0">
+                <a:solidFill>
+                  <a:srgbClr val="43544D"/>
+                </a:solidFill>
+                <a:latin typeface="Segoe UI" pitchFamily="34" charset="0"/>
+                <a:ea typeface="Segoe UI" pitchFamily="34" charset="-122"/>
+                <a:cs typeface="Segoe UI" pitchFamily="34" charset="-120"/>
+              </a:rPr>
+              <a:t>A new assessment must not recall that reference. Completed identical message retries replay; changed text with the same key conflicts.</a:t>
+            </a:r>
+            <a:endParaRPr lang="en-US" sz="1800" dirty="0"/>
+          </a:p>
+        </p:txBody>
+      </p:sp>
+      <p:sp>
+        <p:nvSpPr>
+          <p:cNvPr id="9" name="Shape 7"/>
+          <p:cNvSpPr/>
+          <p:nvPr/>
+        </p:nvSpPr>
+        <p:spPr>
+          <a:xfrm>
+            <a:off x="457200" y="4389120"/>
+            <a:ext cx="54864" cy="1143000"/>
+          </a:xfrm>
+          <a:prstGeom prst="rect">
+            <a:avLst/>
+          </a:prstGeom>
+          <a:solidFill>
+            <a:srgbClr val="B22938"/>
+          </a:solidFill>
+          <a:ln w="12700">
+            <a:solidFill>
+              <a:srgbClr val="333333">
+                <a:alpha val="0"/>
+              </a:srgbClr>
+            </a:solidFill>
+            <a:prstDash val="solid"/>
+          </a:ln>
+        </p:spPr>
+      </p:sp>
+      <p:sp>
+        <p:nvSpPr>
+          <p:cNvPr id="10" name="Text 8"/>
+          <p:cNvSpPr/>
+          <p:nvPr/>
+        </p:nvSpPr>
+        <p:spPr>
+          <a:xfrm>
+            <a:off x="685800" y="4389120"/>
+            <a:ext cx="10789920" cy="365760"/>
+          </a:xfrm>
+          <a:prstGeom prst="rect">
+            <a:avLst/>
+          </a:prstGeom>
+          <a:noFill/>
+          <a:ln/>
+        </p:spPr>
+        <p:txBody>
+          <a:bodyPr wrap="square" rtlCol="0" anchor="ctr"/>
+          <a:lstStyle/>
+          <a:p>
+            <a:pPr indent="0" marL="0">
+              <a:buNone/>
+            </a:pPr>
+            <a:r>
+              <a:rPr lang="en-US" sz="2100" b="1" dirty="0">
+                <a:solidFill>
+                  <a:srgbClr val="243831"/>
+                </a:solidFill>
+                <a:latin typeface="Segoe UI" pitchFamily="34" charset="0"/>
+                <a:ea typeface="Segoe UI" pitchFamily="34" charset="-122"/>
+                <a:cs typeface="Segoe UI" pitchFamily="34" charset="-120"/>
+              </a:rPr>
+              <a:t>No durable history claim</a:t>
+            </a:r>
+            <a:endParaRPr lang="en-US" sz="2100" dirty="0"/>
+          </a:p>
+        </p:txBody>
+      </p:sp>
+      <p:sp>
+        <p:nvSpPr>
+          <p:cNvPr id="11" name="Text 9"/>
+          <p:cNvSpPr/>
+          <p:nvPr/>
+        </p:nvSpPr>
+        <p:spPr>
+          <a:xfrm>
+            <a:off x="685800" y="4846320"/>
+            <a:ext cx="10789920" cy="777240"/>
+          </a:xfrm>
+          <a:prstGeom prst="rect">
+            <a:avLst/>
+          </a:prstGeom>
+          <a:noFill/>
+          <a:ln/>
+        </p:spPr>
+        <p:txBody>
+          <a:bodyPr wrap="square" rtlCol="0" anchor="ctr"/>
+          <a:lstStyle/>
+          <a:p>
+            <a:pPr indent="0" marL="0">
+              <a:buNone/>
+            </a:pPr>
+            <a:r>
+              <a:rPr lang="en-US" sz="1800" dirty="0">
+                <a:solidFill>
+                  <a:srgbClr val="43544D"/>
+                </a:solidFill>
+                <a:latin typeface="Segoe UI" pitchFamily="34" charset="0"/>
+                <a:ea typeface="Segoe UI" pitchFamily="34" charset="-122"/>
+                <a:cs typeface="Segoe UI" pitchFamily="34" charset="-120"/>
+              </a:rPr>
+              <a:t>Owner-bound in-memory sessions expire; restart loses server state and browser reload loses the local list. No Cosmos, Teams, or durable exactly-once guarantee.</a:t>
+            </a:r>
+            <a:endParaRPr lang="en-US" sz="1800" dirty="0"/>
+          </a:p>
+        </p:txBody>
+      </p:sp>
+      <p:sp>
+        <p:nvSpPr>
+          <p:cNvPr id="12" name="Text 10">
+            <a:hlinkClick r:id="rId1" tooltip=""/>
           </p:cNvPr>
           <p:cNvSpPr/>
           <p:nvPr/>
         </p:nvSpPr>
         <p:spPr>
           <a:xfrm>
-            <a:off x="411480" y="6528816"/>
-            <a:ext cx="10515600" cy="201168"/>
+            <a:off x="457200" y="6446520"/>
+            <a:ext cx="10698480" cy="228600"/>
           </a:xfrm>
           <a:prstGeom prst="rect">
             <a:avLst/>
@@ -4741,14 +7780,11 @@
               <a:buNone/>
             </a:pPr>
             <a:r>
-              <a:rPr lang="en-US" sz="900" u="sng" dirty="0">
+              <a:rPr lang="en-US" sz="1000" u="sng" dirty="0">
                 <a:solidFill>
                   <a:srgbClr val="075C9B"/>
                 </a:solidFill>
-                <a:latin typeface="Segoe UI" pitchFamily="34" charset="0"/>
-                <a:ea typeface="Segoe UI" pitchFamily="34" charset="-122"/>
-                <a:cs typeface="Segoe UI" pitchFamily="34" charset="-120"/>
-                <a:hlinkClick r:id="rId2" invalidUrl="" action="" tgtFrame="" tooltip="" history="1" highlightClick="0" endSnd="0">
+                <a:hlinkClick r:id="rId1" invalidUrl="" action="" tgtFrame="" tooltip="" history="1" highlightClick="0" endSnd="0">
                   <a:extLst>
                     <a:ext uri="{A12FA001-AC4F-418D-AE19-62706E023703}">
                       <ahyp:hlinkClr xmlns:ahyp="http://schemas.microsoft.com/office/drawing/2018/hyperlinkcolor" val="tx"/>
@@ -4756,15 +7792,15 @@
                   </a:extLst>
                 </a:hlinkClick>
               </a:rPr>
-              <a:t>GitHub Actions 34178081808 | f3da486 | 2026-09-08 UTC</a:t>
-            </a:r>
-            <a:endParaRPr lang="en-US" sz="900" dirty="0"/>
-          </a:p>
-        </p:txBody>
-      </p:sp>
-      <p:sp>
-        <p:nvSpPr>
-          <p:cNvPr id="7" name="Text 3"/>
+              <a:t>Implementation snapshot | 2026-09-10 UTC | 15098b7 + demo UI refresh</a:t>
+            </a:r>
+            <a:endParaRPr lang="en-US" sz="1000" dirty="0"/>
+          </a:p>
+        </p:txBody>
+      </p:sp>
+      <p:sp>
+        <p:nvSpPr>
+          <p:cNvPr id="14" name="Text 11"/>
           <p:cNvSpPr/>
           <p:nvPr/>
         </p:nvSpPr>
@@ -4792,7 +7828,7 @@
                   <a:srgbClr val="767676"/>
                 </a:solidFill>
               </a:rPr>
-              <a:t>4 / 14</a:t>
+              <a:t>4 / 19</a:t>
             </a:r>
             <a:endParaRPr lang="en-US" sz="900" dirty="0"/>
           </a:p>
@@ -4838,8 +7874,8 @@
         </p:nvSpPr>
         <p:spPr>
           <a:xfrm>
-            <a:off x="411480" y="146304"/>
-            <a:ext cx="11338560" cy="502920"/>
+            <a:off x="457200" y="320040"/>
+            <a:ext cx="11247120" cy="731520"/>
           </a:xfrm>
           <a:prstGeom prst="rect">
             <a:avLst/>
@@ -4855,7 +7891,7 @@
               <a:buNone/>
             </a:pPr>
             <a:r>
-              <a:rPr lang="en-US" sz="2400" b="1" dirty="0">
+              <a:rPr lang="en-US" sz="2800" b="1" dirty="0">
                 <a:solidFill>
                   <a:srgbClr val="146C54"/>
                 </a:solidFill>
@@ -4863,46 +7899,49 @@
                 <a:ea typeface="Segoe UI" pitchFamily="34" charset="-122"/>
                 <a:cs typeface="Segoe UI" pitchFamily="34" charset="-120"/>
               </a:rPr>
-              <a:t>Production 34: Active, Smoke Test Passed</a:t>
-            </a:r>
-            <a:endParaRPr lang="en-US" sz="2400" dirty="0"/>
-          </a:p>
-        </p:txBody>
-      </p:sp>
-      <p:pic>
-        <p:nvPicPr>
-          <p:cNvPr id="3" name="Image 0" descr="Production 34: Active, Smoke Test Passed">    </p:cNvPr>
-          <p:cNvPicPr>
-            <a:picLocks noChangeAspect="1"/>
-          </p:cNvPicPr>
-          <p:nvPr/>
-        </p:nvPicPr>
-        <p:blipFill>
-          <a:blip r:embed="rId1"/>
-          <a:stretch>
-            <a:fillRect/>
-          </a:stretch>
-        </p:blipFill>
-        <p:spPr>
-          <a:xfrm>
-            <a:off x="2068830" y="777240"/>
-            <a:ext cx="8051292" cy="5367528"/>
-          </a:xfrm>
-          <a:prstGeom prst="rect">
-            <a:avLst/>
-          </a:prstGeom>
-        </p:spPr>
-      </p:pic>
-      <p:sp>
-        <p:nvSpPr>
-          <p:cNvPr id="4" name="Text 1"/>
-          <p:cNvSpPr/>
-          <p:nvPr/>
-        </p:nvSpPr>
-        <p:spPr>
-          <a:xfrm>
-            <a:off x="411480" y="6245352"/>
-            <a:ext cx="11338560" cy="256032"/>
+              <a:t>Tool execution is evidence, not model prose</a:t>
+            </a:r>
+            <a:endParaRPr lang="en-US" sz="2800" dirty="0"/>
+          </a:p>
+        </p:txBody>
+      </p:sp>
+      <p:sp>
+        <p:nvSpPr>
+          <p:cNvPr id="3" name="Shape 1"/>
+          <p:cNvSpPr/>
+          <p:nvPr/>
+        </p:nvSpPr>
+        <p:spPr>
+          <a:xfrm>
+            <a:off x="457200" y="1371600"/>
+            <a:ext cx="54864" cy="1143000"/>
+          </a:xfrm>
+          <a:prstGeom prst="rect">
+            <a:avLst/>
+          </a:prstGeom>
+          <a:solidFill>
+            <a:srgbClr val="146C54"/>
+          </a:solidFill>
+          <a:ln w="12700">
+            <a:solidFill>
+              <a:srgbClr val="333333">
+                <a:alpha val="0"/>
+              </a:srgbClr>
+            </a:solidFill>
+            <a:prstDash val="solid"/>
+          </a:ln>
+        </p:spPr>
+      </p:sp>
+      <p:sp>
+        <p:nvSpPr>
+          <p:cNvPr id="4" name="Text 2"/>
+          <p:cNvSpPr/>
+          <p:nvPr/>
+        </p:nvSpPr>
+        <p:spPr>
+          <a:xfrm>
+            <a:off x="685800" y="1371600"/>
+            <a:ext cx="10789920" cy="365760"/>
           </a:xfrm>
           <a:prstGeom prst="rect">
             <a:avLst/>
@@ -4918,32 +7957,281 @@
               <a:buNone/>
             </a:pPr>
             <a:r>
-              <a:rPr lang="en-US" sz="1000" dirty="0">
-                <a:solidFill>
-                  <a:srgbClr val="53635E"/>
-                </a:solidFill>
-                <a:latin typeface="Segoe UI" pitchFamily="34" charset="0"/>
-                <a:ea typeface="Segoe UI" pitchFamily="34" charset="-122"/>
-                <a:cs typeface="Segoe UI" pitchFamily="34" charset="-120"/>
-              </a:rPr>
-              <a:t>Artifact rendering, not a portal screenshot. Synthetic fixtures. Sources and SHA-256 hashes retained.</a:t>
-            </a:r>
-            <a:endParaRPr lang="en-US" sz="1000" dirty="0"/>
-          </a:p>
-        </p:txBody>
-      </p:sp>
-      <p:sp>
-        <p:nvSpPr>
-          <p:cNvPr id="5" name="Text 2">
-            <a:hlinkClick r:id="rId2" tooltip=""/>
+              <a:rPr lang="en-US" sz="2100" b="1" dirty="0">
+                <a:solidFill>
+                  <a:srgbClr val="243831"/>
+                </a:solidFill>
+                <a:latin typeface="Segoe UI" pitchFamily="34" charset="0"/>
+                <a:ea typeface="Segoe UI" pitchFamily="34" charset="-122"/>
+                <a:cs typeface="Segoe UI" pitchFamily="34" charset="-120"/>
+              </a:rPr>
+              <a:t>Deterministic lookup plan</a:t>
+            </a:r>
+            <a:endParaRPr lang="en-US" sz="2100" dirty="0"/>
+          </a:p>
+        </p:txBody>
+      </p:sp>
+      <p:sp>
+        <p:nvSpPr>
+          <p:cNvPr id="5" name="Text 3"/>
+          <p:cNvSpPr/>
+          <p:nvPr/>
+        </p:nvSpPr>
+        <p:spPr>
+          <a:xfrm>
+            <a:off x="685800" y="1828800"/>
+            <a:ext cx="10789920" cy="777240"/>
+          </a:xfrm>
+          <a:prstGeom prst="rect">
+            <a:avLst/>
+          </a:prstGeom>
+          <a:noFill/>
+          <a:ln/>
+        </p:spPr>
+        <p:txBody>
+          <a:bodyPr wrap="square" rtlCol="0" anchor="ctr"/>
+          <a:lstStyle/>
+          <a:p>
+            <a:pPr indent="0" marL="0">
+              <a:buNone/>
+            </a:pPr>
+            <a:r>
+              <a:rPr lang="en-US" sz="1800" dirty="0">
+                <a:solidFill>
+                  <a:srgbClr val="43544D"/>
+                </a:solidFill>
+                <a:latin typeface="Segoe UI" pitchFamily="34" charset="0"/>
+                <a:ea typeface="Segoe UI" pitchFamily="34" charset="-122"/>
+                <a:cs typeface="Segoe UI" pitchFamily="34" charset="-120"/>
+              </a:rPr>
+              <a:t>Explicit user device/account/metric fields select real read-only MCP calls. Omitted fields retain prior context; new values replace that category.</a:t>
+            </a:r>
+            <a:endParaRPr lang="en-US" sz="1800" dirty="0"/>
+          </a:p>
+        </p:txBody>
+      </p:sp>
+      <p:sp>
+        <p:nvSpPr>
+          <p:cNvPr id="6" name="Shape 4"/>
+          <p:cNvSpPr/>
+          <p:nvPr/>
+        </p:nvSpPr>
+        <p:spPr>
+          <a:xfrm>
+            <a:off x="457200" y="2880360"/>
+            <a:ext cx="54864" cy="1143000"/>
+          </a:xfrm>
+          <a:prstGeom prst="rect">
+            <a:avLst/>
+          </a:prstGeom>
+          <a:solidFill>
+            <a:srgbClr val="0078D4"/>
+          </a:solidFill>
+          <a:ln w="12700">
+            <a:solidFill>
+              <a:srgbClr val="333333">
+                <a:alpha val="0"/>
+              </a:srgbClr>
+            </a:solidFill>
+            <a:prstDash val="solid"/>
+          </a:ln>
+        </p:spPr>
+      </p:sp>
+      <p:sp>
+        <p:nvSpPr>
+          <p:cNvPr id="7" name="Text 5"/>
+          <p:cNvSpPr/>
+          <p:nvPr/>
+        </p:nvSpPr>
+        <p:spPr>
+          <a:xfrm>
+            <a:off x="685800" y="2880360"/>
+            <a:ext cx="10789920" cy="365760"/>
+          </a:xfrm>
+          <a:prstGeom prst="rect">
+            <a:avLst/>
+          </a:prstGeom>
+          <a:noFill/>
+          <a:ln/>
+        </p:spPr>
+        <p:txBody>
+          <a:bodyPr wrap="square" rtlCol="0" anchor="ctr"/>
+          <a:lstStyle/>
+          <a:p>
+            <a:pPr indent="0" marL="0">
+              <a:buNone/>
+            </a:pPr>
+            <a:r>
+              <a:rPr lang="en-US" sz="2100" b="1" dirty="0">
+                <a:solidFill>
+                  <a:srgbClr val="243831"/>
+                </a:solidFill>
+                <a:latin typeface="Segoe UI" pitchFamily="34" charset="0"/>
+                <a:ea typeface="Segoe UI" pitchFamily="34" charset="-122"/>
+                <a:cs typeface="Segoe UI" pitchFamily="34" charset="-120"/>
+              </a:rPr>
+              <a:t>Strict specialist permissions</a:t>
+            </a:r>
+            <a:endParaRPr lang="en-US" sz="2100" dirty="0"/>
+          </a:p>
+        </p:txBody>
+      </p:sp>
+      <p:sp>
+        <p:nvSpPr>
+          <p:cNvPr id="8" name="Text 6"/>
+          <p:cNvSpPr/>
+          <p:nvPr/>
+        </p:nvSpPr>
+        <p:spPr>
+          <a:xfrm>
+            <a:off x="685800" y="3337560"/>
+            <a:ext cx="10789920" cy="777240"/>
+          </a:xfrm>
+          <a:prstGeom prst="rect">
+            <a:avLst/>
+          </a:prstGeom>
+          <a:noFill/>
+          <a:ln/>
+        </p:spPr>
+        <p:txBody>
+          <a:bodyPr wrap="square" rtlCol="0" anchor="ctr"/>
+          <a:lstStyle/>
+          <a:p>
+            <a:pPr indent="0" marL="0">
+              <a:buNone/>
+            </a:pPr>
+            <a:r>
+              <a:rPr lang="en-US" sz="1800" dirty="0">
+                <a:solidFill>
+                  <a:srgbClr val="43544D"/>
+                </a:solidFill>
+                <a:latin typeface="Segoe UI" pitchFamily="34" charset="0"/>
+                <a:ea typeface="Segoe UI" pitchFamily="34" charset="-122"/>
+                <a:cs typeface="Segoe UI" pitchFamily="34" charset="-120"/>
+              </a:rPr>
+              <a:t>Investigator: get_device_risk + list_vulnerabilities. Analyst: detect_login_anomalies + score_anomaly. Composer: no tools.</a:t>
+            </a:r>
+            <a:endParaRPr lang="en-US" sz="1800" dirty="0"/>
+          </a:p>
+        </p:txBody>
+      </p:sp>
+      <p:sp>
+        <p:nvSpPr>
+          <p:cNvPr id="9" name="Shape 7"/>
+          <p:cNvSpPr/>
+          <p:nvPr/>
+        </p:nvSpPr>
+        <p:spPr>
+          <a:xfrm>
+            <a:off x="457200" y="4389120"/>
+            <a:ext cx="54864" cy="1143000"/>
+          </a:xfrm>
+          <a:prstGeom prst="rect">
+            <a:avLst/>
+          </a:prstGeom>
+          <a:solidFill>
+            <a:srgbClr val="B22938"/>
+          </a:solidFill>
+          <a:ln w="12700">
+            <a:solidFill>
+              <a:srgbClr val="333333">
+                <a:alpha val="0"/>
+              </a:srgbClr>
+            </a:solidFill>
+            <a:prstDash val="solid"/>
+          </a:ln>
+        </p:spPr>
+      </p:sp>
+      <p:sp>
+        <p:nvSpPr>
+          <p:cNvPr id="10" name="Text 8"/>
+          <p:cNvSpPr/>
+          <p:nvPr/>
+        </p:nvSpPr>
+        <p:spPr>
+          <a:xfrm>
+            <a:off x="685800" y="4389120"/>
+            <a:ext cx="10789920" cy="365760"/>
+          </a:xfrm>
+          <a:prstGeom prst="rect">
+            <a:avLst/>
+          </a:prstGeom>
+          <a:noFill/>
+          <a:ln/>
+        </p:spPr>
+        <p:txBody>
+          <a:bodyPr wrap="square" rtlCol="0" anchor="ctr"/>
+          <a:lstStyle/>
+          <a:p>
+            <a:pPr indent="0" marL="0">
+              <a:buNone/>
+            </a:pPr>
+            <a:r>
+              <a:rPr lang="en-US" sz="2100" b="1" dirty="0">
+                <a:solidFill>
+                  <a:srgbClr val="243831"/>
+                </a:solidFill>
+                <a:latin typeface="Segoe UI" pitchFamily="34" charset="0"/>
+                <a:ea typeface="Segoe UI" pitchFamily="34" charset="-122"/>
+                <a:cs typeface="Segoe UI" pitchFamily="34" charset="-120"/>
+              </a:rPr>
+              <a:t>Validate actual receipts</a:t>
+            </a:r>
+            <a:endParaRPr lang="en-US" sz="2100" dirty="0"/>
+          </a:p>
+        </p:txBody>
+      </p:sp>
+      <p:sp>
+        <p:nvSpPr>
+          <p:cNvPr id="11" name="Text 9"/>
+          <p:cNvSpPr/>
+          <p:nvPr/>
+        </p:nvSpPr>
+        <p:spPr>
+          <a:xfrm>
+            <a:off x="685800" y="4846320"/>
+            <a:ext cx="10789920" cy="777240"/>
+          </a:xfrm>
+          <a:prstGeom prst="rect">
+            <a:avLst/>
+          </a:prstGeom>
+          <a:noFill/>
+          <a:ln/>
+        </p:spPr>
+        <p:txBody>
+          <a:bodyPr wrap="square" rtlCol="0" anchor="ctr"/>
+          <a:lstStyle/>
+          <a:p>
+            <a:pPr indent="0" marL="0">
+              <a:buNone/>
+            </a:pPr>
+            <a:r>
+              <a:rPr lang="en-US" sz="1800" dirty="0">
+                <a:solidFill>
+                  <a:srgbClr val="43544D"/>
+                </a:solidFill>
+                <a:latin typeface="Segoe UI" pitchFamily="34" charset="0"/>
+                <a:ea typeface="Segoe UI" pitchFamily="34" charset="-122"/>
+                <a:cs typeface="Segoe UI" pitchFamily="34" charset="-120"/>
+              </a:rPr>
+              <a:t>Successful ToolMessage results become bounded response metadata. Synthetic fixtures and unavailable vulnerability telemetry must remain visible limitations.</a:t>
+            </a:r>
+            <a:endParaRPr lang="en-US" sz="1800" dirty="0"/>
+          </a:p>
+        </p:txBody>
+      </p:sp>
+      <p:sp>
+        <p:nvSpPr>
+          <p:cNvPr id="12" name="Text 10">
+            <a:hlinkClick r:id="rId1" tooltip=""/>
           </p:cNvPr>
           <p:cNvSpPr/>
           <p:nvPr/>
         </p:nvSpPr>
         <p:spPr>
           <a:xfrm>
-            <a:off x="411480" y="6528816"/>
-            <a:ext cx="10515600" cy="201168"/>
+            <a:off x="457200" y="6446520"/>
+            <a:ext cx="10698480" cy="228600"/>
           </a:xfrm>
           <a:prstGeom prst="rect">
             <a:avLst/>
@@ -4959,14 +8247,11 @@
               <a:buNone/>
             </a:pPr>
             <a:r>
-              <a:rPr lang="en-US" sz="900" u="sng" dirty="0">
+              <a:rPr lang="en-US" sz="1000" u="sng" dirty="0">
                 <a:solidFill>
                   <a:srgbClr val="075C9B"/>
                 </a:solidFill>
-                <a:latin typeface="Segoe UI" pitchFamily="34" charset="0"/>
-                <a:ea typeface="Segoe UI" pitchFamily="34" charset="-122"/>
-                <a:cs typeface="Segoe UI" pitchFamily="34" charset="-120"/>
-                <a:hlinkClick r:id="rId2" invalidUrl="" action="" tgtFrame="" tooltip="" history="1" highlightClick="0" endSnd="0">
+                <a:hlinkClick r:id="rId1" invalidUrl="" action="" tgtFrame="" tooltip="" history="1" highlightClick="0" endSnd="0">
                   <a:extLst>
                     <a:ext uri="{A12FA001-AC4F-418D-AE19-62706E023703}">
                       <ahyp:hlinkClr xmlns:ahyp="http://schemas.microsoft.com/office/drawing/2018/hyperlinkcolor" val="tx"/>
@@ -4974,15 +8259,15 @@
                   </a:extLst>
                 </a:hlinkClick>
               </a:rPr>
-              <a:t>GitHub Actions 34178081808 | f3da486 | 2026-09-08 UTC</a:t>
-            </a:r>
-            <a:endParaRPr lang="en-US" sz="900" dirty="0"/>
-          </a:p>
-        </p:txBody>
-      </p:sp>
-      <p:sp>
-        <p:nvSpPr>
-          <p:cNvPr id="7" name="Text 3"/>
+              <a:t>Implementation snapshot | 2026-09-10 UTC | 15098b7 + demo UI refresh</a:t>
+            </a:r>
+            <a:endParaRPr lang="en-US" sz="1000" dirty="0"/>
+          </a:p>
+        </p:txBody>
+      </p:sp>
+      <p:sp>
+        <p:nvSpPr>
+          <p:cNvPr id="14" name="Text 11"/>
           <p:cNvSpPr/>
           <p:nvPr/>
         </p:nvSpPr>
@@ -5010,7 +8295,7 @@
                   <a:srgbClr val="767676"/>
                 </a:solidFill>
               </a:rPr>
-              <a:t>5 / 14</a:t>
+              <a:t>5 / 19</a:t>
             </a:r>
             <a:endParaRPr lang="en-US" sz="900" dirty="0"/>
           </a:p>
@@ -5030,7 +8315,7 @@
     <p:bg>
       <p:bgPr>
         <a:solidFill>
-          <a:srgbClr val="FAFBFC"/>
+          <a:srgbClr val="FFFFFF"/>
         </a:solidFill>
       </p:bgPr>
     </p:bg>
@@ -5050,14 +8335,158 @@
       </p:grpSpPr>
       <p:sp>
         <p:nvSpPr>
-          <p:cNvPr id="2" name="Shape 0"/>
-          <p:cNvSpPr/>
-          <p:nvPr/>
-        </p:nvSpPr>
-        <p:spPr>
-          <a:xfrm>
-            <a:off x="0" y="0"/>
-            <a:ext cx="12188952" cy="82296"/>
+          <p:cNvPr id="2" name="Text 0"/>
+          <p:cNvSpPr/>
+          <p:nvPr/>
+        </p:nvSpPr>
+        <p:spPr>
+          <a:xfrm>
+            <a:off x="457200" y="320040"/>
+            <a:ext cx="11247120" cy="731520"/>
+          </a:xfrm>
+          <a:prstGeom prst="rect">
+            <a:avLst/>
+          </a:prstGeom>
+          <a:noFill/>
+          <a:ln/>
+        </p:spPr>
+        <p:txBody>
+          <a:bodyPr wrap="square" rtlCol="0" anchor="ctr"/>
+          <a:lstStyle/>
+          <a:p>
+            <a:pPr indent="0" marL="0">
+              <a:buNone/>
+            </a:pPr>
+            <a:r>
+              <a:rPr lang="en-US" sz="2800" b="1" dirty="0">
+                <a:solidFill>
+                  <a:srgbClr val="146C54"/>
+                </a:solidFill>
+                <a:latin typeface="Segoe UI" pitchFamily="34" charset="0"/>
+                <a:ea typeface="Segoe UI" pitchFamily="34" charset="-122"/>
+                <a:cs typeface="Segoe UI" pitchFamily="34" charset="-120"/>
+              </a:rPr>
+              <a:t>Release operations: approval, telemetry, capacity</a:t>
+            </a:r>
+            <a:endParaRPr lang="en-US" sz="2800" dirty="0"/>
+          </a:p>
+        </p:txBody>
+      </p:sp>
+      <p:sp>
+        <p:nvSpPr>
+          <p:cNvPr id="3" name="Shape 1"/>
+          <p:cNvSpPr/>
+          <p:nvPr/>
+        </p:nvSpPr>
+        <p:spPr>
+          <a:xfrm>
+            <a:off x="457200" y="1371600"/>
+            <a:ext cx="54864" cy="1143000"/>
+          </a:xfrm>
+          <a:prstGeom prst="rect">
+            <a:avLst/>
+          </a:prstGeom>
+          <a:solidFill>
+            <a:srgbClr val="146C54"/>
+          </a:solidFill>
+          <a:ln w="12700">
+            <a:solidFill>
+              <a:srgbClr val="333333">
+                <a:alpha val="0"/>
+              </a:srgbClr>
+            </a:solidFill>
+            <a:prstDash val="solid"/>
+          </a:ln>
+        </p:spPr>
+      </p:sp>
+      <p:sp>
+        <p:nvSpPr>
+          <p:cNvPr id="4" name="Text 2"/>
+          <p:cNvSpPr/>
+          <p:nvPr/>
+        </p:nvSpPr>
+        <p:spPr>
+          <a:xfrm>
+            <a:off x="685800" y="1371600"/>
+            <a:ext cx="10789920" cy="365760"/>
+          </a:xfrm>
+          <a:prstGeom prst="rect">
+            <a:avLst/>
+          </a:prstGeom>
+          <a:noFill/>
+          <a:ln/>
+        </p:spPr>
+        <p:txBody>
+          <a:bodyPr wrap="square" rtlCol="0" anchor="ctr"/>
+          <a:lstStyle/>
+          <a:p>
+            <a:pPr indent="0" marL="0">
+              <a:buNone/>
+            </a:pPr>
+            <a:r>
+              <a:rPr lang="en-US" sz="2100" b="1" dirty="0">
+                <a:solidFill>
+                  <a:srgbClr val="243831"/>
+                </a:solidFill>
+                <a:latin typeface="Segoe UI" pitchFamily="34" charset="0"/>
+                <a:ea typeface="Segoe UI" pitchFamily="34" charset="-122"/>
+                <a:cs typeface="Segoe UI" pitchFamily="34" charset="-120"/>
+              </a:rPr>
+              <a:t>Approve the release, then monitoring</a:t>
+            </a:r>
+            <a:endParaRPr lang="en-US" sz="2100" dirty="0"/>
+          </a:p>
+        </p:txBody>
+      </p:sp>
+      <p:sp>
+        <p:nvSpPr>
+          <p:cNvPr id="5" name="Text 3"/>
+          <p:cNvSpPr/>
+          <p:nvPr/>
+        </p:nvSpPr>
+        <p:spPr>
+          <a:xfrm>
+            <a:off x="685800" y="1828800"/>
+            <a:ext cx="10789920" cy="777240"/>
+          </a:xfrm>
+          <a:prstGeom prst="rect">
+            <a:avLst/>
+          </a:prstGeom>
+          <a:noFill/>
+          <a:ln/>
+        </p:spPr>
+        <p:txBody>
+          <a:bodyPr wrap="square" rtlCol="0" anchor="ctr"/>
+          <a:lstStyle/>
+          <a:p>
+            <a:pPr indent="0" marL="0">
+              <a:buNone/>
+            </a:pPr>
+            <a:r>
+              <a:rPr lang="en-US" sz="1800" dirty="0">
+                <a:solidFill>
+                  <a:srgbClr val="43544D"/>
+                </a:solidFill>
+                <a:latin typeface="Segoe UI" pitchFamily="34" charset="0"/>
+                <a:ea typeface="Segoe UI" pitchFamily="34" charset="-122"/>
+                <a:cs typeface="Segoe UI" pitchFamily="34" charset="-120"/>
+              </a:rPr>
+              <a:t>Both protected jobs use production approval. Continuous Validation queues behind the shared environment lock; it needs no manual approval.</a:t>
+            </a:r>
+            <a:endParaRPr lang="en-US" sz="1800" dirty="0"/>
+          </a:p>
+        </p:txBody>
+      </p:sp>
+      <p:sp>
+        <p:nvSpPr>
+          <p:cNvPr id="6" name="Shape 4"/>
+          <p:cNvSpPr/>
+          <p:nvPr/>
+        </p:nvSpPr>
+        <p:spPr>
+          <a:xfrm>
+            <a:off x="457200" y="2880360"/>
+            <a:ext cx="54864" cy="1143000"/>
           </a:xfrm>
           <a:prstGeom prst="rect">
             <a:avLst/>
@@ -5065,19 +8494,26 @@
           <a:solidFill>
             <a:srgbClr val="0078D4"/>
           </a:solidFill>
-          <a:ln/>
-        </p:spPr>
-      </p:sp>
-      <p:sp>
-        <p:nvSpPr>
-          <p:cNvPr id="3" name="Text 1"/>
-          <p:cNvSpPr/>
-          <p:nvPr/>
-        </p:nvSpPr>
-        <p:spPr>
-          <a:xfrm>
-            <a:off x="457200" y="292608"/>
-            <a:ext cx="11247120" cy="274320"/>
+          <a:ln w="12700">
+            <a:solidFill>
+              <a:srgbClr val="333333">
+                <a:alpha val="0"/>
+              </a:srgbClr>
+            </a:solidFill>
+            <a:prstDash val="solid"/>
+          </a:ln>
+        </p:spPr>
+      </p:sp>
+      <p:sp>
+        <p:nvSpPr>
+          <p:cNvPr id="7" name="Text 5"/>
+          <p:cNvSpPr/>
+          <p:nvPr/>
+        </p:nvSpPr>
+        <p:spPr>
+          <a:xfrm>
+            <a:off x="685800" y="2880360"/>
+            <a:ext cx="10789920" cy="365760"/>
           </a:xfrm>
           <a:prstGeom prst="rect">
             <a:avLst/>
@@ -5093,30 +8529,30 @@
               <a:buNone/>
             </a:pPr>
             <a:r>
-              <a:rPr lang="en-US" sz="1100" b="1" spc="100" kern="0" dirty="0">
-                <a:solidFill>
-                  <a:srgbClr val="0078D4"/>
-                </a:solidFill>
-                <a:latin typeface="Segoe UI" pitchFamily="34" charset="0"/>
-                <a:ea typeface="Segoe UI" pitchFamily="34" charset="-122"/>
-                <a:cs typeface="Segoe UI" pitchFamily="34" charset="-120"/>
-              </a:rPr>
-              <a:t>AGENDA</a:t>
-            </a:r>
-            <a:endParaRPr lang="en-US" sz="1100" dirty="0"/>
-          </a:p>
-        </p:txBody>
-      </p:sp>
-      <p:sp>
-        <p:nvSpPr>
-          <p:cNvPr id="4" name="Text 2"/>
-          <p:cNvSpPr/>
-          <p:nvPr/>
-        </p:nvSpPr>
-        <p:spPr>
-          <a:xfrm>
-            <a:off x="457200" y="548640"/>
-            <a:ext cx="11247120" cy="640080"/>
+              <a:rPr lang="en-US" sz="2100" b="1" dirty="0">
+                <a:solidFill>
+                  <a:srgbClr val="243831"/>
+                </a:solidFill>
+                <a:latin typeface="Segoe UI" pitchFamily="34" charset="0"/>
+                <a:ea typeface="Segoe UI" pitchFamily="34" charset="-122"/>
+                <a:cs typeface="Segoe UI" pitchFamily="34" charset="-120"/>
+              </a:rPr>
+              <a:t>Positive ingestion before zero exceptions</a:t>
+            </a:r>
+            <a:endParaRPr lang="en-US" sz="2100" dirty="0"/>
+          </a:p>
+        </p:txBody>
+      </p:sp>
+      <p:sp>
+        <p:nvSpPr>
+          <p:cNvPr id="8" name="Text 6"/>
+          <p:cNvSpPr/>
+          <p:nvPr/>
+        </p:nvSpPr>
+        <p:spPr>
+          <a:xfrm>
+            <a:off x="685800" y="3337560"/>
+            <a:ext cx="10789920" cy="777240"/>
           </a:xfrm>
           <a:prstGeom prst="rect">
             <a:avLst/>
@@ -5132,281 +8568,57 @@
               <a:buNone/>
             </a:pPr>
             <a:r>
-              <a:rPr lang="en-US" sz="2600" b="1" dirty="0">
-                <a:solidFill>
-                  <a:srgbClr val="001B3D"/>
-                </a:solidFill>
-                <a:latin typeface="Segoe UI" pitchFamily="34" charset="0"/>
-                <a:ea typeface="Segoe UI" pitchFamily="34" charset="-122"/>
-                <a:cs typeface="Segoe UI" pitchFamily="34" charset="-120"/>
-              </a:rPr>
-              <a:t>Nine Labs, One Real Deployment</a:t>
-            </a:r>
-            <a:endParaRPr lang="en-US" sz="2600" dirty="0"/>
-          </a:p>
-        </p:txBody>
-      </p:sp>
-      <p:sp>
-        <p:nvSpPr>
-          <p:cNvPr id="5" name="Shape 3"/>
-          <p:cNvSpPr/>
-          <p:nvPr/>
-        </p:nvSpPr>
-        <p:spPr>
-          <a:xfrm>
-            <a:off x="457200" y="1188720"/>
-            <a:ext cx="11247120" cy="10973"/>
+              <a:rPr lang="en-US" sz="1800" dirty="0">
+                <a:solidFill>
+                  <a:srgbClr val="43544D"/>
+                </a:solidFill>
+                <a:latin typeface="Segoe UI" pitchFamily="34" charset="0"/>
+                <a:ea typeface="Segoe UI" pitchFamily="34" charset="-122"/>
+                <a:cs typeface="Segoe UI" pitchFamily="34" charset="-120"/>
+              </a:rPr>
+              <a:t>Correlate the raw response ID with AppTraces, then check AppExceptions. Empty or invalid query results fail; zero exceptions alone is insufficient.</a:t>
+            </a:r>
+            <a:endParaRPr lang="en-US" sz="1800" dirty="0"/>
+          </a:p>
+        </p:txBody>
+      </p:sp>
+      <p:sp>
+        <p:nvSpPr>
+          <p:cNvPr id="9" name="Shape 7"/>
+          <p:cNvSpPr/>
+          <p:nvPr/>
+        </p:nvSpPr>
+        <p:spPr>
+          <a:xfrm>
+            <a:off x="457200" y="4389120"/>
+            <a:ext cx="54864" cy="1143000"/>
           </a:xfrm>
           <a:prstGeom prst="rect">
             <a:avLst/>
           </a:prstGeom>
           <a:solidFill>
-            <a:srgbClr val="E1E5E8"/>
+            <a:srgbClr val="B22938"/>
           </a:solidFill>
-          <a:ln/>
-        </p:spPr>
-      </p:sp>
-      <p:sp>
-        <p:nvSpPr>
-          <p:cNvPr id="6" name="Text 4"/>
-          <p:cNvSpPr/>
-          <p:nvPr/>
-        </p:nvSpPr>
-        <p:spPr>
-          <a:xfrm>
-            <a:off x="548640" y="1463040"/>
-            <a:ext cx="11064240" cy="5029200"/>
-          </a:xfrm>
-          <a:prstGeom prst="rect">
-            <a:avLst/>
-          </a:prstGeom>
-          <a:noFill/>
-          <a:ln/>
-        </p:spPr>
-        <p:txBody>
-          <a:bodyPr wrap="square" rtlCol="0" anchor="t"/>
-          <a:lstStyle/>
-          <a:p>
-            <a:pPr marL="254000" indent="-254000">
-              <a:lnSpc>
-                <a:spcPct val="125000"/>
-              </a:lnSpc>
-              <a:buSzPct val="100000"/>
-              <a:buChar char="●"/>
-            </a:pPr>
-            <a:r>
-              <a:rPr lang="en-US" sz="1500" dirty="0">
-                <a:solidFill>
-                  <a:srgbClr val="1A1A1A"/>
-                </a:solidFill>
-                <a:latin typeface="Segoe UI" pitchFamily="34" charset="0"/>
-                <a:ea typeface="Segoe UI" pitchFamily="34" charset="-122"/>
-                <a:cs typeface="Segoe UI" pitchFamily="34" charset="-120"/>
-              </a:rPr>
-              <a:t>Lab 00 — Prerequisites and environment setup</a:t>
-            </a:r>
-            <a:endParaRPr lang="en-US" sz="1500" dirty="0"/>
-          </a:p>
-          <a:p>
-            <a:pPr marL="254000" indent="-254000">
-              <a:lnSpc>
-                <a:spcPct val="125000"/>
-              </a:lnSpc>
-              <a:buSzPct val="100000"/>
-              <a:buChar char="●"/>
-            </a:pPr>
-            <a:r>
-              <a:rPr lang="en-US" sz="1500" dirty="0">
-                <a:solidFill>
-                  <a:srgbClr val="1A1A1A"/>
-                </a:solidFill>
-                <a:latin typeface="Segoe UI" pitchFamily="34" charset="0"/>
-                <a:ea typeface="Segoe UI" pitchFamily="34" charset="-122"/>
-                <a:cs typeface="Segoe UI" pitchFamily="34" charset="-120"/>
-              </a:rPr>
-              <a:t>Lab 01 — Architecture deep dive (LangGraph supervisor/specialists)</a:t>
-            </a:r>
-            <a:endParaRPr lang="en-US" sz="1500" dirty="0"/>
-          </a:p>
-          <a:p>
-            <a:pPr marL="254000" indent="-254000">
-              <a:lnSpc>
-                <a:spcPct val="125000"/>
-              </a:lnSpc>
-              <a:buSzPct val="100000"/>
-              <a:buChar char="●"/>
-            </a:pPr>
-            <a:r>
-              <a:rPr lang="en-US" sz="1500" dirty="0">
-                <a:solidFill>
-                  <a:srgbClr val="1A1A1A"/>
-                </a:solidFill>
-                <a:latin typeface="Segoe UI" pitchFamily="34" charset="0"/>
-                <a:ea typeface="Segoe UI" pitchFamily="34" charset="-122"/>
-                <a:cs typeface="Segoe UI" pitchFamily="34" charset="-120"/>
-              </a:rPr>
-              <a:t>Lab 02 — Deploy the MCP tool servers</a:t>
-            </a:r>
-            <a:endParaRPr lang="en-US" sz="1500" dirty="0"/>
-          </a:p>
-          <a:p>
-            <a:pPr marL="254000" indent="-254000">
-              <a:lnSpc>
-                <a:spcPct val="125000"/>
-              </a:lnSpc>
-              <a:buSzPct val="100000"/>
-              <a:buChar char="●"/>
-            </a:pPr>
-            <a:r>
-              <a:rPr lang="en-US" sz="1500" dirty="0">
-                <a:solidFill>
-                  <a:srgbClr val="1A1A1A"/>
-                </a:solidFill>
-                <a:latin typeface="Segoe UI" pitchFamily="34" charset="0"/>
-                <a:ea typeface="Segoe UI" pitchFamily="34" charset="-122"/>
-                <a:cs typeface="Segoe UI" pitchFamily="34" charset="-120"/>
-              </a:rPr>
-              <a:t>Lab 03 — Provision and deploy the hosted agent (azd)</a:t>
-            </a:r>
-            <a:endParaRPr lang="en-US" sz="1500" dirty="0"/>
-          </a:p>
-          <a:p>
-            <a:pPr marL="254000" indent="-254000">
-              <a:lnSpc>
-                <a:spcPct val="125000"/>
-              </a:lnSpc>
-              <a:buSzPct val="100000"/>
-              <a:buChar char="●"/>
-            </a:pPr>
-            <a:r>
-              <a:rPr lang="en-US" sz="1500" dirty="0">
-                <a:solidFill>
-                  <a:srgbClr val="1A1A1A"/>
-                </a:solidFill>
-                <a:latin typeface="Segoe UI" pitchFamily="34" charset="0"/>
-                <a:ea typeface="Segoe UI" pitchFamily="34" charset="-122"/>
-                <a:cs typeface="Segoe UI" pitchFamily="34" charset="-120"/>
-              </a:rPr>
-              <a:t>Lab 04 — Invoke the agent and read traces</a:t>
-            </a:r>
-            <a:endParaRPr lang="en-US" sz="1500" dirty="0"/>
-          </a:p>
-          <a:p>
-            <a:pPr marL="254000" indent="-254000">
-              <a:lnSpc>
-                <a:spcPct val="125000"/>
-              </a:lnSpc>
-              <a:buSzPct val="100000"/>
-              <a:buChar char="●"/>
-            </a:pPr>
-            <a:r>
-              <a:rPr lang="en-US" sz="1500" dirty="0">
-                <a:solidFill>
-                  <a:srgbClr val="1A1A1A"/>
-                </a:solidFill>
-                <a:latin typeface="Segoe UI" pitchFamily="34" charset="0"/>
-                <a:ea typeface="Segoe UI" pitchFamily="34" charset="-122"/>
-                <a:cs typeface="Segoe UI" pitchFamily="34" charset="-120"/>
-              </a:rPr>
-              <a:t>Lab 05 — Evaluations: deterministic + LLM-as-judge</a:t>
-            </a:r>
-            <a:endParaRPr lang="en-US" sz="1500" dirty="0"/>
-          </a:p>
-          <a:p>
-            <a:pPr marL="254000" indent="-254000">
-              <a:lnSpc>
-                <a:spcPct val="125000"/>
-              </a:lnSpc>
-              <a:buSzPct val="100000"/>
-              <a:buChar char="●"/>
-            </a:pPr>
-            <a:r>
-              <a:rPr lang="en-US" sz="1500" dirty="0">
-                <a:solidFill>
-                  <a:srgbClr val="1A1A1A"/>
-                </a:solidFill>
-                <a:latin typeface="Segoe UI" pitchFamily="34" charset="0"/>
-                <a:ea typeface="Segoe UI" pitchFamily="34" charset="-122"/>
-                <a:cs typeface="Segoe UI" pitchFamily="34" charset="-120"/>
-              </a:rPr>
-              <a:t>Lab 06 — CI/CD: evaluation-gated release pipeline</a:t>
-            </a:r>
-            <a:endParaRPr lang="en-US" sz="1500" dirty="0"/>
-          </a:p>
-          <a:p>
-            <a:pPr marL="254000" indent="-254000">
-              <a:lnSpc>
-                <a:spcPct val="125000"/>
-              </a:lnSpc>
-              <a:buSzPct val="100000"/>
-              <a:buChar char="●"/>
-            </a:pPr>
-            <a:r>
-              <a:rPr lang="en-US" sz="1500" dirty="0">
-                <a:solidFill>
-                  <a:srgbClr val="1A1A1A"/>
-                </a:solidFill>
-                <a:latin typeface="Segoe UI" pitchFamily="34" charset="0"/>
-                <a:ea typeface="Segoe UI" pitchFamily="34" charset="-122"/>
-                <a:cs typeface="Segoe UI" pitchFamily="34" charset="-120"/>
-              </a:rPr>
-              <a:t>Lab 07 — Real-world troubleshooting: RBAC 401</a:t>
-            </a:r>
-            <a:endParaRPr lang="en-US" sz="1500" dirty="0"/>
-          </a:p>
-          <a:p>
-            <a:pPr marL="254000" indent="-254000">
-              <a:lnSpc>
-                <a:spcPct val="125000"/>
-              </a:lnSpc>
-              <a:buSzPct val="100000"/>
-              <a:buChar char="●"/>
-            </a:pPr>
-            <a:r>
-              <a:rPr lang="en-US" sz="1500" dirty="0">
-                <a:solidFill>
-                  <a:srgbClr val="1A1A1A"/>
-                </a:solidFill>
-                <a:latin typeface="Segoe UI" pitchFamily="34" charset="0"/>
-                <a:ea typeface="Segoe UI" pitchFamily="34" charset="-122"/>
-                <a:cs typeface="Segoe UI" pitchFamily="34" charset="-120"/>
-              </a:rPr>
-              <a:t>Lab 08 — Production readiness and decision gates</a:t>
-            </a:r>
-            <a:endParaRPr lang="en-US" sz="1500" dirty="0"/>
-          </a:p>
-        </p:txBody>
-      </p:sp>
-      <p:sp>
-        <p:nvSpPr>
-          <p:cNvPr id="8" name="Shape 5"/>
-          <p:cNvSpPr/>
-          <p:nvPr/>
-        </p:nvSpPr>
-        <p:spPr>
-          <a:xfrm>
-            <a:off x="0" y="6784848"/>
-            <a:ext cx="12188952" cy="27432"/>
-          </a:xfrm>
-          <a:prstGeom prst="rect">
-            <a:avLst/>
-          </a:prstGeom>
-          <a:solidFill>
-            <a:srgbClr val="E1E5E8"/>
-          </a:solidFill>
-          <a:ln/>
-        </p:spPr>
-      </p:sp>
-      <p:sp>
-        <p:nvSpPr>
-          <p:cNvPr id="9" name="Text 6"/>
-          <p:cNvSpPr/>
-          <p:nvPr/>
-        </p:nvSpPr>
-        <p:spPr>
-          <a:xfrm>
-            <a:off x="457200" y="6537960"/>
-            <a:ext cx="8229600" cy="256032"/>
+          <a:ln w="12700">
+            <a:solidFill>
+              <a:srgbClr val="333333">
+                <a:alpha val="0"/>
+              </a:srgbClr>
+            </a:solidFill>
+            <a:prstDash val="solid"/>
+          </a:ln>
+        </p:spPr>
+      </p:sp>
+      <p:sp>
+        <p:nvSpPr>
+          <p:cNvPr id="10" name="Text 8"/>
+          <p:cNvSpPr/>
+          <p:nvPr/>
+        </p:nvSpPr>
+        <p:spPr>
+          <a:xfrm>
+            <a:off x="685800" y="4389120"/>
+            <a:ext cx="10789920" cy="365760"/>
           </a:xfrm>
           <a:prstGeom prst="rect">
             <a:avLst/>
@@ -5422,23 +8634,107 @@
               <a:buNone/>
             </a:pPr>
             <a:r>
-              <a:rPr lang="en-US" sz="900" dirty="0">
-                <a:solidFill>
-                  <a:srgbClr val="767676"/>
-                </a:solidFill>
-                <a:latin typeface="Segoe UI" pitchFamily="34" charset="0"/>
-                <a:ea typeface="Segoe UI" pitchFamily="34" charset="-122"/>
-                <a:cs typeface="Segoe UI" pitchFamily="34" charset="-120"/>
-              </a:rPr>
-              <a:t>Foundry Hosted Agents Workshop</a:t>
-            </a:r>
-            <a:endParaRPr lang="en-US" sz="900" dirty="0"/>
-          </a:p>
-        </p:txBody>
-      </p:sp>
-      <p:sp>
-        <p:nvSpPr>
-          <p:cNvPr id="10" name="Text 7"/>
+              <a:rPr lang="en-US" sz="2100" b="1" dirty="0">
+                <a:solidFill>
+                  <a:srgbClr val="243831"/>
+                </a:solidFill>
+                <a:latin typeface="Segoe UI" pitchFamily="34" charset="0"/>
+                <a:ea typeface="Segoe UI" pitchFamily="34" charset="-122"/>
+                <a:cs typeface="Segoe UI" pitchFamily="34" charset="-120"/>
+              </a:rPr>
+              <a:t>Staging 50k TPM / production 10k TPM</a:t>
+            </a:r>
+            <a:endParaRPr lang="en-US" sz="2100" dirty="0"/>
+          </a:p>
+        </p:txBody>
+      </p:sp>
+      <p:sp>
+        <p:nvSpPr>
+          <p:cNvPr id="11" name="Text 9"/>
+          <p:cNvSpPr/>
+          <p:nvPr/>
+        </p:nvSpPr>
+        <p:spPr>
+          <a:xfrm>
+            <a:off x="685800" y="4846320"/>
+            <a:ext cx="10789920" cy="777240"/>
+          </a:xfrm>
+          <a:prstGeom prst="rect">
+            <a:avLst/>
+          </a:prstGeom>
+          <a:noFill/>
+          <a:ln/>
+        </p:spPr>
+        <p:txBody>
+          <a:bodyPr wrap="square" rtlCol="0" anchor="ctr"/>
+          <a:lstStyle/>
+          <a:p>
+            <a:pPr indent="0" marL="0">
+              <a:buNone/>
+            </a:pPr>
+            <a:r>
+              <a:rPr lang="en-US" sz="1800" dirty="0">
+                <a:solidFill>
+                  <a:srgbClr val="43544D"/>
+                </a:solidFill>
+                <a:latin typeface="Segoe UI" pitchFamily="34" charset="0"/>
+                <a:ea typeface="Segoe UI" pitchFamily="34" charset="-122"/>
+                <a:cs typeface="Segoe UI" pitchFamily="34" charset="-120"/>
+              </a:rPr>
+              <a:t>Three load failures in 34424723263 correlated with model 429s. Approved staging-only increase; unchanged five-stream gate subsequently passed. Not an SLA or saturation test.</a:t>
+            </a:r>
+            <a:endParaRPr lang="en-US" sz="1800" dirty="0"/>
+          </a:p>
+        </p:txBody>
+      </p:sp>
+      <p:sp>
+        <p:nvSpPr>
+          <p:cNvPr id="12" name="Text 10">
+            <a:hlinkClick r:id="rId1" tooltip=""/>
+          </p:cNvPr>
+          <p:cNvSpPr/>
+          <p:nvPr/>
+        </p:nvSpPr>
+        <p:spPr>
+          <a:xfrm>
+            <a:off x="457200" y="6446520"/>
+            <a:ext cx="10698480" cy="228600"/>
+          </a:xfrm>
+          <a:prstGeom prst="rect">
+            <a:avLst/>
+          </a:prstGeom>
+          <a:noFill/>
+          <a:ln/>
+        </p:spPr>
+        <p:txBody>
+          <a:bodyPr wrap="square" rtlCol="0" anchor="ctr"/>
+          <a:lstStyle/>
+          <a:p>
+            <a:pPr indent="0" marL="0">
+              <a:buNone/>
+            </a:pPr>
+            <a:r>
+              <a:rPr lang="en-US" sz="1000" u="sng" dirty="0">
+                <a:solidFill>
+                  <a:srgbClr val="075C9B"/>
+                </a:solidFill>
+                <a:hlinkClick r:id="rId1" invalidUrl="" action="" tgtFrame="" tooltip="" history="1" highlightClick="0" endSnd="0">
+                  <a:extLst>
+                    <a:ext uri="{A12FA001-AC4F-418D-AE19-62706E023703}">
+                      <ahyp:hlinkClr xmlns:ahyp="http://schemas.microsoft.com/office/drawing/2018/hyperlinkcolor" val="tx"/>
+                    </a:ext>
+                  </a:extLst>
+                </a:hlinkClick>
+              </a:rPr>
+              <a:t>Implementation snapshot | 2026-09-10 UTC | 15098b7 + demo UI refresh</a:t>
+            </a:r>
+            <a:endParaRPr lang="en-US" sz="1000" dirty="0"/>
+          </a:p>
+        </p:txBody>
+      </p:sp>
+      <p:sp>
+        <p:nvSpPr>
+          <p:cNvPr id="14" name="Text 11"/>
           <p:cNvSpPr/>
           <p:nvPr/>
         </p:nvSpPr>
@@ -5466,7 +8762,7 @@
                   <a:srgbClr val="767676"/>
                 </a:solidFill>
               </a:rPr>
-              <a:t>6 / 14</a:t>
+              <a:t>6 / 19</a:t>
             </a:r>
             <a:endParaRPr lang="en-US" sz="900" dirty="0"/>
           </a:p>
@@ -5486,7 +8782,7 @@
     <p:bg>
       <p:bgPr>
         <a:solidFill>
-          <a:srgbClr val="FAFBFC"/>
+          <a:srgbClr val="FFFFFF"/>
         </a:solidFill>
       </p:bgPr>
     </p:bg>
@@ -5506,34 +8802,14 @@
       </p:grpSpPr>
       <p:sp>
         <p:nvSpPr>
-          <p:cNvPr id="2" name="Shape 0"/>
-          <p:cNvSpPr/>
-          <p:nvPr/>
-        </p:nvSpPr>
-        <p:spPr>
-          <a:xfrm>
-            <a:off x="0" y="0"/>
-            <a:ext cx="12188952" cy="82296"/>
-          </a:xfrm>
-          <a:prstGeom prst="rect">
-            <a:avLst/>
-          </a:prstGeom>
-          <a:solidFill>
-            <a:srgbClr val="0078D4"/>
-          </a:solidFill>
-          <a:ln/>
-        </p:spPr>
-      </p:sp>
-      <p:sp>
-        <p:nvSpPr>
-          <p:cNvPr id="3" name="Text 1"/>
-          <p:cNvSpPr/>
-          <p:nvPr/>
-        </p:nvSpPr>
-        <p:spPr>
-          <a:xfrm>
-            <a:off x="457200" y="292608"/>
-            <a:ext cx="11247120" cy="274320"/>
+          <p:cNvPr id="2" name="Text 0"/>
+          <p:cNvSpPr/>
+          <p:nvPr/>
+        </p:nvSpPr>
+        <p:spPr>
+          <a:xfrm>
+            <a:off x="411480" y="146304"/>
+            <a:ext cx="11338560" cy="502920"/>
           </a:xfrm>
           <a:prstGeom prst="rect">
             <a:avLst/>
@@ -5549,30 +8825,54 @@
               <a:buNone/>
             </a:pPr>
             <a:r>
-              <a:rPr lang="en-US" sz="1100" b="1" spc="100" kern="0" dirty="0">
-                <a:solidFill>
-                  <a:srgbClr val="0078D4"/>
-                </a:solidFill>
-                <a:latin typeface="Segoe UI" pitchFamily="34" charset="0"/>
-                <a:ea typeface="Segoe UI" pitchFamily="34" charset="-122"/>
-                <a:cs typeface="Segoe UI" pitchFamily="34" charset="-120"/>
-              </a:rPr>
-              <a:t>ARCHITECTURE</a:t>
-            </a:r>
-            <a:endParaRPr lang="en-US" sz="1100" dirty="0"/>
-          </a:p>
-        </p:txBody>
-      </p:sp>
-      <p:sp>
-        <p:nvSpPr>
-          <p:cNvPr id="4" name="Text 2"/>
-          <p:cNvSpPr/>
-          <p:nvPr/>
-        </p:nvSpPr>
-        <p:spPr>
-          <a:xfrm>
-            <a:off x="457200" y="548640"/>
-            <a:ext cx="11247120" cy="640080"/>
+              <a:rPr lang="en-US" sz="2200" b="1" dirty="0">
+                <a:solidFill>
+                  <a:srgbClr val="146C54"/>
+                </a:solidFill>
+                <a:latin typeface="Segoe UI" pitchFamily="34" charset="0"/>
+                <a:ea typeface="Segoe UI" pitchFamily="34" charset="-122"/>
+                <a:cs typeface="Segoe UI" pitchFamily="34" charset="-120"/>
+              </a:rPr>
+              <a:t>Historical proof: Verified Release: Staging to Production</a:t>
+            </a:r>
+            <a:endParaRPr lang="en-US" sz="2200" dirty="0"/>
+          </a:p>
+        </p:txBody>
+      </p:sp>
+      <p:pic>
+        <p:nvPicPr>
+          <p:cNvPr id="3" name="Image 0" descr="Verified Release: Staging to Production">    </p:cNvPr>
+          <p:cNvPicPr>
+            <a:picLocks noChangeAspect="1"/>
+          </p:cNvPicPr>
+          <p:nvPr/>
+        </p:nvPicPr>
+        <p:blipFill>
+          <a:blip r:embed="rId1"/>
+          <a:stretch>
+            <a:fillRect/>
+          </a:stretch>
+        </p:blipFill>
+        <p:spPr>
+          <a:xfrm>
+            <a:off x="2068830" y="777240"/>
+            <a:ext cx="8051292" cy="5367528"/>
+          </a:xfrm>
+          <a:prstGeom prst="rect">
+            <a:avLst/>
+          </a:prstGeom>
+        </p:spPr>
+      </p:pic>
+      <p:sp>
+        <p:nvSpPr>
+          <p:cNvPr id="4" name="Text 1"/>
+          <p:cNvSpPr/>
+          <p:nvPr/>
+        </p:nvSpPr>
+        <p:spPr>
+          <a:xfrm>
+            <a:off x="411480" y="6245352"/>
+            <a:ext cx="11338560" cy="256032"/>
           </a:xfrm>
           <a:prstGeom prst="rect">
             <a:avLst/>
@@ -5588,197 +8888,32 @@
               <a:buNone/>
             </a:pPr>
             <a:r>
-              <a:rPr lang="en-US" sz="2600" b="1" dirty="0">
-                <a:solidFill>
-                  <a:srgbClr val="001B3D"/>
-                </a:solidFill>
-                <a:latin typeface="Segoe UI" pitchFamily="34" charset="0"/>
-                <a:ea typeface="Segoe UI" pitchFamily="34" charset="-122"/>
-                <a:cs typeface="Segoe UI" pitchFamily="34" charset="-120"/>
-              </a:rPr>
-              <a:t>Supervisor + Specialist Graph</a:t>
-            </a:r>
-            <a:endParaRPr lang="en-US" sz="2600" dirty="0"/>
-          </a:p>
-        </p:txBody>
-      </p:sp>
-      <p:sp>
-        <p:nvSpPr>
-          <p:cNvPr id="5" name="Shape 3"/>
-          <p:cNvSpPr/>
-          <p:nvPr/>
-        </p:nvSpPr>
-        <p:spPr>
-          <a:xfrm>
-            <a:off x="457200" y="1188720"/>
-            <a:ext cx="11247120" cy="10973"/>
-          </a:xfrm>
-          <a:prstGeom prst="rect">
-            <a:avLst/>
-          </a:prstGeom>
-          <a:solidFill>
-            <a:srgbClr val="E1E5E8"/>
-          </a:solidFill>
-          <a:ln/>
-        </p:spPr>
-      </p:sp>
-      <p:sp>
-        <p:nvSpPr>
-          <p:cNvPr id="6" name="Text 4"/>
-          <p:cNvSpPr/>
-          <p:nvPr/>
-        </p:nvSpPr>
-        <p:spPr>
-          <a:xfrm>
-            <a:off x="548640" y="1463040"/>
-            <a:ext cx="11064240" cy="5029200"/>
-          </a:xfrm>
-          <a:prstGeom prst="rect">
-            <a:avLst/>
-          </a:prstGeom>
-          <a:noFill/>
-          <a:ln/>
-        </p:spPr>
-        <p:txBody>
-          <a:bodyPr wrap="square" rtlCol="0" anchor="t"/>
-          <a:lstStyle/>
-          <a:p>
-            <a:pPr marL="254000" indent="-254000">
-              <a:lnSpc>
-                <a:spcPct val="125000"/>
-              </a:lnSpc>
-              <a:buSzPct val="100000"/>
-              <a:buChar char="●"/>
-            </a:pPr>
-            <a:r>
-              <a:rPr lang="en-US" sz="1500" dirty="0">
-                <a:solidFill>
-                  <a:srgbClr val="1A1A1A"/>
-                </a:solidFill>
-                <a:latin typeface="Segoe UI" pitchFamily="34" charset="0"/>
-                <a:ea typeface="Segoe UI" pitchFamily="34" charset="-122"/>
-                <a:cs typeface="Segoe UI" pitchFamily="34" charset="-120"/>
-              </a:rPr>
-              <a:t>A LangGraph supervisor routes to three specialist nodes: Evidence Investigator, Risk Analyst, Report Composer</a:t>
-            </a:r>
-            <a:endParaRPr lang="en-US" sz="1500" dirty="0"/>
-          </a:p>
-          <a:p>
-            <a:pPr marL="254000" indent="-254000">
-              <a:lnSpc>
-                <a:spcPct val="125000"/>
-              </a:lnSpc>
-              <a:buSzPct val="100000"/>
-              <a:buChar char="●"/>
-            </a:pPr>
-            <a:r>
-              <a:rPr lang="en-US" sz="1500" dirty="0">
-                <a:solidFill>
-                  <a:srgbClr val="1A1A1A"/>
-                </a:solidFill>
-                <a:latin typeface="Segoe UI" pitchFamily="34" charset="0"/>
-                <a:ea typeface="Segoe UI" pitchFamily="34" charset="-122"/>
-                <a:cs typeface="Segoe UI" pitchFamily="34" charset="-120"/>
-              </a:rPr>
-              <a:t>Each specialist has its own prompt, tool permissions, and evaluation criteria</a:t>
-            </a:r>
-            <a:endParaRPr lang="en-US" sz="1500" dirty="0"/>
-          </a:p>
-          <a:p>
-            <a:pPr marL="254000" indent="-254000">
-              <a:lnSpc>
-                <a:spcPct val="125000"/>
-              </a:lnSpc>
-              <a:buSzPct val="100000"/>
-              <a:buChar char="●"/>
-            </a:pPr>
-            <a:r>
-              <a:rPr lang="en-US" sz="1500" dirty="0">
-                <a:solidFill>
-                  <a:srgbClr val="1A1A1A"/>
-                </a:solidFill>
-                <a:latin typeface="Segoe UI" pitchFamily="34" charset="0"/>
-                <a:ea typeface="Segoe UI" pitchFamily="34" charset="-122"/>
-                <a:cs typeface="Segoe UI" pitchFamily="34" charset="-120"/>
-              </a:rPr>
-              <a:t>Tool isolation by role: Evidence Investigator → defender-conn only, Risk Analyst → anomaly-conn only</a:t>
-            </a:r>
-            <a:endParaRPr lang="en-US" sz="1500" dirty="0"/>
-          </a:p>
-          <a:p>
-            <a:pPr marL="254000" indent="-254000">
-              <a:lnSpc>
-                <a:spcPct val="125000"/>
-              </a:lnSpc>
-              <a:buSzPct val="100000"/>
-              <a:buChar char="●"/>
-            </a:pPr>
-            <a:r>
-              <a:rPr lang="en-US" sz="1500" dirty="0">
-                <a:solidFill>
-                  <a:srgbClr val="1A1A1A"/>
-                </a:solidFill>
-                <a:latin typeface="Segoe UI" pitchFamily="34" charset="0"/>
-                <a:ea typeface="Segoe UI" pitchFamily="34" charset="-122"/>
-                <a:cs typeface="Segoe UI" pitchFamily="34" charset="-120"/>
-              </a:rPr>
-              <a:t>The Report Composer has zero tool access — it only synthesizes</a:t>
-            </a:r>
-            <a:endParaRPr lang="en-US" sz="1500" dirty="0"/>
-          </a:p>
-          <a:p>
-            <a:pPr marL="254000" indent="-254000">
-              <a:lnSpc>
-                <a:spcPct val="125000"/>
-              </a:lnSpc>
-              <a:buSzPct val="100000"/>
-              <a:buChar char="●"/>
-            </a:pPr>
-            <a:r>
-              <a:rPr lang="en-US" sz="1500" dirty="0">
-                <a:solidFill>
-                  <a:srgbClr val="1A1A1A"/>
-                </a:solidFill>
-                <a:latin typeface="Segoe UI" pitchFamily="34" charset="0"/>
-                <a:ea typeface="Segoe UI" pitchFamily="34" charset="-122"/>
-                <a:cs typeface="Segoe UI" pitchFamily="34" charset="-120"/>
-              </a:rPr>
-              <a:t>Supported versioned MCP transport, fresh Entra tokens and RemoteTool connections now work; runtime receipts prove specialist tool execution</a:t>
-            </a:r>
-            <a:endParaRPr lang="en-US" sz="1500" dirty="0"/>
-          </a:p>
-        </p:txBody>
-      </p:sp>
-      <p:sp>
-        <p:nvSpPr>
-          <p:cNvPr id="8" name="Shape 5"/>
-          <p:cNvSpPr/>
-          <p:nvPr/>
-        </p:nvSpPr>
-        <p:spPr>
-          <a:xfrm>
-            <a:off x="0" y="6784848"/>
-            <a:ext cx="12188952" cy="27432"/>
-          </a:xfrm>
-          <a:prstGeom prst="rect">
-            <a:avLst/>
-          </a:prstGeom>
-          <a:solidFill>
-            <a:srgbClr val="E1E5E8"/>
-          </a:solidFill>
-          <a:ln/>
-        </p:spPr>
-      </p:sp>
-      <p:sp>
-        <p:nvSpPr>
-          <p:cNvPr id="9" name="Text 6"/>
-          <p:cNvSpPr/>
-          <p:nvPr/>
-        </p:nvSpPr>
-        <p:spPr>
-          <a:xfrm>
-            <a:off x="457200" y="6537960"/>
-            <a:ext cx="8229600" cy="256032"/>
+              <a:rPr lang="en-US" sz="1000" dirty="0">
+                <a:solidFill>
+                  <a:srgbClr val="53635E"/>
+                </a:solidFill>
+                <a:latin typeface="Segoe UI" pitchFamily="34" charset="0"/>
+                <a:ea typeface="Segoe UI" pitchFamily="34" charset="-122"/>
+                <a:cs typeface="Segoe UI" pitchFamily="34" charset="-120"/>
+              </a:rPr>
+              <a:t>Artifact rendering, not a portal screenshot. Synthetic fixtures. Sources and SHA-256 hashes retained.</a:t>
+            </a:r>
+            <a:endParaRPr lang="en-US" sz="1000" dirty="0"/>
+          </a:p>
+        </p:txBody>
+      </p:sp>
+      <p:sp>
+        <p:nvSpPr>
+          <p:cNvPr id="5" name="Text 2">
+            <a:hlinkClick r:id="rId2" tooltip=""/>
+          </p:cNvPr>
+          <p:cNvSpPr/>
+          <p:nvPr/>
+        </p:nvSpPr>
+        <p:spPr>
+          <a:xfrm>
+            <a:off x="411480" y="6528816"/>
+            <a:ext cx="10515600" cy="201168"/>
           </a:xfrm>
           <a:prstGeom prst="rect">
             <a:avLst/>
@@ -5794,15 +8929,22 @@
               <a:buNone/>
             </a:pPr>
             <a:r>
-              <a:rPr lang="en-US" sz="900" dirty="0">
-                <a:solidFill>
-                  <a:srgbClr val="767676"/>
-                </a:solidFill>
-                <a:latin typeface="Segoe UI" pitchFamily="34" charset="0"/>
-                <a:ea typeface="Segoe UI" pitchFamily="34" charset="-122"/>
-                <a:cs typeface="Segoe UI" pitchFamily="34" charset="-120"/>
-              </a:rPr>
-              <a:t>Foundry Hosted Agents Workshop</a:t>
+              <a:rPr lang="en-US" sz="900" u="sng" dirty="0">
+                <a:solidFill>
+                  <a:srgbClr val="075C9B"/>
+                </a:solidFill>
+                <a:latin typeface="Segoe UI" pitchFamily="34" charset="0"/>
+                <a:ea typeface="Segoe UI" pitchFamily="34" charset="-122"/>
+                <a:cs typeface="Segoe UI" pitchFamily="34" charset="-120"/>
+                <a:hlinkClick r:id="rId2" invalidUrl="" action="" tgtFrame="" tooltip="" history="1" highlightClick="0" endSnd="0">
+                  <a:extLst>
+                    <a:ext uri="{A12FA001-AC4F-418D-AE19-62706E023703}">
+                      <ahyp:hlinkClr xmlns:ahyp="http://schemas.microsoft.com/office/drawing/2018/hyperlinkcolor" val="tx"/>
+                    </a:ext>
+                  </a:extLst>
+                </a:hlinkClick>
+              </a:rPr>
+              <a:t>GitHub Actions 34178081808 | f3da486 | 2026-09-08 UTC</a:t>
             </a:r>
             <a:endParaRPr lang="en-US" sz="900" dirty="0"/>
           </a:p>
@@ -5810,7 +8952,7 @@
       </p:sp>
       <p:sp>
         <p:nvSpPr>
-          <p:cNvPr id="10" name="Text 7"/>
+          <p:cNvPr id="7" name="Text 3"/>
           <p:cNvSpPr/>
           <p:nvPr/>
         </p:nvSpPr>
@@ -5838,7 +8980,7 @@
                   <a:srgbClr val="767676"/>
                 </a:solidFill>
               </a:rPr>
-              <a:t>7 / 14</a:t>
+              <a:t>7 / 19</a:t>
             </a:r>
             <a:endParaRPr lang="en-US" sz="900" dirty="0"/>
           </a:p>
@@ -5858,7 +9000,7 @@
     <p:bg>
       <p:bgPr>
         <a:solidFill>
-          <a:srgbClr val="FAFBFC"/>
+          <a:srgbClr val="FFFFFF"/>
         </a:solidFill>
       </p:bgPr>
     </p:bg>
@@ -5878,34 +9020,14 @@
       </p:grpSpPr>
       <p:sp>
         <p:nvSpPr>
-          <p:cNvPr id="2" name="Shape 0"/>
-          <p:cNvSpPr/>
-          <p:nvPr/>
-        </p:nvSpPr>
-        <p:spPr>
-          <a:xfrm>
-            <a:off x="0" y="0"/>
-            <a:ext cx="12188952" cy="82296"/>
-          </a:xfrm>
-          <a:prstGeom prst="rect">
-            <a:avLst/>
-          </a:prstGeom>
-          <a:solidFill>
-            <a:srgbClr val="0078D4"/>
-          </a:solidFill>
-          <a:ln/>
-        </p:spPr>
-      </p:sp>
-      <p:sp>
-        <p:nvSpPr>
-          <p:cNvPr id="3" name="Text 1"/>
-          <p:cNvSpPr/>
-          <p:nvPr/>
-        </p:nvSpPr>
-        <p:spPr>
-          <a:xfrm>
-            <a:off x="457200" y="292608"/>
-            <a:ext cx="11247120" cy="274320"/>
+          <p:cNvPr id="2" name="Text 0"/>
+          <p:cNvSpPr/>
+          <p:nvPr/>
+        </p:nvSpPr>
+        <p:spPr>
+          <a:xfrm>
+            <a:off x="411480" y="146304"/>
+            <a:ext cx="11338560" cy="502920"/>
           </a:xfrm>
           <a:prstGeom prst="rect">
             <a:avLst/>
@@ -5921,30 +9043,54 @@
               <a:buNone/>
             </a:pPr>
             <a:r>
-              <a:rPr lang="en-US" sz="1100" b="1" spc="100" kern="0" dirty="0">
-                <a:solidFill>
-                  <a:srgbClr val="0078D4"/>
-                </a:solidFill>
-                <a:latin typeface="Segoe UI" pitchFamily="34" charset="0"/>
-                <a:ea typeface="Segoe UI" pitchFamily="34" charset="-122"/>
-                <a:cs typeface="Segoe UI" pitchFamily="34" charset="-120"/>
-              </a:rPr>
-              <a:t>TOOLS</a:t>
-            </a:r>
-            <a:endParaRPr lang="en-US" sz="1100" dirty="0"/>
-          </a:p>
-        </p:txBody>
-      </p:sp>
-      <p:sp>
-        <p:nvSpPr>
-          <p:cNvPr id="4" name="Text 2"/>
-          <p:cNvSpPr/>
-          <p:nvPr/>
-        </p:nvSpPr>
-        <p:spPr>
-          <a:xfrm>
-            <a:off x="457200" y="548640"/>
-            <a:ext cx="11247120" cy="640080"/>
+              <a:rPr lang="en-US" sz="2200" b="1" dirty="0">
+                <a:solidFill>
+                  <a:srgbClr val="146C54"/>
+                </a:solidFill>
+                <a:latin typeface="Segoe UI" pitchFamily="34" charset="0"/>
+                <a:ea typeface="Segoe UI" pitchFamily="34" charset="-122"/>
+                <a:cs typeface="Segoe UI" pitchFamily="34" charset="-120"/>
+              </a:rPr>
+              <a:t>Historical proof: Quality Gate: 21 of 21 Judge Checks Passed</a:t>
+            </a:r>
+            <a:endParaRPr lang="en-US" sz="2200" dirty="0"/>
+          </a:p>
+        </p:txBody>
+      </p:sp>
+      <p:pic>
+        <p:nvPicPr>
+          <p:cNvPr id="3" name="Image 0" descr="Quality Gate: 21 of 21 Judge Checks Passed">    </p:cNvPr>
+          <p:cNvPicPr>
+            <a:picLocks noChangeAspect="1"/>
+          </p:cNvPicPr>
+          <p:nvPr/>
+        </p:nvPicPr>
+        <p:blipFill>
+          <a:blip r:embed="rId1"/>
+          <a:stretch>
+            <a:fillRect/>
+          </a:stretch>
+        </p:blipFill>
+        <p:spPr>
+          <a:xfrm>
+            <a:off x="2068830" y="777240"/>
+            <a:ext cx="8051292" cy="5367528"/>
+          </a:xfrm>
+          <a:prstGeom prst="rect">
+            <a:avLst/>
+          </a:prstGeom>
+        </p:spPr>
+      </p:pic>
+      <p:sp>
+        <p:nvSpPr>
+          <p:cNvPr id="4" name="Text 1"/>
+          <p:cNvSpPr/>
+          <p:nvPr/>
+        </p:nvSpPr>
+        <p:spPr>
+          <a:xfrm>
+            <a:off x="411480" y="6245352"/>
+            <a:ext cx="11338560" cy="256032"/>
           </a:xfrm>
           <a:prstGeom prst="rect">
             <a:avLst/>
@@ -5960,197 +9106,32 @@
               <a:buNone/>
             </a:pPr>
             <a:r>
-              <a:rPr lang="en-US" sz="2600" b="1" dirty="0">
-                <a:solidFill>
-                  <a:srgbClr val="001B3D"/>
-                </a:solidFill>
-                <a:latin typeface="Segoe UI" pitchFamily="34" charset="0"/>
-                <a:ea typeface="Segoe UI" pitchFamily="34" charset="-122"/>
-                <a:cs typeface="Segoe UI" pitchFamily="34" charset="-120"/>
-              </a:rPr>
-              <a:t>Four Layers: Implement, Host, Register, Consume</a:t>
-            </a:r>
-            <a:endParaRPr lang="en-US" sz="2600" dirty="0"/>
-          </a:p>
-        </p:txBody>
-      </p:sp>
-      <p:sp>
-        <p:nvSpPr>
-          <p:cNvPr id="5" name="Shape 3"/>
-          <p:cNvSpPr/>
-          <p:nvPr/>
-        </p:nvSpPr>
-        <p:spPr>
-          <a:xfrm>
-            <a:off x="457200" y="1188720"/>
-            <a:ext cx="11247120" cy="10973"/>
-          </a:xfrm>
-          <a:prstGeom prst="rect">
-            <a:avLst/>
-          </a:prstGeom>
-          <a:solidFill>
-            <a:srgbClr val="E1E5E8"/>
-          </a:solidFill>
-          <a:ln/>
-        </p:spPr>
-      </p:sp>
-      <p:sp>
-        <p:nvSpPr>
-          <p:cNvPr id="6" name="Text 4"/>
-          <p:cNvSpPr/>
-          <p:nvPr/>
-        </p:nvSpPr>
-        <p:spPr>
-          <a:xfrm>
-            <a:off x="548640" y="1463040"/>
-            <a:ext cx="11064240" cy="5029200"/>
-          </a:xfrm>
-          <a:prstGeom prst="rect">
-            <a:avLst/>
-          </a:prstGeom>
-          <a:noFill/>
-          <a:ln/>
-        </p:spPr>
-        <p:txBody>
-          <a:bodyPr wrap="square" rtlCol="0" anchor="t"/>
-          <a:lstStyle/>
-          <a:p>
-            <a:pPr marL="254000" indent="-254000">
-              <a:lnSpc>
-                <a:spcPct val="125000"/>
-              </a:lnSpc>
-              <a:buSzPct val="100000"/>
-              <a:buChar char="●"/>
-            </a:pPr>
-            <a:r>
-              <a:rPr lang="en-US" sz="1500" dirty="0">
-                <a:solidFill>
-                  <a:srgbClr val="1A1A1A"/>
-                </a:solidFill>
-                <a:latin typeface="Segoe UI" pitchFamily="34" charset="0"/>
-                <a:ea typeface="Segoe UI" pitchFamily="34" charset="-122"/>
-                <a:cs typeface="Segoe UI" pitchFamily="34" charset="-120"/>
-              </a:rPr>
-              <a:t>Layer 1 — Implementation: custom MCP server code (Defender tools, anomaly tools)</a:t>
-            </a:r>
-            <a:endParaRPr lang="en-US" sz="1500" dirty="0"/>
-          </a:p>
-          <a:p>
-            <a:pPr marL="254000" indent="-254000">
-              <a:lnSpc>
-                <a:spcPct val="125000"/>
-              </a:lnSpc>
-              <a:buSzPct val="100000"/>
-              <a:buChar char="●"/>
-            </a:pPr>
-            <a:r>
-              <a:rPr lang="en-US" sz="1500" dirty="0">
-                <a:solidFill>
-                  <a:srgbClr val="1A1A1A"/>
-                </a:solidFill>
-                <a:latin typeface="Segoe UI" pitchFamily="34" charset="0"/>
-                <a:ea typeface="Segoe UI" pitchFamily="34" charset="-122"/>
-                <a:cs typeface="Segoe UI" pitchFamily="34" charset="-120"/>
-              </a:rPr>
-              <a:t>Layer 2 — Hosting: independent Azure Container Apps, own auth/networking/health checks</a:t>
-            </a:r>
-            <a:endParaRPr lang="en-US" sz="1500" dirty="0"/>
-          </a:p>
-          <a:p>
-            <a:pPr marL="254000" indent="-254000">
-              <a:lnSpc>
-                <a:spcPct val="125000"/>
-              </a:lnSpc>
-              <a:buSzPct val="100000"/>
-              <a:buChar char="●"/>
-            </a:pPr>
-            <a:r>
-              <a:rPr lang="en-US" sz="1500" dirty="0">
-                <a:solidFill>
-                  <a:srgbClr val="1A1A1A"/>
-                </a:solidFill>
-                <a:latin typeface="Segoe UI" pitchFamily="34" charset="0"/>
-                <a:ea typeface="Segoe UI" pitchFamily="34" charset="-122"/>
-                <a:cs typeface="Segoe UI" pitchFamily="34" charset="-120"/>
-              </a:rPr>
-              <a:t>Layer 3 — Registration: Foundry connections define endpoint + credential policy per MCP server</a:t>
-            </a:r>
-            <a:endParaRPr lang="en-US" sz="1500" dirty="0"/>
-          </a:p>
-          <a:p>
-            <a:pPr marL="254000" indent="-254000">
-              <a:lnSpc>
-                <a:spcPct val="125000"/>
-              </a:lnSpc>
-              <a:buSzPct val="100000"/>
-              <a:buChar char="●"/>
-            </a:pPr>
-            <a:r>
-              <a:rPr lang="en-US" sz="1500" dirty="0">
-                <a:solidFill>
-                  <a:srgbClr val="1A1A1A"/>
-                </a:solidFill>
-                <a:latin typeface="Segoe UI" pitchFamily="34" charset="0"/>
-                <a:ea typeface="Segoe UI" pitchFamily="34" charset="-122"/>
-                <a:cs typeface="Segoe UI" pitchFamily="34" charset="-120"/>
-              </a:rPr>
-              <a:t>Layer 4 — Consumption: Foundry Toolbox aggregates registered tools for reuse across agents</a:t>
-            </a:r>
-            <a:endParaRPr lang="en-US" sz="1500" dirty="0"/>
-          </a:p>
-          <a:p>
-            <a:pPr marL="254000" indent="-254000">
-              <a:lnSpc>
-                <a:spcPct val="125000"/>
-              </a:lnSpc>
-              <a:buSzPct val="100000"/>
-              <a:buChar char="●"/>
-            </a:pPr>
-            <a:r>
-              <a:rPr lang="en-US" sz="1500" dirty="0">
-                <a:solidFill>
-                  <a:srgbClr val="1A1A1A"/>
-                </a:solidFill>
-                <a:latin typeface="Segoe UI" pitchFamily="34" charset="0"/>
-                <a:ea typeface="Segoe UI" pitchFamily="34" charset="-122"/>
-                <a:cs typeface="Segoe UI" pitchFamily="34" charset="-120"/>
-              </a:rPr>
-              <a:t>The Toolbox is the registration/aggregation layer — not the hosting runtime for your MCP code</a:t>
-            </a:r>
-            <a:endParaRPr lang="en-US" sz="1500" dirty="0"/>
-          </a:p>
-        </p:txBody>
-      </p:sp>
-      <p:sp>
-        <p:nvSpPr>
-          <p:cNvPr id="8" name="Shape 5"/>
-          <p:cNvSpPr/>
-          <p:nvPr/>
-        </p:nvSpPr>
-        <p:spPr>
-          <a:xfrm>
-            <a:off x="0" y="6784848"/>
-            <a:ext cx="12188952" cy="27432"/>
-          </a:xfrm>
-          <a:prstGeom prst="rect">
-            <a:avLst/>
-          </a:prstGeom>
-          <a:solidFill>
-            <a:srgbClr val="E1E5E8"/>
-          </a:solidFill>
-          <a:ln/>
-        </p:spPr>
-      </p:sp>
-      <p:sp>
-        <p:nvSpPr>
-          <p:cNvPr id="9" name="Text 6"/>
-          <p:cNvSpPr/>
-          <p:nvPr/>
-        </p:nvSpPr>
-        <p:spPr>
-          <a:xfrm>
-            <a:off x="457200" y="6537960"/>
-            <a:ext cx="8229600" cy="256032"/>
+              <a:rPr lang="en-US" sz="1000" dirty="0">
+                <a:solidFill>
+                  <a:srgbClr val="53635E"/>
+                </a:solidFill>
+                <a:latin typeface="Segoe UI" pitchFamily="34" charset="0"/>
+                <a:ea typeface="Segoe UI" pitchFamily="34" charset="-122"/>
+                <a:cs typeface="Segoe UI" pitchFamily="34" charset="-120"/>
+              </a:rPr>
+              <a:t>Artifact rendering, not a portal screenshot. Synthetic fixtures. Sources and SHA-256 hashes retained.</a:t>
+            </a:r>
+            <a:endParaRPr lang="en-US" sz="1000" dirty="0"/>
+          </a:p>
+        </p:txBody>
+      </p:sp>
+      <p:sp>
+        <p:nvSpPr>
+          <p:cNvPr id="5" name="Text 2">
+            <a:hlinkClick r:id="rId2" tooltip=""/>
+          </p:cNvPr>
+          <p:cNvSpPr/>
+          <p:nvPr/>
+        </p:nvSpPr>
+        <p:spPr>
+          <a:xfrm>
+            <a:off x="411480" y="6528816"/>
+            <a:ext cx="10515600" cy="201168"/>
           </a:xfrm>
           <a:prstGeom prst="rect">
             <a:avLst/>
@@ -6166,15 +9147,22 @@
               <a:buNone/>
             </a:pPr>
             <a:r>
-              <a:rPr lang="en-US" sz="900" dirty="0">
-                <a:solidFill>
-                  <a:srgbClr val="767676"/>
-                </a:solidFill>
-                <a:latin typeface="Segoe UI" pitchFamily="34" charset="0"/>
-                <a:ea typeface="Segoe UI" pitchFamily="34" charset="-122"/>
-                <a:cs typeface="Segoe UI" pitchFamily="34" charset="-120"/>
-              </a:rPr>
-              <a:t>Foundry Hosted Agents Workshop</a:t>
+              <a:rPr lang="en-US" sz="900" u="sng" dirty="0">
+                <a:solidFill>
+                  <a:srgbClr val="075C9B"/>
+                </a:solidFill>
+                <a:latin typeface="Segoe UI" pitchFamily="34" charset="0"/>
+                <a:ea typeface="Segoe UI" pitchFamily="34" charset="-122"/>
+                <a:cs typeface="Segoe UI" pitchFamily="34" charset="-120"/>
+                <a:hlinkClick r:id="rId2" invalidUrl="" action="" tgtFrame="" tooltip="" history="1" highlightClick="0" endSnd="0">
+                  <a:extLst>
+                    <a:ext uri="{A12FA001-AC4F-418D-AE19-62706E023703}">
+                      <ahyp:hlinkClr xmlns:ahyp="http://schemas.microsoft.com/office/drawing/2018/hyperlinkcolor" val="tx"/>
+                    </a:ext>
+                  </a:extLst>
+                </a:hlinkClick>
+              </a:rPr>
+              <a:t>GitHub Actions 34178081808 | f3da486 | 2026-09-08 UTC</a:t>
             </a:r>
             <a:endParaRPr lang="en-US" sz="900" dirty="0"/>
           </a:p>
@@ -6182,7 +9170,7 @@
       </p:sp>
       <p:sp>
         <p:nvSpPr>
-          <p:cNvPr id="10" name="Text 7"/>
+          <p:cNvPr id="7" name="Text 3"/>
           <p:cNvSpPr/>
           <p:nvPr/>
         </p:nvSpPr>
@@ -6210,7 +9198,7 @@
                   <a:srgbClr val="767676"/>
                 </a:solidFill>
               </a:rPr>
-              <a:t>8 / 14</a:t>
+              <a:t>8 / 19</a:t>
             </a:r>
             <a:endParaRPr lang="en-US" sz="900" dirty="0"/>
           </a:p>
@@ -6230,7 +9218,7 @@
     <p:bg>
       <p:bgPr>
         <a:solidFill>
-          <a:srgbClr val="FAFBFC"/>
+          <a:srgbClr val="FFFFFF"/>
         </a:solidFill>
       </p:bgPr>
     </p:bg>
@@ -6250,34 +9238,14 @@
       </p:grpSpPr>
       <p:sp>
         <p:nvSpPr>
-          <p:cNvPr id="2" name="Shape 0"/>
-          <p:cNvSpPr/>
-          <p:nvPr/>
-        </p:nvSpPr>
-        <p:spPr>
-          <a:xfrm>
-            <a:off x="0" y="0"/>
-            <a:ext cx="12188952" cy="82296"/>
-          </a:xfrm>
-          <a:prstGeom prst="rect">
-            <a:avLst/>
-          </a:prstGeom>
-          <a:solidFill>
-            <a:srgbClr val="0078D4"/>
-          </a:solidFill>
-          <a:ln/>
-        </p:spPr>
-      </p:sp>
-      <p:sp>
-        <p:nvSpPr>
-          <p:cNvPr id="3" name="Text 1"/>
-          <p:cNvSpPr/>
-          <p:nvPr/>
-        </p:nvSpPr>
-        <p:spPr>
-          <a:xfrm>
-            <a:off x="457200" y="292608"/>
-            <a:ext cx="11247120" cy="274320"/>
+          <p:cNvPr id="2" name="Text 0"/>
+          <p:cNvSpPr/>
+          <p:nvPr/>
+        </p:nvSpPr>
+        <p:spPr>
+          <a:xfrm>
+            <a:off x="411480" y="146304"/>
+            <a:ext cx="11338560" cy="502920"/>
           </a:xfrm>
           <a:prstGeom prst="rect">
             <a:avLst/>
@@ -6293,30 +9261,54 @@
               <a:buNone/>
             </a:pPr>
             <a:r>
-              <a:rPr lang="en-US" sz="1100" b="1" spc="100" kern="0" dirty="0">
-                <a:solidFill>
-                  <a:srgbClr val="0078D4"/>
-                </a:solidFill>
-                <a:latin typeface="Segoe UI" pitchFamily="34" charset="0"/>
-                <a:ea typeface="Segoe UI" pitchFamily="34" charset="-122"/>
-                <a:cs typeface="Segoe UI" pitchFamily="34" charset="-120"/>
-              </a:rPr>
-              <a:t>DEPLOYMENT</a:t>
-            </a:r>
-            <a:endParaRPr lang="en-US" sz="1100" dirty="0"/>
-          </a:p>
-        </p:txBody>
-      </p:sp>
-      <p:sp>
-        <p:nvSpPr>
-          <p:cNvPr id="4" name="Text 2"/>
-          <p:cNvSpPr/>
-          <p:nvPr/>
-        </p:nvSpPr>
-        <p:spPr>
-          <a:xfrm>
-            <a:off x="457200" y="548640"/>
-            <a:ext cx="11247120" cy="640080"/>
+              <a:rPr lang="en-US" sz="2200" b="1" dirty="0">
+                <a:solidFill>
+                  <a:srgbClr val="146C54"/>
+                </a:solidFill>
+                <a:latin typeface="Segoe UI" pitchFamily="34" charset="0"/>
+                <a:ea typeface="Segoe UI" pitchFamily="34" charset="-122"/>
+                <a:cs typeface="Segoe UI" pitchFamily="34" charset="-120"/>
+              </a:rPr>
+              <a:t>Historical proof: Tool Execution Proven; Telemetry Is Synthetic</a:t>
+            </a:r>
+            <a:endParaRPr lang="en-US" sz="2200" dirty="0"/>
+          </a:p>
+        </p:txBody>
+      </p:sp>
+      <p:pic>
+        <p:nvPicPr>
+          <p:cNvPr id="3" name="Image 0" descr="Tool Execution Proven; Telemetry Is Synthetic">    </p:cNvPr>
+          <p:cNvPicPr>
+            <a:picLocks noChangeAspect="1"/>
+          </p:cNvPicPr>
+          <p:nvPr/>
+        </p:nvPicPr>
+        <p:blipFill>
+          <a:blip r:embed="rId1"/>
+          <a:stretch>
+            <a:fillRect/>
+          </a:stretch>
+        </p:blipFill>
+        <p:spPr>
+          <a:xfrm>
+            <a:off x="2068830" y="777240"/>
+            <a:ext cx="8051292" cy="5367528"/>
+          </a:xfrm>
+          <a:prstGeom prst="rect">
+            <a:avLst/>
+          </a:prstGeom>
+        </p:spPr>
+      </p:pic>
+      <p:sp>
+        <p:nvSpPr>
+          <p:cNvPr id="4" name="Text 1"/>
+          <p:cNvSpPr/>
+          <p:nvPr/>
+        </p:nvSpPr>
+        <p:spPr>
+          <a:xfrm>
+            <a:off x="411480" y="6245352"/>
+            <a:ext cx="11338560" cy="256032"/>
           </a:xfrm>
           <a:prstGeom prst="rect">
             <a:avLst/>
@@ -6332,197 +9324,32 @@
               <a:buNone/>
             </a:pPr>
             <a:r>
-              <a:rPr lang="en-US" sz="2600" b="1" dirty="0">
-                <a:solidFill>
-                  <a:srgbClr val="001B3D"/>
-                </a:solidFill>
-                <a:latin typeface="Segoe UI" pitchFamily="34" charset="0"/>
-                <a:ea typeface="Segoe UI" pitchFamily="34" charset="-122"/>
-                <a:cs typeface="Segoe UI" pitchFamily="34" charset="-120"/>
-              </a:rPr>
-              <a:t>One Manifest: azure.yaml + azd</a:t>
-            </a:r>
-            <a:endParaRPr lang="en-US" sz="2600" dirty="0"/>
-          </a:p>
-        </p:txBody>
-      </p:sp>
-      <p:sp>
-        <p:nvSpPr>
-          <p:cNvPr id="5" name="Shape 3"/>
-          <p:cNvSpPr/>
-          <p:nvPr/>
-        </p:nvSpPr>
-        <p:spPr>
-          <a:xfrm>
-            <a:off x="457200" y="1188720"/>
-            <a:ext cx="11247120" cy="10973"/>
-          </a:xfrm>
-          <a:prstGeom prst="rect">
-            <a:avLst/>
-          </a:prstGeom>
-          <a:solidFill>
-            <a:srgbClr val="E1E5E8"/>
-          </a:solidFill>
-          <a:ln/>
-        </p:spPr>
-      </p:sp>
-      <p:sp>
-        <p:nvSpPr>
-          <p:cNvPr id="6" name="Text 4"/>
-          <p:cNvSpPr/>
-          <p:nvPr/>
-        </p:nvSpPr>
-        <p:spPr>
-          <a:xfrm>
-            <a:off x="548640" y="1463040"/>
-            <a:ext cx="11064240" cy="5029200"/>
-          </a:xfrm>
-          <a:prstGeom prst="rect">
-            <a:avLst/>
-          </a:prstGeom>
-          <a:noFill/>
-          <a:ln/>
-        </p:spPr>
-        <p:txBody>
-          <a:bodyPr wrap="square" rtlCol="0" anchor="t"/>
-          <a:lstStyle/>
-          <a:p>
-            <a:pPr marL="254000" indent="-254000">
-              <a:lnSpc>
-                <a:spcPct val="125000"/>
-              </a:lnSpc>
-              <a:buSzPct val="100000"/>
-              <a:buChar char="●"/>
-            </a:pPr>
-            <a:r>
-              <a:rPr lang="en-US" sz="1500" dirty="0">
-                <a:solidFill>
-                  <a:srgbClr val="1A1A1A"/>
-                </a:solidFill>
-                <a:latin typeface="Segoe UI" pitchFamily="34" charset="0"/>
-                <a:ea typeface="Segoe UI" pitchFamily="34" charset="-122"/>
-                <a:cs typeface="Segoe UI" pitchFamily="34" charset="-120"/>
-              </a:rPr>
-              <a:t>azure.yaml wires the Foundry project, model deployment, Toolbox connections, and the hosted agent service</a:t>
-            </a:r>
-            <a:endParaRPr lang="en-US" sz="1500" dirty="0"/>
-          </a:p>
-          <a:p>
-            <a:pPr marL="254000" indent="-254000">
-              <a:lnSpc>
-                <a:spcPct val="125000"/>
-              </a:lnSpc>
-              <a:buSzPct val="100000"/>
-              <a:buChar char="●"/>
-            </a:pPr>
-            <a:r>
-              <a:rPr lang="en-US" sz="1500" dirty="0">
-                <a:solidFill>
-                  <a:srgbClr val="1A1A1A"/>
-                </a:solidFill>
-                <a:latin typeface="Segoe UI" pitchFamily="34" charset="0"/>
-                <a:ea typeface="Segoe UI" pitchFamily="34" charset="-122"/>
-                <a:cs typeface="Segoe UI" pitchFamily="34" charset="-120"/>
-              </a:rPr>
-              <a:t>kind: hosted — Foundry operates the session compute; you own only the graph code</a:t>
-            </a:r>
-            <a:endParaRPr lang="en-US" sz="1500" dirty="0"/>
-          </a:p>
-          <a:p>
-            <a:pPr marL="254000" indent="-254000">
-              <a:lnSpc>
-                <a:spcPct val="125000"/>
-              </a:lnSpc>
-              <a:buSzPct val="100000"/>
-              <a:buChar char="●"/>
-            </a:pPr>
-            <a:r>
-              <a:rPr lang="en-US" sz="1500" dirty="0">
-                <a:solidFill>
-                  <a:srgbClr val="1A1A1A"/>
-                </a:solidFill>
-                <a:latin typeface="Segoe UI" pitchFamily="34" charset="0"/>
-                <a:ea typeface="Segoe UI" pitchFamily="34" charset="-122"/>
-                <a:cs typeface="Segoe UI" pitchFamily="34" charset="-120"/>
-              </a:rPr>
-              <a:t>dependencyResolution: remote_build — Foundry builds your Python dependencies server-side</a:t>
-            </a:r>
-            <a:endParaRPr lang="en-US" sz="1500" dirty="0"/>
-          </a:p>
-          <a:p>
-            <a:pPr marL="254000" indent="-254000">
-              <a:lnSpc>
-                <a:spcPct val="125000"/>
-              </a:lnSpc>
-              <a:buSzPct val="100000"/>
-              <a:buChar char="●"/>
-            </a:pPr>
-            <a:r>
-              <a:rPr lang="en-US" sz="1500" dirty="0">
-                <a:solidFill>
-                  <a:srgbClr val="1A1A1A"/>
-                </a:solidFill>
-                <a:latin typeface="Segoe UI" pitchFamily="34" charset="0"/>
-                <a:ea typeface="Segoe UI" pitchFamily="34" charset="-122"/>
-                <a:cs typeface="Segoe UI" pitchFamily="34" charset="-120"/>
-              </a:rPr>
-              <a:t>protocol: responses — OpenAI-compatible Responses protocol with streaming support</a:t>
-            </a:r>
-            <a:endParaRPr lang="en-US" sz="1500" dirty="0"/>
-          </a:p>
-          <a:p>
-            <a:pPr marL="254000" indent="-254000">
-              <a:lnSpc>
-                <a:spcPct val="125000"/>
-              </a:lnSpc>
-              <a:buSzPct val="100000"/>
-              <a:buChar char="●"/>
-            </a:pPr>
-            <a:r>
-              <a:rPr lang="en-US" sz="1500" dirty="0">
-                <a:solidFill>
-                  <a:srgbClr val="1A1A1A"/>
-                </a:solidFill>
-                <a:latin typeface="Segoe UI" pitchFamily="34" charset="0"/>
-                <a:ea typeface="Segoe UI" pitchFamily="34" charset="-122"/>
-                <a:cs typeface="Segoe UI" pitchFamily="34" charset="-120"/>
-              </a:rPr>
-              <a:t>azd provision creates infrastructure; azd deploy publishes a new agent version — separate lifecycles</a:t>
-            </a:r>
-            <a:endParaRPr lang="en-US" sz="1500" dirty="0"/>
-          </a:p>
-        </p:txBody>
-      </p:sp>
-      <p:sp>
-        <p:nvSpPr>
-          <p:cNvPr id="8" name="Shape 5"/>
-          <p:cNvSpPr/>
-          <p:nvPr/>
-        </p:nvSpPr>
-        <p:spPr>
-          <a:xfrm>
-            <a:off x="0" y="6784848"/>
-            <a:ext cx="12188952" cy="27432"/>
-          </a:xfrm>
-          <a:prstGeom prst="rect">
-            <a:avLst/>
-          </a:prstGeom>
-          <a:solidFill>
-            <a:srgbClr val="E1E5E8"/>
-          </a:solidFill>
-          <a:ln/>
-        </p:spPr>
-      </p:sp>
-      <p:sp>
-        <p:nvSpPr>
-          <p:cNvPr id="9" name="Text 6"/>
-          <p:cNvSpPr/>
-          <p:nvPr/>
-        </p:nvSpPr>
-        <p:spPr>
-          <a:xfrm>
-            <a:off x="457200" y="6537960"/>
-            <a:ext cx="8229600" cy="256032"/>
+              <a:rPr lang="en-US" sz="1000" dirty="0">
+                <a:solidFill>
+                  <a:srgbClr val="53635E"/>
+                </a:solidFill>
+                <a:latin typeface="Segoe UI" pitchFamily="34" charset="0"/>
+                <a:ea typeface="Segoe UI" pitchFamily="34" charset="-122"/>
+                <a:cs typeface="Segoe UI" pitchFamily="34" charset="-120"/>
+              </a:rPr>
+              <a:t>Artifact rendering, not a portal screenshot. Synthetic fixtures. Sources and SHA-256 hashes retained.</a:t>
+            </a:r>
+            <a:endParaRPr lang="en-US" sz="1000" dirty="0"/>
+          </a:p>
+        </p:txBody>
+      </p:sp>
+      <p:sp>
+        <p:nvSpPr>
+          <p:cNvPr id="5" name="Text 2">
+            <a:hlinkClick r:id="rId2" tooltip=""/>
+          </p:cNvPr>
+          <p:cNvSpPr/>
+          <p:nvPr/>
+        </p:nvSpPr>
+        <p:spPr>
+          <a:xfrm>
+            <a:off x="411480" y="6528816"/>
+            <a:ext cx="10515600" cy="201168"/>
           </a:xfrm>
           <a:prstGeom prst="rect">
             <a:avLst/>
@@ -6538,15 +9365,22 @@
               <a:buNone/>
             </a:pPr>
             <a:r>
-              <a:rPr lang="en-US" sz="900" dirty="0">
-                <a:solidFill>
-                  <a:srgbClr val="767676"/>
-                </a:solidFill>
-                <a:latin typeface="Segoe UI" pitchFamily="34" charset="0"/>
-                <a:ea typeface="Segoe UI" pitchFamily="34" charset="-122"/>
-                <a:cs typeface="Segoe UI" pitchFamily="34" charset="-120"/>
-              </a:rPr>
-              <a:t>Foundry Hosted Agents Workshop</a:t>
+              <a:rPr lang="en-US" sz="900" u="sng" dirty="0">
+                <a:solidFill>
+                  <a:srgbClr val="075C9B"/>
+                </a:solidFill>
+                <a:latin typeface="Segoe UI" pitchFamily="34" charset="0"/>
+                <a:ea typeface="Segoe UI" pitchFamily="34" charset="-122"/>
+                <a:cs typeface="Segoe UI" pitchFamily="34" charset="-120"/>
+                <a:hlinkClick r:id="rId2" invalidUrl="" action="" tgtFrame="" tooltip="" history="1" highlightClick="0" endSnd="0">
+                  <a:extLst>
+                    <a:ext uri="{A12FA001-AC4F-418D-AE19-62706E023703}">
+                      <ahyp:hlinkClr xmlns:ahyp="http://schemas.microsoft.com/office/drawing/2018/hyperlinkcolor" val="tx"/>
+                    </a:ext>
+                  </a:extLst>
+                </a:hlinkClick>
+              </a:rPr>
+              <a:t>GitHub Actions 34178081808 | f3da486 | 2026-09-08 UTC</a:t>
             </a:r>
             <a:endParaRPr lang="en-US" sz="900" dirty="0"/>
           </a:p>
@@ -6554,7 +9388,7 @@
       </p:sp>
       <p:sp>
         <p:nvSpPr>
-          <p:cNvPr id="10" name="Text 7"/>
+          <p:cNvPr id="7" name="Text 3"/>
           <p:cNvSpPr/>
           <p:nvPr/>
         </p:nvSpPr>
@@ -6582,7 +9416,7 @@
                   <a:srgbClr val="767676"/>
                 </a:solidFill>
               </a:rPr>
-              <a:t>9 / 14</a:t>
+              <a:t>9 / 19</a:t>
             </a:r>
             <a:endParaRPr lang="en-US" sz="900" dirty="0"/>
           </a:p>
